--- a/PQ_Report_Generator_User_Guide.pptx
+++ b/PQ_Report_Generator_User_Guide.pptx
@@ -16,6 +16,7 @@
     <p:sldId id="264" r:id="rId10"/>
     <p:sldId id="265" r:id="rId11"/>
     <p:sldId id="266" r:id="rId12"/>
+    <p:sldId id="273" r:id="rId24"/>
     <p:sldId id="267" r:id="rId13"/>
     <p:sldId id="268" r:id="rId14"/>
     <p:sldId id="269" r:id="rId15"/>
@@ -8576,6 +8577,10 @@
           </a:solidFill>
           <a:ln/>
         </p:spPr>
+        <p:txBody>
+          <a:bodyPr/>
+          <a:p/>
+        </p:txBody>
       </p:sp>
       <p:sp>
         <p:nvSpPr>
@@ -8677,6 +8682,10 @@
             <a:prstDash val="solid"/>
           </a:ln>
         </p:spPr>
+        <p:txBody>
+          <a:bodyPr/>
+          <a:p/>
+        </p:txBody>
       </p:sp>
       <p:sp>
         <p:nvSpPr>
@@ -8697,6 +8706,10 @@
           </a:solidFill>
           <a:ln/>
         </p:spPr>
+        <p:txBody>
+          <a:bodyPr/>
+          <a:p/>
+        </p:txBody>
       </p:sp>
       <p:sp>
         <p:nvSpPr>
@@ -8798,6 +8811,10 @@
             <a:prstDash val="solid"/>
           </a:ln>
         </p:spPr>
+        <p:txBody>
+          <a:bodyPr/>
+          <a:p/>
+        </p:txBody>
       </p:sp>
       <p:sp>
         <p:nvSpPr>
@@ -8818,6 +8835,10 @@
           </a:solidFill>
           <a:ln/>
         </p:spPr>
+        <p:txBody>
+          <a:bodyPr/>
+          <a:p/>
+        </p:txBody>
       </p:sp>
       <p:sp>
         <p:nvSpPr>
@@ -8919,6 +8940,10 @@
             <a:prstDash val="solid"/>
           </a:ln>
         </p:spPr>
+        <p:txBody>
+          <a:bodyPr/>
+          <a:p/>
+        </p:txBody>
       </p:sp>
       <p:sp>
         <p:nvSpPr>
@@ -8939,6 +8964,10 @@
           </a:solidFill>
           <a:ln/>
         </p:spPr>
+        <p:txBody>
+          <a:bodyPr/>
+          <a:p/>
+        </p:txBody>
       </p:sp>
       <p:sp>
         <p:nvSpPr>
@@ -9040,6 +9069,10 @@
             <a:prstDash val="solid"/>
           </a:ln>
         </p:spPr>
+        <p:txBody>
+          <a:bodyPr/>
+          <a:p/>
+        </p:txBody>
       </p:sp>
       <p:sp>
         <p:nvSpPr>
@@ -9060,6 +9093,10 @@
           </a:solidFill>
           <a:ln/>
         </p:spPr>
+        <p:txBody>
+          <a:bodyPr/>
+          <a:p/>
+        </p:txBody>
       </p:sp>
       <p:sp>
         <p:nvSpPr>
@@ -9161,6 +9198,10 @@
             <a:prstDash val="solid"/>
           </a:ln>
         </p:spPr>
+        <p:txBody>
+          <a:bodyPr/>
+          <a:p/>
+        </p:txBody>
       </p:sp>
       <p:sp>
         <p:nvSpPr>
@@ -9181,6 +9222,10 @@
           </a:solidFill>
           <a:ln/>
         </p:spPr>
+        <p:txBody>
+          <a:bodyPr/>
+          <a:p/>
+        </p:txBody>
       </p:sp>
       <p:sp>
         <p:nvSpPr>
@@ -9254,7 +9299,7 @@
                 <a:ea typeface="Calibri" pitchFamily="34" charset="-122"/>
                 <a:cs typeface="Calibri" pitchFamily="34" charset="-120"/>
               </a:rPr>
-              <a:t>Review the Word reports, then distribute them</a:t>
+              <a:t>Review the Word reports and the dormant list, then distribute them</a:t>
             </a:r>
             <a:endParaRPr lang="en-US" sz="1450" dirty="0"/>
           </a:p>
@@ -11953,6 +11998,664 @@
 </p:sld>
 </file>
 
+<file path=ppt/slides/slide18.xml><?xml version="1.0" encoding="utf-8"?>
+<p:sld xmlns:a="http://schemas.openxmlformats.org/drawingml/2006/main" xmlns:p="http://schemas.openxmlformats.org/presentationml/2006/main" xmlns:r="http://schemas.openxmlformats.org/officeDocument/2006/relationships">
+  <p:cSld>
+    <p:spTree>
+      <p:nvGrpSpPr>
+        <p:cNvPr id="1" name=""/>
+        <p:cNvGrpSpPr/>
+        <p:nvPr/>
+      </p:nvGrpSpPr>
+      <p:grpSpPr/>
+      <p:sp>
+        <p:nvSpPr>
+          <p:cNvPr id="2" name="Text 0"/>
+          <p:cNvSpPr txBox="1"/>
+          <p:nvPr/>
+        </p:nvSpPr>
+        <p:spPr>
+          <a:xfrm>
+            <a:off x="548640" y="320040"/>
+            <a:ext cx="11064240" cy="685800"/>
+          </a:xfrm>
+          <a:prstGeom prst="rect">
+            <a:avLst/>
+          </a:prstGeom>
+          <a:noFill/>
+          <a:ln/>
+        </p:spPr>
+        <p:txBody>
+          <a:bodyPr wrap="square" lIns="0" tIns="0" rIns="0" bIns="0" rtlCol="0" anchor="ctr"/>
+          <a:lstStyle/>
+          <a:p>
+            <a:pPr indent="0" marL="0">
+              <a:buNone/>
+            </a:pPr>
+            <a:r>
+              <a:rPr lang="en-US" sz="3000" b="1" dirty="0">
+                <a:solidFill>
+                  <a:srgbClr val="01485C"/>
+                </a:solidFill>
+                <a:latin typeface="Calibri" pitchFamily="34" charset="0"/>
+                <a:ea typeface="Calibri" pitchFamily="34" charset="-122"/>
+                <a:cs typeface="Calibri" pitchFamily="34" charset="-120"/>
+              </a:rPr>
+              <a:t>Overview reports and the dormant list</a:t>
+            </a:r>
+            <a:endParaRPr lang="en-US" sz="3000" dirty="0"/>
+          </a:p>
+        </p:txBody>
+      </p:sp>
+      <p:sp>
+        <p:nvSpPr>
+          <p:cNvPr id="3" name="Shape 1"/>
+          <p:cNvSpPr/>
+          <p:nvPr/>
+        </p:nvSpPr>
+        <p:spPr>
+          <a:xfrm>
+            <a:off x="9784080" y="384048"/>
+            <a:ext cx="1828800" cy="457200"/>
+          </a:xfrm>
+          <a:prstGeom prst="roundRect">
+            <a:avLst>
+              <a:gd name="adj" fmla="val 50000"/>
+            </a:avLst>
+          </a:prstGeom>
+          <a:solidFill>
+            <a:srgbClr val="01485C"/>
+          </a:solidFill>
+          <a:ln/>
+        </p:spPr>
+        <p:txBody>
+          <a:bodyPr/>
+          <a:p/>
+        </p:txBody>
+      </p:sp>
+      <p:sp>
+        <p:nvSpPr>
+          <p:cNvPr id="4" name="Text 2"/>
+          <p:cNvSpPr txBox="1"/>
+          <p:nvPr/>
+        </p:nvSpPr>
+        <p:spPr>
+          <a:xfrm>
+            <a:off x="9784080" y="384048"/>
+            <a:ext cx="1828800" cy="457200"/>
+          </a:xfrm>
+          <a:prstGeom prst="rect">
+            <a:avLst/>
+          </a:prstGeom>
+          <a:noFill/>
+          <a:ln/>
+        </p:spPr>
+        <p:txBody>
+          <a:bodyPr wrap="square" lIns="0" tIns="0" rIns="0" bIns="0" rtlCol="0" anchor="ctr"/>
+          <a:lstStyle/>
+          <a:p>
+            <a:pPr algn="ctr" indent="0" marL="0">
+              <a:buNone/>
+            </a:pPr>
+            <a:r>
+              <a:rPr lang="en-US" sz="1500" b="1" dirty="0">
+                <a:solidFill>
+                  <a:srgbClr val="FFFFFF"/>
+                </a:solidFill>
+                <a:latin typeface="Calibri" pitchFamily="34" charset="0"/>
+                <a:ea typeface="Calibri" pitchFamily="34" charset="-122"/>
+                <a:cs typeface="Calibri" pitchFamily="34" charset="-120"/>
+              </a:rPr>
+              <a:t>i-STAT</a:t>
+            </a:r>
+            <a:endParaRPr lang="en-US" sz="1500" dirty="0"/>
+          </a:p>
+        </p:txBody>
+      </p:sp>
+      <p:sp>
+        <p:nvSpPr>
+          <p:cNvPr id="5" name="Shape 3"/>
+          <p:cNvSpPr/>
+          <p:nvPr/>
+        </p:nvSpPr>
+        <p:spPr>
+          <a:xfrm>
+            <a:off x="548640" y="1463040"/>
+            <a:ext cx="5486400" cy="2103120"/>
+          </a:xfrm>
+          <a:prstGeom prst="roundRect">
+            <a:avLst>
+              <a:gd name="adj" fmla="val 5217"/>
+            </a:avLst>
+          </a:prstGeom>
+          <a:solidFill>
+            <a:srgbClr val="E5F2F0"/>
+          </a:solidFill>
+          <a:ln/>
+        </p:spPr>
+        <p:txBody>
+          <a:bodyPr/>
+          <a:p/>
+        </p:txBody>
+      </p:sp>
+      <p:sp>
+        <p:nvSpPr>
+          <p:cNvPr id="6" name="Text 4"/>
+          <p:cNvSpPr txBox="1"/>
+          <p:nvPr/>
+        </p:nvSpPr>
+        <p:spPr>
+          <a:xfrm>
+            <a:off x="822960" y="1664208"/>
+            <a:ext cx="4937760" cy="411480"/>
+          </a:xfrm>
+          <a:prstGeom prst="rect">
+            <a:avLst/>
+          </a:prstGeom>
+          <a:noFill/>
+          <a:ln/>
+        </p:spPr>
+        <p:txBody>
+          <a:bodyPr wrap="square" lIns="0" tIns="0" rIns="0" bIns="0" rtlCol="0" anchor="ctr"/>
+          <a:lstStyle/>
+          <a:p>
+            <a:pPr indent="0" marL="0">
+              <a:buNone/>
+            </a:pPr>
+            <a:r>
+              <a:rPr lang="en-US" sz="1600" b="1" dirty="0">
+                <a:solidFill>
+                  <a:srgbClr val="01485C"/>
+                </a:solidFill>
+                <a:latin typeface="Calibri" pitchFamily="34" charset="0"/>
+                <a:ea typeface="Calibri" pitchFamily="34" charset="-122"/>
+                <a:cs typeface="Calibri" pitchFamily="34" charset="-120"/>
+              </a:rPr>
+              <a:t>Site Overview — large sites</a:t>
+            </a:r>
+            <a:endParaRPr lang="en-US" sz="1600" dirty="0"/>
+          </a:p>
+        </p:txBody>
+      </p:sp>
+      <p:sp>
+        <p:nvSpPr>
+          <p:cNvPr id="7" name="Text 5"/>
+          <p:cNvSpPr txBox="1"/>
+          <p:nvPr/>
+        </p:nvSpPr>
+        <p:spPr>
+          <a:xfrm>
+            <a:off x="822960" y="2148840"/>
+            <a:ext cx="4937760" cy="1463040"/>
+          </a:xfrm>
+          <a:prstGeom prst="rect">
+            <a:avLst/>
+          </a:prstGeom>
+          <a:noFill/>
+          <a:ln/>
+        </p:spPr>
+        <p:txBody>
+          <a:bodyPr wrap="square" lIns="0" tIns="0" rIns="0" bIns="0" rtlCol="0" anchor="ctr"/>
+          <a:lstStyle/>
+          <a:p>
+            <a:pPr indent="0" marL="0">
+              <a:buNone/>
+            </a:pPr>
+            <a:r>
+              <a:rPr lang="en-US" sz="1200" dirty="0">
+                <a:solidFill>
+                  <a:srgbClr val="17272E"/>
+                </a:solidFill>
+                <a:latin typeface="Calibri" pitchFamily="34" charset="0"/>
+                <a:ea typeface="Calibri" pitchFamily="34" charset="-122"/>
+                <a:cs typeface="Calibri" pitchFamily="34" charset="-120"/>
+              </a:rPr>
+              <a:t>Every site that is split by ward also gets one page listing each ward’s analyser: cartridges, errors, error % with its band, simulator runs and ceramic ✓/✗, plus a whole-site total. Filed with the ward reports as i-STAT_&lt;Site&gt;_Site_Overview_&lt;Month&gt;.docx</a:t>
+            </a:r>
+            <a:endParaRPr lang="en-US" sz="1300" dirty="0"/>
+          </a:p>
+        </p:txBody>
+      </p:sp>
+      <p:sp>
+        <p:nvSpPr>
+          <p:cNvPr id="8" name="Shape 6"/>
+          <p:cNvSpPr/>
+          <p:nvPr/>
+        </p:nvSpPr>
+        <p:spPr>
+          <a:xfrm>
+            <a:off x="6172200" y="1463040"/>
+            <a:ext cx="5486400" cy="2103120"/>
+          </a:xfrm>
+          <a:prstGeom prst="roundRect">
+            <a:avLst>
+              <a:gd name="adj" fmla="val 5217"/>
+            </a:avLst>
+          </a:prstGeom>
+          <a:solidFill>
+            <a:srgbClr val="FDF0E4"/>
+          </a:solidFill>
+          <a:ln/>
+        </p:spPr>
+        <p:txBody>
+          <a:bodyPr/>
+          <a:p/>
+        </p:txBody>
+      </p:sp>
+      <p:sp>
+        <p:nvSpPr>
+          <p:cNvPr id="9" name="Text 7"/>
+          <p:cNvSpPr txBox="1"/>
+          <p:nvPr/>
+        </p:nvSpPr>
+        <p:spPr>
+          <a:xfrm>
+            <a:off x="6446520" y="1664208"/>
+            <a:ext cx="4937760" cy="411480"/>
+          </a:xfrm>
+          <a:prstGeom prst="rect">
+            <a:avLst/>
+          </a:prstGeom>
+          <a:noFill/>
+          <a:ln/>
+        </p:spPr>
+        <p:txBody>
+          <a:bodyPr wrap="square" lIns="0" tIns="0" rIns="0" bIns="0" rtlCol="0" anchor="ctr"/>
+          <a:lstStyle/>
+          <a:p>
+            <a:pPr indent="0" marL="0">
+              <a:buNone/>
+            </a:pPr>
+            <a:r>
+              <a:rPr lang="en-US" sz="1600" b="1" dirty="0">
+                <a:solidFill>
+                  <a:srgbClr val="B4540A"/>
+                </a:solidFill>
+                <a:latin typeface="Calibri" pitchFamily="34" charset="0"/>
+                <a:ea typeface="Calibri" pitchFamily="34" charset="-122"/>
+                <a:cs typeface="Calibri" pitchFamily="34" charset="-120"/>
+              </a:rPr>
+              <a:t>Dormant analysers — the 4-month rule</a:t>
+            </a:r>
+            <a:endParaRPr lang="en-US" sz="1600" dirty="0"/>
+          </a:p>
+        </p:txBody>
+      </p:sp>
+      <p:sp>
+        <p:nvSpPr>
+          <p:cNvPr id="10" name="Text 8"/>
+          <p:cNvSpPr txBox="1"/>
+          <p:nvPr/>
+        </p:nvSpPr>
+        <p:spPr>
+          <a:xfrm>
+            <a:off x="6446520" y="2148840"/>
+            <a:ext cx="4937760" cy="1463040"/>
+          </a:xfrm>
+          <a:prstGeom prst="rect">
+            <a:avLst/>
+          </a:prstGeom>
+          <a:noFill/>
+          <a:ln/>
+        </p:spPr>
+        <p:txBody>
+          <a:bodyPr wrap="square" lIns="0" tIns="0" rIns="0" bIns="0" rtlCol="0" anchor="ctr"/>
+          <a:lstStyle/>
+          <a:p>
+            <a:pPr indent="0" marL="0">
+              <a:buNone/>
+            </a:pPr>
+            <a:r>
+              <a:rPr lang="en-US" sz="1200" dirty="0">
+                <a:solidFill>
+                  <a:srgbClr val="17272E"/>
+                </a:solidFill>
+                <a:latin typeface="Calibri" pitchFamily="34" charset="0"/>
+                <a:ea typeface="Calibri" pitchFamily="34" charset="-122"/>
+                <a:cs typeface="Calibri" pitchFamily="34" charset="-120"/>
+              </a:rPr>
+              <a:t>An analyser with no cartridges, no simulator runs and no ceramics for 4 consecutive months gets no report and no longer counts against its site’s simulator or ceramic checks. One or two quiet months change nothing. Any use brings it straight back the next month.</a:t>
+            </a:r>
+            <a:endParaRPr lang="en-US" sz="1300" dirty="0"/>
+          </a:p>
+        </p:txBody>
+      </p:sp>
+      <p:sp>
+        <p:nvSpPr>
+          <p:cNvPr id="11" name="Shape 9"/>
+          <p:cNvSpPr/>
+          <p:nvPr/>
+        </p:nvSpPr>
+        <p:spPr>
+          <a:xfrm>
+            <a:off x="548640" y="3749040"/>
+            <a:ext cx="5486400" cy="2103120"/>
+          </a:xfrm>
+          <a:prstGeom prst="roundRect">
+            <a:avLst>
+              <a:gd name="adj" fmla="val 5217"/>
+            </a:avLst>
+          </a:prstGeom>
+          <a:solidFill>
+            <a:srgbClr val="E5F2F0"/>
+          </a:solidFill>
+          <a:ln/>
+        </p:spPr>
+        <p:txBody>
+          <a:bodyPr/>
+          <a:p/>
+        </p:txBody>
+      </p:sp>
+      <p:sp>
+        <p:nvSpPr>
+          <p:cNvPr id="12" name="Text 10"/>
+          <p:cNvSpPr txBox="1"/>
+          <p:nvPr/>
+        </p:nvSpPr>
+        <p:spPr>
+          <a:xfrm>
+            <a:off x="822960" y="3950208"/>
+            <a:ext cx="4937760" cy="411480"/>
+          </a:xfrm>
+          <a:prstGeom prst="rect">
+            <a:avLst/>
+          </a:prstGeom>
+          <a:noFill/>
+          <a:ln/>
+        </p:spPr>
+        <p:txBody>
+          <a:bodyPr wrap="square" lIns="0" tIns="0" rIns="0" bIns="0" rtlCol="0" anchor="ctr"/>
+          <a:lstStyle/>
+          <a:p>
+            <a:pPr indent="0" marL="0">
+              <a:buNone/>
+            </a:pPr>
+            <a:r>
+              <a:rPr lang="en-US" sz="1600" b="1" dirty="0">
+                <a:solidFill>
+                  <a:srgbClr val="01485C"/>
+                </a:solidFill>
+                <a:latin typeface="Calibri" pitchFamily="34" charset="0"/>
+                <a:ea typeface="Calibri" pitchFamily="34" charset="-122"/>
+                <a:cs typeface="Calibri" pitchFamily="34" charset="-120"/>
+              </a:rPr>
+              <a:t>Area Summary — every HHS</a:t>
+            </a:r>
+            <a:endParaRPr lang="en-US" sz="1600" dirty="0"/>
+          </a:p>
+        </p:txBody>
+      </p:sp>
+      <p:sp>
+        <p:nvSpPr>
+          <p:cNvPr id="13" name="Text 11"/>
+          <p:cNvSpPr txBox="1"/>
+          <p:nvPr/>
+        </p:nvSpPr>
+        <p:spPr>
+          <a:xfrm>
+            <a:off x="822960" y="4434840"/>
+            <a:ext cx="4937760" cy="1463040"/>
+          </a:xfrm>
+          <a:prstGeom prst="rect">
+            <a:avLst/>
+          </a:prstGeom>
+          <a:noFill/>
+          <a:ln/>
+        </p:spPr>
+        <p:txBody>
+          <a:bodyPr wrap="square" lIns="0" tIns="0" rIns="0" bIns="0" rtlCol="0" anchor="ctr"/>
+          <a:lstStyle/>
+          <a:p>
+            <a:pPr indent="0" marL="0">
+              <a:buNone/>
+            </a:pPr>
+            <a:r>
+              <a:rPr lang="en-US" sz="1200" dirty="0">
+                <a:solidFill>
+                  <a:srgbClr val="17272E"/>
+                </a:solidFill>
+                <a:latin typeface="Calibri" pitchFamily="34" charset="0"/>
+                <a:ea typeface="Calibri" pitchFamily="34" charset="-122"/>
+                <a:cs typeface="Calibri" pitchFamily="34" charset="-120"/>
+              </a:rPr>
+              <a:t>One per HHS folder each run: every hospital in the area on one page with the same figures, an area total, and an “Analysers Needing Attention” table naming each analyser that ran no simulator or fewer than 3 ceramics. i-STAT_&lt;HHS&gt;_Area_Summary_&lt;Month&gt;.docx</a:t>
+            </a:r>
+            <a:endParaRPr lang="en-US" sz="1300" dirty="0"/>
+          </a:p>
+        </p:txBody>
+      </p:sp>
+      <p:sp>
+        <p:nvSpPr>
+          <p:cNvPr id="14" name="Shape 12"/>
+          <p:cNvSpPr/>
+          <p:nvPr/>
+        </p:nvSpPr>
+        <p:spPr>
+          <a:xfrm>
+            <a:off x="6172200" y="3749040"/>
+            <a:ext cx="5486400" cy="2103120"/>
+          </a:xfrm>
+          <a:prstGeom prst="roundRect">
+            <a:avLst>
+              <a:gd name="adj" fmla="val 5217"/>
+            </a:avLst>
+          </a:prstGeom>
+          <a:solidFill>
+            <a:srgbClr val="E5F2F0"/>
+          </a:solidFill>
+          <a:ln/>
+        </p:spPr>
+        <p:txBody>
+          <a:bodyPr/>
+          <a:p/>
+        </p:txBody>
+      </p:sp>
+      <p:sp>
+        <p:nvSpPr>
+          <p:cNvPr id="15" name="Text 13"/>
+          <p:cNvSpPr txBox="1"/>
+          <p:nvPr/>
+        </p:nvSpPr>
+        <p:spPr>
+          <a:xfrm>
+            <a:off x="6446520" y="3950208"/>
+            <a:ext cx="4937760" cy="411480"/>
+          </a:xfrm>
+          <a:prstGeom prst="rect">
+            <a:avLst/>
+          </a:prstGeom>
+          <a:noFill/>
+          <a:ln/>
+        </p:spPr>
+        <p:txBody>
+          <a:bodyPr wrap="square" lIns="0" tIns="0" rIns="0" bIns="0" rtlCol="0" anchor="ctr"/>
+          <a:lstStyle/>
+          <a:p>
+            <a:pPr indent="0" marL="0">
+              <a:buNone/>
+            </a:pPr>
+            <a:r>
+              <a:rPr lang="en-US" sz="1600" b="1" dirty="0">
+                <a:solidFill>
+                  <a:srgbClr val="01485C"/>
+                </a:solidFill>
+                <a:latin typeface="Calibri" pitchFamily="34" charset="0"/>
+                <a:ea typeface="Calibri" pitchFamily="34" charset="-122"/>
+                <a:cs typeface="Calibri" pitchFamily="34" charset="-120"/>
+              </a:rPr>
+              <a:t>The dormant list</a:t>
+            </a:r>
+            <a:endParaRPr lang="en-US" sz="1600" dirty="0"/>
+          </a:p>
+        </p:txBody>
+      </p:sp>
+      <p:sp>
+        <p:nvSpPr>
+          <p:cNvPr id="16" name="Text 14"/>
+          <p:cNvSpPr txBox="1"/>
+          <p:nvPr/>
+        </p:nvSpPr>
+        <p:spPr>
+          <a:xfrm>
+            <a:off x="6446520" y="4434840"/>
+            <a:ext cx="4937760" cy="1463040"/>
+          </a:xfrm>
+          <a:prstGeom prst="rect">
+            <a:avLst/>
+          </a:prstGeom>
+          <a:noFill/>
+          <a:ln/>
+        </p:spPr>
+        <p:txBody>
+          <a:bodyPr wrap="square" lIns="0" tIns="0" rIns="0" bIns="0" rtlCol="0" anchor="ctr"/>
+          <a:lstStyle/>
+          <a:p>
+            <a:pPr indent="0" marL="0">
+              <a:buNone/>
+            </a:pPr>
+            <a:r>
+              <a:rPr lang="en-US" sz="1200" dirty="0">
+                <a:solidFill>
+                  <a:srgbClr val="17272E"/>
+                </a:solidFill>
+                <a:latin typeface="Calibri" pitchFamily="34" charset="0"/>
+                <a:ea typeface="Calibri" pitchFamily="34" charset="-122"/>
+                <a:cs typeface="Calibri" pitchFamily="34" charset="-120"/>
+              </a:rPr>
+              <a:t>Dormant_iSTATs_&lt;Month&gt;.docx in the reports folder lists every unit left out: hospital, location, serial, months idle and last activity. Check it each month for units to retire — or units that should be in use but are not being maintained. The results card shows the count.</a:t>
+            </a:r>
+            <a:endParaRPr lang="en-US" sz="1300" dirty="0"/>
+          </a:p>
+        </p:txBody>
+      </p:sp>
+      <p:sp>
+        <p:nvSpPr>
+          <p:cNvPr id="17" name="Shape 15"/>
+          <p:cNvSpPr/>
+          <p:nvPr/>
+        </p:nvSpPr>
+        <p:spPr>
+          <a:xfrm>
+            <a:off x="0" y="6793992"/>
+            <a:ext cx="2040636" cy="64008"/>
+          </a:xfrm>
+          <a:prstGeom prst="rect">
+            <a:avLst/>
+          </a:prstGeom>
+          <a:solidFill>
+            <a:srgbClr val="01485C"/>
+          </a:solidFill>
+          <a:ln/>
+        </p:spPr>
+      </p:sp>
+      <p:sp>
+        <p:nvSpPr>
+          <p:cNvPr id="18" name="Shape 16"/>
+          <p:cNvSpPr/>
+          <p:nvPr/>
+        </p:nvSpPr>
+        <p:spPr>
+          <a:xfrm>
+            <a:off x="2031492" y="6793992"/>
+            <a:ext cx="2040636" cy="64008"/>
+          </a:xfrm>
+          <a:prstGeom prst="rect">
+            <a:avLst/>
+          </a:prstGeom>
+          <a:solidFill>
+            <a:srgbClr val="146175"/>
+          </a:solidFill>
+          <a:ln/>
+        </p:spPr>
+      </p:sp>
+      <p:sp>
+        <p:nvSpPr>
+          <p:cNvPr id="19" name="Shape 17"/>
+          <p:cNvSpPr/>
+          <p:nvPr/>
+        </p:nvSpPr>
+        <p:spPr>
+          <a:xfrm>
+            <a:off x="4062984" y="6793992"/>
+            <a:ext cx="2040636" cy="64008"/>
+          </a:xfrm>
+          <a:prstGeom prst="rect">
+            <a:avLst/>
+          </a:prstGeom>
+          <a:solidFill>
+            <a:srgbClr val="11B5AE"/>
+          </a:solidFill>
+          <a:ln/>
+        </p:spPr>
+      </p:sp>
+      <p:sp>
+        <p:nvSpPr>
+          <p:cNvPr id="20" name="Shape 18"/>
+          <p:cNvSpPr/>
+          <p:nvPr/>
+        </p:nvSpPr>
+        <p:spPr>
+          <a:xfrm>
+            <a:off x="6094476" y="6793992"/>
+            <a:ext cx="2040636" cy="64008"/>
+          </a:xfrm>
+          <a:prstGeom prst="rect">
+            <a:avLst/>
+          </a:prstGeom>
+          <a:solidFill>
+            <a:srgbClr val="6CCAD4"/>
+          </a:solidFill>
+          <a:ln/>
+        </p:spPr>
+      </p:sp>
+      <p:sp>
+        <p:nvSpPr>
+          <p:cNvPr id="21" name="Shape 19"/>
+          <p:cNvSpPr/>
+          <p:nvPr/>
+        </p:nvSpPr>
+        <p:spPr>
+          <a:xfrm>
+            <a:off x="8125968" y="6793992"/>
+            <a:ext cx="2040636" cy="64008"/>
+          </a:xfrm>
+          <a:prstGeom prst="rect">
+            <a:avLst/>
+          </a:prstGeom>
+          <a:solidFill>
+            <a:srgbClr val="7FC04C"/>
+          </a:solidFill>
+          <a:ln/>
+        </p:spPr>
+      </p:sp>
+      <p:sp>
+        <p:nvSpPr>
+          <p:cNvPr id="22" name="Shape 20"/>
+          <p:cNvSpPr/>
+          <p:nvPr/>
+        </p:nvSpPr>
+        <p:spPr>
+          <a:xfrm>
+            <a:off x="10157460" y="6793992"/>
+            <a:ext cx="2040636" cy="64008"/>
+          </a:xfrm>
+          <a:prstGeom prst="rect">
+            <a:avLst/>
+          </a:prstGeom>
+          <a:solidFill>
+            <a:srgbClr val="E1DD57"/>
+          </a:solidFill>
+          <a:ln/>
+        </p:spPr>
+      </p:sp>
+    </p:spTree>
+  </p:cSld>
+  <p:clrMapOvr>
+    <a:masterClrMapping/>
+  </p:clrMapOvr>
+</p:sld>
+</file>
+
 <file path=ppt/slides/slide2.xml><?xml version="1.0" encoding="utf-8"?>
 <p:sld xmlns:a="http://schemas.openxmlformats.org/drawingml/2006/main" xmlns:r="http://schemas.openxmlformats.org/officeDocument/2006/relationships" xmlns:p="http://schemas.openxmlformats.org/presentationml/2006/main">
   <p:cSld name="Slide 2">
@@ -14835,6 +15538,10 @@
           </a:solidFill>
           <a:ln/>
         </p:spPr>
+        <p:txBody>
+          <a:bodyPr/>
+          <a:p/>
+        </p:txBody>
       </p:sp>
       <p:sp>
         <p:nvSpPr>
@@ -14894,6 +15601,10 @@
           </a:solidFill>
           <a:ln/>
         </p:spPr>
+        <p:txBody>
+          <a:bodyPr/>
+          <a:p/>
+        </p:txBody>
       </p:sp>
       <p:sp>
         <p:nvSpPr>
@@ -15007,6 +15718,10 @@
           </a:solidFill>
           <a:ln/>
         </p:spPr>
+        <p:txBody>
+          <a:bodyPr/>
+          <a:p/>
+        </p:txBody>
       </p:sp>
       <p:sp>
         <p:nvSpPr>
@@ -15095,7 +15810,7 @@
                 <a:ea typeface="Calibri" pitchFamily="34" charset="-122"/>
                 <a:cs typeface="Calibri" pitchFamily="34" charset="-120"/>
               </a:rPr>
-              <a:t>A progress bar shows each hospital as it is processed.</a:t>
+              <a:t>A progress bar shows each hospital as it is processed and the number of reports written so far.</a:t>
             </a:r>
             <a:endParaRPr lang="en-US" sz="1450" dirty="0"/>
           </a:p>
@@ -15120,6 +15835,10 @@
           </a:solidFill>
           <a:ln/>
         </p:spPr>
+        <p:txBody>
+          <a:bodyPr/>
+          <a:p/>
+        </p:txBody>
       </p:sp>
       <p:sp>
         <p:nvSpPr>
@@ -15208,7 +15927,7 @@
                 <a:ea typeface="Calibri" pitchFamily="34" charset="-122"/>
                 <a:cs typeface="Calibri" pitchFamily="34" charset="-120"/>
               </a:rPr>
-              <a:t>When "Reports Ready" appears, click the button — reports are filed by HHS.</a:t>
+              <a:t>When "Reports Ready" appears, click the button — reports are filed by HHS, with the count of documents written and of dormant analysers left out.</a:t>
             </a:r>
             <a:endParaRPr lang="en-US" sz="1450" dirty="0"/>
           </a:p>
@@ -15235,6 +15954,10 @@
           </a:solidFill>
           <a:ln/>
         </p:spPr>
+        <p:txBody>
+          <a:bodyPr/>
+          <a:p/>
+        </p:txBody>
       </p:sp>
       <p:sp>
         <p:nvSpPr>
@@ -15311,6 +16034,10 @@
           </a:solidFill>
           <a:ln/>
         </p:spPr>
+        <p:txBody>
+          <a:bodyPr/>
+          <a:p/>
+        </p:txBody>
       </p:sp>
       <p:sp>
         <p:nvSpPr>
@@ -15360,7 +16087,7 @@
                 <a:ea typeface="Calibri" pitchFamily="34" charset="-122"/>
                 <a:cs typeface="Calibri" pitchFamily="34" charset="-120"/>
               </a:rPr>
-              <a:t>Townsville, Mt Isa, Mackay and Redcliffe generate one report per device automatically</a:t>
+              <a:t>23 sites, from Townsville to RBWH, get one report per ward plus a Site Overview page</a:t>
             </a:r>
             <a:endParaRPr lang="en-US" sz="1250" dirty="0"/>
           </a:p>

--- a/PQ_Report_Generator_User_Guide.pptx
+++ b/PQ_Report_Generator_User_Guide.pptx
@@ -8,6 +8,7 @@
     <p:sldId id="256" r:id="rId2"/>
     <p:sldId id="257" r:id="rId3"/>
     <p:sldId id="258" r:id="rId4"/>
+    <p:sldId id="274" r:id="rId25"/>
     <p:sldId id="259" r:id="rId5"/>
     <p:sldId id="260" r:id="rId6"/>
     <p:sldId id="261" r:id="rId7"/>
@@ -2321,6 +2322,10 @@
           </a:solidFill>
           <a:ln/>
         </p:spPr>
+        <p:txBody>
+          <a:bodyPr/>
+          <a:p/>
+        </p:txBody>
       </p:sp>
       <p:pic>
         <p:nvPicPr>
@@ -5121,6 +5126,664 @@
 </file>
 
 <file path=ppt/slides/slide12.xml><?xml version="1.0" encoding="utf-8"?>
+<p:sld xmlns:a="http://schemas.openxmlformats.org/drawingml/2006/main" xmlns:p="http://schemas.openxmlformats.org/presentationml/2006/main" xmlns:r="http://schemas.openxmlformats.org/officeDocument/2006/relationships">
+  <p:cSld>
+    <p:spTree>
+      <p:nvGrpSpPr>
+        <p:cNvPr id="1" name=""/>
+        <p:cNvGrpSpPr/>
+        <p:nvPr/>
+      </p:nvGrpSpPr>
+      <p:grpSpPr/>
+      <p:sp>
+        <p:nvSpPr>
+          <p:cNvPr id="2" name="Text 0"/>
+          <p:cNvSpPr txBox="1"/>
+          <p:nvPr/>
+        </p:nvSpPr>
+        <p:spPr>
+          <a:xfrm>
+            <a:off x="548640" y="320040"/>
+            <a:ext cx="11064240" cy="685800"/>
+          </a:xfrm>
+          <a:prstGeom prst="rect">
+            <a:avLst/>
+          </a:prstGeom>
+          <a:noFill/>
+          <a:ln/>
+        </p:spPr>
+        <p:txBody>
+          <a:bodyPr wrap="square" lIns="0" tIns="0" rIns="0" bIns="0" rtlCol="0" anchor="ctr"/>
+          <a:lstStyle/>
+          <a:p>
+            <a:pPr indent="0" marL="0">
+              <a:buNone/>
+            </a:pPr>
+            <a:r>
+              <a:rPr lang="en-US" sz="3000" b="1" dirty="0">
+                <a:solidFill>
+                  <a:srgbClr val="01485C"/>
+                </a:solidFill>
+                <a:latin typeface="Calibri" pitchFamily="34" charset="0"/>
+                <a:ea typeface="Calibri" pitchFamily="34" charset="-122"/>
+                <a:cs typeface="Calibri" pitchFamily="34" charset="-120"/>
+              </a:rPr>
+              <a:t>Overview reports and the dormant list</a:t>
+            </a:r>
+            <a:endParaRPr lang="en-US" sz="3000" dirty="0"/>
+          </a:p>
+        </p:txBody>
+      </p:sp>
+      <p:sp>
+        <p:nvSpPr>
+          <p:cNvPr id="3" name="Shape 1"/>
+          <p:cNvSpPr/>
+          <p:nvPr/>
+        </p:nvSpPr>
+        <p:spPr>
+          <a:xfrm>
+            <a:off x="9784080" y="384048"/>
+            <a:ext cx="1828800" cy="457200"/>
+          </a:xfrm>
+          <a:prstGeom prst="roundRect">
+            <a:avLst>
+              <a:gd name="adj" fmla="val 50000"/>
+            </a:avLst>
+          </a:prstGeom>
+          <a:solidFill>
+            <a:srgbClr val="01485C"/>
+          </a:solidFill>
+          <a:ln/>
+        </p:spPr>
+        <p:txBody>
+          <a:bodyPr/>
+          <a:p/>
+        </p:txBody>
+      </p:sp>
+      <p:sp>
+        <p:nvSpPr>
+          <p:cNvPr id="4" name="Text 2"/>
+          <p:cNvSpPr txBox="1"/>
+          <p:nvPr/>
+        </p:nvSpPr>
+        <p:spPr>
+          <a:xfrm>
+            <a:off x="9784080" y="384048"/>
+            <a:ext cx="1828800" cy="457200"/>
+          </a:xfrm>
+          <a:prstGeom prst="rect">
+            <a:avLst/>
+          </a:prstGeom>
+          <a:noFill/>
+          <a:ln/>
+        </p:spPr>
+        <p:txBody>
+          <a:bodyPr wrap="square" lIns="0" tIns="0" rIns="0" bIns="0" rtlCol="0" anchor="ctr"/>
+          <a:lstStyle/>
+          <a:p>
+            <a:pPr algn="ctr" indent="0" marL="0">
+              <a:buNone/>
+            </a:pPr>
+            <a:r>
+              <a:rPr lang="en-US" sz="1500" b="1" dirty="0">
+                <a:solidFill>
+                  <a:srgbClr val="FFFFFF"/>
+                </a:solidFill>
+                <a:latin typeface="Calibri" pitchFamily="34" charset="0"/>
+                <a:ea typeface="Calibri" pitchFamily="34" charset="-122"/>
+                <a:cs typeface="Calibri" pitchFamily="34" charset="-120"/>
+              </a:rPr>
+              <a:t>i-STAT</a:t>
+            </a:r>
+            <a:endParaRPr lang="en-US" sz="1500" dirty="0"/>
+          </a:p>
+        </p:txBody>
+      </p:sp>
+      <p:sp>
+        <p:nvSpPr>
+          <p:cNvPr id="5" name="Shape 3"/>
+          <p:cNvSpPr/>
+          <p:nvPr/>
+        </p:nvSpPr>
+        <p:spPr>
+          <a:xfrm>
+            <a:off x="548640" y="1463040"/>
+            <a:ext cx="5486400" cy="2103120"/>
+          </a:xfrm>
+          <a:prstGeom prst="roundRect">
+            <a:avLst>
+              <a:gd name="adj" fmla="val 5217"/>
+            </a:avLst>
+          </a:prstGeom>
+          <a:solidFill>
+            <a:srgbClr val="E5F2F0"/>
+          </a:solidFill>
+          <a:ln/>
+        </p:spPr>
+        <p:txBody>
+          <a:bodyPr/>
+          <a:p/>
+        </p:txBody>
+      </p:sp>
+      <p:sp>
+        <p:nvSpPr>
+          <p:cNvPr id="6" name="Text 4"/>
+          <p:cNvSpPr txBox="1"/>
+          <p:nvPr/>
+        </p:nvSpPr>
+        <p:spPr>
+          <a:xfrm>
+            <a:off x="822960" y="1664208"/>
+            <a:ext cx="4937760" cy="411480"/>
+          </a:xfrm>
+          <a:prstGeom prst="rect">
+            <a:avLst/>
+          </a:prstGeom>
+          <a:noFill/>
+          <a:ln/>
+        </p:spPr>
+        <p:txBody>
+          <a:bodyPr wrap="square" lIns="0" tIns="0" rIns="0" bIns="0" rtlCol="0" anchor="ctr"/>
+          <a:lstStyle/>
+          <a:p>
+            <a:pPr indent="0" marL="0">
+              <a:buNone/>
+            </a:pPr>
+            <a:r>
+              <a:rPr lang="en-US" sz="1600" b="1" dirty="0">
+                <a:solidFill>
+                  <a:srgbClr val="01485C"/>
+                </a:solidFill>
+                <a:latin typeface="Calibri" pitchFamily="34" charset="0"/>
+                <a:ea typeface="Calibri" pitchFamily="34" charset="-122"/>
+                <a:cs typeface="Calibri" pitchFamily="34" charset="-120"/>
+              </a:rPr>
+              <a:t>Site Overview — large sites</a:t>
+            </a:r>
+            <a:endParaRPr lang="en-US" sz="1600" dirty="0"/>
+          </a:p>
+        </p:txBody>
+      </p:sp>
+      <p:sp>
+        <p:nvSpPr>
+          <p:cNvPr id="7" name="Text 5"/>
+          <p:cNvSpPr txBox="1"/>
+          <p:nvPr/>
+        </p:nvSpPr>
+        <p:spPr>
+          <a:xfrm>
+            <a:off x="822960" y="2148840"/>
+            <a:ext cx="4937760" cy="1463040"/>
+          </a:xfrm>
+          <a:prstGeom prst="rect">
+            <a:avLst/>
+          </a:prstGeom>
+          <a:noFill/>
+          <a:ln/>
+        </p:spPr>
+        <p:txBody>
+          <a:bodyPr wrap="square" lIns="0" tIns="0" rIns="0" bIns="0" rtlCol="0" anchor="ctr"/>
+          <a:lstStyle/>
+          <a:p>
+            <a:pPr indent="0" marL="0">
+              <a:buNone/>
+            </a:pPr>
+            <a:r>
+              <a:rPr lang="en-US" sz="1200" dirty="0">
+                <a:solidFill>
+                  <a:srgbClr val="17272E"/>
+                </a:solidFill>
+                <a:latin typeface="Calibri" pitchFamily="34" charset="0"/>
+                <a:ea typeface="Calibri" pitchFamily="34" charset="-122"/>
+                <a:cs typeface="Calibri" pitchFamily="34" charset="-120"/>
+              </a:rPr>
+              <a:t>Every site that is split by ward also gets one page listing each ward’s analyser: cartridges, errors, error % with its band, simulator runs and ceramic ✓/✗, plus a whole-site total. Filed with the ward reports as i-STAT_&lt;Site&gt;_Site_Overview_&lt;Month&gt;.docx</a:t>
+            </a:r>
+            <a:endParaRPr lang="en-US" sz="1300" dirty="0"/>
+          </a:p>
+        </p:txBody>
+      </p:sp>
+      <p:sp>
+        <p:nvSpPr>
+          <p:cNvPr id="8" name="Shape 6"/>
+          <p:cNvSpPr/>
+          <p:nvPr/>
+        </p:nvSpPr>
+        <p:spPr>
+          <a:xfrm>
+            <a:off x="6172200" y="1463040"/>
+            <a:ext cx="5486400" cy="2103120"/>
+          </a:xfrm>
+          <a:prstGeom prst="roundRect">
+            <a:avLst>
+              <a:gd name="adj" fmla="val 5217"/>
+            </a:avLst>
+          </a:prstGeom>
+          <a:solidFill>
+            <a:srgbClr val="FDF0E4"/>
+          </a:solidFill>
+          <a:ln/>
+        </p:spPr>
+        <p:txBody>
+          <a:bodyPr/>
+          <a:p/>
+        </p:txBody>
+      </p:sp>
+      <p:sp>
+        <p:nvSpPr>
+          <p:cNvPr id="9" name="Text 7"/>
+          <p:cNvSpPr txBox="1"/>
+          <p:nvPr/>
+        </p:nvSpPr>
+        <p:spPr>
+          <a:xfrm>
+            <a:off x="6446520" y="1664208"/>
+            <a:ext cx="4937760" cy="411480"/>
+          </a:xfrm>
+          <a:prstGeom prst="rect">
+            <a:avLst/>
+          </a:prstGeom>
+          <a:noFill/>
+          <a:ln/>
+        </p:spPr>
+        <p:txBody>
+          <a:bodyPr wrap="square" lIns="0" tIns="0" rIns="0" bIns="0" rtlCol="0" anchor="ctr"/>
+          <a:lstStyle/>
+          <a:p>
+            <a:pPr indent="0" marL="0">
+              <a:buNone/>
+            </a:pPr>
+            <a:r>
+              <a:rPr lang="en-US" sz="1600" b="1" dirty="0">
+                <a:solidFill>
+                  <a:srgbClr val="B4540A"/>
+                </a:solidFill>
+                <a:latin typeface="Calibri" pitchFamily="34" charset="0"/>
+                <a:ea typeface="Calibri" pitchFamily="34" charset="-122"/>
+                <a:cs typeface="Calibri" pitchFamily="34" charset="-120"/>
+              </a:rPr>
+              <a:t>Dormant analysers — the 4-month rule</a:t>
+            </a:r>
+            <a:endParaRPr lang="en-US" sz="1600" dirty="0"/>
+          </a:p>
+        </p:txBody>
+      </p:sp>
+      <p:sp>
+        <p:nvSpPr>
+          <p:cNvPr id="10" name="Text 8"/>
+          <p:cNvSpPr txBox="1"/>
+          <p:nvPr/>
+        </p:nvSpPr>
+        <p:spPr>
+          <a:xfrm>
+            <a:off x="6446520" y="2148840"/>
+            <a:ext cx="4937760" cy="1463040"/>
+          </a:xfrm>
+          <a:prstGeom prst="rect">
+            <a:avLst/>
+          </a:prstGeom>
+          <a:noFill/>
+          <a:ln/>
+        </p:spPr>
+        <p:txBody>
+          <a:bodyPr wrap="square" lIns="0" tIns="0" rIns="0" bIns="0" rtlCol="0" anchor="ctr"/>
+          <a:lstStyle/>
+          <a:p>
+            <a:pPr indent="0" marL="0">
+              <a:buNone/>
+            </a:pPr>
+            <a:r>
+              <a:rPr lang="en-US" sz="1200" dirty="0">
+                <a:solidFill>
+                  <a:srgbClr val="17272E"/>
+                </a:solidFill>
+                <a:latin typeface="Calibri" pitchFamily="34" charset="0"/>
+                <a:ea typeface="Calibri" pitchFamily="34" charset="-122"/>
+                <a:cs typeface="Calibri" pitchFamily="34" charset="-120"/>
+              </a:rPr>
+              <a:t>An analyser with no cartridges, no simulator runs and no ceramics for 4 consecutive months gets no report and no longer counts against its site’s simulator or ceramic checks. One or two quiet months change nothing. Any use brings it straight back the next month.</a:t>
+            </a:r>
+            <a:endParaRPr lang="en-US" sz="1300" dirty="0"/>
+          </a:p>
+        </p:txBody>
+      </p:sp>
+      <p:sp>
+        <p:nvSpPr>
+          <p:cNvPr id="11" name="Shape 9"/>
+          <p:cNvSpPr/>
+          <p:nvPr/>
+        </p:nvSpPr>
+        <p:spPr>
+          <a:xfrm>
+            <a:off x="548640" y="3749040"/>
+            <a:ext cx="5486400" cy="2103120"/>
+          </a:xfrm>
+          <a:prstGeom prst="roundRect">
+            <a:avLst>
+              <a:gd name="adj" fmla="val 5217"/>
+            </a:avLst>
+          </a:prstGeom>
+          <a:solidFill>
+            <a:srgbClr val="E5F2F0"/>
+          </a:solidFill>
+          <a:ln/>
+        </p:spPr>
+        <p:txBody>
+          <a:bodyPr/>
+          <a:p/>
+        </p:txBody>
+      </p:sp>
+      <p:sp>
+        <p:nvSpPr>
+          <p:cNvPr id="12" name="Text 10"/>
+          <p:cNvSpPr txBox="1"/>
+          <p:nvPr/>
+        </p:nvSpPr>
+        <p:spPr>
+          <a:xfrm>
+            <a:off x="822960" y="3950208"/>
+            <a:ext cx="4937760" cy="411480"/>
+          </a:xfrm>
+          <a:prstGeom prst="rect">
+            <a:avLst/>
+          </a:prstGeom>
+          <a:noFill/>
+          <a:ln/>
+        </p:spPr>
+        <p:txBody>
+          <a:bodyPr wrap="square" lIns="0" tIns="0" rIns="0" bIns="0" rtlCol="0" anchor="ctr"/>
+          <a:lstStyle/>
+          <a:p>
+            <a:pPr indent="0" marL="0">
+              <a:buNone/>
+            </a:pPr>
+            <a:r>
+              <a:rPr lang="en-US" sz="1600" b="1" dirty="0">
+                <a:solidFill>
+                  <a:srgbClr val="01485C"/>
+                </a:solidFill>
+                <a:latin typeface="Calibri" pitchFamily="34" charset="0"/>
+                <a:ea typeface="Calibri" pitchFamily="34" charset="-122"/>
+                <a:cs typeface="Calibri" pitchFamily="34" charset="-120"/>
+              </a:rPr>
+              <a:t>Area Summary — every HHS</a:t>
+            </a:r>
+            <a:endParaRPr lang="en-US" sz="1600" dirty="0"/>
+          </a:p>
+        </p:txBody>
+      </p:sp>
+      <p:sp>
+        <p:nvSpPr>
+          <p:cNvPr id="13" name="Text 11"/>
+          <p:cNvSpPr txBox="1"/>
+          <p:nvPr/>
+        </p:nvSpPr>
+        <p:spPr>
+          <a:xfrm>
+            <a:off x="822960" y="4434840"/>
+            <a:ext cx="4937760" cy="1463040"/>
+          </a:xfrm>
+          <a:prstGeom prst="rect">
+            <a:avLst/>
+          </a:prstGeom>
+          <a:noFill/>
+          <a:ln/>
+        </p:spPr>
+        <p:txBody>
+          <a:bodyPr wrap="square" lIns="0" tIns="0" rIns="0" bIns="0" rtlCol="0" anchor="ctr"/>
+          <a:lstStyle/>
+          <a:p>
+            <a:pPr indent="0" marL="0">
+              <a:buNone/>
+            </a:pPr>
+            <a:r>
+              <a:rPr lang="en-US" sz="1200" dirty="0">
+                <a:solidFill>
+                  <a:srgbClr val="17272E"/>
+                </a:solidFill>
+                <a:latin typeface="Calibri" pitchFamily="34" charset="0"/>
+                <a:ea typeface="Calibri" pitchFamily="34" charset="-122"/>
+                <a:cs typeface="Calibri" pitchFamily="34" charset="-120"/>
+              </a:rPr>
+              <a:t>One per HHS folder each run: every hospital in the area on one page with the same figures, an area total, and an “Analysers Needing Attention” table naming each analyser that ran no simulator or fewer than 3 ceramics. i-STAT_&lt;HHS&gt;_Area_Summary_&lt;Month&gt;.docx</a:t>
+            </a:r>
+            <a:endParaRPr lang="en-US" sz="1300" dirty="0"/>
+          </a:p>
+        </p:txBody>
+      </p:sp>
+      <p:sp>
+        <p:nvSpPr>
+          <p:cNvPr id="14" name="Shape 12"/>
+          <p:cNvSpPr/>
+          <p:nvPr/>
+        </p:nvSpPr>
+        <p:spPr>
+          <a:xfrm>
+            <a:off x="6172200" y="3749040"/>
+            <a:ext cx="5486400" cy="2103120"/>
+          </a:xfrm>
+          <a:prstGeom prst="roundRect">
+            <a:avLst>
+              <a:gd name="adj" fmla="val 5217"/>
+            </a:avLst>
+          </a:prstGeom>
+          <a:solidFill>
+            <a:srgbClr val="E5F2F0"/>
+          </a:solidFill>
+          <a:ln/>
+        </p:spPr>
+        <p:txBody>
+          <a:bodyPr/>
+          <a:p/>
+        </p:txBody>
+      </p:sp>
+      <p:sp>
+        <p:nvSpPr>
+          <p:cNvPr id="15" name="Text 13"/>
+          <p:cNvSpPr txBox="1"/>
+          <p:nvPr/>
+        </p:nvSpPr>
+        <p:spPr>
+          <a:xfrm>
+            <a:off x="6446520" y="3950208"/>
+            <a:ext cx="4937760" cy="411480"/>
+          </a:xfrm>
+          <a:prstGeom prst="rect">
+            <a:avLst/>
+          </a:prstGeom>
+          <a:noFill/>
+          <a:ln/>
+        </p:spPr>
+        <p:txBody>
+          <a:bodyPr wrap="square" lIns="0" tIns="0" rIns="0" bIns="0" rtlCol="0" anchor="ctr"/>
+          <a:lstStyle/>
+          <a:p>
+            <a:pPr indent="0" marL="0">
+              <a:buNone/>
+            </a:pPr>
+            <a:r>
+              <a:rPr lang="en-US" sz="1600" b="1" dirty="0">
+                <a:solidFill>
+                  <a:srgbClr val="01485C"/>
+                </a:solidFill>
+                <a:latin typeface="Calibri" pitchFamily="34" charset="0"/>
+                <a:ea typeface="Calibri" pitchFamily="34" charset="-122"/>
+                <a:cs typeface="Calibri" pitchFamily="34" charset="-120"/>
+              </a:rPr>
+              <a:t>The dormant list</a:t>
+            </a:r>
+            <a:endParaRPr lang="en-US" sz="1600" dirty="0"/>
+          </a:p>
+        </p:txBody>
+      </p:sp>
+      <p:sp>
+        <p:nvSpPr>
+          <p:cNvPr id="16" name="Text 14"/>
+          <p:cNvSpPr txBox="1"/>
+          <p:nvPr/>
+        </p:nvSpPr>
+        <p:spPr>
+          <a:xfrm>
+            <a:off x="6446520" y="4434840"/>
+            <a:ext cx="4937760" cy="1463040"/>
+          </a:xfrm>
+          <a:prstGeom prst="rect">
+            <a:avLst/>
+          </a:prstGeom>
+          <a:noFill/>
+          <a:ln/>
+        </p:spPr>
+        <p:txBody>
+          <a:bodyPr wrap="square" lIns="0" tIns="0" rIns="0" bIns="0" rtlCol="0" anchor="ctr"/>
+          <a:lstStyle/>
+          <a:p>
+            <a:pPr indent="0" marL="0">
+              <a:buNone/>
+            </a:pPr>
+            <a:r>
+              <a:rPr lang="en-US" sz="1200" dirty="0">
+                <a:solidFill>
+                  <a:srgbClr val="17272E"/>
+                </a:solidFill>
+                <a:latin typeface="Calibri" pitchFamily="34" charset="0"/>
+                <a:ea typeface="Calibri" pitchFamily="34" charset="-122"/>
+                <a:cs typeface="Calibri" pitchFamily="34" charset="-120"/>
+              </a:rPr>
+              <a:t>Dormant_iSTATs_&lt;Month&gt;.docx in the reports folder lists every unit left out: hospital, location, serial, months idle and last activity. Check it each month for units to retire — or units that should be in use but are not being maintained. The results card shows the count.</a:t>
+            </a:r>
+            <a:endParaRPr lang="en-US" sz="1300" dirty="0"/>
+          </a:p>
+        </p:txBody>
+      </p:sp>
+      <p:sp>
+        <p:nvSpPr>
+          <p:cNvPr id="17" name="Shape 15"/>
+          <p:cNvSpPr/>
+          <p:nvPr/>
+        </p:nvSpPr>
+        <p:spPr>
+          <a:xfrm>
+            <a:off x="0" y="6793992"/>
+            <a:ext cx="2040636" cy="64008"/>
+          </a:xfrm>
+          <a:prstGeom prst="rect">
+            <a:avLst/>
+          </a:prstGeom>
+          <a:solidFill>
+            <a:srgbClr val="01485C"/>
+          </a:solidFill>
+          <a:ln/>
+        </p:spPr>
+      </p:sp>
+      <p:sp>
+        <p:nvSpPr>
+          <p:cNvPr id="18" name="Shape 16"/>
+          <p:cNvSpPr/>
+          <p:nvPr/>
+        </p:nvSpPr>
+        <p:spPr>
+          <a:xfrm>
+            <a:off x="2031492" y="6793992"/>
+            <a:ext cx="2040636" cy="64008"/>
+          </a:xfrm>
+          <a:prstGeom prst="rect">
+            <a:avLst/>
+          </a:prstGeom>
+          <a:solidFill>
+            <a:srgbClr val="146175"/>
+          </a:solidFill>
+          <a:ln/>
+        </p:spPr>
+      </p:sp>
+      <p:sp>
+        <p:nvSpPr>
+          <p:cNvPr id="19" name="Shape 17"/>
+          <p:cNvSpPr/>
+          <p:nvPr/>
+        </p:nvSpPr>
+        <p:spPr>
+          <a:xfrm>
+            <a:off x="4062984" y="6793992"/>
+            <a:ext cx="2040636" cy="64008"/>
+          </a:xfrm>
+          <a:prstGeom prst="rect">
+            <a:avLst/>
+          </a:prstGeom>
+          <a:solidFill>
+            <a:srgbClr val="11B5AE"/>
+          </a:solidFill>
+          <a:ln/>
+        </p:spPr>
+      </p:sp>
+      <p:sp>
+        <p:nvSpPr>
+          <p:cNvPr id="20" name="Shape 18"/>
+          <p:cNvSpPr/>
+          <p:nvPr/>
+        </p:nvSpPr>
+        <p:spPr>
+          <a:xfrm>
+            <a:off x="6094476" y="6793992"/>
+            <a:ext cx="2040636" cy="64008"/>
+          </a:xfrm>
+          <a:prstGeom prst="rect">
+            <a:avLst/>
+          </a:prstGeom>
+          <a:solidFill>
+            <a:srgbClr val="6CCAD4"/>
+          </a:solidFill>
+          <a:ln/>
+        </p:spPr>
+      </p:sp>
+      <p:sp>
+        <p:nvSpPr>
+          <p:cNvPr id="21" name="Shape 19"/>
+          <p:cNvSpPr/>
+          <p:nvPr/>
+        </p:nvSpPr>
+        <p:spPr>
+          <a:xfrm>
+            <a:off x="8125968" y="6793992"/>
+            <a:ext cx="2040636" cy="64008"/>
+          </a:xfrm>
+          <a:prstGeom prst="rect">
+            <a:avLst/>
+          </a:prstGeom>
+          <a:solidFill>
+            <a:srgbClr val="7FC04C"/>
+          </a:solidFill>
+          <a:ln/>
+        </p:spPr>
+      </p:sp>
+      <p:sp>
+        <p:nvSpPr>
+          <p:cNvPr id="22" name="Shape 20"/>
+          <p:cNvSpPr/>
+          <p:nvPr/>
+        </p:nvSpPr>
+        <p:spPr>
+          <a:xfrm>
+            <a:off x="10157460" y="6793992"/>
+            <a:ext cx="2040636" cy="64008"/>
+          </a:xfrm>
+          <a:prstGeom prst="rect">
+            <a:avLst/>
+          </a:prstGeom>
+          <a:solidFill>
+            <a:srgbClr val="E1DD57"/>
+          </a:solidFill>
+          <a:ln/>
+        </p:spPr>
+      </p:sp>
+    </p:spTree>
+  </p:cSld>
+  <p:clrMapOvr>
+    <a:masterClrMapping/>
+  </p:clrMapOvr>
+</p:sld>
+</file>
+
+<file path=ppt/slides/slide13.xml><?xml version="1.0" encoding="utf-8"?>
 <p:sld xmlns:a="http://schemas.openxmlformats.org/drawingml/2006/main" xmlns:r="http://schemas.openxmlformats.org/officeDocument/2006/relationships" xmlns:p="http://schemas.openxmlformats.org/presentationml/2006/main">
   <p:cSld name="Slide 12">
     <p:bg>
@@ -6570,7 +7233,7 @@
 </p:sld>
 </file>
 
-<file path=ppt/slides/slide13.xml><?xml version="1.0" encoding="utf-8"?>
+<file path=ppt/slides/slide14.xml><?xml version="1.0" encoding="utf-8"?>
 <p:sld xmlns:a="http://schemas.openxmlformats.org/drawingml/2006/main" xmlns:r="http://schemas.openxmlformats.org/officeDocument/2006/relationships" xmlns:p="http://schemas.openxmlformats.org/presentationml/2006/main">
   <p:cSld name="Slide 13">
     <p:bg>
@@ -7262,7 +7925,7 @@
 </p:sld>
 </file>
 
-<file path=ppt/slides/slide14.xml><?xml version="1.0" encoding="utf-8"?>
+<file path=ppt/slides/slide15.xml><?xml version="1.0" encoding="utf-8"?>
 <p:sld xmlns:a="http://schemas.openxmlformats.org/drawingml/2006/main" xmlns:r="http://schemas.openxmlformats.org/officeDocument/2006/relationships" xmlns:p="http://schemas.openxmlformats.org/presentationml/2006/main">
   <p:cSld name="Slide 14">
     <p:bg>
@@ -8495,7 +9158,7 @@
 </p:sld>
 </file>
 
-<file path=ppt/slides/slide15.xml><?xml version="1.0" encoding="utf-8"?>
+<file path=ppt/slides/slide16.xml><?xml version="1.0" encoding="utf-8"?>
 <p:sld xmlns:a="http://schemas.openxmlformats.org/drawingml/2006/main" xmlns:r="http://schemas.openxmlformats.org/officeDocument/2006/relationships" xmlns:p="http://schemas.openxmlformats.org/presentationml/2006/main">
   <p:cSld name="Slide 15">
     <p:bg>
@@ -9554,7 +10217,7 @@
 </p:sld>
 </file>
 
-<file path=ppt/slides/slide16.xml><?xml version="1.0" encoding="utf-8"?>
+<file path=ppt/slides/slide17.xml><?xml version="1.0" encoding="utf-8"?>
 <p:sld xmlns:a="http://schemas.openxmlformats.org/drawingml/2006/main" xmlns:r="http://schemas.openxmlformats.org/officeDocument/2006/relationships" xmlns:p="http://schemas.openxmlformats.org/presentationml/2006/main">
   <p:cSld name="Slide 16">
     <p:bg>
@@ -10705,7 +11368,7 @@
 </p:sld>
 </file>
 
-<file path=ppt/slides/slide17.xml><?xml version="1.0" encoding="utf-8"?>
+<file path=ppt/slides/slide18.xml><?xml version="1.0" encoding="utf-8"?>
 <p:sld xmlns:a="http://schemas.openxmlformats.org/drawingml/2006/main" xmlns:r="http://schemas.openxmlformats.org/officeDocument/2006/relationships" xmlns:p="http://schemas.openxmlformats.org/presentationml/2006/main">
   <p:cSld name="Slide 17">
     <p:bg>
@@ -10794,6 +11457,10 @@
             <a:prstDash val="solid"/>
           </a:ln>
         </p:spPr>
+        <p:txBody>
+          <a:bodyPr/>
+          <a:p/>
+        </p:txBody>
       </p:sp>
       <p:sp>
         <p:nvSpPr>
@@ -11133,6 +11800,10 @@
             <a:prstDash val="solid"/>
           </a:ln>
         </p:spPr>
+        <p:txBody>
+          <a:bodyPr/>
+          <a:p/>
+        </p:txBody>
       </p:sp>
       <p:sp>
         <p:nvSpPr>
@@ -11472,6 +12143,10 @@
             <a:prstDash val="solid"/>
           </a:ln>
         </p:spPr>
+        <p:txBody>
+          <a:bodyPr/>
+          <a:p/>
+        </p:txBody>
       </p:sp>
       <p:sp>
         <p:nvSpPr>
@@ -11545,7 +12220,7 @@
                 <a:ea typeface="Calibri" pitchFamily="34" charset="-122"/>
                 <a:cs typeface="Calibri" pitchFamily="34" charset="-120"/>
               </a:rPr>
-              <a:t>BitLocker (drive) + history (i-STAT)</a:t>
+              <a:t>BitLocker · history (i-STAT) · enrolment (new PC)</a:t>
             </a:r>
             <a:endParaRPr lang="en-US" sz="1250" dirty="0"/>
           </a:p>
@@ -11998,7 +12673,7 @@
 </p:sld>
 </file>
 
-<file path=ppt/slides/slide18.xml><?xml version="1.0" encoding="utf-8"?>
+<file path=ppt/slides/slide19.xml><?xml version="1.0" encoding="utf-8"?>
 <p:sld xmlns:a="http://schemas.openxmlformats.org/drawingml/2006/main" xmlns:p="http://schemas.openxmlformats.org/presentationml/2006/main" xmlns:r="http://schemas.openxmlformats.org/officeDocument/2006/relationships">
   <p:cSld>
     <p:spTree>
@@ -12041,7 +12716,7 @@
                 <a:ea typeface="Calibri" pitchFamily="34" charset="-122"/>
                 <a:cs typeface="Calibri" pitchFamily="34" charset="-120"/>
               </a:rPr>
-              <a:t>Overview reports and the dormant list</a:t>
+              <a:t>Enrolling a PC (first use on a computer)</a:t>
             </a:r>
             <a:endParaRPr lang="en-US" sz="3000" dirty="0"/>
           </a:p>
@@ -12106,7 +12781,7 @@
                 <a:ea typeface="Calibri" pitchFamily="34" charset="-122"/>
                 <a:cs typeface="Calibri" pitchFamily="34" charset="-120"/>
               </a:rPr>
-              <a:t>i-STAT</a:t>
+              <a:t>BOTH</a:t>
             </a:r>
             <a:endParaRPr lang="en-US" sz="1500" dirty="0"/>
           </a:p>
@@ -12171,7 +12846,7 @@
                 <a:ea typeface="Calibri" pitchFamily="34" charset="-122"/>
                 <a:cs typeface="Calibri" pitchFamily="34" charset="-120"/>
               </a:rPr>
-              <a:t>Site Overview — large sites</a:t>
+              <a:t>The lock card</a:t>
             </a:r>
             <a:endParaRPr lang="en-US" sz="1600" dirty="0"/>
           </a:p>
@@ -12210,7 +12885,7 @@
                 <a:ea typeface="Calibri" pitchFamily="34" charset="-122"/>
                 <a:cs typeface="Calibri" pitchFamily="34" charset="-120"/>
               </a:rPr>
-              <a:t>Every site that is split by ward also gets one page listing each ward’s analyser: cartridges, errors, error % with its band, simulator runs and ceramic ✓/✗, plus a whole-site total. Filed with the ward reports as i-STAT_&lt;Site&gt;_Site_Overview_&lt;Month&gt;.docx</a:t>
+              <a:t>On a PC that is not enrolled, the selection page shows PC NOT ENROLLED with the machine ID and hostname instead of the report-type drop-down. Nothing runs until the PC is enrolled — the engines show a lock page too.</a:t>
             </a:r>
             <a:endParaRPr lang="en-US" sz="1300" dirty="0"/>
           </a:p>
@@ -12275,7 +12950,7 @@
                 <a:ea typeface="Calibri" pitchFamily="34" charset="-122"/>
                 <a:cs typeface="Calibri" pitchFamily="34" charset="-120"/>
               </a:rPr>
-              <a:t>Dormant analysers — the 4-month rule</a:t>
+              <a:t>Networked PCs — confirm first</a:t>
             </a:r>
             <a:endParaRPr lang="en-US" sz="1600" dirty="0"/>
           </a:p>
@@ -12314,7 +12989,7 @@
                 <a:ea typeface="Calibri" pitchFamily="34" charset="-122"/>
                 <a:cs typeface="Calibri" pitchFamily="34" charset="-120"/>
               </a:rPr>
-              <a:t>An analyser with no cartridges, no simulator runs and no ceramics for 4 consecutive months gets no report and no longer counts against its site’s simulator or ceramic checks. One or two quiet months change nothing. Any use brings it straight back the next month.</a:t>
+              <a:t>The tool is meant for non-networked PCs. If a network connection is active, the card says so and needs a confirmation tick before enrolling. That fact is recorded with the enrolment.</a:t>
             </a:r>
             <a:endParaRPr lang="en-US" sz="1300" dirty="0"/>
           </a:p>
@@ -12379,7 +13054,7 @@
                 <a:ea typeface="Calibri" pitchFamily="34" charset="-122"/>
                 <a:cs typeface="Calibri" pitchFamily="34" charset="-120"/>
               </a:rPr>
-              <a:t>Area Summary — every HHS</a:t>
+              <a:t>Enrolling</a:t>
             </a:r>
             <a:endParaRPr lang="en-US" sz="1600" dirty="0"/>
           </a:p>
@@ -12418,7 +13093,7 @@
                 <a:ea typeface="Calibri" pitchFamily="34" charset="-122"/>
                 <a:cs typeface="Calibri" pitchFamily="34" charset="-120"/>
               </a:rPr>
-              <a:t>One per HHS folder each run: every hospital in the area on one page with the same figures, an area total, and an “Analysers Needing Attention” table naming each analyser that ran no simulator or fewer than 3 ceramics. i-STAT_&lt;HHS&gt;_Area_Summary_&lt;Month&gt;.docx</a:t>
+              <a:t>A PoC team member types the enrolment password (very first use: choose it and confirm it), adds an optional note such as the room or bench, and clicks Enrol this PC. The page reloads with the normal drop-down.</a:t>
             </a:r>
             <a:endParaRPr lang="en-US" sz="1300" dirty="0"/>
           </a:p>
@@ -12483,7 +13158,7 @@
                 <a:ea typeface="Calibri" pitchFamily="34" charset="-122"/>
                 <a:cs typeface="Calibri" pitchFamily="34" charset="-120"/>
               </a:rPr>
-              <a:t>The dormant list</a:t>
+              <a:t>Renewal and the Enrolled PCs list</a:t>
             </a:r>
             <a:endParaRPr lang="en-US" sz="1600" dirty="0"/>
           </a:p>
@@ -12522,7 +13197,7 @@
                 <a:ea typeface="Calibri" pitchFamily="34" charset="-122"/>
                 <a:cs typeface="Calibri" pitchFamily="34" charset="-120"/>
               </a:rPr>
-              <a:t>Dormant_iSTATs_&lt;Month&gt;.docx in the reports folder lists every unit left out: hospital, location, serial, months idle and last activity. Check it each month for units to retire — or units that should be in use but are not being maintained. The results card shows the count.</a:t>
+              <a:t>Enrolment lasts 12 months; a renewal notice appears in the last 30 days with a Renew link. “Enrolled PCs” at the foot of the page lists every PC with its version and last use, and can revoke one.</a:t>
             </a:r>
             <a:endParaRPr lang="en-US" sz="1300" dirty="0"/>
           </a:p>
@@ -12740,6 +13415,10 @@
           </a:solidFill>
           <a:ln/>
         </p:spPr>
+        <p:txBody>
+          <a:bodyPr/>
+          <a:p/>
+        </p:txBody>
       </p:sp>
       <p:sp>
         <p:nvSpPr>
@@ -12815,6 +13494,10 @@
           </a:solidFill>
           <a:ln/>
         </p:spPr>
+        <p:txBody>
+          <a:bodyPr/>
+          <a:p/>
+        </p:txBody>
       </p:sp>
       <p:sp>
         <p:nvSpPr>
@@ -12890,6 +13573,10 @@
           </a:solidFill>
           <a:ln/>
         </p:spPr>
+        <p:txBody>
+          <a:bodyPr/>
+          <a:p/>
+        </p:txBody>
       </p:sp>
       <p:sp>
         <p:nvSpPr>
@@ -12965,6 +13652,10 @@
           </a:solidFill>
           <a:ln/>
         </p:spPr>
+        <p:txBody>
+          <a:bodyPr/>
+          <a:p/>
+        </p:txBody>
       </p:sp>
       <p:sp>
         <p:nvSpPr>
@@ -13040,6 +13731,10 @@
           </a:solidFill>
           <a:ln/>
         </p:spPr>
+        <p:txBody>
+          <a:bodyPr/>
+          <a:p/>
+        </p:txBody>
       </p:sp>
       <p:sp>
         <p:nvSpPr>
@@ -13160,6 +13855,27 @@
                 <a:cs typeface="Calibri" pitchFamily="34" charset="-120"/>
               </a:rPr>
               <a:t>Reports never leave the drive — everything is processed locally.</a:t>
+            </a:r>
+            <a:endParaRPr lang="en-US" sz="1300" dirty="0"/>
+          </a:p>
+          <a:p>
+            <a:pPr marL="152400" indent="-152400">
+              <a:spcAft>
+                <a:spcPts val="1400"/>
+              </a:spcAft>
+              <a:buSzPct val="100000"/>
+              <a:buChar char="•"/>
+            </a:pPr>
+            <a:r>
+              <a:rPr lang="en-US" sz="1300" dirty="0">
+                <a:solidFill>
+                  <a:srgbClr val="6CCAD4"/>
+                </a:solidFill>
+                <a:latin typeface="Calibri" pitchFamily="34" charset="0"/>
+                <a:ea typeface="Calibri" pitchFamily="34" charset="-122"/>
+                <a:cs typeface="Calibri" pitchFamily="34" charset="-120"/>
+              </a:rPr>
+              <a:t>A NEW PC must be enrolled first: the selection page shows its machine ID and asks for the enrolment password (PoC team). Enrolment lasts 12 months.</a:t>
             </a:r>
             <a:endParaRPr lang="en-US" sz="1300" dirty="0"/>
           </a:p>
@@ -13375,6 +14091,10 @@
           </a:solidFill>
           <a:ln/>
         </p:spPr>
+        <p:txBody>
+          <a:bodyPr/>
+          <a:p/>
+        </p:txBody>
       </p:sp>
       <p:sp>
         <p:nvSpPr>
@@ -13488,6 +14208,10 @@
           </a:solidFill>
           <a:ln/>
         </p:spPr>
+        <p:txBody>
+          <a:bodyPr/>
+          <a:p/>
+        </p:txBody>
       </p:sp>
       <p:sp>
         <p:nvSpPr>
@@ -13601,6 +14325,10 @@
           </a:solidFill>
           <a:ln/>
         </p:spPr>
+        <p:txBody>
+          <a:bodyPr/>
+          <a:p/>
+        </p:txBody>
       </p:sp>
       <p:sp>
         <p:nvSpPr>
@@ -13714,6 +14442,10 @@
           </a:solidFill>
           <a:ln/>
         </p:spPr>
+        <p:txBody>
+          <a:bodyPr/>
+          <a:p/>
+        </p:txBody>
       </p:sp>
       <p:sp>
         <p:nvSpPr>
@@ -13841,6 +14573,10 @@
             </a:outerShdw>
           </a:effectLst>
         </p:spPr>
+        <p:txBody>
+          <a:bodyPr/>
+          <a:p/>
+        </p:txBody>
       </p:sp>
       <p:pic>
         <p:nvPicPr>
@@ -13938,7 +14674,7 @@
                 <a:ea typeface="Calibri" pitchFamily="34" charset="-122"/>
                 <a:cs typeface="Calibri" pitchFamily="34" charset="-120"/>
               </a:rPr>
-              <a:t>You can run both report types in one session — finish one, then use the browser Back button or reopen localhost:5750.</a:t>
+              <a:t>New PC? The selection page shows a lock card first — a PoC team member enters the enrolment password to enrol it (valid 12 months). Both report types can be run in one session.</a:t>
             </a:r>
             <a:endParaRPr lang="en-US" sz="1250" dirty="0"/>
           </a:p>

--- a/PQ_Report_Generator_User_Guide.pptx
+++ b/PQ_Report_Generator_User_Guide.pptx
@@ -2758,6 +2758,1670 @@
 
 <file path=ppt/slides/slide10.xml><?xml version="1.0" encoding="utf-8"?>
 <p:sld xmlns:a="http://schemas.openxmlformats.org/drawingml/2006/main" xmlns:r="http://schemas.openxmlformats.org/officeDocument/2006/relationships" xmlns:p="http://schemas.openxmlformats.org/presentationml/2006/main">
+  <p:cSld name="Slide 9">
+    <p:bg>
+      <p:bgPr>
+        <a:solidFill>
+          <a:srgbClr val="FFFFFF"/>
+        </a:solidFill>
+      </p:bgPr>
+    </p:bg>
+    <p:spTree>
+      <p:nvGrpSpPr>
+        <p:cNvPr id="1" name=""/>
+        <p:cNvGrpSpPr/>
+        <p:nvPr/>
+      </p:nvGrpSpPr>
+      <p:grpSpPr>
+        <a:xfrm>
+          <a:off x="0" y="0"/>
+          <a:ext cx="0" cy="0"/>
+          <a:chOff x="0" y="0"/>
+          <a:chExt cx="0" cy="0"/>
+        </a:xfrm>
+      </p:grpSpPr>
+      <p:sp>
+        <p:nvSpPr>
+          <p:cNvPr id="2" name="Text 0"/>
+          <p:cNvSpPr txBox="1"/>
+          <p:nvPr/>
+        </p:nvSpPr>
+        <p:spPr>
+          <a:xfrm>
+            <a:off x="548640" y="320040"/>
+            <a:ext cx="11064240" cy="685800"/>
+          </a:xfrm>
+          <a:prstGeom prst="rect">
+            <a:avLst/>
+          </a:prstGeom>
+          <a:noFill/>
+          <a:ln/>
+        </p:spPr>
+        <p:txBody>
+          <a:bodyPr wrap="square" lIns="0" tIns="0" rIns="0" bIns="0" rtlCol="0" anchor="ctr"/>
+          <a:lstStyle/>
+          <a:p>
+            <a:pPr indent="0" marL="0">
+              <a:buNone/>
+            </a:pPr>
+            <a:r>
+              <a:rPr lang="en-US" sz="3000" b="1" dirty="0">
+                <a:solidFill>
+                  <a:srgbClr val="01485C"/>
+                </a:solidFill>
+                <a:latin typeface="Calibri" pitchFamily="34" charset="0"/>
+                <a:ea typeface="Calibri" pitchFamily="34" charset="-122"/>
+                <a:cs typeface="Calibri" pitchFamily="34" charset="-120"/>
+              </a:rPr>
+              <a:t>What the report contains (1 of 2)</a:t>
+            </a:r>
+            <a:endParaRPr lang="en-US" sz="3000" dirty="0"/>
+          </a:p>
+        </p:txBody>
+      </p:sp>
+      <p:sp>
+        <p:nvSpPr>
+          <p:cNvPr id="3" name="Shape 1"/>
+          <p:cNvSpPr/>
+          <p:nvPr/>
+        </p:nvSpPr>
+        <p:spPr>
+          <a:xfrm>
+            <a:off x="9784080" y="384048"/>
+            <a:ext cx="1828800" cy="457200"/>
+          </a:xfrm>
+          <a:prstGeom prst="roundRect">
+            <a:avLst>
+              <a:gd name="adj" fmla="val 50000"/>
+            </a:avLst>
+          </a:prstGeom>
+          <a:solidFill>
+            <a:srgbClr val="01485C"/>
+          </a:solidFill>
+          <a:ln/>
+        </p:spPr>
+      </p:sp>
+      <p:sp>
+        <p:nvSpPr>
+          <p:cNvPr id="4" name="Text 2"/>
+          <p:cNvSpPr txBox="1"/>
+          <p:nvPr/>
+        </p:nvSpPr>
+        <p:spPr>
+          <a:xfrm>
+            <a:off x="9784080" y="384048"/>
+            <a:ext cx="1828800" cy="457200"/>
+          </a:xfrm>
+          <a:prstGeom prst="rect">
+            <a:avLst/>
+          </a:prstGeom>
+          <a:noFill/>
+          <a:ln/>
+        </p:spPr>
+        <p:txBody>
+          <a:bodyPr wrap="square" lIns="0" tIns="0" rIns="0" bIns="0" rtlCol="0" anchor="ctr"/>
+          <a:lstStyle/>
+          <a:p>
+            <a:pPr algn="ctr" indent="0" marL="0">
+              <a:buNone/>
+            </a:pPr>
+            <a:r>
+              <a:rPr lang="en-US" sz="1500" b="1" dirty="0">
+                <a:solidFill>
+                  <a:srgbClr val="FFFFFF"/>
+                </a:solidFill>
+                <a:latin typeface="Calibri" pitchFamily="34" charset="0"/>
+                <a:ea typeface="Calibri" pitchFamily="34" charset="-122"/>
+                <a:cs typeface="Calibri" pitchFamily="34" charset="-120"/>
+              </a:rPr>
+              <a:t>i-STAT</a:t>
+            </a:r>
+            <a:endParaRPr lang="en-US" sz="1500" dirty="0"/>
+          </a:p>
+        </p:txBody>
+      </p:sp>
+      <p:sp>
+        <p:nvSpPr>
+          <p:cNvPr id="5" name="Shape 3"/>
+          <p:cNvSpPr/>
+          <p:nvPr/>
+        </p:nvSpPr>
+        <p:spPr>
+          <a:xfrm>
+            <a:off x="548640" y="1325880"/>
+            <a:ext cx="420624" cy="420624"/>
+          </a:xfrm>
+          <a:prstGeom prst="ellipse">
+            <a:avLst/>
+          </a:prstGeom>
+          <a:solidFill>
+            <a:srgbClr val="01485C"/>
+          </a:solidFill>
+          <a:ln/>
+        </p:spPr>
+      </p:sp>
+      <p:sp>
+        <p:nvSpPr>
+          <p:cNvPr id="6" name="Text 4"/>
+          <p:cNvSpPr txBox="1"/>
+          <p:nvPr/>
+        </p:nvSpPr>
+        <p:spPr>
+          <a:xfrm>
+            <a:off x="548640" y="1325880"/>
+            <a:ext cx="420624" cy="420624"/>
+          </a:xfrm>
+          <a:prstGeom prst="rect">
+            <a:avLst/>
+          </a:prstGeom>
+          <a:noFill/>
+          <a:ln/>
+        </p:spPr>
+        <p:txBody>
+          <a:bodyPr wrap="square" lIns="0" tIns="0" rIns="0" bIns="0" rtlCol="0" anchor="ctr"/>
+          <a:lstStyle/>
+          <a:p>
+            <a:pPr algn="ctr" indent="0" marL="0">
+              <a:buNone/>
+            </a:pPr>
+            <a:r>
+              <a:rPr lang="en-US" sz="1500" b="1" dirty="0">
+                <a:solidFill>
+                  <a:srgbClr val="FFFFFF"/>
+                </a:solidFill>
+                <a:latin typeface="Calibri" pitchFamily="34" charset="0"/>
+                <a:ea typeface="Calibri" pitchFamily="34" charset="-122"/>
+                <a:cs typeface="Calibri" pitchFamily="34" charset="-120"/>
+              </a:rPr>
+              <a:t>1</a:t>
+            </a:r>
+            <a:endParaRPr lang="en-US" sz="1500" dirty="0"/>
+          </a:p>
+        </p:txBody>
+      </p:sp>
+      <p:sp>
+        <p:nvSpPr>
+          <p:cNvPr id="7" name="Text 5"/>
+          <p:cNvSpPr txBox="1"/>
+          <p:nvPr/>
+        </p:nvSpPr>
+        <p:spPr>
+          <a:xfrm>
+            <a:off x="1133856" y="1271016"/>
+            <a:ext cx="5029200" cy="859536"/>
+          </a:xfrm>
+          <a:prstGeom prst="rect">
+            <a:avLst/>
+          </a:prstGeom>
+          <a:noFill/>
+          <a:ln/>
+        </p:spPr>
+        <p:txBody>
+          <a:bodyPr wrap="square" lIns="0" tIns="0" rIns="0" bIns="0" rtlCol="0" anchor="t"/>
+          <a:lstStyle/>
+          <a:p>
+            <a:pPr indent="0" marL="0">
+              <a:buNone/>
+            </a:pPr>
+            <a:r>
+              <a:rPr lang="en-US" sz="1300" b="1" dirty="0">
+                <a:solidFill>
+                  <a:srgbClr val="01485C"/>
+                </a:solidFill>
+                <a:latin typeface="Calibri" pitchFamily="34" charset="0"/>
+                <a:ea typeface="Calibri" pitchFamily="34" charset="-122"/>
+                <a:cs typeface="Calibri" pitchFamily="34" charset="-120"/>
+              </a:rPr>
+              <a:t>Monthly Snapshot
+</a:t>
+            </a:r>
+            <a:pPr indent="0" marL="0">
+              <a:buNone/>
+            </a:pPr>
+            <a:r>
+              <a:rPr lang="en-US" sz="1100" dirty="0">
+                <a:solidFill>
+                  <a:srgbClr val="5F7178"/>
+                </a:solidFill>
+                <a:latin typeface="Calibri" pitchFamily="34" charset="0"/>
+                <a:ea typeface="Calibri" pitchFamily="34" charset="-122"/>
+                <a:cs typeface="Calibri" pitchFamily="34" charset="-120"/>
+              </a:rPr>
+              <a:t>The month in one block: overall rate, errors vs cartridges, top error, flagged staff.</a:t>
+            </a:r>
+            <a:endParaRPr lang="en-US" sz="1300" dirty="0"/>
+          </a:p>
+        </p:txBody>
+      </p:sp>
+      <p:sp>
+        <p:nvSpPr>
+          <p:cNvPr id="8" name="Shape 6"/>
+          <p:cNvSpPr/>
+          <p:nvPr/>
+        </p:nvSpPr>
+        <p:spPr>
+          <a:xfrm>
+            <a:off x="6400800" y="1280160"/>
+            <a:ext cx="5212080" cy="859536"/>
+          </a:xfrm>
+          <a:prstGeom prst="roundRect">
+            <a:avLst>
+              <a:gd name="adj" fmla="val 8511"/>
+            </a:avLst>
+          </a:prstGeom>
+          <a:solidFill>
+            <a:srgbClr val="FFFFFF"/>
+          </a:solidFill>
+          <a:ln w="15875">
+            <a:solidFill>
+              <a:srgbClr val="E2E8EA"/>
+            </a:solidFill>
+            <a:prstDash val="solid"/>
+          </a:ln>
+        </p:spPr>
+      </p:sp>
+      <p:sp>
+        <p:nvSpPr>
+          <p:cNvPr id="9" name="Text 7"/>
+          <p:cNvSpPr txBox="1"/>
+          <p:nvPr/>
+        </p:nvSpPr>
+        <p:spPr>
+          <a:xfrm>
+            <a:off x="6629400" y="1408176"/>
+            <a:ext cx="4754880" cy="630936"/>
+          </a:xfrm>
+          <a:prstGeom prst="rect">
+            <a:avLst/>
+          </a:prstGeom>
+          <a:noFill/>
+          <a:ln/>
+        </p:spPr>
+        <p:txBody>
+          <a:bodyPr wrap="square" lIns="0" tIns="0" rIns="0" bIns="0" rtlCol="0" anchor="t"/>
+          <a:lstStyle/>
+          <a:p>
+            <a:pPr indent="0" marL="0">
+              <a:buNone/>
+            </a:pPr>
+            <a:r>
+              <a:rPr lang="en-US" sz="1250" b="1" dirty="0">
+                <a:solidFill>
+                  <a:srgbClr val="2F5496"/>
+                </a:solidFill>
+                <a:latin typeface="Calibri" pitchFamily="34" charset="0"/>
+                <a:ea typeface="Calibri" pitchFamily="34" charset="-122"/>
+                <a:cs typeface="Calibri" pitchFamily="34" charset="-120"/>
+              </a:rPr>
+              <a:t>Error rate 4.5%</a:t>
+            </a:r>
+            <a:pPr indent="0" marL="0">
+              <a:buNone/>
+            </a:pPr>
+            <a:r>
+              <a:rPr lang="en-US" sz="1050" dirty="0">
+                <a:solidFill>
+                  <a:srgbClr val="17272E"/>
+                </a:solidFill>
+                <a:latin typeface="Calibri" pitchFamily="34" charset="0"/>
+                <a:ea typeface="Calibri" pitchFamily="34" charset="-122"/>
+                <a:cs typeface="Calibri" pitchFamily="34" charset="-120"/>
+              </a:rPr>
+              <a:t>   (12 errors / 266 cartridges)
+</a:t>
+            </a:r>
+            <a:pPr indent="0" marL="0">
+              <a:buNone/>
+            </a:pPr>
+            <a:r>
+              <a:rPr lang="en-US" sz="1050" dirty="0">
+                <a:solidFill>
+                  <a:srgbClr val="5F7178"/>
+                </a:solidFill>
+                <a:latin typeface="Calibri" pitchFamily="34" charset="0"/>
+                <a:ea typeface="Calibri" pitchFamily="34" charset="-122"/>
+                <a:cs typeface="Calibri" pitchFamily="34" charset="-120"/>
+              </a:rPr>
+              <a:t>Top error: P3 Cartridge Handling  ·  Staff flagged: 2</a:t>
+            </a:r>
+            <a:endParaRPr lang="en-US" sz="1250" dirty="0"/>
+          </a:p>
+        </p:txBody>
+      </p:sp>
+      <p:sp>
+        <p:nvSpPr>
+          <p:cNvPr id="10" name="Shape 8"/>
+          <p:cNvSpPr/>
+          <p:nvPr/>
+        </p:nvSpPr>
+        <p:spPr>
+          <a:xfrm>
+            <a:off x="548640" y="2295144"/>
+            <a:ext cx="420624" cy="420624"/>
+          </a:xfrm>
+          <a:prstGeom prst="ellipse">
+            <a:avLst/>
+          </a:prstGeom>
+          <a:solidFill>
+            <a:srgbClr val="01485C"/>
+          </a:solidFill>
+          <a:ln/>
+        </p:spPr>
+      </p:sp>
+      <p:sp>
+        <p:nvSpPr>
+          <p:cNvPr id="11" name="Text 9"/>
+          <p:cNvSpPr txBox="1"/>
+          <p:nvPr/>
+        </p:nvSpPr>
+        <p:spPr>
+          <a:xfrm>
+            <a:off x="548640" y="2295144"/>
+            <a:ext cx="420624" cy="420624"/>
+          </a:xfrm>
+          <a:prstGeom prst="rect">
+            <a:avLst/>
+          </a:prstGeom>
+          <a:noFill/>
+          <a:ln/>
+        </p:spPr>
+        <p:txBody>
+          <a:bodyPr wrap="square" lIns="0" tIns="0" rIns="0" bIns="0" rtlCol="0" anchor="ctr"/>
+          <a:lstStyle/>
+          <a:p>
+            <a:pPr algn="ctr" indent="0" marL="0">
+              <a:buNone/>
+            </a:pPr>
+            <a:r>
+              <a:rPr lang="en-US" sz="1500" b="1" dirty="0">
+                <a:solidFill>
+                  <a:srgbClr val="FFFFFF"/>
+                </a:solidFill>
+                <a:latin typeface="Calibri" pitchFamily="34" charset="0"/>
+                <a:ea typeface="Calibri" pitchFamily="34" charset="-122"/>
+                <a:cs typeface="Calibri" pitchFamily="34" charset="-120"/>
+              </a:rPr>
+              <a:t>2</a:t>
+            </a:r>
+            <a:endParaRPr lang="en-US" sz="1500" dirty="0"/>
+          </a:p>
+        </p:txBody>
+      </p:sp>
+      <p:sp>
+        <p:nvSpPr>
+          <p:cNvPr id="12" name="Text 10"/>
+          <p:cNvSpPr txBox="1"/>
+          <p:nvPr/>
+        </p:nvSpPr>
+        <p:spPr>
+          <a:xfrm>
+            <a:off x="1133856" y="2240280"/>
+            <a:ext cx="5029200" cy="859536"/>
+          </a:xfrm>
+          <a:prstGeom prst="rect">
+            <a:avLst/>
+          </a:prstGeom>
+          <a:noFill/>
+          <a:ln/>
+        </p:spPr>
+        <p:txBody>
+          <a:bodyPr wrap="square" lIns="0" tIns="0" rIns="0" bIns="0" rtlCol="0" anchor="t"/>
+          <a:lstStyle/>
+          <a:p>
+            <a:pPr indent="0" marL="0">
+              <a:buNone/>
+            </a:pPr>
+            <a:r>
+              <a:rPr lang="en-US" sz="1300" b="1" dirty="0">
+                <a:solidFill>
+                  <a:srgbClr val="01485C"/>
+                </a:solidFill>
+                <a:latin typeface="Calibri" pitchFamily="34" charset="0"/>
+                <a:ea typeface="Calibri" pitchFamily="34" charset="-122"/>
+                <a:cs typeface="Calibri" pitchFamily="34" charset="-120"/>
+              </a:rPr>
+              <a:t>Historical Performance
+</a:t>
+            </a:r>
+            <a:pPr indent="0" marL="0">
+              <a:buNone/>
+            </a:pPr>
+            <a:r>
+              <a:rPr lang="en-US" sz="1100" dirty="0">
+                <a:solidFill>
+                  <a:srgbClr val="5F7178"/>
+                </a:solidFill>
+                <a:latin typeface="Calibri" pitchFamily="34" charset="0"/>
+                <a:ea typeface="Calibri" pitchFamily="34" charset="-122"/>
+                <a:cs typeface="Calibri" pitchFamily="34" charset="-120"/>
+              </a:rPr>
+              <a:t>TWO charts per device: the error-rate trend over the colour bands, and the Cartridges Run &amp; Error Mix chart (next slide).</a:t>
+            </a:r>
+            <a:endParaRPr lang="en-US" sz="1300" dirty="0"/>
+          </a:p>
+        </p:txBody>
+      </p:sp>
+      <p:sp>
+        <p:nvSpPr>
+          <p:cNvPr id="13" name="Shape 11"/>
+          <p:cNvSpPr/>
+          <p:nvPr/>
+        </p:nvSpPr>
+        <p:spPr>
+          <a:xfrm>
+            <a:off x="6400800" y="2249424"/>
+            <a:ext cx="5212080" cy="859536"/>
+          </a:xfrm>
+          <a:prstGeom prst="roundRect">
+            <a:avLst>
+              <a:gd name="adj" fmla="val 8511"/>
+            </a:avLst>
+          </a:prstGeom>
+          <a:solidFill>
+            <a:srgbClr val="FFFFFF"/>
+          </a:solidFill>
+          <a:ln w="15875">
+            <a:solidFill>
+              <a:srgbClr val="E2E8EA"/>
+            </a:solidFill>
+            <a:prstDash val="solid"/>
+          </a:ln>
+        </p:spPr>
+      </p:sp>
+      <p:sp>
+        <p:nvSpPr>
+          <p:cNvPr id="14" name="Shape 12"/>
+          <p:cNvSpPr/>
+          <p:nvPr/>
+        </p:nvSpPr>
+        <p:spPr>
+          <a:xfrm>
+            <a:off x="6601968" y="2359152"/>
+            <a:ext cx="3840480" cy="155448"/>
+          </a:xfrm>
+          <a:prstGeom prst="rect">
+            <a:avLst/>
+          </a:prstGeom>
+          <a:solidFill>
+            <a:srgbClr val="C00000">
+              <a:alpha val="38000"/>
+            </a:srgbClr>
+          </a:solidFill>
+          <a:ln/>
+        </p:spPr>
+      </p:sp>
+      <p:sp>
+        <p:nvSpPr>
+          <p:cNvPr id="15" name="Shape 13"/>
+          <p:cNvSpPr/>
+          <p:nvPr/>
+        </p:nvSpPr>
+        <p:spPr>
+          <a:xfrm>
+            <a:off x="6601968" y="2514600"/>
+            <a:ext cx="3840480" cy="155448"/>
+          </a:xfrm>
+          <a:prstGeom prst="rect">
+            <a:avLst/>
+          </a:prstGeom>
+          <a:solidFill>
+            <a:srgbClr val="D96800">
+              <a:alpha val="38000"/>
+            </a:srgbClr>
+          </a:solidFill>
+          <a:ln/>
+        </p:spPr>
+      </p:sp>
+      <p:sp>
+        <p:nvSpPr>
+          <p:cNvPr id="16" name="Shape 14"/>
+          <p:cNvSpPr/>
+          <p:nvPr/>
+        </p:nvSpPr>
+        <p:spPr>
+          <a:xfrm>
+            <a:off x="6601968" y="2670048"/>
+            <a:ext cx="3840480" cy="155448"/>
+          </a:xfrm>
+          <a:prstGeom prst="rect">
+            <a:avLst/>
+          </a:prstGeom>
+          <a:solidFill>
+            <a:srgbClr val="2F5496">
+              <a:alpha val="38000"/>
+            </a:srgbClr>
+          </a:solidFill>
+          <a:ln/>
+        </p:spPr>
+      </p:sp>
+      <p:sp>
+        <p:nvSpPr>
+          <p:cNvPr id="17" name="Shape 15"/>
+          <p:cNvSpPr/>
+          <p:nvPr/>
+        </p:nvSpPr>
+        <p:spPr>
+          <a:xfrm>
+            <a:off x="6601968" y="2825496"/>
+            <a:ext cx="3840480" cy="155448"/>
+          </a:xfrm>
+          <a:prstGeom prst="rect">
+            <a:avLst/>
+          </a:prstGeom>
+          <a:solidFill>
+            <a:srgbClr val="538135">
+              <a:alpha val="38000"/>
+            </a:srgbClr>
+          </a:solidFill>
+          <a:ln/>
+        </p:spPr>
+      </p:sp>
+      <p:sp>
+        <p:nvSpPr>
+          <p:cNvPr id="18" name="Shape 16"/>
+          <p:cNvSpPr/>
+          <p:nvPr/>
+        </p:nvSpPr>
+        <p:spPr>
+          <a:xfrm>
+            <a:off x="7059168" y="2468880"/>
+            <a:ext cx="118872" cy="118872"/>
+          </a:xfrm>
+          <a:prstGeom prst="ellipse">
+            <a:avLst/>
+          </a:prstGeom>
+          <a:solidFill>
+            <a:srgbClr val="01485C"/>
+          </a:solidFill>
+          <a:ln w="12700">
+            <a:solidFill>
+              <a:srgbClr val="FFFFFF"/>
+            </a:solidFill>
+            <a:prstDash val="solid"/>
+          </a:ln>
+        </p:spPr>
+      </p:sp>
+      <p:sp>
+        <p:nvSpPr>
+          <p:cNvPr id="19" name="Shape 17"/>
+          <p:cNvSpPr/>
+          <p:nvPr/>
+        </p:nvSpPr>
+        <p:spPr>
+          <a:xfrm>
+            <a:off x="7790688" y="2578608"/>
+            <a:ext cx="118872" cy="118872"/>
+          </a:xfrm>
+          <a:prstGeom prst="ellipse">
+            <a:avLst/>
+          </a:prstGeom>
+          <a:solidFill>
+            <a:srgbClr val="01485C"/>
+          </a:solidFill>
+          <a:ln w="12700">
+            <a:solidFill>
+              <a:srgbClr val="FFFFFF"/>
+            </a:solidFill>
+            <a:prstDash val="solid"/>
+          </a:ln>
+        </p:spPr>
+      </p:sp>
+      <p:sp>
+        <p:nvSpPr>
+          <p:cNvPr id="20" name="Shape 18"/>
+          <p:cNvSpPr/>
+          <p:nvPr/>
+        </p:nvSpPr>
+        <p:spPr>
+          <a:xfrm>
+            <a:off x="8522208" y="2542032"/>
+            <a:ext cx="118872" cy="118872"/>
+          </a:xfrm>
+          <a:prstGeom prst="ellipse">
+            <a:avLst/>
+          </a:prstGeom>
+          <a:solidFill>
+            <a:srgbClr val="01485C"/>
+          </a:solidFill>
+          <a:ln w="12700">
+            <a:solidFill>
+              <a:srgbClr val="FFFFFF"/>
+            </a:solidFill>
+            <a:prstDash val="solid"/>
+          </a:ln>
+        </p:spPr>
+      </p:sp>
+      <p:sp>
+        <p:nvSpPr>
+          <p:cNvPr id="21" name="Shape 19"/>
+          <p:cNvSpPr/>
+          <p:nvPr/>
+        </p:nvSpPr>
+        <p:spPr>
+          <a:xfrm>
+            <a:off x="9253728" y="2724912"/>
+            <a:ext cx="118872" cy="118872"/>
+          </a:xfrm>
+          <a:prstGeom prst="ellipse">
+            <a:avLst/>
+          </a:prstGeom>
+          <a:solidFill>
+            <a:srgbClr val="01485C"/>
+          </a:solidFill>
+          <a:ln w="12700">
+            <a:solidFill>
+              <a:srgbClr val="FFFFFF"/>
+            </a:solidFill>
+            <a:prstDash val="solid"/>
+          </a:ln>
+        </p:spPr>
+      </p:sp>
+      <p:sp>
+        <p:nvSpPr>
+          <p:cNvPr id="22" name="Shape 20"/>
+          <p:cNvSpPr/>
+          <p:nvPr/>
+        </p:nvSpPr>
+        <p:spPr>
+          <a:xfrm>
+            <a:off x="9985248" y="2825496"/>
+            <a:ext cx="118872" cy="118872"/>
+          </a:xfrm>
+          <a:prstGeom prst="ellipse">
+            <a:avLst/>
+          </a:prstGeom>
+          <a:solidFill>
+            <a:srgbClr val="01485C"/>
+          </a:solidFill>
+          <a:ln w="12700">
+            <a:solidFill>
+              <a:srgbClr val="FFFFFF"/>
+            </a:solidFill>
+            <a:prstDash val="solid"/>
+          </a:ln>
+        </p:spPr>
+      </p:sp>
+      <p:sp>
+        <p:nvSpPr>
+          <p:cNvPr id="23" name="Text 21"/>
+          <p:cNvSpPr txBox="1"/>
+          <p:nvPr/>
+        </p:nvSpPr>
+        <p:spPr>
+          <a:xfrm>
+            <a:off x="10469880" y="2542032"/>
+            <a:ext cx="1005840" cy="274320"/>
+          </a:xfrm>
+          <a:prstGeom prst="rect">
+            <a:avLst/>
+          </a:prstGeom>
+          <a:noFill/>
+          <a:ln/>
+        </p:spPr>
+        <p:txBody>
+          <a:bodyPr wrap="square" lIns="0" tIns="0" rIns="0" bIns="0" rtlCol="0" anchor="ctr"/>
+          <a:lstStyle/>
+          <a:p>
+            <a:pPr indent="0" marL="0">
+              <a:buNone/>
+            </a:pPr>
+            <a:r>
+              <a:rPr lang="en-US" sz="950" i="1" dirty="0">
+                <a:solidFill>
+                  <a:srgbClr val="538135"/>
+                </a:solidFill>
+                <a:latin typeface="Calibri" pitchFamily="34" charset="0"/>
+                <a:ea typeface="Calibri" pitchFamily="34" charset="-122"/>
+                <a:cs typeface="Calibri" pitchFamily="34" charset="-120"/>
+              </a:rPr>
+              <a:t>improving ↓</a:t>
+            </a:r>
+            <a:endParaRPr lang="en-US" sz="950" dirty="0"/>
+          </a:p>
+        </p:txBody>
+      </p:sp>
+      <p:sp>
+        <p:nvSpPr>
+          <p:cNvPr id="24" name="Shape 22"/>
+          <p:cNvSpPr/>
+          <p:nvPr/>
+        </p:nvSpPr>
+        <p:spPr>
+          <a:xfrm>
+            <a:off x="548640" y="3264408"/>
+            <a:ext cx="420624" cy="420624"/>
+          </a:xfrm>
+          <a:prstGeom prst="ellipse">
+            <a:avLst/>
+          </a:prstGeom>
+          <a:solidFill>
+            <a:srgbClr val="01485C"/>
+          </a:solidFill>
+          <a:ln/>
+        </p:spPr>
+      </p:sp>
+      <p:sp>
+        <p:nvSpPr>
+          <p:cNvPr id="25" name="Text 23"/>
+          <p:cNvSpPr txBox="1"/>
+          <p:nvPr/>
+        </p:nvSpPr>
+        <p:spPr>
+          <a:xfrm>
+            <a:off x="548640" y="3264408"/>
+            <a:ext cx="420624" cy="420624"/>
+          </a:xfrm>
+          <a:prstGeom prst="rect">
+            <a:avLst/>
+          </a:prstGeom>
+          <a:noFill/>
+          <a:ln/>
+        </p:spPr>
+        <p:txBody>
+          <a:bodyPr wrap="square" lIns="0" tIns="0" rIns="0" bIns="0" rtlCol="0" anchor="ctr"/>
+          <a:lstStyle/>
+          <a:p>
+            <a:pPr algn="ctr" indent="0" marL="0">
+              <a:buNone/>
+            </a:pPr>
+            <a:r>
+              <a:rPr lang="en-US" sz="1500" b="1" dirty="0">
+                <a:solidFill>
+                  <a:srgbClr val="FFFFFF"/>
+                </a:solidFill>
+                <a:latin typeface="Calibri" pitchFamily="34" charset="0"/>
+                <a:ea typeface="Calibri" pitchFamily="34" charset="-122"/>
+                <a:cs typeface="Calibri" pitchFamily="34" charset="-120"/>
+              </a:rPr>
+              <a:t>3</a:t>
+            </a:r>
+            <a:endParaRPr lang="en-US" sz="1500" dirty="0"/>
+          </a:p>
+        </p:txBody>
+      </p:sp>
+      <p:sp>
+        <p:nvSpPr>
+          <p:cNvPr id="26" name="Text 24"/>
+          <p:cNvSpPr txBox="1"/>
+          <p:nvPr/>
+        </p:nvSpPr>
+        <p:spPr>
+          <a:xfrm>
+            <a:off x="1133856" y="3209544"/>
+            <a:ext cx="5029200" cy="859536"/>
+          </a:xfrm>
+          <a:prstGeom prst="rect">
+            <a:avLst/>
+          </a:prstGeom>
+          <a:noFill/>
+          <a:ln/>
+        </p:spPr>
+        <p:txBody>
+          <a:bodyPr wrap="square" lIns="0" tIns="0" rIns="0" bIns="0" rtlCol="0" anchor="t"/>
+          <a:lstStyle/>
+          <a:p>
+            <a:pPr indent="0" marL="0">
+              <a:buNone/>
+            </a:pPr>
+            <a:r>
+              <a:rPr lang="en-US" sz="1300" b="1" dirty="0">
+                <a:solidFill>
+                  <a:srgbClr val="01485C"/>
+                </a:solidFill>
+                <a:latin typeface="Calibri" pitchFamily="34" charset="0"/>
+                <a:ea typeface="Calibri" pitchFamily="34" charset="-122"/>
+                <a:cs typeface="Calibri" pitchFamily="34" charset="-120"/>
+              </a:rPr>
+              <a:t>Performance Summary
+</a:t>
+            </a:r>
+            <a:pPr indent="0" marL="0">
+              <a:buNone/>
+            </a:pPr>
+            <a:r>
+              <a:rPr lang="en-US" sz="1100" dirty="0">
+                <a:solidFill>
+                  <a:srgbClr val="5F7178"/>
+                </a:solidFill>
+                <a:latin typeface="Calibri" pitchFamily="34" charset="0"/>
+                <a:ea typeface="Calibri" pitchFamily="34" charset="-122"/>
+                <a:cs typeface="Calibri" pitchFamily="34" charset="-120"/>
+              </a:rPr>
+              <a:t>Device-by-device: cartridges, errors and rate, banded Champions → Needs attention.</a:t>
+            </a:r>
+            <a:endParaRPr lang="en-US" sz="1300" dirty="0"/>
+          </a:p>
+        </p:txBody>
+      </p:sp>
+      <p:sp>
+        <p:nvSpPr>
+          <p:cNvPr id="27" name="Shape 25"/>
+          <p:cNvSpPr/>
+          <p:nvPr/>
+        </p:nvSpPr>
+        <p:spPr>
+          <a:xfrm>
+            <a:off x="6400800" y="3218688"/>
+            <a:ext cx="5212080" cy="859536"/>
+          </a:xfrm>
+          <a:prstGeom prst="roundRect">
+            <a:avLst>
+              <a:gd name="adj" fmla="val 8511"/>
+            </a:avLst>
+          </a:prstGeom>
+          <a:solidFill>
+            <a:srgbClr val="FFFFFF"/>
+          </a:solidFill>
+          <a:ln w="15875">
+            <a:solidFill>
+              <a:srgbClr val="E2E8EA"/>
+            </a:solidFill>
+            <a:prstDash val="solid"/>
+          </a:ln>
+        </p:spPr>
+      </p:sp>
+      <p:sp>
+        <p:nvSpPr>
+          <p:cNvPr id="28" name="Text 26"/>
+          <p:cNvSpPr txBox="1"/>
+          <p:nvPr/>
+        </p:nvSpPr>
+        <p:spPr>
+          <a:xfrm>
+            <a:off x="6629400" y="3310128"/>
+            <a:ext cx="3291840" cy="274320"/>
+          </a:xfrm>
+          <a:prstGeom prst="rect">
+            <a:avLst/>
+          </a:prstGeom>
+          <a:noFill/>
+          <a:ln/>
+        </p:spPr>
+        <p:txBody>
+          <a:bodyPr wrap="square" lIns="0" tIns="0" rIns="0" bIns="0" rtlCol="0" anchor="ctr"/>
+          <a:lstStyle/>
+          <a:p>
+            <a:pPr indent="0" marL="0">
+              <a:buNone/>
+            </a:pPr>
+            <a:r>
+              <a:rPr lang="en-US" sz="1050" dirty="0">
+                <a:solidFill>
+                  <a:srgbClr val="17272E"/>
+                </a:solidFill>
+                <a:latin typeface="Calibri" pitchFamily="34" charset="0"/>
+                <a:ea typeface="Calibri" pitchFamily="34" charset="-122"/>
+                <a:cs typeface="Calibri" pitchFamily="34" charset="-120"/>
+              </a:rPr>
+              <a:t>i-STAT 1;9001    80 carts    4 errors</a:t>
+            </a:r>
+            <a:endParaRPr lang="en-US" sz="1050" dirty="0"/>
+          </a:p>
+        </p:txBody>
+      </p:sp>
+      <p:sp>
+        <p:nvSpPr>
+          <p:cNvPr id="29" name="Shape 27"/>
+          <p:cNvSpPr/>
+          <p:nvPr/>
+        </p:nvSpPr>
+        <p:spPr>
+          <a:xfrm>
+            <a:off x="10195560" y="3310128"/>
+            <a:ext cx="960120" cy="274320"/>
+          </a:xfrm>
+          <a:prstGeom prst="roundRect">
+            <a:avLst>
+              <a:gd name="adj" fmla="val 26667"/>
+            </a:avLst>
+          </a:prstGeom>
+          <a:solidFill>
+            <a:srgbClr val="2F5496"/>
+          </a:solidFill>
+          <a:ln/>
+        </p:spPr>
+      </p:sp>
+      <p:sp>
+        <p:nvSpPr>
+          <p:cNvPr id="30" name="Text 28"/>
+          <p:cNvSpPr txBox="1"/>
+          <p:nvPr/>
+        </p:nvSpPr>
+        <p:spPr>
+          <a:xfrm>
+            <a:off x="10195560" y="3310128"/>
+            <a:ext cx="960120" cy="274320"/>
+          </a:xfrm>
+          <a:prstGeom prst="rect">
+            <a:avLst/>
+          </a:prstGeom>
+          <a:noFill/>
+          <a:ln/>
+        </p:spPr>
+        <p:txBody>
+          <a:bodyPr wrap="square" lIns="0" tIns="0" rIns="0" bIns="0" rtlCol="0" anchor="ctr"/>
+          <a:lstStyle/>
+          <a:p>
+            <a:pPr algn="ctr" indent="0" marL="0">
+              <a:buNone/>
+            </a:pPr>
+            <a:r>
+              <a:rPr lang="en-US" sz="1000" b="1" dirty="0">
+                <a:solidFill>
+                  <a:srgbClr val="FFFFFF"/>
+                </a:solidFill>
+                <a:latin typeface="Calibri" pitchFamily="34" charset="0"/>
+                <a:ea typeface="Calibri" pitchFamily="34" charset="-122"/>
+                <a:cs typeface="Calibri" pitchFamily="34" charset="-120"/>
+              </a:rPr>
+              <a:t>5.0% Excellent</a:t>
+            </a:r>
+            <a:endParaRPr lang="en-US" sz="1000" dirty="0"/>
+          </a:p>
+        </p:txBody>
+      </p:sp>
+      <p:sp>
+        <p:nvSpPr>
+          <p:cNvPr id="31" name="Text 29"/>
+          <p:cNvSpPr txBox="1"/>
+          <p:nvPr/>
+        </p:nvSpPr>
+        <p:spPr>
+          <a:xfrm>
+            <a:off x="6629400" y="3675888"/>
+            <a:ext cx="3291840" cy="274320"/>
+          </a:xfrm>
+          <a:prstGeom prst="rect">
+            <a:avLst/>
+          </a:prstGeom>
+          <a:noFill/>
+          <a:ln/>
+        </p:spPr>
+        <p:txBody>
+          <a:bodyPr wrap="square" lIns="0" tIns="0" rIns="0" bIns="0" rtlCol="0" anchor="ctr"/>
+          <a:lstStyle/>
+          <a:p>
+            <a:pPr indent="0" marL="0">
+              <a:buNone/>
+            </a:pPr>
+            <a:r>
+              <a:rPr lang="en-US" sz="1050" dirty="0">
+                <a:solidFill>
+                  <a:srgbClr val="17272E"/>
+                </a:solidFill>
+                <a:latin typeface="Calibri" pitchFamily="34" charset="0"/>
+                <a:ea typeface="Calibri" pitchFamily="34" charset="-122"/>
+                <a:cs typeface="Calibri" pitchFamily="34" charset="-120"/>
+              </a:rPr>
+              <a:t>i-STAT 1;9002    74 carts    5 errors</a:t>
+            </a:r>
+            <a:endParaRPr lang="en-US" sz="1050" dirty="0"/>
+          </a:p>
+        </p:txBody>
+      </p:sp>
+      <p:sp>
+        <p:nvSpPr>
+          <p:cNvPr id="32" name="Shape 30"/>
+          <p:cNvSpPr/>
+          <p:nvPr/>
+        </p:nvSpPr>
+        <p:spPr>
+          <a:xfrm>
+            <a:off x="10195560" y="3675888"/>
+            <a:ext cx="960120" cy="274320"/>
+          </a:xfrm>
+          <a:prstGeom prst="roundRect">
+            <a:avLst>
+              <a:gd name="adj" fmla="val 26667"/>
+            </a:avLst>
+          </a:prstGeom>
+          <a:solidFill>
+            <a:srgbClr val="D96800"/>
+          </a:solidFill>
+          <a:ln/>
+        </p:spPr>
+      </p:sp>
+      <p:sp>
+        <p:nvSpPr>
+          <p:cNvPr id="33" name="Text 31"/>
+          <p:cNvSpPr txBox="1"/>
+          <p:nvPr/>
+        </p:nvSpPr>
+        <p:spPr>
+          <a:xfrm>
+            <a:off x="10195560" y="3675888"/>
+            <a:ext cx="960120" cy="274320"/>
+          </a:xfrm>
+          <a:prstGeom prst="rect">
+            <a:avLst/>
+          </a:prstGeom>
+          <a:noFill/>
+          <a:ln/>
+        </p:spPr>
+        <p:txBody>
+          <a:bodyPr wrap="square" lIns="0" tIns="0" rIns="0" bIns="0" rtlCol="0" anchor="ctr"/>
+          <a:lstStyle/>
+          <a:p>
+            <a:pPr algn="ctr" indent="0" marL="0">
+              <a:buNone/>
+            </a:pPr>
+            <a:r>
+              <a:rPr lang="en-US" sz="1000" b="1" dirty="0">
+                <a:solidFill>
+                  <a:srgbClr val="FFFFFF"/>
+                </a:solidFill>
+                <a:latin typeface="Calibri" pitchFamily="34" charset="0"/>
+                <a:ea typeface="Calibri" pitchFamily="34" charset="-122"/>
+                <a:cs typeface="Calibri" pitchFamily="34" charset="-120"/>
+              </a:rPr>
+              <a:t>6.8% Accept.</a:t>
+            </a:r>
+            <a:endParaRPr lang="en-US" sz="1000" dirty="0"/>
+          </a:p>
+        </p:txBody>
+      </p:sp>
+      <p:sp>
+        <p:nvSpPr>
+          <p:cNvPr id="34" name="Shape 32"/>
+          <p:cNvSpPr/>
+          <p:nvPr/>
+        </p:nvSpPr>
+        <p:spPr>
+          <a:xfrm>
+            <a:off x="548640" y="4233672"/>
+            <a:ext cx="420624" cy="420624"/>
+          </a:xfrm>
+          <a:prstGeom prst="ellipse">
+            <a:avLst/>
+          </a:prstGeom>
+          <a:solidFill>
+            <a:srgbClr val="01485C"/>
+          </a:solidFill>
+          <a:ln/>
+        </p:spPr>
+      </p:sp>
+      <p:sp>
+        <p:nvSpPr>
+          <p:cNvPr id="35" name="Text 33"/>
+          <p:cNvSpPr txBox="1"/>
+          <p:nvPr/>
+        </p:nvSpPr>
+        <p:spPr>
+          <a:xfrm>
+            <a:off x="548640" y="4233672"/>
+            <a:ext cx="420624" cy="420624"/>
+          </a:xfrm>
+          <a:prstGeom prst="rect">
+            <a:avLst/>
+          </a:prstGeom>
+          <a:noFill/>
+          <a:ln/>
+        </p:spPr>
+        <p:txBody>
+          <a:bodyPr wrap="square" lIns="0" tIns="0" rIns="0" bIns="0" rtlCol="0" anchor="ctr"/>
+          <a:lstStyle/>
+          <a:p>
+            <a:pPr algn="ctr" indent="0" marL="0">
+              <a:buNone/>
+            </a:pPr>
+            <a:r>
+              <a:rPr lang="en-US" sz="1500" b="1" dirty="0">
+                <a:solidFill>
+                  <a:srgbClr val="FFFFFF"/>
+                </a:solidFill>
+                <a:latin typeface="Calibri" pitchFamily="34" charset="0"/>
+                <a:ea typeface="Calibri" pitchFamily="34" charset="-122"/>
+                <a:cs typeface="Calibri" pitchFamily="34" charset="-120"/>
+              </a:rPr>
+              <a:t>4</a:t>
+            </a:r>
+            <a:endParaRPr lang="en-US" sz="1500" dirty="0"/>
+          </a:p>
+        </p:txBody>
+      </p:sp>
+      <p:sp>
+        <p:nvSpPr>
+          <p:cNvPr id="36" name="Text 34"/>
+          <p:cNvSpPr txBox="1"/>
+          <p:nvPr/>
+        </p:nvSpPr>
+        <p:spPr>
+          <a:xfrm>
+            <a:off x="1133856" y="4178808"/>
+            <a:ext cx="5029200" cy="859536"/>
+          </a:xfrm>
+          <a:prstGeom prst="rect">
+            <a:avLst/>
+          </a:prstGeom>
+          <a:noFill/>
+          <a:ln/>
+        </p:spPr>
+        <p:txBody>
+          <a:bodyPr wrap="square" lIns="0" tIns="0" rIns="0" bIns="0" rtlCol="0" anchor="t"/>
+          <a:lstStyle/>
+          <a:p>
+            <a:pPr indent="0" marL="0">
+              <a:buNone/>
+            </a:pPr>
+            <a:r>
+              <a:rPr lang="en-US" sz="1300" b="1" dirty="0">
+                <a:solidFill>
+                  <a:srgbClr val="01485C"/>
+                </a:solidFill>
+                <a:latin typeface="Calibri" pitchFamily="34" charset="0"/>
+                <a:ea typeface="Calibri" pitchFamily="34" charset="-122"/>
+                <a:cs typeface="Calibri" pitchFamily="34" charset="-120"/>
+              </a:rPr>
+              <a:t>Simulators Run
+</a:t>
+            </a:r>
+            <a:pPr indent="0" marL="0">
+              <a:buNone/>
+            </a:pPr>
+            <a:r>
+              <a:rPr lang="en-US" sz="1100" dirty="0">
+                <a:solidFill>
+                  <a:srgbClr val="5F7178"/>
+                </a:solidFill>
+                <a:latin typeface="Calibri" pitchFamily="34" charset="0"/>
+                <a:ea typeface="Calibri" pitchFamily="34" charset="-122"/>
+                <a:cs typeface="Calibri" pitchFamily="34" charset="-120"/>
+              </a:rPr>
+              <a:t>Electronic QC (simulator) checks recorded on each device during the month.</a:t>
+            </a:r>
+            <a:endParaRPr lang="en-US" sz="1300" dirty="0"/>
+          </a:p>
+        </p:txBody>
+      </p:sp>
+      <p:sp>
+        <p:nvSpPr>
+          <p:cNvPr id="37" name="Shape 35"/>
+          <p:cNvSpPr/>
+          <p:nvPr/>
+        </p:nvSpPr>
+        <p:spPr>
+          <a:xfrm>
+            <a:off x="6400800" y="4187952"/>
+            <a:ext cx="5212080" cy="859536"/>
+          </a:xfrm>
+          <a:prstGeom prst="roundRect">
+            <a:avLst>
+              <a:gd name="adj" fmla="val 8511"/>
+            </a:avLst>
+          </a:prstGeom>
+          <a:solidFill>
+            <a:srgbClr val="FFFFFF"/>
+          </a:solidFill>
+          <a:ln w="15875">
+            <a:solidFill>
+              <a:srgbClr val="E2E8EA"/>
+            </a:solidFill>
+            <a:prstDash val="solid"/>
+          </a:ln>
+        </p:spPr>
+      </p:sp>
+      <p:sp>
+        <p:nvSpPr>
+          <p:cNvPr id="38" name="Text 36"/>
+          <p:cNvSpPr txBox="1"/>
+          <p:nvPr/>
+        </p:nvSpPr>
+        <p:spPr>
+          <a:xfrm>
+            <a:off x="6629400" y="4187952"/>
+            <a:ext cx="4754880" cy="859536"/>
+          </a:xfrm>
+          <a:prstGeom prst="rect">
+            <a:avLst/>
+          </a:prstGeom>
+          <a:noFill/>
+          <a:ln/>
+        </p:spPr>
+        <p:txBody>
+          <a:bodyPr wrap="square" lIns="0" tIns="0" rIns="0" bIns="0" rtlCol="0" anchor="ctr"/>
+          <a:lstStyle/>
+          <a:p>
+            <a:pPr indent="0" marL="0">
+              <a:buNone/>
+            </a:pPr>
+            <a:r>
+              <a:rPr lang="en-US" sz="1100" b="1" dirty="0">
+                <a:solidFill>
+                  <a:srgbClr val="01485C"/>
+                </a:solidFill>
+                <a:latin typeface="Calibri" pitchFamily="34" charset="0"/>
+                <a:ea typeface="Calibri" pitchFamily="34" charset="-122"/>
+                <a:cs typeface="Calibri" pitchFamily="34" charset="-120"/>
+              </a:rPr>
+              <a:t>EQC checks:   </a:t>
+            </a:r>
+            <a:pPr indent="0" marL="0">
+              <a:buNone/>
+            </a:pPr>
+            <a:r>
+              <a:rPr lang="en-US" sz="1100" dirty="0">
+                <a:solidFill>
+                  <a:srgbClr val="17272E"/>
+                </a:solidFill>
+                <a:latin typeface="Calibri" pitchFamily="34" charset="0"/>
+                <a:ea typeface="Calibri" pitchFamily="34" charset="-122"/>
+                <a:cs typeface="Calibri" pitchFamily="34" charset="-120"/>
+              </a:rPr>
+              <a:t>9001 — 8 ✓      9002 — 6 ✓      9003 — 7 ✓</a:t>
+            </a:r>
+            <a:endParaRPr lang="en-US" sz="1100" dirty="0"/>
+          </a:p>
+        </p:txBody>
+      </p:sp>
+      <p:sp>
+        <p:nvSpPr>
+          <p:cNvPr id="39" name="Shape 37"/>
+          <p:cNvSpPr/>
+          <p:nvPr/>
+        </p:nvSpPr>
+        <p:spPr>
+          <a:xfrm>
+            <a:off x="548640" y="5202936"/>
+            <a:ext cx="420624" cy="420624"/>
+          </a:xfrm>
+          <a:prstGeom prst="ellipse">
+            <a:avLst/>
+          </a:prstGeom>
+          <a:solidFill>
+            <a:srgbClr val="01485C"/>
+          </a:solidFill>
+          <a:ln/>
+        </p:spPr>
+      </p:sp>
+      <p:sp>
+        <p:nvSpPr>
+          <p:cNvPr id="40" name="Text 38"/>
+          <p:cNvSpPr txBox="1"/>
+          <p:nvPr/>
+        </p:nvSpPr>
+        <p:spPr>
+          <a:xfrm>
+            <a:off x="548640" y="5202936"/>
+            <a:ext cx="420624" cy="420624"/>
+          </a:xfrm>
+          <a:prstGeom prst="rect">
+            <a:avLst/>
+          </a:prstGeom>
+          <a:noFill/>
+          <a:ln/>
+        </p:spPr>
+        <p:txBody>
+          <a:bodyPr wrap="square" lIns="0" tIns="0" rIns="0" bIns="0" rtlCol="0" anchor="ctr"/>
+          <a:lstStyle/>
+          <a:p>
+            <a:pPr algn="ctr" indent="0" marL="0">
+              <a:buNone/>
+            </a:pPr>
+            <a:r>
+              <a:rPr lang="en-US" sz="1500" b="1" dirty="0">
+                <a:solidFill>
+                  <a:srgbClr val="FFFFFF"/>
+                </a:solidFill>
+                <a:latin typeface="Calibri" pitchFamily="34" charset="0"/>
+                <a:ea typeface="Calibri" pitchFamily="34" charset="-122"/>
+                <a:cs typeface="Calibri" pitchFamily="34" charset="-120"/>
+              </a:rPr>
+              <a:t>5</a:t>
+            </a:r>
+            <a:endParaRPr lang="en-US" sz="1500" dirty="0"/>
+          </a:p>
+        </p:txBody>
+      </p:sp>
+      <p:sp>
+        <p:nvSpPr>
+          <p:cNvPr id="41" name="Text 39"/>
+          <p:cNvSpPr txBox="1"/>
+          <p:nvPr/>
+        </p:nvSpPr>
+        <p:spPr>
+          <a:xfrm>
+            <a:off x="1133856" y="5148072"/>
+            <a:ext cx="5029200" cy="859536"/>
+          </a:xfrm>
+          <a:prstGeom prst="rect">
+            <a:avLst/>
+          </a:prstGeom>
+          <a:noFill/>
+          <a:ln/>
+        </p:spPr>
+        <p:txBody>
+          <a:bodyPr wrap="square" lIns="0" tIns="0" rIns="0" bIns="0" rtlCol="0" anchor="t"/>
+          <a:lstStyle/>
+          <a:p>
+            <a:pPr indent="0" marL="0">
+              <a:buNone/>
+            </a:pPr>
+            <a:r>
+              <a:rPr lang="en-US" sz="1300" b="1" dirty="0">
+                <a:solidFill>
+                  <a:srgbClr val="01485C"/>
+                </a:solidFill>
+                <a:latin typeface="Calibri" pitchFamily="34" charset="0"/>
+                <a:ea typeface="Calibri" pitchFamily="34" charset="-122"/>
+                <a:cs typeface="Calibri" pitchFamily="34" charset="-120"/>
+              </a:rPr>
+              <a:t>Monthly Ceramic Cleaning
+</a:t>
+            </a:r>
+            <a:pPr indent="0" marL="0">
+              <a:buNone/>
+            </a:pPr>
+            <a:r>
+              <a:rPr lang="en-US" sz="1100" dirty="0">
+                <a:solidFill>
+                  <a:srgbClr val="5F7178"/>
+                </a:solidFill>
+                <a:latin typeface="Calibri" pitchFamily="34" charset="0"/>
+                <a:ea typeface="Calibri" pitchFamily="34" charset="-122"/>
+                <a:cs typeface="Calibri" pitchFamily="34" charset="-120"/>
+              </a:rPr>
+              <a:t>Each analyser listed with its cleaning-cartridge count. Every i-STAT needs 3 per month; any shortfall fails the department.</a:t>
+            </a:r>
+            <a:endParaRPr lang="en-US" sz="1300" dirty="0"/>
+          </a:p>
+        </p:txBody>
+      </p:sp>
+      <p:sp>
+        <p:nvSpPr>
+          <p:cNvPr id="42" name="Shape 40"/>
+          <p:cNvSpPr/>
+          <p:nvPr/>
+        </p:nvSpPr>
+        <p:spPr>
+          <a:xfrm>
+            <a:off x="6400800" y="5157216"/>
+            <a:ext cx="5212080" cy="859536"/>
+          </a:xfrm>
+          <a:prstGeom prst="roundRect">
+            <a:avLst>
+              <a:gd name="adj" fmla="val 8511"/>
+            </a:avLst>
+          </a:prstGeom>
+          <a:solidFill>
+            <a:srgbClr val="FFFFFF"/>
+          </a:solidFill>
+          <a:ln w="15875">
+            <a:solidFill>
+              <a:srgbClr val="E2E8EA"/>
+            </a:solidFill>
+            <a:prstDash val="solid"/>
+          </a:ln>
+        </p:spPr>
+      </p:sp>
+      <p:sp>
+        <p:nvSpPr>
+          <p:cNvPr id="43" name="Shape 41"/>
+          <p:cNvSpPr/>
+          <p:nvPr/>
+        </p:nvSpPr>
+        <p:spPr>
+          <a:xfrm>
+            <a:off x="6629400" y="5404104"/>
+            <a:ext cx="1554480" cy="365760"/>
+          </a:xfrm>
+          <a:prstGeom prst="roundRect">
+            <a:avLst>
+              <a:gd name="adj" fmla="val 25000"/>
+            </a:avLst>
+          </a:prstGeom>
+          <a:solidFill>
+            <a:srgbClr val="538135"/>
+          </a:solidFill>
+          <a:ln/>
+        </p:spPr>
+      </p:sp>
+      <p:sp>
+        <p:nvSpPr>
+          <p:cNvPr id="44" name="Text 42"/>
+          <p:cNvSpPr txBox="1"/>
+          <p:nvPr/>
+        </p:nvSpPr>
+        <p:spPr>
+          <a:xfrm>
+            <a:off x="6629400" y="5404104"/>
+            <a:ext cx="1554480" cy="365760"/>
+          </a:xfrm>
+          <a:prstGeom prst="rect">
+            <a:avLst/>
+          </a:prstGeom>
+          <a:noFill/>
+          <a:ln/>
+        </p:spPr>
+        <p:txBody>
+          <a:bodyPr wrap="square" lIns="0" tIns="0" rIns="0" bIns="0" rtlCol="0" anchor="ctr"/>
+          <a:lstStyle/>
+          <a:p>
+            <a:pPr algn="ctr" indent="0" marL="0">
+              <a:buNone/>
+            </a:pPr>
+            <a:r>
+              <a:rPr lang="en-US" sz="1100" b="1" dirty="0">
+                <a:solidFill>
+                  <a:srgbClr val="FFFFFF"/>
+                </a:solidFill>
+                <a:latin typeface="Calibri" pitchFamily="34" charset="0"/>
+                <a:ea typeface="Calibri" pitchFamily="34" charset="-122"/>
+                <a:cs typeface="Calibri" pitchFamily="34" charset="-120"/>
+              </a:rPr>
+              <a:t>Completed ✓</a:t>
+            </a:r>
+            <a:endParaRPr lang="en-US" sz="1100" dirty="0"/>
+          </a:p>
+        </p:txBody>
+      </p:sp>
+      <p:sp>
+        <p:nvSpPr>
+          <p:cNvPr id="45" name="Text 43"/>
+          <p:cNvSpPr txBox="1"/>
+          <p:nvPr/>
+        </p:nvSpPr>
+        <p:spPr>
+          <a:xfrm>
+            <a:off x="8366760" y="5404104"/>
+            <a:ext cx="3017520" cy="365760"/>
+          </a:xfrm>
+          <a:prstGeom prst="rect">
+            <a:avLst/>
+          </a:prstGeom>
+          <a:noFill/>
+          <a:ln/>
+        </p:spPr>
+        <p:txBody>
+          <a:bodyPr wrap="square" lIns="0" tIns="0" rIns="0" bIns="0" rtlCol="0" anchor="ctr"/>
+          <a:lstStyle/>
+          <a:p>
+            <a:pPr indent="0" marL="0">
+              <a:buNone/>
+            </a:pPr>
+            <a:r>
+              <a:rPr lang="en-US" sz="1050" i="1" dirty="0">
+                <a:solidFill>
+                  <a:srgbClr val="5F7178"/>
+                </a:solidFill>
+                <a:latin typeface="Calibri" pitchFamily="34" charset="0"/>
+                <a:ea typeface="Calibri" pitchFamily="34" charset="-122"/>
+                <a:cs typeface="Calibri" pitchFamily="34" charset="-120"/>
+              </a:rPr>
+              <a:t>— listed per analyser; any analyser under 3 shows a red Fail</a:t>
+            </a:r>
+            <a:endParaRPr lang="en-US" sz="1050" dirty="0"/>
+          </a:p>
+        </p:txBody>
+      </p:sp>
+      <p:sp>
+        <p:nvSpPr>
+          <p:cNvPr id="46" name="Text 44"/>
+          <p:cNvSpPr txBox="1"/>
+          <p:nvPr/>
+        </p:nvSpPr>
+        <p:spPr>
+          <a:xfrm>
+            <a:off x="6400800" y="6163056"/>
+            <a:ext cx="5212080" cy="320040"/>
+          </a:xfrm>
+          <a:prstGeom prst="rect">
+            <a:avLst/>
+          </a:prstGeom>
+          <a:noFill/>
+          <a:ln/>
+        </p:spPr>
+        <p:txBody>
+          <a:bodyPr wrap="square" lIns="0" tIns="0" rIns="0" bIns="0" rtlCol="0" anchor="ctr"/>
+          <a:lstStyle/>
+          <a:p>
+            <a:pPr indent="0" marL="0">
+              <a:buNone/>
+            </a:pPr>
+            <a:r>
+              <a:rPr lang="en-US" sz="1000" i="1" dirty="0">
+                <a:solidFill>
+                  <a:srgbClr val="5F7178"/>
+                </a:solidFill>
+                <a:latin typeface="Calibri" pitchFamily="34" charset="0"/>
+                <a:ea typeface="Calibri" pitchFamily="34" charset="-122"/>
+                <a:cs typeface="Calibri" pitchFamily="34" charset="-120"/>
+              </a:rPr>
+              <a:t>Examples shown with fictional data — layouts match the real Word report.</a:t>
+            </a:r>
+            <a:endParaRPr lang="en-US" sz="1000" dirty="0"/>
+          </a:p>
+        </p:txBody>
+      </p:sp>
+      <p:sp>
+        <p:nvSpPr>
+          <p:cNvPr id="47" name="Shape 45"/>
+          <p:cNvSpPr/>
+          <p:nvPr/>
+        </p:nvSpPr>
+        <p:spPr>
+          <a:xfrm>
+            <a:off x="0" y="6793992"/>
+            <a:ext cx="2040636" cy="64008"/>
+          </a:xfrm>
+          <a:prstGeom prst="rect">
+            <a:avLst/>
+          </a:prstGeom>
+          <a:solidFill>
+            <a:srgbClr val="01485C"/>
+          </a:solidFill>
+          <a:ln/>
+        </p:spPr>
+      </p:sp>
+      <p:sp>
+        <p:nvSpPr>
+          <p:cNvPr id="48" name="Shape 46"/>
+          <p:cNvSpPr/>
+          <p:nvPr/>
+        </p:nvSpPr>
+        <p:spPr>
+          <a:xfrm>
+            <a:off x="2031492" y="6793992"/>
+            <a:ext cx="2040636" cy="64008"/>
+          </a:xfrm>
+          <a:prstGeom prst="rect">
+            <a:avLst/>
+          </a:prstGeom>
+          <a:solidFill>
+            <a:srgbClr val="146175"/>
+          </a:solidFill>
+          <a:ln/>
+        </p:spPr>
+      </p:sp>
+      <p:sp>
+        <p:nvSpPr>
+          <p:cNvPr id="49" name="Shape 47"/>
+          <p:cNvSpPr/>
+          <p:nvPr/>
+        </p:nvSpPr>
+        <p:spPr>
+          <a:xfrm>
+            <a:off x="4062984" y="6793992"/>
+            <a:ext cx="2040636" cy="64008"/>
+          </a:xfrm>
+          <a:prstGeom prst="rect">
+            <a:avLst/>
+          </a:prstGeom>
+          <a:solidFill>
+            <a:srgbClr val="11B5AE"/>
+          </a:solidFill>
+          <a:ln/>
+        </p:spPr>
+      </p:sp>
+      <p:sp>
+        <p:nvSpPr>
+          <p:cNvPr id="50" name="Shape 48"/>
+          <p:cNvSpPr/>
+          <p:nvPr/>
+        </p:nvSpPr>
+        <p:spPr>
+          <a:xfrm>
+            <a:off x="6094476" y="6793992"/>
+            <a:ext cx="2040636" cy="64008"/>
+          </a:xfrm>
+          <a:prstGeom prst="rect">
+            <a:avLst/>
+          </a:prstGeom>
+          <a:solidFill>
+            <a:srgbClr val="6CCAD4"/>
+          </a:solidFill>
+          <a:ln/>
+        </p:spPr>
+      </p:sp>
+      <p:sp>
+        <p:nvSpPr>
+          <p:cNvPr id="51" name="Shape 49"/>
+          <p:cNvSpPr/>
+          <p:nvPr/>
+        </p:nvSpPr>
+        <p:spPr>
+          <a:xfrm>
+            <a:off x="8125968" y="6793992"/>
+            <a:ext cx="2040636" cy="64008"/>
+          </a:xfrm>
+          <a:prstGeom prst="rect">
+            <a:avLst/>
+          </a:prstGeom>
+          <a:solidFill>
+            <a:srgbClr val="7FC04C"/>
+          </a:solidFill>
+          <a:ln/>
+        </p:spPr>
+      </p:sp>
+      <p:sp>
+        <p:nvSpPr>
+          <p:cNvPr id="52" name="Shape 50"/>
+          <p:cNvSpPr/>
+          <p:nvPr/>
+        </p:nvSpPr>
+        <p:spPr>
+          <a:xfrm>
+            <a:off x="10157460" y="6793992"/>
+            <a:ext cx="2040636" cy="64008"/>
+          </a:xfrm>
+          <a:prstGeom prst="rect">
+            <a:avLst/>
+          </a:prstGeom>
+          <a:solidFill>
+            <a:srgbClr val="E1DD57"/>
+          </a:solidFill>
+          <a:ln/>
+        </p:spPr>
+      </p:sp>
+    </p:spTree>
+  </p:cSld>
+  <p:clrMapOvr>
+    <a:masterClrMapping/>
+  </p:clrMapOvr>
+</p:sld>
+</file>
+
+<file path=ppt/slides/slide11.xml><?xml version="1.0" encoding="utf-8"?>
+<p:sld xmlns:a="http://schemas.openxmlformats.org/drawingml/2006/main" xmlns:r="http://schemas.openxmlformats.org/officeDocument/2006/relationships" xmlns:p="http://schemas.openxmlformats.org/presentationml/2006/main">
   <p:cSld name="Slide 10">
     <p:bg>
       <p:bgPr>
@@ -3448,7 +5112,7 @@
 </p:sld>
 </file>
 
-<file path=ppt/slides/slide11.xml><?xml version="1.0" encoding="utf-8"?>
+<file path=ppt/slides/slide12.xml><?xml version="1.0" encoding="utf-8"?>
 <p:sld xmlns:a="http://schemas.openxmlformats.org/drawingml/2006/main" xmlns:r="http://schemas.openxmlformats.org/officeDocument/2006/relationships" xmlns:p="http://schemas.openxmlformats.org/presentationml/2006/main">
   <p:cSld name="Slide 11">
     <p:bg>
@@ -5125,7 +6789,7 @@
 </p:sld>
 </file>
 
-<file path=ppt/slides/slide12.xml><?xml version="1.0" encoding="utf-8"?>
+<file path=ppt/slides/slide13.xml><?xml version="1.0" encoding="utf-8"?>
 <p:sld xmlns:a="http://schemas.openxmlformats.org/drawingml/2006/main" xmlns:p="http://schemas.openxmlformats.org/presentationml/2006/main" xmlns:r="http://schemas.openxmlformats.org/officeDocument/2006/relationships">
   <p:cSld>
     <p:spTree>
@@ -5783,7 +7447,7 @@
 </p:sld>
 </file>
 
-<file path=ppt/slides/slide13.xml><?xml version="1.0" encoding="utf-8"?>
+<file path=ppt/slides/slide14.xml><?xml version="1.0" encoding="utf-8"?>
 <p:sld xmlns:a="http://schemas.openxmlformats.org/drawingml/2006/main" xmlns:r="http://schemas.openxmlformats.org/officeDocument/2006/relationships" xmlns:p="http://schemas.openxmlformats.org/presentationml/2006/main">
   <p:cSld name="Slide 12">
     <p:bg>
@@ -7233,7 +8897,7 @@
 </p:sld>
 </file>
 
-<file path=ppt/slides/slide14.xml><?xml version="1.0" encoding="utf-8"?>
+<file path=ppt/slides/slide15.xml><?xml version="1.0" encoding="utf-8"?>
 <p:sld xmlns:a="http://schemas.openxmlformats.org/drawingml/2006/main" xmlns:r="http://schemas.openxmlformats.org/officeDocument/2006/relationships" xmlns:p="http://schemas.openxmlformats.org/presentationml/2006/main">
   <p:cSld name="Slide 13">
     <p:bg>
@@ -7925,7 +9589,7 @@
 </p:sld>
 </file>
 
-<file path=ppt/slides/slide15.xml><?xml version="1.0" encoding="utf-8"?>
+<file path=ppt/slides/slide16.xml><?xml version="1.0" encoding="utf-8"?>
 <p:sld xmlns:a="http://schemas.openxmlformats.org/drawingml/2006/main" xmlns:r="http://schemas.openxmlformats.org/officeDocument/2006/relationships" xmlns:p="http://schemas.openxmlformats.org/presentationml/2006/main">
   <p:cSld name="Slide 14">
     <p:bg>
@@ -9158,7 +10822,7 @@
 </p:sld>
 </file>
 
-<file path=ppt/slides/slide16.xml><?xml version="1.0" encoding="utf-8"?>
+<file path=ppt/slides/slide17.xml><?xml version="1.0" encoding="utf-8"?>
 <p:sld xmlns:a="http://schemas.openxmlformats.org/drawingml/2006/main" xmlns:r="http://schemas.openxmlformats.org/officeDocument/2006/relationships" xmlns:p="http://schemas.openxmlformats.org/presentationml/2006/main">
   <p:cSld name="Slide 15">
     <p:bg>
@@ -10217,7 +11881,7 @@
 </p:sld>
 </file>
 
-<file path=ppt/slides/slide17.xml><?xml version="1.0" encoding="utf-8"?>
+<file path=ppt/slides/slide18.xml><?xml version="1.0" encoding="utf-8"?>
 <p:sld xmlns:a="http://schemas.openxmlformats.org/drawingml/2006/main" xmlns:r="http://schemas.openxmlformats.org/officeDocument/2006/relationships" xmlns:p="http://schemas.openxmlformats.org/presentationml/2006/main">
   <p:cSld name="Slide 16">
     <p:bg>
@@ -10296,7 +11960,7 @@
         </p:nvGraphicFramePr>
         <p:xfrm>
           <a:off x="548640" y="1280160"/>
-          <a:ext cx="11064240" cy="914400"/>
+          <a:ext cx="11064240" cy="4279392"/>
         </p:xfrm>
         <a:graphic>
           <a:graphicData uri="http://schemas.openxmlformats.org/drawingml/2006/table">
@@ -10306,7 +11970,7 @@
                 <a:gridCol w="3566160"/>
                 <a:gridCol w="7498080"/>
               </a:tblGrid>
-              <a:tr h="566928">
+              <a:tr h="475488">
                 <a:tc>
                   <a:txBody>
                     <a:bodyPr/>
@@ -10444,7 +12108,7 @@
                   </a:tcPr>
                 </a:tc>
               </a:tr>
-              <a:tr h="566928">
+              <a:tr h="475488">
                 <a:tc>
                   <a:txBody>
                     <a:bodyPr/>
@@ -10576,7 +12240,7 @@
                   </a:tcPr>
                 </a:tc>
               </a:tr>
-              <a:tr h="566928">
+              <a:tr h="475488">
                 <a:tc>
                   <a:txBody>
                     <a:bodyPr/>
@@ -10708,7 +12372,7 @@
                   </a:tcPr>
                 </a:tc>
               </a:tr>
-              <a:tr h="566928">
+              <a:tr h="475488">
                 <a:tc>
                   <a:txBody>
                     <a:bodyPr/>
@@ -10840,7 +12504,7 @@
                   </a:tcPr>
                 </a:tc>
               </a:tr>
-              <a:tr h="566928">
+              <a:tr h="475488">
                 <a:tc>
                   <a:txBody>
                     <a:bodyPr/>
@@ -10972,7 +12636,7 @@
                   </a:tcPr>
                 </a:tc>
               </a:tr>
-              <a:tr h="566928">
+              <a:tr h="475488">
                 <a:tc>
                   <a:txBody>
                     <a:bodyPr/>
@@ -11104,7 +12768,7 @@
                   </a:tcPr>
                 </a:tc>
               </a:tr>
-              <a:tr h="566928">
+              <a:tr h="475488">
                 <a:tc>
                   <a:txBody>
                     <a:bodyPr/>
@@ -11236,6 +12900,270 @@
                   </a:tcPr>
                 </a:tc>
               </a:tr>
+              <a:tr h="475488">
+                <a:tc>
+                  <a:txBody>
+                    <a:bodyPr/>
+                    <a:lstStyle/>
+                    <a:p>
+                      <a:pPr indent="0" marL="0">
+                        <a:buNone/>
+                      </a:pPr>
+                      <a:r>
+                        <a:rPr lang="en-US" sz="1250" dirty="0">
+                          <a:solidFill>
+                            <a:srgbClr val="17272E"/>
+                          </a:solidFill>
+                          <a:latin typeface="Calibri" pitchFamily="34" charset="0"/>
+                          <a:ea typeface="Calibri" pitchFamily="34" charset="-122"/>
+                          <a:cs typeface="Calibri" pitchFamily="34" charset="-120"/>
+                        </a:rPr>
+                        <a:t>Lock card on a PC that was enrolled</a:t>
+                      </a:r>
+                      <a:endParaRPr lang="en-US" sz="1250" dirty="0">
+                        <a:latin typeface="Calibri" charset="0"/>
+                        <a:ea typeface="Calibri" charset="0"/>
+                        <a:cs typeface="Calibri" charset="0"/>
+                      </a:endParaRPr>
+                    </a:p>
+                  </a:txBody>
+                  <a:tcPr marL="64008" marR="64008" marT="64008" marB="64008" anchor="ctr">
+                    <a:lnL w="12700" cap="flat" cmpd="sng" algn="ctr">
+                      <a:solidFill>
+                        <a:srgbClr val="E2E8EA"/>
+                      </a:solidFill>
+                      <a:prstDash val="solid"/>
+                      <a:round/>
+                      <a:headEnd type="none" w="med" len="med"/>
+                      <a:tailEnd type="none" w="med" len="med"/>
+                    </a:lnL>
+                    <a:lnR w="12700" cap="flat" cmpd="sng" algn="ctr">
+                      <a:solidFill>
+                        <a:srgbClr val="E2E8EA"/>
+                      </a:solidFill>
+                      <a:prstDash val="solid"/>
+                      <a:round/>
+                      <a:headEnd type="none" w="med" len="med"/>
+                      <a:tailEnd type="none" w="med" len="med"/>
+                    </a:lnR>
+                    <a:lnT w="12700" cap="flat" cmpd="sng" algn="ctr">
+                      <a:solidFill>
+                        <a:srgbClr val="E2E8EA"/>
+                      </a:solidFill>
+                      <a:prstDash val="solid"/>
+                      <a:round/>
+                      <a:headEnd type="none" w="med" len="med"/>
+                      <a:tailEnd type="none" w="med" len="med"/>
+                    </a:lnT>
+                    <a:lnB w="12700" cap="flat" cmpd="sng" algn="ctr">
+                      <a:solidFill>
+                        <a:srgbClr val="E2E8EA"/>
+                      </a:solidFill>
+                      <a:prstDash val="solid"/>
+                      <a:round/>
+                      <a:headEnd type="none" w="med" len="med"/>
+                      <a:tailEnd type="none" w="med" len="med"/>
+                    </a:lnB>
+                  </a:tcPr>
+                </a:tc>
+                <a:tc>
+                  <a:txBody>
+                    <a:bodyPr/>
+                    <a:lstStyle/>
+                    <a:p>
+                      <a:pPr indent="0" marL="0">
+                        <a:buNone/>
+                      </a:pPr>
+                      <a:r>
+                        <a:rPr lang="en-US" sz="1250" dirty="0">
+                          <a:solidFill>
+                            <a:srgbClr val="17272E"/>
+                          </a:solidFill>
+                          <a:latin typeface="Calibri" pitchFamily="34" charset="0"/>
+                          <a:ea typeface="Calibri" pitchFamily="34" charset="-122"/>
+                          <a:cs typeface="Calibri" pitchFamily="34" charset="-120"/>
+                        </a:rPr>
+                        <a:t>EXPIRED: renew it with the enrolment password. NOT ENROLLED: the machine ID has changed (PC reimaged or renamed, motherboard or drive replaced) — enrol again and revoke the old entry on Enrolled PCs.</a:t>
+                      </a:r>
+                      <a:endParaRPr lang="en-US" sz="1250" dirty="0">
+                        <a:latin typeface="Calibri" charset="0"/>
+                        <a:ea typeface="Calibri" charset="0"/>
+                        <a:cs typeface="Calibri" charset="0"/>
+                      </a:endParaRPr>
+                    </a:p>
+                  </a:txBody>
+                  <a:tcPr marL="64008" marR="64008" marT="64008" marB="64008" anchor="ctr">
+                    <a:lnL w="12700" cap="flat" cmpd="sng" algn="ctr">
+                      <a:solidFill>
+                        <a:srgbClr val="E2E8EA"/>
+                      </a:solidFill>
+                      <a:prstDash val="solid"/>
+                      <a:round/>
+                      <a:headEnd type="none" w="med" len="med"/>
+                      <a:tailEnd type="none" w="med" len="med"/>
+                    </a:lnL>
+                    <a:lnR w="12700" cap="flat" cmpd="sng" algn="ctr">
+                      <a:solidFill>
+                        <a:srgbClr val="E2E8EA"/>
+                      </a:solidFill>
+                      <a:prstDash val="solid"/>
+                      <a:round/>
+                      <a:headEnd type="none" w="med" len="med"/>
+                      <a:tailEnd type="none" w="med" len="med"/>
+                    </a:lnR>
+                    <a:lnT w="12700" cap="flat" cmpd="sng" algn="ctr">
+                      <a:solidFill>
+                        <a:srgbClr val="E2E8EA"/>
+                      </a:solidFill>
+                      <a:prstDash val="solid"/>
+                      <a:round/>
+                      <a:headEnd type="none" w="med" len="med"/>
+                      <a:tailEnd type="none" w="med" len="med"/>
+                    </a:lnT>
+                    <a:lnB w="12700" cap="flat" cmpd="sng" algn="ctr">
+                      <a:solidFill>
+                        <a:srgbClr val="E2E8EA"/>
+                      </a:solidFill>
+                      <a:prstDash val="solid"/>
+                      <a:round/>
+                      <a:headEnd type="none" w="med" len="med"/>
+                      <a:tailEnd type="none" w="med" len="med"/>
+                    </a:lnB>
+                  </a:tcPr>
+                </a:tc>
+              </a:tr>
+              <a:tr h="475488">
+                <a:tc>
+                  <a:txBody>
+                    <a:bodyPr/>
+                    <a:lstStyle/>
+                    <a:p>
+                      <a:pPr indent="0" marL="0">
+                        <a:buNone/>
+                      </a:pPr>
+                      <a:r>
+                        <a:rPr lang="en-US" sz="1250" dirty="0">
+                          <a:solidFill>
+                            <a:srgbClr val="17272E"/>
+                          </a:solidFill>
+                          <a:latin typeface="Calibri" pitchFamily="34" charset="0"/>
+                          <a:ea typeface="Calibri" pitchFamily="34" charset="-122"/>
+                          <a:cs typeface="Calibri" pitchFamily="34" charset="-120"/>
+                        </a:rPr>
+                        <a:t>Lock page inside an engine (localhost:5757 / 5758)</a:t>
+                      </a:r>
+                      <a:endParaRPr lang="en-US" sz="1250" dirty="0">
+                        <a:latin typeface="Calibri" charset="0"/>
+                        <a:ea typeface="Calibri" charset="0"/>
+                        <a:cs typeface="Calibri" charset="0"/>
+                      </a:endParaRPr>
+                    </a:p>
+                  </a:txBody>
+                  <a:tcPr marL="64008" marR="64008" marT="64008" marB="64008" anchor="ctr">
+                    <a:lnL w="12700" cap="flat" cmpd="sng" algn="ctr">
+                      <a:solidFill>
+                        <a:srgbClr val="E2E8EA"/>
+                      </a:solidFill>
+                      <a:prstDash val="solid"/>
+                      <a:round/>
+                      <a:headEnd type="none" w="med" len="med"/>
+                      <a:tailEnd type="none" w="med" len="med"/>
+                    </a:lnL>
+                    <a:lnR w="12700" cap="flat" cmpd="sng" algn="ctr">
+                      <a:solidFill>
+                        <a:srgbClr val="E2E8EA"/>
+                      </a:solidFill>
+                      <a:prstDash val="solid"/>
+                      <a:round/>
+                      <a:headEnd type="none" w="med" len="med"/>
+                      <a:tailEnd type="none" w="med" len="med"/>
+                    </a:lnR>
+                    <a:lnT w="12700" cap="flat" cmpd="sng" algn="ctr">
+                      <a:solidFill>
+                        <a:srgbClr val="E2E8EA"/>
+                      </a:solidFill>
+                      <a:prstDash val="solid"/>
+                      <a:round/>
+                      <a:headEnd type="none" w="med" len="med"/>
+                      <a:tailEnd type="none" w="med" len="med"/>
+                    </a:lnT>
+                    <a:lnB w="12700" cap="flat" cmpd="sng" algn="ctr">
+                      <a:solidFill>
+                        <a:srgbClr val="E2E8EA"/>
+                      </a:solidFill>
+                      <a:prstDash val="solid"/>
+                      <a:round/>
+                      <a:headEnd type="none" w="med" len="med"/>
+                      <a:tailEnd type="none" w="med" len="med"/>
+                    </a:lnB>
+                  </a:tcPr>
+                </a:tc>
+                <a:tc>
+                  <a:txBody>
+                    <a:bodyPr/>
+                    <a:lstStyle/>
+                    <a:p>
+                      <a:pPr indent="0" marL="0">
+                        <a:buNone/>
+                      </a:pPr>
+                      <a:r>
+                        <a:rPr lang="en-US" sz="1250" dirty="0">
+                          <a:solidFill>
+                            <a:srgbClr val="17272E"/>
+                          </a:solidFill>
+                          <a:latin typeface="Calibri" pitchFamily="34" charset="0"/>
+                          <a:ea typeface="Calibri" pitchFamily="34" charset="-122"/>
+                          <a:cs typeface="Calibri" pitchFamily="34" charset="-120"/>
+                        </a:rPr>
+                        <a:t>Same cause. Go back to localhost:5750, enrol or renew the PC, and the engines unlock straight away — nothing to restart.</a:t>
+                      </a:r>
+                      <a:endParaRPr lang="en-US" sz="1250" dirty="0">
+                        <a:latin typeface="Calibri" charset="0"/>
+                        <a:ea typeface="Calibri" charset="0"/>
+                        <a:cs typeface="Calibri" charset="0"/>
+                      </a:endParaRPr>
+                    </a:p>
+                  </a:txBody>
+                  <a:tcPr marL="64008" marR="64008" marT="64008" marB="64008" anchor="ctr">
+                    <a:lnL w="12700" cap="flat" cmpd="sng" algn="ctr">
+                      <a:solidFill>
+                        <a:srgbClr val="E2E8EA"/>
+                      </a:solidFill>
+                      <a:prstDash val="solid"/>
+                      <a:round/>
+                      <a:headEnd type="none" w="med" len="med"/>
+                      <a:tailEnd type="none" w="med" len="med"/>
+                    </a:lnL>
+                    <a:lnR w="12700" cap="flat" cmpd="sng" algn="ctr">
+                      <a:solidFill>
+                        <a:srgbClr val="E2E8EA"/>
+                      </a:solidFill>
+                      <a:prstDash val="solid"/>
+                      <a:round/>
+                      <a:headEnd type="none" w="med" len="med"/>
+                      <a:tailEnd type="none" w="med" len="med"/>
+                    </a:lnR>
+                    <a:lnT w="12700" cap="flat" cmpd="sng" algn="ctr">
+                      <a:solidFill>
+                        <a:srgbClr val="E2E8EA"/>
+                      </a:solidFill>
+                      <a:prstDash val="solid"/>
+                      <a:round/>
+                      <a:headEnd type="none" w="med" len="med"/>
+                      <a:tailEnd type="none" w="med" len="med"/>
+                    </a:lnT>
+                    <a:lnB w="12700" cap="flat" cmpd="sng" algn="ctr">
+                      <a:solidFill>
+                        <a:srgbClr val="E2E8EA"/>
+                      </a:solidFill>
+                      <a:prstDash val="solid"/>
+                      <a:round/>
+                      <a:headEnd type="none" w="med" len="med"/>
+                      <a:tailEnd type="none" w="med" len="med"/>
+                    </a:lnB>
+                  </a:tcPr>
+                </a:tc>
+              </a:tr>
             </a:tbl>
           </a:graphicData>
         </a:graphic>
@@ -11368,7 +13296,7 @@
 </p:sld>
 </file>
 
-<file path=ppt/slides/slide18.xml><?xml version="1.0" encoding="utf-8"?>
+<file path=ppt/slides/slide19.xml><?xml version="1.0" encoding="utf-8"?>
 <p:sld xmlns:a="http://schemas.openxmlformats.org/drawingml/2006/main" xmlns:r="http://schemas.openxmlformats.org/officeDocument/2006/relationships" xmlns:p="http://schemas.openxmlformats.org/presentationml/2006/main">
   <p:cSld name="Slide 17">
     <p:bg>
@@ -12648,664 +14576,6 @@
       <p:sp>
         <p:nvSpPr>
           <p:cNvPr id="38" name="Shape 35"/>
-          <p:cNvSpPr/>
-          <p:nvPr/>
-        </p:nvSpPr>
-        <p:spPr>
-          <a:xfrm>
-            <a:off x="10157460" y="6793992"/>
-            <a:ext cx="2040636" cy="64008"/>
-          </a:xfrm>
-          <a:prstGeom prst="rect">
-            <a:avLst/>
-          </a:prstGeom>
-          <a:solidFill>
-            <a:srgbClr val="E1DD57"/>
-          </a:solidFill>
-          <a:ln/>
-        </p:spPr>
-      </p:sp>
-    </p:spTree>
-  </p:cSld>
-  <p:clrMapOvr>
-    <a:masterClrMapping/>
-  </p:clrMapOvr>
-</p:sld>
-</file>
-
-<file path=ppt/slides/slide19.xml><?xml version="1.0" encoding="utf-8"?>
-<p:sld xmlns:a="http://schemas.openxmlformats.org/drawingml/2006/main" xmlns:p="http://schemas.openxmlformats.org/presentationml/2006/main" xmlns:r="http://schemas.openxmlformats.org/officeDocument/2006/relationships">
-  <p:cSld>
-    <p:spTree>
-      <p:nvGrpSpPr>
-        <p:cNvPr id="1" name=""/>
-        <p:cNvGrpSpPr/>
-        <p:nvPr/>
-      </p:nvGrpSpPr>
-      <p:grpSpPr/>
-      <p:sp>
-        <p:nvSpPr>
-          <p:cNvPr id="2" name="Text 0"/>
-          <p:cNvSpPr txBox="1"/>
-          <p:nvPr/>
-        </p:nvSpPr>
-        <p:spPr>
-          <a:xfrm>
-            <a:off x="548640" y="320040"/>
-            <a:ext cx="11064240" cy="685800"/>
-          </a:xfrm>
-          <a:prstGeom prst="rect">
-            <a:avLst/>
-          </a:prstGeom>
-          <a:noFill/>
-          <a:ln/>
-        </p:spPr>
-        <p:txBody>
-          <a:bodyPr wrap="square" lIns="0" tIns="0" rIns="0" bIns="0" rtlCol="0" anchor="ctr"/>
-          <a:lstStyle/>
-          <a:p>
-            <a:pPr indent="0" marL="0">
-              <a:buNone/>
-            </a:pPr>
-            <a:r>
-              <a:rPr lang="en-US" sz="3000" b="1" dirty="0">
-                <a:solidFill>
-                  <a:srgbClr val="01485C"/>
-                </a:solidFill>
-                <a:latin typeface="Calibri" pitchFamily="34" charset="0"/>
-                <a:ea typeface="Calibri" pitchFamily="34" charset="-122"/>
-                <a:cs typeface="Calibri" pitchFamily="34" charset="-120"/>
-              </a:rPr>
-              <a:t>Enrolling a PC (first use on a computer)</a:t>
-            </a:r>
-            <a:endParaRPr lang="en-US" sz="3000" dirty="0"/>
-          </a:p>
-        </p:txBody>
-      </p:sp>
-      <p:sp>
-        <p:nvSpPr>
-          <p:cNvPr id="3" name="Shape 1"/>
-          <p:cNvSpPr/>
-          <p:nvPr/>
-        </p:nvSpPr>
-        <p:spPr>
-          <a:xfrm>
-            <a:off x="9784080" y="384048"/>
-            <a:ext cx="1828800" cy="457200"/>
-          </a:xfrm>
-          <a:prstGeom prst="roundRect">
-            <a:avLst>
-              <a:gd name="adj" fmla="val 50000"/>
-            </a:avLst>
-          </a:prstGeom>
-          <a:solidFill>
-            <a:srgbClr val="01485C"/>
-          </a:solidFill>
-          <a:ln/>
-        </p:spPr>
-        <p:txBody>
-          <a:bodyPr/>
-          <a:p/>
-        </p:txBody>
-      </p:sp>
-      <p:sp>
-        <p:nvSpPr>
-          <p:cNvPr id="4" name="Text 2"/>
-          <p:cNvSpPr txBox="1"/>
-          <p:nvPr/>
-        </p:nvSpPr>
-        <p:spPr>
-          <a:xfrm>
-            <a:off x="9784080" y="384048"/>
-            <a:ext cx="1828800" cy="457200"/>
-          </a:xfrm>
-          <a:prstGeom prst="rect">
-            <a:avLst/>
-          </a:prstGeom>
-          <a:noFill/>
-          <a:ln/>
-        </p:spPr>
-        <p:txBody>
-          <a:bodyPr wrap="square" lIns="0" tIns="0" rIns="0" bIns="0" rtlCol="0" anchor="ctr"/>
-          <a:lstStyle/>
-          <a:p>
-            <a:pPr algn="ctr" indent="0" marL="0">
-              <a:buNone/>
-            </a:pPr>
-            <a:r>
-              <a:rPr lang="en-US" sz="1500" b="1" dirty="0">
-                <a:solidFill>
-                  <a:srgbClr val="FFFFFF"/>
-                </a:solidFill>
-                <a:latin typeface="Calibri" pitchFamily="34" charset="0"/>
-                <a:ea typeface="Calibri" pitchFamily="34" charset="-122"/>
-                <a:cs typeface="Calibri" pitchFamily="34" charset="-120"/>
-              </a:rPr>
-              <a:t>BOTH</a:t>
-            </a:r>
-            <a:endParaRPr lang="en-US" sz="1500" dirty="0"/>
-          </a:p>
-        </p:txBody>
-      </p:sp>
-      <p:sp>
-        <p:nvSpPr>
-          <p:cNvPr id="5" name="Shape 3"/>
-          <p:cNvSpPr/>
-          <p:nvPr/>
-        </p:nvSpPr>
-        <p:spPr>
-          <a:xfrm>
-            <a:off x="548640" y="1463040"/>
-            <a:ext cx="5486400" cy="2103120"/>
-          </a:xfrm>
-          <a:prstGeom prst="roundRect">
-            <a:avLst>
-              <a:gd name="adj" fmla="val 5217"/>
-            </a:avLst>
-          </a:prstGeom>
-          <a:solidFill>
-            <a:srgbClr val="E5F2F0"/>
-          </a:solidFill>
-          <a:ln/>
-        </p:spPr>
-        <p:txBody>
-          <a:bodyPr/>
-          <a:p/>
-        </p:txBody>
-      </p:sp>
-      <p:sp>
-        <p:nvSpPr>
-          <p:cNvPr id="6" name="Text 4"/>
-          <p:cNvSpPr txBox="1"/>
-          <p:nvPr/>
-        </p:nvSpPr>
-        <p:spPr>
-          <a:xfrm>
-            <a:off x="822960" y="1664208"/>
-            <a:ext cx="4937760" cy="411480"/>
-          </a:xfrm>
-          <a:prstGeom prst="rect">
-            <a:avLst/>
-          </a:prstGeom>
-          <a:noFill/>
-          <a:ln/>
-        </p:spPr>
-        <p:txBody>
-          <a:bodyPr wrap="square" lIns="0" tIns="0" rIns="0" bIns="0" rtlCol="0" anchor="ctr"/>
-          <a:lstStyle/>
-          <a:p>
-            <a:pPr indent="0" marL="0">
-              <a:buNone/>
-            </a:pPr>
-            <a:r>
-              <a:rPr lang="en-US" sz="1600" b="1" dirty="0">
-                <a:solidFill>
-                  <a:srgbClr val="01485C"/>
-                </a:solidFill>
-                <a:latin typeface="Calibri" pitchFamily="34" charset="0"/>
-                <a:ea typeface="Calibri" pitchFamily="34" charset="-122"/>
-                <a:cs typeface="Calibri" pitchFamily="34" charset="-120"/>
-              </a:rPr>
-              <a:t>The lock card</a:t>
-            </a:r>
-            <a:endParaRPr lang="en-US" sz="1600" dirty="0"/>
-          </a:p>
-        </p:txBody>
-      </p:sp>
-      <p:sp>
-        <p:nvSpPr>
-          <p:cNvPr id="7" name="Text 5"/>
-          <p:cNvSpPr txBox="1"/>
-          <p:nvPr/>
-        </p:nvSpPr>
-        <p:spPr>
-          <a:xfrm>
-            <a:off x="822960" y="2148840"/>
-            <a:ext cx="4937760" cy="1463040"/>
-          </a:xfrm>
-          <a:prstGeom prst="rect">
-            <a:avLst/>
-          </a:prstGeom>
-          <a:noFill/>
-          <a:ln/>
-        </p:spPr>
-        <p:txBody>
-          <a:bodyPr wrap="square" lIns="0" tIns="0" rIns="0" bIns="0" rtlCol="0" anchor="ctr"/>
-          <a:lstStyle/>
-          <a:p>
-            <a:pPr indent="0" marL="0">
-              <a:buNone/>
-            </a:pPr>
-            <a:r>
-              <a:rPr lang="en-US" sz="1200" dirty="0">
-                <a:solidFill>
-                  <a:srgbClr val="17272E"/>
-                </a:solidFill>
-                <a:latin typeface="Calibri" pitchFamily="34" charset="0"/>
-                <a:ea typeface="Calibri" pitchFamily="34" charset="-122"/>
-                <a:cs typeface="Calibri" pitchFamily="34" charset="-120"/>
-              </a:rPr>
-              <a:t>On a PC that is not enrolled, the selection page shows PC NOT ENROLLED with the machine ID and hostname instead of the report-type drop-down. Nothing runs until the PC is enrolled — the engines show a lock page too.</a:t>
-            </a:r>
-            <a:endParaRPr lang="en-US" sz="1300" dirty="0"/>
-          </a:p>
-        </p:txBody>
-      </p:sp>
-      <p:sp>
-        <p:nvSpPr>
-          <p:cNvPr id="8" name="Shape 6"/>
-          <p:cNvSpPr/>
-          <p:nvPr/>
-        </p:nvSpPr>
-        <p:spPr>
-          <a:xfrm>
-            <a:off x="6172200" y="1463040"/>
-            <a:ext cx="5486400" cy="2103120"/>
-          </a:xfrm>
-          <a:prstGeom prst="roundRect">
-            <a:avLst>
-              <a:gd name="adj" fmla="val 5217"/>
-            </a:avLst>
-          </a:prstGeom>
-          <a:solidFill>
-            <a:srgbClr val="FDF0E4"/>
-          </a:solidFill>
-          <a:ln/>
-        </p:spPr>
-        <p:txBody>
-          <a:bodyPr/>
-          <a:p/>
-        </p:txBody>
-      </p:sp>
-      <p:sp>
-        <p:nvSpPr>
-          <p:cNvPr id="9" name="Text 7"/>
-          <p:cNvSpPr txBox="1"/>
-          <p:nvPr/>
-        </p:nvSpPr>
-        <p:spPr>
-          <a:xfrm>
-            <a:off x="6446520" y="1664208"/>
-            <a:ext cx="4937760" cy="411480"/>
-          </a:xfrm>
-          <a:prstGeom prst="rect">
-            <a:avLst/>
-          </a:prstGeom>
-          <a:noFill/>
-          <a:ln/>
-        </p:spPr>
-        <p:txBody>
-          <a:bodyPr wrap="square" lIns="0" tIns="0" rIns="0" bIns="0" rtlCol="0" anchor="ctr"/>
-          <a:lstStyle/>
-          <a:p>
-            <a:pPr indent="0" marL="0">
-              <a:buNone/>
-            </a:pPr>
-            <a:r>
-              <a:rPr lang="en-US" sz="1600" b="1" dirty="0">
-                <a:solidFill>
-                  <a:srgbClr val="B4540A"/>
-                </a:solidFill>
-                <a:latin typeface="Calibri" pitchFamily="34" charset="0"/>
-                <a:ea typeface="Calibri" pitchFamily="34" charset="-122"/>
-                <a:cs typeface="Calibri" pitchFamily="34" charset="-120"/>
-              </a:rPr>
-              <a:t>Networked PCs — confirm first</a:t>
-            </a:r>
-            <a:endParaRPr lang="en-US" sz="1600" dirty="0"/>
-          </a:p>
-        </p:txBody>
-      </p:sp>
-      <p:sp>
-        <p:nvSpPr>
-          <p:cNvPr id="10" name="Text 8"/>
-          <p:cNvSpPr txBox="1"/>
-          <p:nvPr/>
-        </p:nvSpPr>
-        <p:spPr>
-          <a:xfrm>
-            <a:off x="6446520" y="2148840"/>
-            <a:ext cx="4937760" cy="1463040"/>
-          </a:xfrm>
-          <a:prstGeom prst="rect">
-            <a:avLst/>
-          </a:prstGeom>
-          <a:noFill/>
-          <a:ln/>
-        </p:spPr>
-        <p:txBody>
-          <a:bodyPr wrap="square" lIns="0" tIns="0" rIns="0" bIns="0" rtlCol="0" anchor="ctr"/>
-          <a:lstStyle/>
-          <a:p>
-            <a:pPr indent="0" marL="0">
-              <a:buNone/>
-            </a:pPr>
-            <a:r>
-              <a:rPr lang="en-US" sz="1200" dirty="0">
-                <a:solidFill>
-                  <a:srgbClr val="17272E"/>
-                </a:solidFill>
-                <a:latin typeface="Calibri" pitchFamily="34" charset="0"/>
-                <a:ea typeface="Calibri" pitchFamily="34" charset="-122"/>
-                <a:cs typeface="Calibri" pitchFamily="34" charset="-120"/>
-              </a:rPr>
-              <a:t>The tool is meant for non-networked PCs. If a network connection is active, the card says so and needs a confirmation tick before enrolling. That fact is recorded with the enrolment.</a:t>
-            </a:r>
-            <a:endParaRPr lang="en-US" sz="1300" dirty="0"/>
-          </a:p>
-        </p:txBody>
-      </p:sp>
-      <p:sp>
-        <p:nvSpPr>
-          <p:cNvPr id="11" name="Shape 9"/>
-          <p:cNvSpPr/>
-          <p:nvPr/>
-        </p:nvSpPr>
-        <p:spPr>
-          <a:xfrm>
-            <a:off x="548640" y="3749040"/>
-            <a:ext cx="5486400" cy="2103120"/>
-          </a:xfrm>
-          <a:prstGeom prst="roundRect">
-            <a:avLst>
-              <a:gd name="adj" fmla="val 5217"/>
-            </a:avLst>
-          </a:prstGeom>
-          <a:solidFill>
-            <a:srgbClr val="E5F2F0"/>
-          </a:solidFill>
-          <a:ln/>
-        </p:spPr>
-        <p:txBody>
-          <a:bodyPr/>
-          <a:p/>
-        </p:txBody>
-      </p:sp>
-      <p:sp>
-        <p:nvSpPr>
-          <p:cNvPr id="12" name="Text 10"/>
-          <p:cNvSpPr txBox="1"/>
-          <p:nvPr/>
-        </p:nvSpPr>
-        <p:spPr>
-          <a:xfrm>
-            <a:off x="822960" y="3950208"/>
-            <a:ext cx="4937760" cy="411480"/>
-          </a:xfrm>
-          <a:prstGeom prst="rect">
-            <a:avLst/>
-          </a:prstGeom>
-          <a:noFill/>
-          <a:ln/>
-        </p:spPr>
-        <p:txBody>
-          <a:bodyPr wrap="square" lIns="0" tIns="0" rIns="0" bIns="0" rtlCol="0" anchor="ctr"/>
-          <a:lstStyle/>
-          <a:p>
-            <a:pPr indent="0" marL="0">
-              <a:buNone/>
-            </a:pPr>
-            <a:r>
-              <a:rPr lang="en-US" sz="1600" b="1" dirty="0">
-                <a:solidFill>
-                  <a:srgbClr val="01485C"/>
-                </a:solidFill>
-                <a:latin typeface="Calibri" pitchFamily="34" charset="0"/>
-                <a:ea typeface="Calibri" pitchFamily="34" charset="-122"/>
-                <a:cs typeface="Calibri" pitchFamily="34" charset="-120"/>
-              </a:rPr>
-              <a:t>Enrolling</a:t>
-            </a:r>
-            <a:endParaRPr lang="en-US" sz="1600" dirty="0"/>
-          </a:p>
-        </p:txBody>
-      </p:sp>
-      <p:sp>
-        <p:nvSpPr>
-          <p:cNvPr id="13" name="Text 11"/>
-          <p:cNvSpPr txBox="1"/>
-          <p:nvPr/>
-        </p:nvSpPr>
-        <p:spPr>
-          <a:xfrm>
-            <a:off x="822960" y="4434840"/>
-            <a:ext cx="4937760" cy="1463040"/>
-          </a:xfrm>
-          <a:prstGeom prst="rect">
-            <a:avLst/>
-          </a:prstGeom>
-          <a:noFill/>
-          <a:ln/>
-        </p:spPr>
-        <p:txBody>
-          <a:bodyPr wrap="square" lIns="0" tIns="0" rIns="0" bIns="0" rtlCol="0" anchor="ctr"/>
-          <a:lstStyle/>
-          <a:p>
-            <a:pPr indent="0" marL="0">
-              <a:buNone/>
-            </a:pPr>
-            <a:r>
-              <a:rPr lang="en-US" sz="1200" dirty="0">
-                <a:solidFill>
-                  <a:srgbClr val="17272E"/>
-                </a:solidFill>
-                <a:latin typeface="Calibri" pitchFamily="34" charset="0"/>
-                <a:ea typeface="Calibri" pitchFamily="34" charset="-122"/>
-                <a:cs typeface="Calibri" pitchFamily="34" charset="-120"/>
-              </a:rPr>
-              <a:t>A PoC team member types the enrolment password (very first use: choose it and confirm it), adds an optional note such as the room or bench, and clicks Enrol this PC. The page reloads with the normal drop-down.</a:t>
-            </a:r>
-            <a:endParaRPr lang="en-US" sz="1300" dirty="0"/>
-          </a:p>
-        </p:txBody>
-      </p:sp>
-      <p:sp>
-        <p:nvSpPr>
-          <p:cNvPr id="14" name="Shape 12"/>
-          <p:cNvSpPr/>
-          <p:nvPr/>
-        </p:nvSpPr>
-        <p:spPr>
-          <a:xfrm>
-            <a:off x="6172200" y="3749040"/>
-            <a:ext cx="5486400" cy="2103120"/>
-          </a:xfrm>
-          <a:prstGeom prst="roundRect">
-            <a:avLst>
-              <a:gd name="adj" fmla="val 5217"/>
-            </a:avLst>
-          </a:prstGeom>
-          <a:solidFill>
-            <a:srgbClr val="E5F2F0"/>
-          </a:solidFill>
-          <a:ln/>
-        </p:spPr>
-        <p:txBody>
-          <a:bodyPr/>
-          <a:p/>
-        </p:txBody>
-      </p:sp>
-      <p:sp>
-        <p:nvSpPr>
-          <p:cNvPr id="15" name="Text 13"/>
-          <p:cNvSpPr txBox="1"/>
-          <p:nvPr/>
-        </p:nvSpPr>
-        <p:spPr>
-          <a:xfrm>
-            <a:off x="6446520" y="3950208"/>
-            <a:ext cx="4937760" cy="411480"/>
-          </a:xfrm>
-          <a:prstGeom prst="rect">
-            <a:avLst/>
-          </a:prstGeom>
-          <a:noFill/>
-          <a:ln/>
-        </p:spPr>
-        <p:txBody>
-          <a:bodyPr wrap="square" lIns="0" tIns="0" rIns="0" bIns="0" rtlCol="0" anchor="ctr"/>
-          <a:lstStyle/>
-          <a:p>
-            <a:pPr indent="0" marL="0">
-              <a:buNone/>
-            </a:pPr>
-            <a:r>
-              <a:rPr lang="en-US" sz="1600" b="1" dirty="0">
-                <a:solidFill>
-                  <a:srgbClr val="01485C"/>
-                </a:solidFill>
-                <a:latin typeface="Calibri" pitchFamily="34" charset="0"/>
-                <a:ea typeface="Calibri" pitchFamily="34" charset="-122"/>
-                <a:cs typeface="Calibri" pitchFamily="34" charset="-120"/>
-              </a:rPr>
-              <a:t>Renewal and the Enrolled PCs list</a:t>
-            </a:r>
-            <a:endParaRPr lang="en-US" sz="1600" dirty="0"/>
-          </a:p>
-        </p:txBody>
-      </p:sp>
-      <p:sp>
-        <p:nvSpPr>
-          <p:cNvPr id="16" name="Text 14"/>
-          <p:cNvSpPr txBox="1"/>
-          <p:nvPr/>
-        </p:nvSpPr>
-        <p:spPr>
-          <a:xfrm>
-            <a:off x="6446520" y="4434840"/>
-            <a:ext cx="4937760" cy="1463040"/>
-          </a:xfrm>
-          <a:prstGeom prst="rect">
-            <a:avLst/>
-          </a:prstGeom>
-          <a:noFill/>
-          <a:ln/>
-        </p:spPr>
-        <p:txBody>
-          <a:bodyPr wrap="square" lIns="0" tIns="0" rIns="0" bIns="0" rtlCol="0" anchor="ctr"/>
-          <a:lstStyle/>
-          <a:p>
-            <a:pPr indent="0" marL="0">
-              <a:buNone/>
-            </a:pPr>
-            <a:r>
-              <a:rPr lang="en-US" sz="1200" dirty="0">
-                <a:solidFill>
-                  <a:srgbClr val="17272E"/>
-                </a:solidFill>
-                <a:latin typeface="Calibri" pitchFamily="34" charset="0"/>
-                <a:ea typeface="Calibri" pitchFamily="34" charset="-122"/>
-                <a:cs typeface="Calibri" pitchFamily="34" charset="-120"/>
-              </a:rPr>
-              <a:t>Enrolment lasts 12 months; a renewal notice appears in the last 30 days with a Renew link. “Enrolled PCs” at the foot of the page lists every PC with its version and last use, and can revoke one.</a:t>
-            </a:r>
-            <a:endParaRPr lang="en-US" sz="1300" dirty="0"/>
-          </a:p>
-        </p:txBody>
-      </p:sp>
-      <p:sp>
-        <p:nvSpPr>
-          <p:cNvPr id="17" name="Shape 15"/>
-          <p:cNvSpPr/>
-          <p:nvPr/>
-        </p:nvSpPr>
-        <p:spPr>
-          <a:xfrm>
-            <a:off x="0" y="6793992"/>
-            <a:ext cx="2040636" cy="64008"/>
-          </a:xfrm>
-          <a:prstGeom prst="rect">
-            <a:avLst/>
-          </a:prstGeom>
-          <a:solidFill>
-            <a:srgbClr val="01485C"/>
-          </a:solidFill>
-          <a:ln/>
-        </p:spPr>
-      </p:sp>
-      <p:sp>
-        <p:nvSpPr>
-          <p:cNvPr id="18" name="Shape 16"/>
-          <p:cNvSpPr/>
-          <p:nvPr/>
-        </p:nvSpPr>
-        <p:spPr>
-          <a:xfrm>
-            <a:off x="2031492" y="6793992"/>
-            <a:ext cx="2040636" cy="64008"/>
-          </a:xfrm>
-          <a:prstGeom prst="rect">
-            <a:avLst/>
-          </a:prstGeom>
-          <a:solidFill>
-            <a:srgbClr val="146175"/>
-          </a:solidFill>
-          <a:ln/>
-        </p:spPr>
-      </p:sp>
-      <p:sp>
-        <p:nvSpPr>
-          <p:cNvPr id="19" name="Shape 17"/>
-          <p:cNvSpPr/>
-          <p:nvPr/>
-        </p:nvSpPr>
-        <p:spPr>
-          <a:xfrm>
-            <a:off x="4062984" y="6793992"/>
-            <a:ext cx="2040636" cy="64008"/>
-          </a:xfrm>
-          <a:prstGeom prst="rect">
-            <a:avLst/>
-          </a:prstGeom>
-          <a:solidFill>
-            <a:srgbClr val="11B5AE"/>
-          </a:solidFill>
-          <a:ln/>
-        </p:spPr>
-      </p:sp>
-      <p:sp>
-        <p:nvSpPr>
-          <p:cNvPr id="20" name="Shape 18"/>
-          <p:cNvSpPr/>
-          <p:nvPr/>
-        </p:nvSpPr>
-        <p:spPr>
-          <a:xfrm>
-            <a:off x="6094476" y="6793992"/>
-            <a:ext cx="2040636" cy="64008"/>
-          </a:xfrm>
-          <a:prstGeom prst="rect">
-            <a:avLst/>
-          </a:prstGeom>
-          <a:solidFill>
-            <a:srgbClr val="6CCAD4"/>
-          </a:solidFill>
-          <a:ln/>
-        </p:spPr>
-      </p:sp>
-      <p:sp>
-        <p:nvSpPr>
-          <p:cNvPr id="21" name="Shape 19"/>
-          <p:cNvSpPr/>
-          <p:nvPr/>
-        </p:nvSpPr>
-        <p:spPr>
-          <a:xfrm>
-            <a:off x="8125968" y="6793992"/>
-            <a:ext cx="2040636" cy="64008"/>
-          </a:xfrm>
-          <a:prstGeom prst="rect">
-            <a:avLst/>
-          </a:prstGeom>
-          <a:solidFill>
-            <a:srgbClr val="7FC04C"/>
-          </a:solidFill>
-          <a:ln/>
-        </p:spPr>
-      </p:sp>
-      <p:sp>
-        <p:nvSpPr>
-          <p:cNvPr id="22" name="Shape 20"/>
           <p:cNvSpPr/>
           <p:nvPr/>
         </p:nvSpPr>
@@ -14809,6 +16079,664 @@
 </file>
 
 <file path=ppt/slides/slide4.xml><?xml version="1.0" encoding="utf-8"?>
+<p:sld xmlns:a="http://schemas.openxmlformats.org/drawingml/2006/main" xmlns:p="http://schemas.openxmlformats.org/presentationml/2006/main" xmlns:r="http://schemas.openxmlformats.org/officeDocument/2006/relationships">
+  <p:cSld>
+    <p:spTree>
+      <p:nvGrpSpPr>
+        <p:cNvPr id="1" name=""/>
+        <p:cNvGrpSpPr/>
+        <p:nvPr/>
+      </p:nvGrpSpPr>
+      <p:grpSpPr/>
+      <p:sp>
+        <p:nvSpPr>
+          <p:cNvPr id="2" name="Text 0"/>
+          <p:cNvSpPr txBox="1"/>
+          <p:nvPr/>
+        </p:nvSpPr>
+        <p:spPr>
+          <a:xfrm>
+            <a:off x="548640" y="320040"/>
+            <a:ext cx="11064240" cy="685800"/>
+          </a:xfrm>
+          <a:prstGeom prst="rect">
+            <a:avLst/>
+          </a:prstGeom>
+          <a:noFill/>
+          <a:ln/>
+        </p:spPr>
+        <p:txBody>
+          <a:bodyPr wrap="square" lIns="0" tIns="0" rIns="0" bIns="0" rtlCol="0" anchor="ctr"/>
+          <a:lstStyle/>
+          <a:p>
+            <a:pPr indent="0" marL="0">
+              <a:buNone/>
+            </a:pPr>
+            <a:r>
+              <a:rPr lang="en-US" sz="3000" b="1" dirty="0">
+                <a:solidFill>
+                  <a:srgbClr val="01485C"/>
+                </a:solidFill>
+                <a:latin typeface="Calibri" pitchFamily="34" charset="0"/>
+                <a:ea typeface="Calibri" pitchFamily="34" charset="-122"/>
+                <a:cs typeface="Calibri" pitchFamily="34" charset="-120"/>
+              </a:rPr>
+              <a:t>Enrolling a PC (first use on a computer)</a:t>
+            </a:r>
+            <a:endParaRPr lang="en-US" sz="3000" dirty="0"/>
+          </a:p>
+        </p:txBody>
+      </p:sp>
+      <p:sp>
+        <p:nvSpPr>
+          <p:cNvPr id="3" name="Shape 1"/>
+          <p:cNvSpPr/>
+          <p:nvPr/>
+        </p:nvSpPr>
+        <p:spPr>
+          <a:xfrm>
+            <a:off x="9784080" y="384048"/>
+            <a:ext cx="1828800" cy="457200"/>
+          </a:xfrm>
+          <a:prstGeom prst="roundRect">
+            <a:avLst>
+              <a:gd name="adj" fmla="val 50000"/>
+            </a:avLst>
+          </a:prstGeom>
+          <a:solidFill>
+            <a:srgbClr val="01485C"/>
+          </a:solidFill>
+          <a:ln/>
+        </p:spPr>
+        <p:txBody>
+          <a:bodyPr/>
+          <a:p/>
+        </p:txBody>
+      </p:sp>
+      <p:sp>
+        <p:nvSpPr>
+          <p:cNvPr id="4" name="Text 2"/>
+          <p:cNvSpPr txBox="1"/>
+          <p:nvPr/>
+        </p:nvSpPr>
+        <p:spPr>
+          <a:xfrm>
+            <a:off x="9784080" y="384048"/>
+            <a:ext cx="1828800" cy="457200"/>
+          </a:xfrm>
+          <a:prstGeom prst="rect">
+            <a:avLst/>
+          </a:prstGeom>
+          <a:noFill/>
+          <a:ln/>
+        </p:spPr>
+        <p:txBody>
+          <a:bodyPr wrap="square" lIns="0" tIns="0" rIns="0" bIns="0" rtlCol="0" anchor="ctr"/>
+          <a:lstStyle/>
+          <a:p>
+            <a:pPr algn="ctr" indent="0" marL="0">
+              <a:buNone/>
+            </a:pPr>
+            <a:r>
+              <a:rPr lang="en-US" sz="1500" b="1" dirty="0">
+                <a:solidFill>
+                  <a:srgbClr val="FFFFFF"/>
+                </a:solidFill>
+                <a:latin typeface="Calibri" pitchFamily="34" charset="0"/>
+                <a:ea typeface="Calibri" pitchFamily="34" charset="-122"/>
+                <a:cs typeface="Calibri" pitchFamily="34" charset="-120"/>
+              </a:rPr>
+              <a:t>BOTH</a:t>
+            </a:r>
+            <a:endParaRPr lang="en-US" sz="1500" dirty="0"/>
+          </a:p>
+        </p:txBody>
+      </p:sp>
+      <p:sp>
+        <p:nvSpPr>
+          <p:cNvPr id="5" name="Shape 3"/>
+          <p:cNvSpPr/>
+          <p:nvPr/>
+        </p:nvSpPr>
+        <p:spPr>
+          <a:xfrm>
+            <a:off x="548640" y="1463040"/>
+            <a:ext cx="5486400" cy="2103120"/>
+          </a:xfrm>
+          <a:prstGeom prst="roundRect">
+            <a:avLst>
+              <a:gd name="adj" fmla="val 5217"/>
+            </a:avLst>
+          </a:prstGeom>
+          <a:solidFill>
+            <a:srgbClr val="E5F2F0"/>
+          </a:solidFill>
+          <a:ln/>
+        </p:spPr>
+        <p:txBody>
+          <a:bodyPr/>
+          <a:p/>
+        </p:txBody>
+      </p:sp>
+      <p:sp>
+        <p:nvSpPr>
+          <p:cNvPr id="6" name="Text 4"/>
+          <p:cNvSpPr txBox="1"/>
+          <p:nvPr/>
+        </p:nvSpPr>
+        <p:spPr>
+          <a:xfrm>
+            <a:off x="822960" y="1664208"/>
+            <a:ext cx="4937760" cy="411480"/>
+          </a:xfrm>
+          <a:prstGeom prst="rect">
+            <a:avLst/>
+          </a:prstGeom>
+          <a:noFill/>
+          <a:ln/>
+        </p:spPr>
+        <p:txBody>
+          <a:bodyPr wrap="square" lIns="0" tIns="0" rIns="0" bIns="0" rtlCol="0" anchor="ctr"/>
+          <a:lstStyle/>
+          <a:p>
+            <a:pPr indent="0" marL="0">
+              <a:buNone/>
+            </a:pPr>
+            <a:r>
+              <a:rPr lang="en-US" sz="1600" b="1" dirty="0">
+                <a:solidFill>
+                  <a:srgbClr val="01485C"/>
+                </a:solidFill>
+                <a:latin typeface="Calibri" pitchFamily="34" charset="0"/>
+                <a:ea typeface="Calibri" pitchFamily="34" charset="-122"/>
+                <a:cs typeface="Calibri" pitchFamily="34" charset="-120"/>
+              </a:rPr>
+              <a:t>The lock card</a:t>
+            </a:r>
+            <a:endParaRPr lang="en-US" sz="1600" dirty="0"/>
+          </a:p>
+        </p:txBody>
+      </p:sp>
+      <p:sp>
+        <p:nvSpPr>
+          <p:cNvPr id="7" name="Text 5"/>
+          <p:cNvSpPr txBox="1"/>
+          <p:nvPr/>
+        </p:nvSpPr>
+        <p:spPr>
+          <a:xfrm>
+            <a:off x="822960" y="2148840"/>
+            <a:ext cx="4937760" cy="1463040"/>
+          </a:xfrm>
+          <a:prstGeom prst="rect">
+            <a:avLst/>
+          </a:prstGeom>
+          <a:noFill/>
+          <a:ln/>
+        </p:spPr>
+        <p:txBody>
+          <a:bodyPr wrap="square" lIns="0" tIns="0" rIns="0" bIns="0" rtlCol="0" anchor="ctr"/>
+          <a:lstStyle/>
+          <a:p>
+            <a:pPr indent="0" marL="0">
+              <a:buNone/>
+            </a:pPr>
+            <a:r>
+              <a:rPr lang="en-US" sz="1200" dirty="0">
+                <a:solidFill>
+                  <a:srgbClr val="17272E"/>
+                </a:solidFill>
+                <a:latin typeface="Calibri" pitchFamily="34" charset="0"/>
+                <a:ea typeface="Calibri" pitchFamily="34" charset="-122"/>
+                <a:cs typeface="Calibri" pitchFamily="34" charset="-120"/>
+              </a:rPr>
+              <a:t>On a PC that is not enrolled, the selection page shows PC NOT ENROLLED with the machine ID and hostname instead of the report-type drop-down. Nothing runs until the PC is enrolled — the engines show a lock page too.</a:t>
+            </a:r>
+            <a:endParaRPr lang="en-US" sz="1300" dirty="0"/>
+          </a:p>
+        </p:txBody>
+      </p:sp>
+      <p:sp>
+        <p:nvSpPr>
+          <p:cNvPr id="8" name="Shape 6"/>
+          <p:cNvSpPr/>
+          <p:nvPr/>
+        </p:nvSpPr>
+        <p:spPr>
+          <a:xfrm>
+            <a:off x="6172200" y="1463040"/>
+            <a:ext cx="5486400" cy="2103120"/>
+          </a:xfrm>
+          <a:prstGeom prst="roundRect">
+            <a:avLst>
+              <a:gd name="adj" fmla="val 5217"/>
+            </a:avLst>
+          </a:prstGeom>
+          <a:solidFill>
+            <a:srgbClr val="FDF0E4"/>
+          </a:solidFill>
+          <a:ln/>
+        </p:spPr>
+        <p:txBody>
+          <a:bodyPr/>
+          <a:p/>
+        </p:txBody>
+      </p:sp>
+      <p:sp>
+        <p:nvSpPr>
+          <p:cNvPr id="9" name="Text 7"/>
+          <p:cNvSpPr txBox="1"/>
+          <p:nvPr/>
+        </p:nvSpPr>
+        <p:spPr>
+          <a:xfrm>
+            <a:off x="6446520" y="1664208"/>
+            <a:ext cx="4937760" cy="411480"/>
+          </a:xfrm>
+          <a:prstGeom prst="rect">
+            <a:avLst/>
+          </a:prstGeom>
+          <a:noFill/>
+          <a:ln/>
+        </p:spPr>
+        <p:txBody>
+          <a:bodyPr wrap="square" lIns="0" tIns="0" rIns="0" bIns="0" rtlCol="0" anchor="ctr"/>
+          <a:lstStyle/>
+          <a:p>
+            <a:pPr indent="0" marL="0">
+              <a:buNone/>
+            </a:pPr>
+            <a:r>
+              <a:rPr lang="en-US" sz="1600" b="1" dirty="0">
+                <a:solidFill>
+                  <a:srgbClr val="B4540A"/>
+                </a:solidFill>
+                <a:latin typeface="Calibri" pitchFamily="34" charset="0"/>
+                <a:ea typeface="Calibri" pitchFamily="34" charset="-122"/>
+                <a:cs typeface="Calibri" pitchFamily="34" charset="-120"/>
+              </a:rPr>
+              <a:t>Networked PCs — confirm first</a:t>
+            </a:r>
+            <a:endParaRPr lang="en-US" sz="1600" dirty="0"/>
+          </a:p>
+        </p:txBody>
+      </p:sp>
+      <p:sp>
+        <p:nvSpPr>
+          <p:cNvPr id="10" name="Text 8"/>
+          <p:cNvSpPr txBox="1"/>
+          <p:nvPr/>
+        </p:nvSpPr>
+        <p:spPr>
+          <a:xfrm>
+            <a:off x="6446520" y="2148840"/>
+            <a:ext cx="4937760" cy="1463040"/>
+          </a:xfrm>
+          <a:prstGeom prst="rect">
+            <a:avLst/>
+          </a:prstGeom>
+          <a:noFill/>
+          <a:ln/>
+        </p:spPr>
+        <p:txBody>
+          <a:bodyPr wrap="square" lIns="0" tIns="0" rIns="0" bIns="0" rtlCol="0" anchor="ctr"/>
+          <a:lstStyle/>
+          <a:p>
+            <a:pPr indent="0" marL="0">
+              <a:buNone/>
+            </a:pPr>
+            <a:r>
+              <a:rPr lang="en-US" sz="1200" dirty="0">
+                <a:solidFill>
+                  <a:srgbClr val="17272E"/>
+                </a:solidFill>
+                <a:latin typeface="Calibri" pitchFamily="34" charset="0"/>
+                <a:ea typeface="Calibri" pitchFamily="34" charset="-122"/>
+                <a:cs typeface="Calibri" pitchFamily="34" charset="-120"/>
+              </a:rPr>
+              <a:t>The tool is meant for non-networked PCs. If a network connection is active, the card says so and needs a confirmation tick before enrolling. That fact is recorded with the enrolment.</a:t>
+            </a:r>
+            <a:endParaRPr lang="en-US" sz="1300" dirty="0"/>
+          </a:p>
+        </p:txBody>
+      </p:sp>
+      <p:sp>
+        <p:nvSpPr>
+          <p:cNvPr id="11" name="Shape 9"/>
+          <p:cNvSpPr/>
+          <p:nvPr/>
+        </p:nvSpPr>
+        <p:spPr>
+          <a:xfrm>
+            <a:off x="548640" y="3749040"/>
+            <a:ext cx="5486400" cy="2103120"/>
+          </a:xfrm>
+          <a:prstGeom prst="roundRect">
+            <a:avLst>
+              <a:gd name="adj" fmla="val 5217"/>
+            </a:avLst>
+          </a:prstGeom>
+          <a:solidFill>
+            <a:srgbClr val="E5F2F0"/>
+          </a:solidFill>
+          <a:ln/>
+        </p:spPr>
+        <p:txBody>
+          <a:bodyPr/>
+          <a:p/>
+        </p:txBody>
+      </p:sp>
+      <p:sp>
+        <p:nvSpPr>
+          <p:cNvPr id="12" name="Text 10"/>
+          <p:cNvSpPr txBox="1"/>
+          <p:nvPr/>
+        </p:nvSpPr>
+        <p:spPr>
+          <a:xfrm>
+            <a:off x="822960" y="3950208"/>
+            <a:ext cx="4937760" cy="411480"/>
+          </a:xfrm>
+          <a:prstGeom prst="rect">
+            <a:avLst/>
+          </a:prstGeom>
+          <a:noFill/>
+          <a:ln/>
+        </p:spPr>
+        <p:txBody>
+          <a:bodyPr wrap="square" lIns="0" tIns="0" rIns="0" bIns="0" rtlCol="0" anchor="ctr"/>
+          <a:lstStyle/>
+          <a:p>
+            <a:pPr indent="0" marL="0">
+              <a:buNone/>
+            </a:pPr>
+            <a:r>
+              <a:rPr lang="en-US" sz="1600" b="1" dirty="0">
+                <a:solidFill>
+                  <a:srgbClr val="01485C"/>
+                </a:solidFill>
+                <a:latin typeface="Calibri" pitchFamily="34" charset="0"/>
+                <a:ea typeface="Calibri" pitchFamily="34" charset="-122"/>
+                <a:cs typeface="Calibri" pitchFamily="34" charset="-120"/>
+              </a:rPr>
+              <a:t>Enrolling</a:t>
+            </a:r>
+            <a:endParaRPr lang="en-US" sz="1600" dirty="0"/>
+          </a:p>
+        </p:txBody>
+      </p:sp>
+      <p:sp>
+        <p:nvSpPr>
+          <p:cNvPr id="13" name="Text 11"/>
+          <p:cNvSpPr txBox="1"/>
+          <p:nvPr/>
+        </p:nvSpPr>
+        <p:spPr>
+          <a:xfrm>
+            <a:off x="822960" y="4434840"/>
+            <a:ext cx="4937760" cy="1463040"/>
+          </a:xfrm>
+          <a:prstGeom prst="rect">
+            <a:avLst/>
+          </a:prstGeom>
+          <a:noFill/>
+          <a:ln/>
+        </p:spPr>
+        <p:txBody>
+          <a:bodyPr wrap="square" lIns="0" tIns="0" rIns="0" bIns="0" rtlCol="0" anchor="ctr"/>
+          <a:lstStyle/>
+          <a:p>
+            <a:pPr indent="0" marL="0">
+              <a:buNone/>
+            </a:pPr>
+            <a:r>
+              <a:rPr lang="en-US" sz="1200" dirty="0">
+                <a:solidFill>
+                  <a:srgbClr val="17272E"/>
+                </a:solidFill>
+                <a:latin typeface="Calibri" pitchFamily="34" charset="0"/>
+                <a:ea typeface="Calibri" pitchFamily="34" charset="-122"/>
+                <a:cs typeface="Calibri" pitchFamily="34" charset="-120"/>
+              </a:rPr>
+              <a:t>A PoC team member types the enrolment password (very first use: choose it and confirm it), adds an optional note such as the room or bench, and clicks Enrol this PC. The page reloads with the normal drop-down.</a:t>
+            </a:r>
+            <a:endParaRPr lang="en-US" sz="1300" dirty="0"/>
+          </a:p>
+        </p:txBody>
+      </p:sp>
+      <p:sp>
+        <p:nvSpPr>
+          <p:cNvPr id="14" name="Shape 12"/>
+          <p:cNvSpPr/>
+          <p:nvPr/>
+        </p:nvSpPr>
+        <p:spPr>
+          <a:xfrm>
+            <a:off x="6172200" y="3749040"/>
+            <a:ext cx="5486400" cy="2103120"/>
+          </a:xfrm>
+          <a:prstGeom prst="roundRect">
+            <a:avLst>
+              <a:gd name="adj" fmla="val 5217"/>
+            </a:avLst>
+          </a:prstGeom>
+          <a:solidFill>
+            <a:srgbClr val="E5F2F0"/>
+          </a:solidFill>
+          <a:ln/>
+        </p:spPr>
+        <p:txBody>
+          <a:bodyPr/>
+          <a:p/>
+        </p:txBody>
+      </p:sp>
+      <p:sp>
+        <p:nvSpPr>
+          <p:cNvPr id="15" name="Text 13"/>
+          <p:cNvSpPr txBox="1"/>
+          <p:nvPr/>
+        </p:nvSpPr>
+        <p:spPr>
+          <a:xfrm>
+            <a:off x="6446520" y="3950208"/>
+            <a:ext cx="4937760" cy="411480"/>
+          </a:xfrm>
+          <a:prstGeom prst="rect">
+            <a:avLst/>
+          </a:prstGeom>
+          <a:noFill/>
+          <a:ln/>
+        </p:spPr>
+        <p:txBody>
+          <a:bodyPr wrap="square" lIns="0" tIns="0" rIns="0" bIns="0" rtlCol="0" anchor="ctr"/>
+          <a:lstStyle/>
+          <a:p>
+            <a:pPr indent="0" marL="0">
+              <a:buNone/>
+            </a:pPr>
+            <a:r>
+              <a:rPr lang="en-US" sz="1600" b="1" dirty="0">
+                <a:solidFill>
+                  <a:srgbClr val="01485C"/>
+                </a:solidFill>
+                <a:latin typeface="Calibri" pitchFamily="34" charset="0"/>
+                <a:ea typeface="Calibri" pitchFamily="34" charset="-122"/>
+                <a:cs typeface="Calibri" pitchFamily="34" charset="-120"/>
+              </a:rPr>
+              <a:t>Renewal and the Enrolled PCs list</a:t>
+            </a:r>
+            <a:endParaRPr lang="en-US" sz="1600" dirty="0"/>
+          </a:p>
+        </p:txBody>
+      </p:sp>
+      <p:sp>
+        <p:nvSpPr>
+          <p:cNvPr id="16" name="Text 14"/>
+          <p:cNvSpPr txBox="1"/>
+          <p:nvPr/>
+        </p:nvSpPr>
+        <p:spPr>
+          <a:xfrm>
+            <a:off x="6446520" y="4434840"/>
+            <a:ext cx="4937760" cy="1463040"/>
+          </a:xfrm>
+          <a:prstGeom prst="rect">
+            <a:avLst/>
+          </a:prstGeom>
+          <a:noFill/>
+          <a:ln/>
+        </p:spPr>
+        <p:txBody>
+          <a:bodyPr wrap="square" lIns="0" tIns="0" rIns="0" bIns="0" rtlCol="0" anchor="ctr"/>
+          <a:lstStyle/>
+          <a:p>
+            <a:pPr indent="0" marL="0">
+              <a:buNone/>
+            </a:pPr>
+            <a:r>
+              <a:rPr lang="en-US" sz="1200" dirty="0">
+                <a:solidFill>
+                  <a:srgbClr val="17272E"/>
+                </a:solidFill>
+                <a:latin typeface="Calibri" pitchFamily="34" charset="0"/>
+                <a:ea typeface="Calibri" pitchFamily="34" charset="-122"/>
+                <a:cs typeface="Calibri" pitchFamily="34" charset="-120"/>
+              </a:rPr>
+              <a:t>Enrolment lasts 12 months; a renewal notice appears in the last 30 days with a Renew link. “Enrolled PCs” at the foot of the page lists every PC with its version and last use, and can revoke one.</a:t>
+            </a:r>
+            <a:endParaRPr lang="en-US" sz="1300" dirty="0"/>
+          </a:p>
+        </p:txBody>
+      </p:sp>
+      <p:sp>
+        <p:nvSpPr>
+          <p:cNvPr id="17" name="Shape 15"/>
+          <p:cNvSpPr/>
+          <p:nvPr/>
+        </p:nvSpPr>
+        <p:spPr>
+          <a:xfrm>
+            <a:off x="0" y="6793992"/>
+            <a:ext cx="2040636" cy="64008"/>
+          </a:xfrm>
+          <a:prstGeom prst="rect">
+            <a:avLst/>
+          </a:prstGeom>
+          <a:solidFill>
+            <a:srgbClr val="01485C"/>
+          </a:solidFill>
+          <a:ln/>
+        </p:spPr>
+      </p:sp>
+      <p:sp>
+        <p:nvSpPr>
+          <p:cNvPr id="18" name="Shape 16"/>
+          <p:cNvSpPr/>
+          <p:nvPr/>
+        </p:nvSpPr>
+        <p:spPr>
+          <a:xfrm>
+            <a:off x="2031492" y="6793992"/>
+            <a:ext cx="2040636" cy="64008"/>
+          </a:xfrm>
+          <a:prstGeom prst="rect">
+            <a:avLst/>
+          </a:prstGeom>
+          <a:solidFill>
+            <a:srgbClr val="146175"/>
+          </a:solidFill>
+          <a:ln/>
+        </p:spPr>
+      </p:sp>
+      <p:sp>
+        <p:nvSpPr>
+          <p:cNvPr id="19" name="Shape 17"/>
+          <p:cNvSpPr/>
+          <p:nvPr/>
+        </p:nvSpPr>
+        <p:spPr>
+          <a:xfrm>
+            <a:off x="4062984" y="6793992"/>
+            <a:ext cx="2040636" cy="64008"/>
+          </a:xfrm>
+          <a:prstGeom prst="rect">
+            <a:avLst/>
+          </a:prstGeom>
+          <a:solidFill>
+            <a:srgbClr val="11B5AE"/>
+          </a:solidFill>
+          <a:ln/>
+        </p:spPr>
+      </p:sp>
+      <p:sp>
+        <p:nvSpPr>
+          <p:cNvPr id="20" name="Shape 18"/>
+          <p:cNvSpPr/>
+          <p:nvPr/>
+        </p:nvSpPr>
+        <p:spPr>
+          <a:xfrm>
+            <a:off x="6094476" y="6793992"/>
+            <a:ext cx="2040636" cy="64008"/>
+          </a:xfrm>
+          <a:prstGeom prst="rect">
+            <a:avLst/>
+          </a:prstGeom>
+          <a:solidFill>
+            <a:srgbClr val="6CCAD4"/>
+          </a:solidFill>
+          <a:ln/>
+        </p:spPr>
+      </p:sp>
+      <p:sp>
+        <p:nvSpPr>
+          <p:cNvPr id="21" name="Shape 19"/>
+          <p:cNvSpPr/>
+          <p:nvPr/>
+        </p:nvSpPr>
+        <p:spPr>
+          <a:xfrm>
+            <a:off x="8125968" y="6793992"/>
+            <a:ext cx="2040636" cy="64008"/>
+          </a:xfrm>
+          <a:prstGeom prst="rect">
+            <a:avLst/>
+          </a:prstGeom>
+          <a:solidFill>
+            <a:srgbClr val="7FC04C"/>
+          </a:solidFill>
+          <a:ln/>
+        </p:spPr>
+      </p:sp>
+      <p:sp>
+        <p:nvSpPr>
+          <p:cNvPr id="22" name="Shape 20"/>
+          <p:cNvSpPr/>
+          <p:nvPr/>
+        </p:nvSpPr>
+        <p:spPr>
+          <a:xfrm>
+            <a:off x="10157460" y="6793992"/>
+            <a:ext cx="2040636" cy="64008"/>
+          </a:xfrm>
+          <a:prstGeom prst="rect">
+            <a:avLst/>
+          </a:prstGeom>
+          <a:solidFill>
+            <a:srgbClr val="E1DD57"/>
+          </a:solidFill>
+          <a:ln/>
+        </p:spPr>
+      </p:sp>
+    </p:spTree>
+  </p:cSld>
+  <p:clrMapOvr>
+    <a:masterClrMapping/>
+  </p:clrMapOvr>
+</p:sld>
+</file>
+
+<file path=ppt/slides/slide5.xml><?xml version="1.0" encoding="utf-8"?>
 <p:sld xmlns:a="http://schemas.openxmlformats.org/drawingml/2006/main" xmlns:r="http://schemas.openxmlformats.org/officeDocument/2006/relationships" xmlns:p="http://schemas.openxmlformats.org/presentationml/2006/main">
   <p:cSld name="Slide 4">
     <p:bg>
@@ -15463,7 +17391,7 @@
 </p:sld>
 </file>
 
-<file path=ppt/slides/slide5.xml><?xml version="1.0" encoding="utf-8"?>
+<file path=ppt/slides/slide6.xml><?xml version="1.0" encoding="utf-8"?>
 <p:sld xmlns:a="http://schemas.openxmlformats.org/drawingml/2006/main" xmlns:r="http://schemas.openxmlformats.org/officeDocument/2006/relationships" xmlns:p="http://schemas.openxmlformats.org/presentationml/2006/main">
   <p:cSld name="Slide 5">
     <p:bg>
@@ -16190,7 +18118,7 @@
 </p:sld>
 </file>
 
-<file path=ppt/slides/slide6.xml><?xml version="1.0" encoding="utf-8"?>
+<file path=ppt/slides/slide7.xml><?xml version="1.0" encoding="utf-8"?>
 <p:sld xmlns:a="http://schemas.openxmlformats.org/drawingml/2006/main" xmlns:r="http://schemas.openxmlformats.org/officeDocument/2006/relationships" xmlns:p="http://schemas.openxmlformats.org/presentationml/2006/main">
   <p:cSld name="Slide 6">
     <p:bg>
@@ -17109,7 +19037,7 @@
 </p:sld>
 </file>
 
-<file path=ppt/slides/slide7.xml><?xml version="1.0" encoding="utf-8"?>
+<file path=ppt/slides/slide8.xml><?xml version="1.0" encoding="utf-8"?>
 <p:sld xmlns:a="http://schemas.openxmlformats.org/drawingml/2006/main" xmlns:r="http://schemas.openxmlformats.org/officeDocument/2006/relationships" xmlns:p="http://schemas.openxmlformats.org/presentationml/2006/main">
   <p:cSld name="Slide 7">
     <p:bg>
@@ -17910,7 +19838,7 @@
 </p:sld>
 </file>
 
-<file path=ppt/slides/slide8.xml><?xml version="1.0" encoding="utf-8"?>
+<file path=ppt/slides/slide9.xml><?xml version="1.0" encoding="utf-8"?>
 <p:sld xmlns:a="http://schemas.openxmlformats.org/drawingml/2006/main" xmlns:r="http://schemas.openxmlformats.org/officeDocument/2006/relationships" xmlns:p="http://schemas.openxmlformats.org/presentationml/2006/main">
   <p:cSld name="Slide 8">
     <p:bg>
@@ -18537,1670 +20465,6 @@
       <p:sp>
         <p:nvSpPr>
           <p:cNvPr id="22" name="Shape 20"/>
-          <p:cNvSpPr/>
-          <p:nvPr/>
-        </p:nvSpPr>
-        <p:spPr>
-          <a:xfrm>
-            <a:off x="10157460" y="6793992"/>
-            <a:ext cx="2040636" cy="64008"/>
-          </a:xfrm>
-          <a:prstGeom prst="rect">
-            <a:avLst/>
-          </a:prstGeom>
-          <a:solidFill>
-            <a:srgbClr val="E1DD57"/>
-          </a:solidFill>
-          <a:ln/>
-        </p:spPr>
-      </p:sp>
-    </p:spTree>
-  </p:cSld>
-  <p:clrMapOvr>
-    <a:masterClrMapping/>
-  </p:clrMapOvr>
-</p:sld>
-</file>
-
-<file path=ppt/slides/slide9.xml><?xml version="1.0" encoding="utf-8"?>
-<p:sld xmlns:a="http://schemas.openxmlformats.org/drawingml/2006/main" xmlns:r="http://schemas.openxmlformats.org/officeDocument/2006/relationships" xmlns:p="http://schemas.openxmlformats.org/presentationml/2006/main">
-  <p:cSld name="Slide 9">
-    <p:bg>
-      <p:bgPr>
-        <a:solidFill>
-          <a:srgbClr val="FFFFFF"/>
-        </a:solidFill>
-      </p:bgPr>
-    </p:bg>
-    <p:spTree>
-      <p:nvGrpSpPr>
-        <p:cNvPr id="1" name=""/>
-        <p:cNvGrpSpPr/>
-        <p:nvPr/>
-      </p:nvGrpSpPr>
-      <p:grpSpPr>
-        <a:xfrm>
-          <a:off x="0" y="0"/>
-          <a:ext cx="0" cy="0"/>
-          <a:chOff x="0" y="0"/>
-          <a:chExt cx="0" cy="0"/>
-        </a:xfrm>
-      </p:grpSpPr>
-      <p:sp>
-        <p:nvSpPr>
-          <p:cNvPr id="2" name="Text 0"/>
-          <p:cNvSpPr txBox="1"/>
-          <p:nvPr/>
-        </p:nvSpPr>
-        <p:spPr>
-          <a:xfrm>
-            <a:off x="548640" y="320040"/>
-            <a:ext cx="11064240" cy="685800"/>
-          </a:xfrm>
-          <a:prstGeom prst="rect">
-            <a:avLst/>
-          </a:prstGeom>
-          <a:noFill/>
-          <a:ln/>
-        </p:spPr>
-        <p:txBody>
-          <a:bodyPr wrap="square" lIns="0" tIns="0" rIns="0" bIns="0" rtlCol="0" anchor="ctr"/>
-          <a:lstStyle/>
-          <a:p>
-            <a:pPr indent="0" marL="0">
-              <a:buNone/>
-            </a:pPr>
-            <a:r>
-              <a:rPr lang="en-US" sz="3000" b="1" dirty="0">
-                <a:solidFill>
-                  <a:srgbClr val="01485C"/>
-                </a:solidFill>
-                <a:latin typeface="Calibri" pitchFamily="34" charset="0"/>
-                <a:ea typeface="Calibri" pitchFamily="34" charset="-122"/>
-                <a:cs typeface="Calibri" pitchFamily="34" charset="-120"/>
-              </a:rPr>
-              <a:t>What the report contains (1 of 2)</a:t>
-            </a:r>
-            <a:endParaRPr lang="en-US" sz="3000" dirty="0"/>
-          </a:p>
-        </p:txBody>
-      </p:sp>
-      <p:sp>
-        <p:nvSpPr>
-          <p:cNvPr id="3" name="Shape 1"/>
-          <p:cNvSpPr/>
-          <p:nvPr/>
-        </p:nvSpPr>
-        <p:spPr>
-          <a:xfrm>
-            <a:off x="9784080" y="384048"/>
-            <a:ext cx="1828800" cy="457200"/>
-          </a:xfrm>
-          <a:prstGeom prst="roundRect">
-            <a:avLst>
-              <a:gd name="adj" fmla="val 50000"/>
-            </a:avLst>
-          </a:prstGeom>
-          <a:solidFill>
-            <a:srgbClr val="01485C"/>
-          </a:solidFill>
-          <a:ln/>
-        </p:spPr>
-      </p:sp>
-      <p:sp>
-        <p:nvSpPr>
-          <p:cNvPr id="4" name="Text 2"/>
-          <p:cNvSpPr txBox="1"/>
-          <p:nvPr/>
-        </p:nvSpPr>
-        <p:spPr>
-          <a:xfrm>
-            <a:off x="9784080" y="384048"/>
-            <a:ext cx="1828800" cy="457200"/>
-          </a:xfrm>
-          <a:prstGeom prst="rect">
-            <a:avLst/>
-          </a:prstGeom>
-          <a:noFill/>
-          <a:ln/>
-        </p:spPr>
-        <p:txBody>
-          <a:bodyPr wrap="square" lIns="0" tIns="0" rIns="0" bIns="0" rtlCol="0" anchor="ctr"/>
-          <a:lstStyle/>
-          <a:p>
-            <a:pPr algn="ctr" indent="0" marL="0">
-              <a:buNone/>
-            </a:pPr>
-            <a:r>
-              <a:rPr lang="en-US" sz="1500" b="1" dirty="0">
-                <a:solidFill>
-                  <a:srgbClr val="FFFFFF"/>
-                </a:solidFill>
-                <a:latin typeface="Calibri" pitchFamily="34" charset="0"/>
-                <a:ea typeface="Calibri" pitchFamily="34" charset="-122"/>
-                <a:cs typeface="Calibri" pitchFamily="34" charset="-120"/>
-              </a:rPr>
-              <a:t>i-STAT</a:t>
-            </a:r>
-            <a:endParaRPr lang="en-US" sz="1500" dirty="0"/>
-          </a:p>
-        </p:txBody>
-      </p:sp>
-      <p:sp>
-        <p:nvSpPr>
-          <p:cNvPr id="5" name="Shape 3"/>
-          <p:cNvSpPr/>
-          <p:nvPr/>
-        </p:nvSpPr>
-        <p:spPr>
-          <a:xfrm>
-            <a:off x="548640" y="1325880"/>
-            <a:ext cx="420624" cy="420624"/>
-          </a:xfrm>
-          <a:prstGeom prst="ellipse">
-            <a:avLst/>
-          </a:prstGeom>
-          <a:solidFill>
-            <a:srgbClr val="01485C"/>
-          </a:solidFill>
-          <a:ln/>
-        </p:spPr>
-      </p:sp>
-      <p:sp>
-        <p:nvSpPr>
-          <p:cNvPr id="6" name="Text 4"/>
-          <p:cNvSpPr txBox="1"/>
-          <p:nvPr/>
-        </p:nvSpPr>
-        <p:spPr>
-          <a:xfrm>
-            <a:off x="548640" y="1325880"/>
-            <a:ext cx="420624" cy="420624"/>
-          </a:xfrm>
-          <a:prstGeom prst="rect">
-            <a:avLst/>
-          </a:prstGeom>
-          <a:noFill/>
-          <a:ln/>
-        </p:spPr>
-        <p:txBody>
-          <a:bodyPr wrap="square" lIns="0" tIns="0" rIns="0" bIns="0" rtlCol="0" anchor="ctr"/>
-          <a:lstStyle/>
-          <a:p>
-            <a:pPr algn="ctr" indent="0" marL="0">
-              <a:buNone/>
-            </a:pPr>
-            <a:r>
-              <a:rPr lang="en-US" sz="1500" b="1" dirty="0">
-                <a:solidFill>
-                  <a:srgbClr val="FFFFFF"/>
-                </a:solidFill>
-                <a:latin typeface="Calibri" pitchFamily="34" charset="0"/>
-                <a:ea typeface="Calibri" pitchFamily="34" charset="-122"/>
-                <a:cs typeface="Calibri" pitchFamily="34" charset="-120"/>
-              </a:rPr>
-              <a:t>1</a:t>
-            </a:r>
-            <a:endParaRPr lang="en-US" sz="1500" dirty="0"/>
-          </a:p>
-        </p:txBody>
-      </p:sp>
-      <p:sp>
-        <p:nvSpPr>
-          <p:cNvPr id="7" name="Text 5"/>
-          <p:cNvSpPr txBox="1"/>
-          <p:nvPr/>
-        </p:nvSpPr>
-        <p:spPr>
-          <a:xfrm>
-            <a:off x="1133856" y="1271016"/>
-            <a:ext cx="5029200" cy="859536"/>
-          </a:xfrm>
-          <a:prstGeom prst="rect">
-            <a:avLst/>
-          </a:prstGeom>
-          <a:noFill/>
-          <a:ln/>
-        </p:spPr>
-        <p:txBody>
-          <a:bodyPr wrap="square" lIns="0" tIns="0" rIns="0" bIns="0" rtlCol="0" anchor="t"/>
-          <a:lstStyle/>
-          <a:p>
-            <a:pPr indent="0" marL="0">
-              <a:buNone/>
-            </a:pPr>
-            <a:r>
-              <a:rPr lang="en-US" sz="1300" b="1" dirty="0">
-                <a:solidFill>
-                  <a:srgbClr val="01485C"/>
-                </a:solidFill>
-                <a:latin typeface="Calibri" pitchFamily="34" charset="0"/>
-                <a:ea typeface="Calibri" pitchFamily="34" charset="-122"/>
-                <a:cs typeface="Calibri" pitchFamily="34" charset="-120"/>
-              </a:rPr>
-              <a:t>Monthly Snapshot
-</a:t>
-            </a:r>
-            <a:pPr indent="0" marL="0">
-              <a:buNone/>
-            </a:pPr>
-            <a:r>
-              <a:rPr lang="en-US" sz="1100" dirty="0">
-                <a:solidFill>
-                  <a:srgbClr val="5F7178"/>
-                </a:solidFill>
-                <a:latin typeface="Calibri" pitchFamily="34" charset="0"/>
-                <a:ea typeface="Calibri" pitchFamily="34" charset="-122"/>
-                <a:cs typeface="Calibri" pitchFamily="34" charset="-120"/>
-              </a:rPr>
-              <a:t>The month in one block: overall rate, errors vs cartridges, top error, flagged staff.</a:t>
-            </a:r>
-            <a:endParaRPr lang="en-US" sz="1300" dirty="0"/>
-          </a:p>
-        </p:txBody>
-      </p:sp>
-      <p:sp>
-        <p:nvSpPr>
-          <p:cNvPr id="8" name="Shape 6"/>
-          <p:cNvSpPr/>
-          <p:nvPr/>
-        </p:nvSpPr>
-        <p:spPr>
-          <a:xfrm>
-            <a:off x="6400800" y="1280160"/>
-            <a:ext cx="5212080" cy="859536"/>
-          </a:xfrm>
-          <a:prstGeom prst="roundRect">
-            <a:avLst>
-              <a:gd name="adj" fmla="val 8511"/>
-            </a:avLst>
-          </a:prstGeom>
-          <a:solidFill>
-            <a:srgbClr val="FFFFFF"/>
-          </a:solidFill>
-          <a:ln w="15875">
-            <a:solidFill>
-              <a:srgbClr val="E2E8EA"/>
-            </a:solidFill>
-            <a:prstDash val="solid"/>
-          </a:ln>
-        </p:spPr>
-      </p:sp>
-      <p:sp>
-        <p:nvSpPr>
-          <p:cNvPr id="9" name="Text 7"/>
-          <p:cNvSpPr txBox="1"/>
-          <p:nvPr/>
-        </p:nvSpPr>
-        <p:spPr>
-          <a:xfrm>
-            <a:off x="6629400" y="1408176"/>
-            <a:ext cx="4754880" cy="630936"/>
-          </a:xfrm>
-          <a:prstGeom prst="rect">
-            <a:avLst/>
-          </a:prstGeom>
-          <a:noFill/>
-          <a:ln/>
-        </p:spPr>
-        <p:txBody>
-          <a:bodyPr wrap="square" lIns="0" tIns="0" rIns="0" bIns="0" rtlCol="0" anchor="t"/>
-          <a:lstStyle/>
-          <a:p>
-            <a:pPr indent="0" marL="0">
-              <a:buNone/>
-            </a:pPr>
-            <a:r>
-              <a:rPr lang="en-US" sz="1250" b="1" dirty="0">
-                <a:solidFill>
-                  <a:srgbClr val="2F5496"/>
-                </a:solidFill>
-                <a:latin typeface="Calibri" pitchFamily="34" charset="0"/>
-                <a:ea typeface="Calibri" pitchFamily="34" charset="-122"/>
-                <a:cs typeface="Calibri" pitchFamily="34" charset="-120"/>
-              </a:rPr>
-              <a:t>Error rate 4.5%</a:t>
-            </a:r>
-            <a:pPr indent="0" marL="0">
-              <a:buNone/>
-            </a:pPr>
-            <a:r>
-              <a:rPr lang="en-US" sz="1050" dirty="0">
-                <a:solidFill>
-                  <a:srgbClr val="17272E"/>
-                </a:solidFill>
-                <a:latin typeface="Calibri" pitchFamily="34" charset="0"/>
-                <a:ea typeface="Calibri" pitchFamily="34" charset="-122"/>
-                <a:cs typeface="Calibri" pitchFamily="34" charset="-120"/>
-              </a:rPr>
-              <a:t>   (12 errors / 266 cartridges)
-</a:t>
-            </a:r>
-            <a:pPr indent="0" marL="0">
-              <a:buNone/>
-            </a:pPr>
-            <a:r>
-              <a:rPr lang="en-US" sz="1050" dirty="0">
-                <a:solidFill>
-                  <a:srgbClr val="5F7178"/>
-                </a:solidFill>
-                <a:latin typeface="Calibri" pitchFamily="34" charset="0"/>
-                <a:ea typeface="Calibri" pitchFamily="34" charset="-122"/>
-                <a:cs typeface="Calibri" pitchFamily="34" charset="-120"/>
-              </a:rPr>
-              <a:t>Top error: P3 Cartridge Handling  ·  Staff flagged: 2</a:t>
-            </a:r>
-            <a:endParaRPr lang="en-US" sz="1250" dirty="0"/>
-          </a:p>
-        </p:txBody>
-      </p:sp>
-      <p:sp>
-        <p:nvSpPr>
-          <p:cNvPr id="10" name="Shape 8"/>
-          <p:cNvSpPr/>
-          <p:nvPr/>
-        </p:nvSpPr>
-        <p:spPr>
-          <a:xfrm>
-            <a:off x="548640" y="2295144"/>
-            <a:ext cx="420624" cy="420624"/>
-          </a:xfrm>
-          <a:prstGeom prst="ellipse">
-            <a:avLst/>
-          </a:prstGeom>
-          <a:solidFill>
-            <a:srgbClr val="01485C"/>
-          </a:solidFill>
-          <a:ln/>
-        </p:spPr>
-      </p:sp>
-      <p:sp>
-        <p:nvSpPr>
-          <p:cNvPr id="11" name="Text 9"/>
-          <p:cNvSpPr txBox="1"/>
-          <p:nvPr/>
-        </p:nvSpPr>
-        <p:spPr>
-          <a:xfrm>
-            <a:off x="548640" y="2295144"/>
-            <a:ext cx="420624" cy="420624"/>
-          </a:xfrm>
-          <a:prstGeom prst="rect">
-            <a:avLst/>
-          </a:prstGeom>
-          <a:noFill/>
-          <a:ln/>
-        </p:spPr>
-        <p:txBody>
-          <a:bodyPr wrap="square" lIns="0" tIns="0" rIns="0" bIns="0" rtlCol="0" anchor="ctr"/>
-          <a:lstStyle/>
-          <a:p>
-            <a:pPr algn="ctr" indent="0" marL="0">
-              <a:buNone/>
-            </a:pPr>
-            <a:r>
-              <a:rPr lang="en-US" sz="1500" b="1" dirty="0">
-                <a:solidFill>
-                  <a:srgbClr val="FFFFFF"/>
-                </a:solidFill>
-                <a:latin typeface="Calibri" pitchFamily="34" charset="0"/>
-                <a:ea typeface="Calibri" pitchFamily="34" charset="-122"/>
-                <a:cs typeface="Calibri" pitchFamily="34" charset="-120"/>
-              </a:rPr>
-              <a:t>2</a:t>
-            </a:r>
-            <a:endParaRPr lang="en-US" sz="1500" dirty="0"/>
-          </a:p>
-        </p:txBody>
-      </p:sp>
-      <p:sp>
-        <p:nvSpPr>
-          <p:cNvPr id="12" name="Text 10"/>
-          <p:cNvSpPr txBox="1"/>
-          <p:nvPr/>
-        </p:nvSpPr>
-        <p:spPr>
-          <a:xfrm>
-            <a:off x="1133856" y="2240280"/>
-            <a:ext cx="5029200" cy="859536"/>
-          </a:xfrm>
-          <a:prstGeom prst="rect">
-            <a:avLst/>
-          </a:prstGeom>
-          <a:noFill/>
-          <a:ln/>
-        </p:spPr>
-        <p:txBody>
-          <a:bodyPr wrap="square" lIns="0" tIns="0" rIns="0" bIns="0" rtlCol="0" anchor="t"/>
-          <a:lstStyle/>
-          <a:p>
-            <a:pPr indent="0" marL="0">
-              <a:buNone/>
-            </a:pPr>
-            <a:r>
-              <a:rPr lang="en-US" sz="1300" b="1" dirty="0">
-                <a:solidFill>
-                  <a:srgbClr val="01485C"/>
-                </a:solidFill>
-                <a:latin typeface="Calibri" pitchFamily="34" charset="0"/>
-                <a:ea typeface="Calibri" pitchFamily="34" charset="-122"/>
-                <a:cs typeface="Calibri" pitchFamily="34" charset="-120"/>
-              </a:rPr>
-              <a:t>Historical Performance
-</a:t>
-            </a:r>
-            <a:pPr indent="0" marL="0">
-              <a:buNone/>
-            </a:pPr>
-            <a:r>
-              <a:rPr lang="en-US" sz="1100" dirty="0">
-                <a:solidFill>
-                  <a:srgbClr val="5F7178"/>
-                </a:solidFill>
-                <a:latin typeface="Calibri" pitchFamily="34" charset="0"/>
-                <a:ea typeface="Calibri" pitchFamily="34" charset="-122"/>
-                <a:cs typeface="Calibri" pitchFamily="34" charset="-120"/>
-              </a:rPr>
-              <a:t>TWO charts per device: the error-rate trend over the colour bands, and the Cartridges Run &amp; Error Mix chart (next slide).</a:t>
-            </a:r>
-            <a:endParaRPr lang="en-US" sz="1300" dirty="0"/>
-          </a:p>
-        </p:txBody>
-      </p:sp>
-      <p:sp>
-        <p:nvSpPr>
-          <p:cNvPr id="13" name="Shape 11"/>
-          <p:cNvSpPr/>
-          <p:nvPr/>
-        </p:nvSpPr>
-        <p:spPr>
-          <a:xfrm>
-            <a:off x="6400800" y="2249424"/>
-            <a:ext cx="5212080" cy="859536"/>
-          </a:xfrm>
-          <a:prstGeom prst="roundRect">
-            <a:avLst>
-              <a:gd name="adj" fmla="val 8511"/>
-            </a:avLst>
-          </a:prstGeom>
-          <a:solidFill>
-            <a:srgbClr val="FFFFFF"/>
-          </a:solidFill>
-          <a:ln w="15875">
-            <a:solidFill>
-              <a:srgbClr val="E2E8EA"/>
-            </a:solidFill>
-            <a:prstDash val="solid"/>
-          </a:ln>
-        </p:spPr>
-      </p:sp>
-      <p:sp>
-        <p:nvSpPr>
-          <p:cNvPr id="14" name="Shape 12"/>
-          <p:cNvSpPr/>
-          <p:nvPr/>
-        </p:nvSpPr>
-        <p:spPr>
-          <a:xfrm>
-            <a:off x="6601968" y="2359152"/>
-            <a:ext cx="3840480" cy="155448"/>
-          </a:xfrm>
-          <a:prstGeom prst="rect">
-            <a:avLst/>
-          </a:prstGeom>
-          <a:solidFill>
-            <a:srgbClr val="C00000">
-              <a:alpha val="38000"/>
-            </a:srgbClr>
-          </a:solidFill>
-          <a:ln/>
-        </p:spPr>
-      </p:sp>
-      <p:sp>
-        <p:nvSpPr>
-          <p:cNvPr id="15" name="Shape 13"/>
-          <p:cNvSpPr/>
-          <p:nvPr/>
-        </p:nvSpPr>
-        <p:spPr>
-          <a:xfrm>
-            <a:off x="6601968" y="2514600"/>
-            <a:ext cx="3840480" cy="155448"/>
-          </a:xfrm>
-          <a:prstGeom prst="rect">
-            <a:avLst/>
-          </a:prstGeom>
-          <a:solidFill>
-            <a:srgbClr val="D96800">
-              <a:alpha val="38000"/>
-            </a:srgbClr>
-          </a:solidFill>
-          <a:ln/>
-        </p:spPr>
-      </p:sp>
-      <p:sp>
-        <p:nvSpPr>
-          <p:cNvPr id="16" name="Shape 14"/>
-          <p:cNvSpPr/>
-          <p:nvPr/>
-        </p:nvSpPr>
-        <p:spPr>
-          <a:xfrm>
-            <a:off x="6601968" y="2670048"/>
-            <a:ext cx="3840480" cy="155448"/>
-          </a:xfrm>
-          <a:prstGeom prst="rect">
-            <a:avLst/>
-          </a:prstGeom>
-          <a:solidFill>
-            <a:srgbClr val="2F5496">
-              <a:alpha val="38000"/>
-            </a:srgbClr>
-          </a:solidFill>
-          <a:ln/>
-        </p:spPr>
-      </p:sp>
-      <p:sp>
-        <p:nvSpPr>
-          <p:cNvPr id="17" name="Shape 15"/>
-          <p:cNvSpPr/>
-          <p:nvPr/>
-        </p:nvSpPr>
-        <p:spPr>
-          <a:xfrm>
-            <a:off x="6601968" y="2825496"/>
-            <a:ext cx="3840480" cy="155448"/>
-          </a:xfrm>
-          <a:prstGeom prst="rect">
-            <a:avLst/>
-          </a:prstGeom>
-          <a:solidFill>
-            <a:srgbClr val="538135">
-              <a:alpha val="38000"/>
-            </a:srgbClr>
-          </a:solidFill>
-          <a:ln/>
-        </p:spPr>
-      </p:sp>
-      <p:sp>
-        <p:nvSpPr>
-          <p:cNvPr id="18" name="Shape 16"/>
-          <p:cNvSpPr/>
-          <p:nvPr/>
-        </p:nvSpPr>
-        <p:spPr>
-          <a:xfrm>
-            <a:off x="7059168" y="2468880"/>
-            <a:ext cx="118872" cy="118872"/>
-          </a:xfrm>
-          <a:prstGeom prst="ellipse">
-            <a:avLst/>
-          </a:prstGeom>
-          <a:solidFill>
-            <a:srgbClr val="01485C"/>
-          </a:solidFill>
-          <a:ln w="12700">
-            <a:solidFill>
-              <a:srgbClr val="FFFFFF"/>
-            </a:solidFill>
-            <a:prstDash val="solid"/>
-          </a:ln>
-        </p:spPr>
-      </p:sp>
-      <p:sp>
-        <p:nvSpPr>
-          <p:cNvPr id="19" name="Shape 17"/>
-          <p:cNvSpPr/>
-          <p:nvPr/>
-        </p:nvSpPr>
-        <p:spPr>
-          <a:xfrm>
-            <a:off x="7790688" y="2578608"/>
-            <a:ext cx="118872" cy="118872"/>
-          </a:xfrm>
-          <a:prstGeom prst="ellipse">
-            <a:avLst/>
-          </a:prstGeom>
-          <a:solidFill>
-            <a:srgbClr val="01485C"/>
-          </a:solidFill>
-          <a:ln w="12700">
-            <a:solidFill>
-              <a:srgbClr val="FFFFFF"/>
-            </a:solidFill>
-            <a:prstDash val="solid"/>
-          </a:ln>
-        </p:spPr>
-      </p:sp>
-      <p:sp>
-        <p:nvSpPr>
-          <p:cNvPr id="20" name="Shape 18"/>
-          <p:cNvSpPr/>
-          <p:nvPr/>
-        </p:nvSpPr>
-        <p:spPr>
-          <a:xfrm>
-            <a:off x="8522208" y="2542032"/>
-            <a:ext cx="118872" cy="118872"/>
-          </a:xfrm>
-          <a:prstGeom prst="ellipse">
-            <a:avLst/>
-          </a:prstGeom>
-          <a:solidFill>
-            <a:srgbClr val="01485C"/>
-          </a:solidFill>
-          <a:ln w="12700">
-            <a:solidFill>
-              <a:srgbClr val="FFFFFF"/>
-            </a:solidFill>
-            <a:prstDash val="solid"/>
-          </a:ln>
-        </p:spPr>
-      </p:sp>
-      <p:sp>
-        <p:nvSpPr>
-          <p:cNvPr id="21" name="Shape 19"/>
-          <p:cNvSpPr/>
-          <p:nvPr/>
-        </p:nvSpPr>
-        <p:spPr>
-          <a:xfrm>
-            <a:off x="9253728" y="2724912"/>
-            <a:ext cx="118872" cy="118872"/>
-          </a:xfrm>
-          <a:prstGeom prst="ellipse">
-            <a:avLst/>
-          </a:prstGeom>
-          <a:solidFill>
-            <a:srgbClr val="01485C"/>
-          </a:solidFill>
-          <a:ln w="12700">
-            <a:solidFill>
-              <a:srgbClr val="FFFFFF"/>
-            </a:solidFill>
-            <a:prstDash val="solid"/>
-          </a:ln>
-        </p:spPr>
-      </p:sp>
-      <p:sp>
-        <p:nvSpPr>
-          <p:cNvPr id="22" name="Shape 20"/>
-          <p:cNvSpPr/>
-          <p:nvPr/>
-        </p:nvSpPr>
-        <p:spPr>
-          <a:xfrm>
-            <a:off x="9985248" y="2825496"/>
-            <a:ext cx="118872" cy="118872"/>
-          </a:xfrm>
-          <a:prstGeom prst="ellipse">
-            <a:avLst/>
-          </a:prstGeom>
-          <a:solidFill>
-            <a:srgbClr val="01485C"/>
-          </a:solidFill>
-          <a:ln w="12700">
-            <a:solidFill>
-              <a:srgbClr val="FFFFFF"/>
-            </a:solidFill>
-            <a:prstDash val="solid"/>
-          </a:ln>
-        </p:spPr>
-      </p:sp>
-      <p:sp>
-        <p:nvSpPr>
-          <p:cNvPr id="23" name="Text 21"/>
-          <p:cNvSpPr txBox="1"/>
-          <p:nvPr/>
-        </p:nvSpPr>
-        <p:spPr>
-          <a:xfrm>
-            <a:off x="10469880" y="2542032"/>
-            <a:ext cx="1005840" cy="274320"/>
-          </a:xfrm>
-          <a:prstGeom prst="rect">
-            <a:avLst/>
-          </a:prstGeom>
-          <a:noFill/>
-          <a:ln/>
-        </p:spPr>
-        <p:txBody>
-          <a:bodyPr wrap="square" lIns="0" tIns="0" rIns="0" bIns="0" rtlCol="0" anchor="ctr"/>
-          <a:lstStyle/>
-          <a:p>
-            <a:pPr indent="0" marL="0">
-              <a:buNone/>
-            </a:pPr>
-            <a:r>
-              <a:rPr lang="en-US" sz="950" i="1" dirty="0">
-                <a:solidFill>
-                  <a:srgbClr val="538135"/>
-                </a:solidFill>
-                <a:latin typeface="Calibri" pitchFamily="34" charset="0"/>
-                <a:ea typeface="Calibri" pitchFamily="34" charset="-122"/>
-                <a:cs typeface="Calibri" pitchFamily="34" charset="-120"/>
-              </a:rPr>
-              <a:t>improving ↓</a:t>
-            </a:r>
-            <a:endParaRPr lang="en-US" sz="950" dirty="0"/>
-          </a:p>
-        </p:txBody>
-      </p:sp>
-      <p:sp>
-        <p:nvSpPr>
-          <p:cNvPr id="24" name="Shape 22"/>
-          <p:cNvSpPr/>
-          <p:nvPr/>
-        </p:nvSpPr>
-        <p:spPr>
-          <a:xfrm>
-            <a:off x="548640" y="3264408"/>
-            <a:ext cx="420624" cy="420624"/>
-          </a:xfrm>
-          <a:prstGeom prst="ellipse">
-            <a:avLst/>
-          </a:prstGeom>
-          <a:solidFill>
-            <a:srgbClr val="01485C"/>
-          </a:solidFill>
-          <a:ln/>
-        </p:spPr>
-      </p:sp>
-      <p:sp>
-        <p:nvSpPr>
-          <p:cNvPr id="25" name="Text 23"/>
-          <p:cNvSpPr txBox="1"/>
-          <p:nvPr/>
-        </p:nvSpPr>
-        <p:spPr>
-          <a:xfrm>
-            <a:off x="548640" y="3264408"/>
-            <a:ext cx="420624" cy="420624"/>
-          </a:xfrm>
-          <a:prstGeom prst="rect">
-            <a:avLst/>
-          </a:prstGeom>
-          <a:noFill/>
-          <a:ln/>
-        </p:spPr>
-        <p:txBody>
-          <a:bodyPr wrap="square" lIns="0" tIns="0" rIns="0" bIns="0" rtlCol="0" anchor="ctr"/>
-          <a:lstStyle/>
-          <a:p>
-            <a:pPr algn="ctr" indent="0" marL="0">
-              <a:buNone/>
-            </a:pPr>
-            <a:r>
-              <a:rPr lang="en-US" sz="1500" b="1" dirty="0">
-                <a:solidFill>
-                  <a:srgbClr val="FFFFFF"/>
-                </a:solidFill>
-                <a:latin typeface="Calibri" pitchFamily="34" charset="0"/>
-                <a:ea typeface="Calibri" pitchFamily="34" charset="-122"/>
-                <a:cs typeface="Calibri" pitchFamily="34" charset="-120"/>
-              </a:rPr>
-              <a:t>3</a:t>
-            </a:r>
-            <a:endParaRPr lang="en-US" sz="1500" dirty="0"/>
-          </a:p>
-        </p:txBody>
-      </p:sp>
-      <p:sp>
-        <p:nvSpPr>
-          <p:cNvPr id="26" name="Text 24"/>
-          <p:cNvSpPr txBox="1"/>
-          <p:nvPr/>
-        </p:nvSpPr>
-        <p:spPr>
-          <a:xfrm>
-            <a:off x="1133856" y="3209544"/>
-            <a:ext cx="5029200" cy="859536"/>
-          </a:xfrm>
-          <a:prstGeom prst="rect">
-            <a:avLst/>
-          </a:prstGeom>
-          <a:noFill/>
-          <a:ln/>
-        </p:spPr>
-        <p:txBody>
-          <a:bodyPr wrap="square" lIns="0" tIns="0" rIns="0" bIns="0" rtlCol="0" anchor="t"/>
-          <a:lstStyle/>
-          <a:p>
-            <a:pPr indent="0" marL="0">
-              <a:buNone/>
-            </a:pPr>
-            <a:r>
-              <a:rPr lang="en-US" sz="1300" b="1" dirty="0">
-                <a:solidFill>
-                  <a:srgbClr val="01485C"/>
-                </a:solidFill>
-                <a:latin typeface="Calibri" pitchFamily="34" charset="0"/>
-                <a:ea typeface="Calibri" pitchFamily="34" charset="-122"/>
-                <a:cs typeface="Calibri" pitchFamily="34" charset="-120"/>
-              </a:rPr>
-              <a:t>Performance Summary
-</a:t>
-            </a:r>
-            <a:pPr indent="0" marL="0">
-              <a:buNone/>
-            </a:pPr>
-            <a:r>
-              <a:rPr lang="en-US" sz="1100" dirty="0">
-                <a:solidFill>
-                  <a:srgbClr val="5F7178"/>
-                </a:solidFill>
-                <a:latin typeface="Calibri" pitchFamily="34" charset="0"/>
-                <a:ea typeface="Calibri" pitchFamily="34" charset="-122"/>
-                <a:cs typeface="Calibri" pitchFamily="34" charset="-120"/>
-              </a:rPr>
-              <a:t>Device-by-device: cartridges, errors and rate, banded Champions → Needs attention.</a:t>
-            </a:r>
-            <a:endParaRPr lang="en-US" sz="1300" dirty="0"/>
-          </a:p>
-        </p:txBody>
-      </p:sp>
-      <p:sp>
-        <p:nvSpPr>
-          <p:cNvPr id="27" name="Shape 25"/>
-          <p:cNvSpPr/>
-          <p:nvPr/>
-        </p:nvSpPr>
-        <p:spPr>
-          <a:xfrm>
-            <a:off x="6400800" y="3218688"/>
-            <a:ext cx="5212080" cy="859536"/>
-          </a:xfrm>
-          <a:prstGeom prst="roundRect">
-            <a:avLst>
-              <a:gd name="adj" fmla="val 8511"/>
-            </a:avLst>
-          </a:prstGeom>
-          <a:solidFill>
-            <a:srgbClr val="FFFFFF"/>
-          </a:solidFill>
-          <a:ln w="15875">
-            <a:solidFill>
-              <a:srgbClr val="E2E8EA"/>
-            </a:solidFill>
-            <a:prstDash val="solid"/>
-          </a:ln>
-        </p:spPr>
-      </p:sp>
-      <p:sp>
-        <p:nvSpPr>
-          <p:cNvPr id="28" name="Text 26"/>
-          <p:cNvSpPr txBox="1"/>
-          <p:nvPr/>
-        </p:nvSpPr>
-        <p:spPr>
-          <a:xfrm>
-            <a:off x="6629400" y="3310128"/>
-            <a:ext cx="3291840" cy="274320"/>
-          </a:xfrm>
-          <a:prstGeom prst="rect">
-            <a:avLst/>
-          </a:prstGeom>
-          <a:noFill/>
-          <a:ln/>
-        </p:spPr>
-        <p:txBody>
-          <a:bodyPr wrap="square" lIns="0" tIns="0" rIns="0" bIns="0" rtlCol="0" anchor="ctr"/>
-          <a:lstStyle/>
-          <a:p>
-            <a:pPr indent="0" marL="0">
-              <a:buNone/>
-            </a:pPr>
-            <a:r>
-              <a:rPr lang="en-US" sz="1050" dirty="0">
-                <a:solidFill>
-                  <a:srgbClr val="17272E"/>
-                </a:solidFill>
-                <a:latin typeface="Calibri" pitchFamily="34" charset="0"/>
-                <a:ea typeface="Calibri" pitchFamily="34" charset="-122"/>
-                <a:cs typeface="Calibri" pitchFamily="34" charset="-120"/>
-              </a:rPr>
-              <a:t>i-STAT 1;9001    80 carts    4 errors</a:t>
-            </a:r>
-            <a:endParaRPr lang="en-US" sz="1050" dirty="0"/>
-          </a:p>
-        </p:txBody>
-      </p:sp>
-      <p:sp>
-        <p:nvSpPr>
-          <p:cNvPr id="29" name="Shape 27"/>
-          <p:cNvSpPr/>
-          <p:nvPr/>
-        </p:nvSpPr>
-        <p:spPr>
-          <a:xfrm>
-            <a:off x="10195560" y="3310128"/>
-            <a:ext cx="960120" cy="274320"/>
-          </a:xfrm>
-          <a:prstGeom prst="roundRect">
-            <a:avLst>
-              <a:gd name="adj" fmla="val 26667"/>
-            </a:avLst>
-          </a:prstGeom>
-          <a:solidFill>
-            <a:srgbClr val="2F5496"/>
-          </a:solidFill>
-          <a:ln/>
-        </p:spPr>
-      </p:sp>
-      <p:sp>
-        <p:nvSpPr>
-          <p:cNvPr id="30" name="Text 28"/>
-          <p:cNvSpPr txBox="1"/>
-          <p:nvPr/>
-        </p:nvSpPr>
-        <p:spPr>
-          <a:xfrm>
-            <a:off x="10195560" y="3310128"/>
-            <a:ext cx="960120" cy="274320"/>
-          </a:xfrm>
-          <a:prstGeom prst="rect">
-            <a:avLst/>
-          </a:prstGeom>
-          <a:noFill/>
-          <a:ln/>
-        </p:spPr>
-        <p:txBody>
-          <a:bodyPr wrap="square" lIns="0" tIns="0" rIns="0" bIns="0" rtlCol="0" anchor="ctr"/>
-          <a:lstStyle/>
-          <a:p>
-            <a:pPr algn="ctr" indent="0" marL="0">
-              <a:buNone/>
-            </a:pPr>
-            <a:r>
-              <a:rPr lang="en-US" sz="1000" b="1" dirty="0">
-                <a:solidFill>
-                  <a:srgbClr val="FFFFFF"/>
-                </a:solidFill>
-                <a:latin typeface="Calibri" pitchFamily="34" charset="0"/>
-                <a:ea typeface="Calibri" pitchFamily="34" charset="-122"/>
-                <a:cs typeface="Calibri" pitchFamily="34" charset="-120"/>
-              </a:rPr>
-              <a:t>5.0% Excellent</a:t>
-            </a:r>
-            <a:endParaRPr lang="en-US" sz="1000" dirty="0"/>
-          </a:p>
-        </p:txBody>
-      </p:sp>
-      <p:sp>
-        <p:nvSpPr>
-          <p:cNvPr id="31" name="Text 29"/>
-          <p:cNvSpPr txBox="1"/>
-          <p:nvPr/>
-        </p:nvSpPr>
-        <p:spPr>
-          <a:xfrm>
-            <a:off x="6629400" y="3675888"/>
-            <a:ext cx="3291840" cy="274320"/>
-          </a:xfrm>
-          <a:prstGeom prst="rect">
-            <a:avLst/>
-          </a:prstGeom>
-          <a:noFill/>
-          <a:ln/>
-        </p:spPr>
-        <p:txBody>
-          <a:bodyPr wrap="square" lIns="0" tIns="0" rIns="0" bIns="0" rtlCol="0" anchor="ctr"/>
-          <a:lstStyle/>
-          <a:p>
-            <a:pPr indent="0" marL="0">
-              <a:buNone/>
-            </a:pPr>
-            <a:r>
-              <a:rPr lang="en-US" sz="1050" dirty="0">
-                <a:solidFill>
-                  <a:srgbClr val="17272E"/>
-                </a:solidFill>
-                <a:latin typeface="Calibri" pitchFamily="34" charset="0"/>
-                <a:ea typeface="Calibri" pitchFamily="34" charset="-122"/>
-                <a:cs typeface="Calibri" pitchFamily="34" charset="-120"/>
-              </a:rPr>
-              <a:t>i-STAT 1;9002    74 carts    5 errors</a:t>
-            </a:r>
-            <a:endParaRPr lang="en-US" sz="1050" dirty="0"/>
-          </a:p>
-        </p:txBody>
-      </p:sp>
-      <p:sp>
-        <p:nvSpPr>
-          <p:cNvPr id="32" name="Shape 30"/>
-          <p:cNvSpPr/>
-          <p:nvPr/>
-        </p:nvSpPr>
-        <p:spPr>
-          <a:xfrm>
-            <a:off x="10195560" y="3675888"/>
-            <a:ext cx="960120" cy="274320"/>
-          </a:xfrm>
-          <a:prstGeom prst="roundRect">
-            <a:avLst>
-              <a:gd name="adj" fmla="val 26667"/>
-            </a:avLst>
-          </a:prstGeom>
-          <a:solidFill>
-            <a:srgbClr val="D96800"/>
-          </a:solidFill>
-          <a:ln/>
-        </p:spPr>
-      </p:sp>
-      <p:sp>
-        <p:nvSpPr>
-          <p:cNvPr id="33" name="Text 31"/>
-          <p:cNvSpPr txBox="1"/>
-          <p:nvPr/>
-        </p:nvSpPr>
-        <p:spPr>
-          <a:xfrm>
-            <a:off x="10195560" y="3675888"/>
-            <a:ext cx="960120" cy="274320"/>
-          </a:xfrm>
-          <a:prstGeom prst="rect">
-            <a:avLst/>
-          </a:prstGeom>
-          <a:noFill/>
-          <a:ln/>
-        </p:spPr>
-        <p:txBody>
-          <a:bodyPr wrap="square" lIns="0" tIns="0" rIns="0" bIns="0" rtlCol="0" anchor="ctr"/>
-          <a:lstStyle/>
-          <a:p>
-            <a:pPr algn="ctr" indent="0" marL="0">
-              <a:buNone/>
-            </a:pPr>
-            <a:r>
-              <a:rPr lang="en-US" sz="1000" b="1" dirty="0">
-                <a:solidFill>
-                  <a:srgbClr val="FFFFFF"/>
-                </a:solidFill>
-                <a:latin typeface="Calibri" pitchFamily="34" charset="0"/>
-                <a:ea typeface="Calibri" pitchFamily="34" charset="-122"/>
-                <a:cs typeface="Calibri" pitchFamily="34" charset="-120"/>
-              </a:rPr>
-              <a:t>6.8% Accept.</a:t>
-            </a:r>
-            <a:endParaRPr lang="en-US" sz="1000" dirty="0"/>
-          </a:p>
-        </p:txBody>
-      </p:sp>
-      <p:sp>
-        <p:nvSpPr>
-          <p:cNvPr id="34" name="Shape 32"/>
-          <p:cNvSpPr/>
-          <p:nvPr/>
-        </p:nvSpPr>
-        <p:spPr>
-          <a:xfrm>
-            <a:off x="548640" y="4233672"/>
-            <a:ext cx="420624" cy="420624"/>
-          </a:xfrm>
-          <a:prstGeom prst="ellipse">
-            <a:avLst/>
-          </a:prstGeom>
-          <a:solidFill>
-            <a:srgbClr val="01485C"/>
-          </a:solidFill>
-          <a:ln/>
-        </p:spPr>
-      </p:sp>
-      <p:sp>
-        <p:nvSpPr>
-          <p:cNvPr id="35" name="Text 33"/>
-          <p:cNvSpPr txBox="1"/>
-          <p:nvPr/>
-        </p:nvSpPr>
-        <p:spPr>
-          <a:xfrm>
-            <a:off x="548640" y="4233672"/>
-            <a:ext cx="420624" cy="420624"/>
-          </a:xfrm>
-          <a:prstGeom prst="rect">
-            <a:avLst/>
-          </a:prstGeom>
-          <a:noFill/>
-          <a:ln/>
-        </p:spPr>
-        <p:txBody>
-          <a:bodyPr wrap="square" lIns="0" tIns="0" rIns="0" bIns="0" rtlCol="0" anchor="ctr"/>
-          <a:lstStyle/>
-          <a:p>
-            <a:pPr algn="ctr" indent="0" marL="0">
-              <a:buNone/>
-            </a:pPr>
-            <a:r>
-              <a:rPr lang="en-US" sz="1500" b="1" dirty="0">
-                <a:solidFill>
-                  <a:srgbClr val="FFFFFF"/>
-                </a:solidFill>
-                <a:latin typeface="Calibri" pitchFamily="34" charset="0"/>
-                <a:ea typeface="Calibri" pitchFamily="34" charset="-122"/>
-                <a:cs typeface="Calibri" pitchFamily="34" charset="-120"/>
-              </a:rPr>
-              <a:t>4</a:t>
-            </a:r>
-            <a:endParaRPr lang="en-US" sz="1500" dirty="0"/>
-          </a:p>
-        </p:txBody>
-      </p:sp>
-      <p:sp>
-        <p:nvSpPr>
-          <p:cNvPr id="36" name="Text 34"/>
-          <p:cNvSpPr txBox="1"/>
-          <p:nvPr/>
-        </p:nvSpPr>
-        <p:spPr>
-          <a:xfrm>
-            <a:off x="1133856" y="4178808"/>
-            <a:ext cx="5029200" cy="859536"/>
-          </a:xfrm>
-          <a:prstGeom prst="rect">
-            <a:avLst/>
-          </a:prstGeom>
-          <a:noFill/>
-          <a:ln/>
-        </p:spPr>
-        <p:txBody>
-          <a:bodyPr wrap="square" lIns="0" tIns="0" rIns="0" bIns="0" rtlCol="0" anchor="t"/>
-          <a:lstStyle/>
-          <a:p>
-            <a:pPr indent="0" marL="0">
-              <a:buNone/>
-            </a:pPr>
-            <a:r>
-              <a:rPr lang="en-US" sz="1300" b="1" dirty="0">
-                <a:solidFill>
-                  <a:srgbClr val="01485C"/>
-                </a:solidFill>
-                <a:latin typeface="Calibri" pitchFamily="34" charset="0"/>
-                <a:ea typeface="Calibri" pitchFamily="34" charset="-122"/>
-                <a:cs typeface="Calibri" pitchFamily="34" charset="-120"/>
-              </a:rPr>
-              <a:t>Simulators Run
-</a:t>
-            </a:r>
-            <a:pPr indent="0" marL="0">
-              <a:buNone/>
-            </a:pPr>
-            <a:r>
-              <a:rPr lang="en-US" sz="1100" dirty="0">
-                <a:solidFill>
-                  <a:srgbClr val="5F7178"/>
-                </a:solidFill>
-                <a:latin typeface="Calibri" pitchFamily="34" charset="0"/>
-                <a:ea typeface="Calibri" pitchFamily="34" charset="-122"/>
-                <a:cs typeface="Calibri" pitchFamily="34" charset="-120"/>
-              </a:rPr>
-              <a:t>Electronic QC (simulator) checks recorded on each device during the month.</a:t>
-            </a:r>
-            <a:endParaRPr lang="en-US" sz="1300" dirty="0"/>
-          </a:p>
-        </p:txBody>
-      </p:sp>
-      <p:sp>
-        <p:nvSpPr>
-          <p:cNvPr id="37" name="Shape 35"/>
-          <p:cNvSpPr/>
-          <p:nvPr/>
-        </p:nvSpPr>
-        <p:spPr>
-          <a:xfrm>
-            <a:off x="6400800" y="4187952"/>
-            <a:ext cx="5212080" cy="859536"/>
-          </a:xfrm>
-          <a:prstGeom prst="roundRect">
-            <a:avLst>
-              <a:gd name="adj" fmla="val 8511"/>
-            </a:avLst>
-          </a:prstGeom>
-          <a:solidFill>
-            <a:srgbClr val="FFFFFF"/>
-          </a:solidFill>
-          <a:ln w="15875">
-            <a:solidFill>
-              <a:srgbClr val="E2E8EA"/>
-            </a:solidFill>
-            <a:prstDash val="solid"/>
-          </a:ln>
-        </p:spPr>
-      </p:sp>
-      <p:sp>
-        <p:nvSpPr>
-          <p:cNvPr id="38" name="Text 36"/>
-          <p:cNvSpPr txBox="1"/>
-          <p:nvPr/>
-        </p:nvSpPr>
-        <p:spPr>
-          <a:xfrm>
-            <a:off x="6629400" y="4187952"/>
-            <a:ext cx="4754880" cy="859536"/>
-          </a:xfrm>
-          <a:prstGeom prst="rect">
-            <a:avLst/>
-          </a:prstGeom>
-          <a:noFill/>
-          <a:ln/>
-        </p:spPr>
-        <p:txBody>
-          <a:bodyPr wrap="square" lIns="0" tIns="0" rIns="0" bIns="0" rtlCol="0" anchor="ctr"/>
-          <a:lstStyle/>
-          <a:p>
-            <a:pPr indent="0" marL="0">
-              <a:buNone/>
-            </a:pPr>
-            <a:r>
-              <a:rPr lang="en-US" sz="1100" b="1" dirty="0">
-                <a:solidFill>
-                  <a:srgbClr val="01485C"/>
-                </a:solidFill>
-                <a:latin typeface="Calibri" pitchFamily="34" charset="0"/>
-                <a:ea typeface="Calibri" pitchFamily="34" charset="-122"/>
-                <a:cs typeface="Calibri" pitchFamily="34" charset="-120"/>
-              </a:rPr>
-              <a:t>EQC checks:   </a:t>
-            </a:r>
-            <a:pPr indent="0" marL="0">
-              <a:buNone/>
-            </a:pPr>
-            <a:r>
-              <a:rPr lang="en-US" sz="1100" dirty="0">
-                <a:solidFill>
-                  <a:srgbClr val="17272E"/>
-                </a:solidFill>
-                <a:latin typeface="Calibri" pitchFamily="34" charset="0"/>
-                <a:ea typeface="Calibri" pitchFamily="34" charset="-122"/>
-                <a:cs typeface="Calibri" pitchFamily="34" charset="-120"/>
-              </a:rPr>
-              <a:t>9001 — 8 ✓      9002 — 6 ✓      9003 — 7 ✓</a:t>
-            </a:r>
-            <a:endParaRPr lang="en-US" sz="1100" dirty="0"/>
-          </a:p>
-        </p:txBody>
-      </p:sp>
-      <p:sp>
-        <p:nvSpPr>
-          <p:cNvPr id="39" name="Shape 37"/>
-          <p:cNvSpPr/>
-          <p:nvPr/>
-        </p:nvSpPr>
-        <p:spPr>
-          <a:xfrm>
-            <a:off x="548640" y="5202936"/>
-            <a:ext cx="420624" cy="420624"/>
-          </a:xfrm>
-          <a:prstGeom prst="ellipse">
-            <a:avLst/>
-          </a:prstGeom>
-          <a:solidFill>
-            <a:srgbClr val="01485C"/>
-          </a:solidFill>
-          <a:ln/>
-        </p:spPr>
-      </p:sp>
-      <p:sp>
-        <p:nvSpPr>
-          <p:cNvPr id="40" name="Text 38"/>
-          <p:cNvSpPr txBox="1"/>
-          <p:nvPr/>
-        </p:nvSpPr>
-        <p:spPr>
-          <a:xfrm>
-            <a:off x="548640" y="5202936"/>
-            <a:ext cx="420624" cy="420624"/>
-          </a:xfrm>
-          <a:prstGeom prst="rect">
-            <a:avLst/>
-          </a:prstGeom>
-          <a:noFill/>
-          <a:ln/>
-        </p:spPr>
-        <p:txBody>
-          <a:bodyPr wrap="square" lIns="0" tIns="0" rIns="0" bIns="0" rtlCol="0" anchor="ctr"/>
-          <a:lstStyle/>
-          <a:p>
-            <a:pPr algn="ctr" indent="0" marL="0">
-              <a:buNone/>
-            </a:pPr>
-            <a:r>
-              <a:rPr lang="en-US" sz="1500" b="1" dirty="0">
-                <a:solidFill>
-                  <a:srgbClr val="FFFFFF"/>
-                </a:solidFill>
-                <a:latin typeface="Calibri" pitchFamily="34" charset="0"/>
-                <a:ea typeface="Calibri" pitchFamily="34" charset="-122"/>
-                <a:cs typeface="Calibri" pitchFamily="34" charset="-120"/>
-              </a:rPr>
-              <a:t>5</a:t>
-            </a:r>
-            <a:endParaRPr lang="en-US" sz="1500" dirty="0"/>
-          </a:p>
-        </p:txBody>
-      </p:sp>
-      <p:sp>
-        <p:nvSpPr>
-          <p:cNvPr id="41" name="Text 39"/>
-          <p:cNvSpPr txBox="1"/>
-          <p:nvPr/>
-        </p:nvSpPr>
-        <p:spPr>
-          <a:xfrm>
-            <a:off x="1133856" y="5148072"/>
-            <a:ext cx="5029200" cy="859536"/>
-          </a:xfrm>
-          <a:prstGeom prst="rect">
-            <a:avLst/>
-          </a:prstGeom>
-          <a:noFill/>
-          <a:ln/>
-        </p:spPr>
-        <p:txBody>
-          <a:bodyPr wrap="square" lIns="0" tIns="0" rIns="0" bIns="0" rtlCol="0" anchor="t"/>
-          <a:lstStyle/>
-          <a:p>
-            <a:pPr indent="0" marL="0">
-              <a:buNone/>
-            </a:pPr>
-            <a:r>
-              <a:rPr lang="en-US" sz="1300" b="1" dirty="0">
-                <a:solidFill>
-                  <a:srgbClr val="01485C"/>
-                </a:solidFill>
-                <a:latin typeface="Calibri" pitchFamily="34" charset="0"/>
-                <a:ea typeface="Calibri" pitchFamily="34" charset="-122"/>
-                <a:cs typeface="Calibri" pitchFamily="34" charset="-120"/>
-              </a:rPr>
-              <a:t>Monthly Ceramic Cleaning
-</a:t>
-            </a:r>
-            <a:pPr indent="0" marL="0">
-              <a:buNone/>
-            </a:pPr>
-            <a:r>
-              <a:rPr lang="en-US" sz="1100" dirty="0">
-                <a:solidFill>
-                  <a:srgbClr val="5F7178"/>
-                </a:solidFill>
-                <a:latin typeface="Calibri" pitchFamily="34" charset="0"/>
-                <a:ea typeface="Calibri" pitchFamily="34" charset="-122"/>
-                <a:cs typeface="Calibri" pitchFamily="34" charset="-120"/>
-              </a:rPr>
-              <a:t>Each analyser listed with its cleaning-cartridge count. Every i-STAT needs 3 per month; any shortfall fails the department.</a:t>
-            </a:r>
-            <a:endParaRPr lang="en-US" sz="1300" dirty="0"/>
-          </a:p>
-        </p:txBody>
-      </p:sp>
-      <p:sp>
-        <p:nvSpPr>
-          <p:cNvPr id="42" name="Shape 40"/>
-          <p:cNvSpPr/>
-          <p:nvPr/>
-        </p:nvSpPr>
-        <p:spPr>
-          <a:xfrm>
-            <a:off x="6400800" y="5157216"/>
-            <a:ext cx="5212080" cy="859536"/>
-          </a:xfrm>
-          <a:prstGeom prst="roundRect">
-            <a:avLst>
-              <a:gd name="adj" fmla="val 8511"/>
-            </a:avLst>
-          </a:prstGeom>
-          <a:solidFill>
-            <a:srgbClr val="FFFFFF"/>
-          </a:solidFill>
-          <a:ln w="15875">
-            <a:solidFill>
-              <a:srgbClr val="E2E8EA"/>
-            </a:solidFill>
-            <a:prstDash val="solid"/>
-          </a:ln>
-        </p:spPr>
-      </p:sp>
-      <p:sp>
-        <p:nvSpPr>
-          <p:cNvPr id="43" name="Shape 41"/>
-          <p:cNvSpPr/>
-          <p:nvPr/>
-        </p:nvSpPr>
-        <p:spPr>
-          <a:xfrm>
-            <a:off x="6629400" y="5404104"/>
-            <a:ext cx="1554480" cy="365760"/>
-          </a:xfrm>
-          <a:prstGeom prst="roundRect">
-            <a:avLst>
-              <a:gd name="adj" fmla="val 25000"/>
-            </a:avLst>
-          </a:prstGeom>
-          <a:solidFill>
-            <a:srgbClr val="538135"/>
-          </a:solidFill>
-          <a:ln/>
-        </p:spPr>
-      </p:sp>
-      <p:sp>
-        <p:nvSpPr>
-          <p:cNvPr id="44" name="Text 42"/>
-          <p:cNvSpPr txBox="1"/>
-          <p:nvPr/>
-        </p:nvSpPr>
-        <p:spPr>
-          <a:xfrm>
-            <a:off x="6629400" y="5404104"/>
-            <a:ext cx="1554480" cy="365760"/>
-          </a:xfrm>
-          <a:prstGeom prst="rect">
-            <a:avLst/>
-          </a:prstGeom>
-          <a:noFill/>
-          <a:ln/>
-        </p:spPr>
-        <p:txBody>
-          <a:bodyPr wrap="square" lIns="0" tIns="0" rIns="0" bIns="0" rtlCol="0" anchor="ctr"/>
-          <a:lstStyle/>
-          <a:p>
-            <a:pPr algn="ctr" indent="0" marL="0">
-              <a:buNone/>
-            </a:pPr>
-            <a:r>
-              <a:rPr lang="en-US" sz="1100" b="1" dirty="0">
-                <a:solidFill>
-                  <a:srgbClr val="FFFFFF"/>
-                </a:solidFill>
-                <a:latin typeface="Calibri" pitchFamily="34" charset="0"/>
-                <a:ea typeface="Calibri" pitchFamily="34" charset="-122"/>
-                <a:cs typeface="Calibri" pitchFamily="34" charset="-120"/>
-              </a:rPr>
-              <a:t>Completed ✓</a:t>
-            </a:r>
-            <a:endParaRPr lang="en-US" sz="1100" dirty="0"/>
-          </a:p>
-        </p:txBody>
-      </p:sp>
-      <p:sp>
-        <p:nvSpPr>
-          <p:cNvPr id="45" name="Text 43"/>
-          <p:cNvSpPr txBox="1"/>
-          <p:nvPr/>
-        </p:nvSpPr>
-        <p:spPr>
-          <a:xfrm>
-            <a:off x="8366760" y="5404104"/>
-            <a:ext cx="3017520" cy="365760"/>
-          </a:xfrm>
-          <a:prstGeom prst="rect">
-            <a:avLst/>
-          </a:prstGeom>
-          <a:noFill/>
-          <a:ln/>
-        </p:spPr>
-        <p:txBody>
-          <a:bodyPr wrap="square" lIns="0" tIns="0" rIns="0" bIns="0" rtlCol="0" anchor="ctr"/>
-          <a:lstStyle/>
-          <a:p>
-            <a:pPr indent="0" marL="0">
-              <a:buNone/>
-            </a:pPr>
-            <a:r>
-              <a:rPr lang="en-US" sz="1050" i="1" dirty="0">
-                <a:solidFill>
-                  <a:srgbClr val="5F7178"/>
-                </a:solidFill>
-                <a:latin typeface="Calibri" pitchFamily="34" charset="0"/>
-                <a:ea typeface="Calibri" pitchFamily="34" charset="-122"/>
-                <a:cs typeface="Calibri" pitchFamily="34" charset="-120"/>
-              </a:rPr>
-              <a:t>— listed per analyser; any analyser under 3 shows a red Fail</a:t>
-            </a:r>
-            <a:endParaRPr lang="en-US" sz="1050" dirty="0"/>
-          </a:p>
-        </p:txBody>
-      </p:sp>
-      <p:sp>
-        <p:nvSpPr>
-          <p:cNvPr id="46" name="Text 44"/>
-          <p:cNvSpPr txBox="1"/>
-          <p:nvPr/>
-        </p:nvSpPr>
-        <p:spPr>
-          <a:xfrm>
-            <a:off x="6400800" y="6163056"/>
-            <a:ext cx="5212080" cy="320040"/>
-          </a:xfrm>
-          <a:prstGeom prst="rect">
-            <a:avLst/>
-          </a:prstGeom>
-          <a:noFill/>
-          <a:ln/>
-        </p:spPr>
-        <p:txBody>
-          <a:bodyPr wrap="square" lIns="0" tIns="0" rIns="0" bIns="0" rtlCol="0" anchor="ctr"/>
-          <a:lstStyle/>
-          <a:p>
-            <a:pPr indent="0" marL="0">
-              <a:buNone/>
-            </a:pPr>
-            <a:r>
-              <a:rPr lang="en-US" sz="1000" i="1" dirty="0">
-                <a:solidFill>
-                  <a:srgbClr val="5F7178"/>
-                </a:solidFill>
-                <a:latin typeface="Calibri" pitchFamily="34" charset="0"/>
-                <a:ea typeface="Calibri" pitchFamily="34" charset="-122"/>
-                <a:cs typeface="Calibri" pitchFamily="34" charset="-120"/>
-              </a:rPr>
-              <a:t>Examples shown with fictional data — layouts match the real Word report.</a:t>
-            </a:r>
-            <a:endParaRPr lang="en-US" sz="1000" dirty="0"/>
-          </a:p>
-        </p:txBody>
-      </p:sp>
-      <p:sp>
-        <p:nvSpPr>
-          <p:cNvPr id="47" name="Shape 45"/>
-          <p:cNvSpPr/>
-          <p:nvPr/>
-        </p:nvSpPr>
-        <p:spPr>
-          <a:xfrm>
-            <a:off x="0" y="6793992"/>
-            <a:ext cx="2040636" cy="64008"/>
-          </a:xfrm>
-          <a:prstGeom prst="rect">
-            <a:avLst/>
-          </a:prstGeom>
-          <a:solidFill>
-            <a:srgbClr val="01485C"/>
-          </a:solidFill>
-          <a:ln/>
-        </p:spPr>
-      </p:sp>
-      <p:sp>
-        <p:nvSpPr>
-          <p:cNvPr id="48" name="Shape 46"/>
-          <p:cNvSpPr/>
-          <p:nvPr/>
-        </p:nvSpPr>
-        <p:spPr>
-          <a:xfrm>
-            <a:off x="2031492" y="6793992"/>
-            <a:ext cx="2040636" cy="64008"/>
-          </a:xfrm>
-          <a:prstGeom prst="rect">
-            <a:avLst/>
-          </a:prstGeom>
-          <a:solidFill>
-            <a:srgbClr val="146175"/>
-          </a:solidFill>
-          <a:ln/>
-        </p:spPr>
-      </p:sp>
-      <p:sp>
-        <p:nvSpPr>
-          <p:cNvPr id="49" name="Shape 47"/>
-          <p:cNvSpPr/>
-          <p:nvPr/>
-        </p:nvSpPr>
-        <p:spPr>
-          <a:xfrm>
-            <a:off x="4062984" y="6793992"/>
-            <a:ext cx="2040636" cy="64008"/>
-          </a:xfrm>
-          <a:prstGeom prst="rect">
-            <a:avLst/>
-          </a:prstGeom>
-          <a:solidFill>
-            <a:srgbClr val="11B5AE"/>
-          </a:solidFill>
-          <a:ln/>
-        </p:spPr>
-      </p:sp>
-      <p:sp>
-        <p:nvSpPr>
-          <p:cNvPr id="50" name="Shape 48"/>
-          <p:cNvSpPr/>
-          <p:nvPr/>
-        </p:nvSpPr>
-        <p:spPr>
-          <a:xfrm>
-            <a:off x="6094476" y="6793992"/>
-            <a:ext cx="2040636" cy="64008"/>
-          </a:xfrm>
-          <a:prstGeom prst="rect">
-            <a:avLst/>
-          </a:prstGeom>
-          <a:solidFill>
-            <a:srgbClr val="6CCAD4"/>
-          </a:solidFill>
-          <a:ln/>
-        </p:spPr>
-      </p:sp>
-      <p:sp>
-        <p:nvSpPr>
-          <p:cNvPr id="51" name="Shape 49"/>
-          <p:cNvSpPr/>
-          <p:nvPr/>
-        </p:nvSpPr>
-        <p:spPr>
-          <a:xfrm>
-            <a:off x="8125968" y="6793992"/>
-            <a:ext cx="2040636" cy="64008"/>
-          </a:xfrm>
-          <a:prstGeom prst="rect">
-            <a:avLst/>
-          </a:prstGeom>
-          <a:solidFill>
-            <a:srgbClr val="7FC04C"/>
-          </a:solidFill>
-          <a:ln/>
-        </p:spPr>
-      </p:sp>
-      <p:sp>
-        <p:nvSpPr>
-          <p:cNvPr id="52" name="Shape 50"/>
           <p:cNvSpPr/>
           <p:nvPr/>
         </p:nvSpPr>

--- a/PQ_Report_Generator_User_Guide.pptx
+++ b/PQ_Report_Generator_User_Guide.pptx
@@ -2758,1670 +2758,6 @@
 
 <file path=ppt/slides/slide10.xml><?xml version="1.0" encoding="utf-8"?>
 <p:sld xmlns:a="http://schemas.openxmlformats.org/drawingml/2006/main" xmlns:r="http://schemas.openxmlformats.org/officeDocument/2006/relationships" xmlns:p="http://schemas.openxmlformats.org/presentationml/2006/main">
-  <p:cSld name="Slide 9">
-    <p:bg>
-      <p:bgPr>
-        <a:solidFill>
-          <a:srgbClr val="FFFFFF"/>
-        </a:solidFill>
-      </p:bgPr>
-    </p:bg>
-    <p:spTree>
-      <p:nvGrpSpPr>
-        <p:cNvPr id="1" name=""/>
-        <p:cNvGrpSpPr/>
-        <p:nvPr/>
-      </p:nvGrpSpPr>
-      <p:grpSpPr>
-        <a:xfrm>
-          <a:off x="0" y="0"/>
-          <a:ext cx="0" cy="0"/>
-          <a:chOff x="0" y="0"/>
-          <a:chExt cx="0" cy="0"/>
-        </a:xfrm>
-      </p:grpSpPr>
-      <p:sp>
-        <p:nvSpPr>
-          <p:cNvPr id="2" name="Text 0"/>
-          <p:cNvSpPr txBox="1"/>
-          <p:nvPr/>
-        </p:nvSpPr>
-        <p:spPr>
-          <a:xfrm>
-            <a:off x="548640" y="320040"/>
-            <a:ext cx="11064240" cy="685800"/>
-          </a:xfrm>
-          <a:prstGeom prst="rect">
-            <a:avLst/>
-          </a:prstGeom>
-          <a:noFill/>
-          <a:ln/>
-        </p:spPr>
-        <p:txBody>
-          <a:bodyPr wrap="square" lIns="0" tIns="0" rIns="0" bIns="0" rtlCol="0" anchor="ctr"/>
-          <a:lstStyle/>
-          <a:p>
-            <a:pPr indent="0" marL="0">
-              <a:buNone/>
-            </a:pPr>
-            <a:r>
-              <a:rPr lang="en-US" sz="3000" b="1" dirty="0">
-                <a:solidFill>
-                  <a:srgbClr val="01485C"/>
-                </a:solidFill>
-                <a:latin typeface="Calibri" pitchFamily="34" charset="0"/>
-                <a:ea typeface="Calibri" pitchFamily="34" charset="-122"/>
-                <a:cs typeface="Calibri" pitchFamily="34" charset="-120"/>
-              </a:rPr>
-              <a:t>What the report contains (1 of 2)</a:t>
-            </a:r>
-            <a:endParaRPr lang="en-US" sz="3000" dirty="0"/>
-          </a:p>
-        </p:txBody>
-      </p:sp>
-      <p:sp>
-        <p:nvSpPr>
-          <p:cNvPr id="3" name="Shape 1"/>
-          <p:cNvSpPr/>
-          <p:nvPr/>
-        </p:nvSpPr>
-        <p:spPr>
-          <a:xfrm>
-            <a:off x="9784080" y="384048"/>
-            <a:ext cx="1828800" cy="457200"/>
-          </a:xfrm>
-          <a:prstGeom prst="roundRect">
-            <a:avLst>
-              <a:gd name="adj" fmla="val 50000"/>
-            </a:avLst>
-          </a:prstGeom>
-          <a:solidFill>
-            <a:srgbClr val="01485C"/>
-          </a:solidFill>
-          <a:ln/>
-        </p:spPr>
-      </p:sp>
-      <p:sp>
-        <p:nvSpPr>
-          <p:cNvPr id="4" name="Text 2"/>
-          <p:cNvSpPr txBox="1"/>
-          <p:nvPr/>
-        </p:nvSpPr>
-        <p:spPr>
-          <a:xfrm>
-            <a:off x="9784080" y="384048"/>
-            <a:ext cx="1828800" cy="457200"/>
-          </a:xfrm>
-          <a:prstGeom prst="rect">
-            <a:avLst/>
-          </a:prstGeom>
-          <a:noFill/>
-          <a:ln/>
-        </p:spPr>
-        <p:txBody>
-          <a:bodyPr wrap="square" lIns="0" tIns="0" rIns="0" bIns="0" rtlCol="0" anchor="ctr"/>
-          <a:lstStyle/>
-          <a:p>
-            <a:pPr algn="ctr" indent="0" marL="0">
-              <a:buNone/>
-            </a:pPr>
-            <a:r>
-              <a:rPr lang="en-US" sz="1500" b="1" dirty="0">
-                <a:solidFill>
-                  <a:srgbClr val="FFFFFF"/>
-                </a:solidFill>
-                <a:latin typeface="Calibri" pitchFamily="34" charset="0"/>
-                <a:ea typeface="Calibri" pitchFamily="34" charset="-122"/>
-                <a:cs typeface="Calibri" pitchFamily="34" charset="-120"/>
-              </a:rPr>
-              <a:t>i-STAT</a:t>
-            </a:r>
-            <a:endParaRPr lang="en-US" sz="1500" dirty="0"/>
-          </a:p>
-        </p:txBody>
-      </p:sp>
-      <p:sp>
-        <p:nvSpPr>
-          <p:cNvPr id="5" name="Shape 3"/>
-          <p:cNvSpPr/>
-          <p:nvPr/>
-        </p:nvSpPr>
-        <p:spPr>
-          <a:xfrm>
-            <a:off x="548640" y="1325880"/>
-            <a:ext cx="420624" cy="420624"/>
-          </a:xfrm>
-          <a:prstGeom prst="ellipse">
-            <a:avLst/>
-          </a:prstGeom>
-          <a:solidFill>
-            <a:srgbClr val="01485C"/>
-          </a:solidFill>
-          <a:ln/>
-        </p:spPr>
-      </p:sp>
-      <p:sp>
-        <p:nvSpPr>
-          <p:cNvPr id="6" name="Text 4"/>
-          <p:cNvSpPr txBox="1"/>
-          <p:nvPr/>
-        </p:nvSpPr>
-        <p:spPr>
-          <a:xfrm>
-            <a:off x="548640" y="1325880"/>
-            <a:ext cx="420624" cy="420624"/>
-          </a:xfrm>
-          <a:prstGeom prst="rect">
-            <a:avLst/>
-          </a:prstGeom>
-          <a:noFill/>
-          <a:ln/>
-        </p:spPr>
-        <p:txBody>
-          <a:bodyPr wrap="square" lIns="0" tIns="0" rIns="0" bIns="0" rtlCol="0" anchor="ctr"/>
-          <a:lstStyle/>
-          <a:p>
-            <a:pPr algn="ctr" indent="0" marL="0">
-              <a:buNone/>
-            </a:pPr>
-            <a:r>
-              <a:rPr lang="en-US" sz="1500" b="1" dirty="0">
-                <a:solidFill>
-                  <a:srgbClr val="FFFFFF"/>
-                </a:solidFill>
-                <a:latin typeface="Calibri" pitchFamily="34" charset="0"/>
-                <a:ea typeface="Calibri" pitchFamily="34" charset="-122"/>
-                <a:cs typeface="Calibri" pitchFamily="34" charset="-120"/>
-              </a:rPr>
-              <a:t>1</a:t>
-            </a:r>
-            <a:endParaRPr lang="en-US" sz="1500" dirty="0"/>
-          </a:p>
-        </p:txBody>
-      </p:sp>
-      <p:sp>
-        <p:nvSpPr>
-          <p:cNvPr id="7" name="Text 5"/>
-          <p:cNvSpPr txBox="1"/>
-          <p:nvPr/>
-        </p:nvSpPr>
-        <p:spPr>
-          <a:xfrm>
-            <a:off x="1133856" y="1271016"/>
-            <a:ext cx="5029200" cy="859536"/>
-          </a:xfrm>
-          <a:prstGeom prst="rect">
-            <a:avLst/>
-          </a:prstGeom>
-          <a:noFill/>
-          <a:ln/>
-        </p:spPr>
-        <p:txBody>
-          <a:bodyPr wrap="square" lIns="0" tIns="0" rIns="0" bIns="0" rtlCol="0" anchor="t"/>
-          <a:lstStyle/>
-          <a:p>
-            <a:pPr indent="0" marL="0">
-              <a:buNone/>
-            </a:pPr>
-            <a:r>
-              <a:rPr lang="en-US" sz="1300" b="1" dirty="0">
-                <a:solidFill>
-                  <a:srgbClr val="01485C"/>
-                </a:solidFill>
-                <a:latin typeface="Calibri" pitchFamily="34" charset="0"/>
-                <a:ea typeface="Calibri" pitchFamily="34" charset="-122"/>
-                <a:cs typeface="Calibri" pitchFamily="34" charset="-120"/>
-              </a:rPr>
-              <a:t>Monthly Snapshot
-</a:t>
-            </a:r>
-            <a:pPr indent="0" marL="0">
-              <a:buNone/>
-            </a:pPr>
-            <a:r>
-              <a:rPr lang="en-US" sz="1100" dirty="0">
-                <a:solidFill>
-                  <a:srgbClr val="5F7178"/>
-                </a:solidFill>
-                <a:latin typeface="Calibri" pitchFamily="34" charset="0"/>
-                <a:ea typeface="Calibri" pitchFamily="34" charset="-122"/>
-                <a:cs typeface="Calibri" pitchFamily="34" charset="-120"/>
-              </a:rPr>
-              <a:t>The month in one block: overall rate, errors vs cartridges, top error, flagged staff.</a:t>
-            </a:r>
-            <a:endParaRPr lang="en-US" sz="1300" dirty="0"/>
-          </a:p>
-        </p:txBody>
-      </p:sp>
-      <p:sp>
-        <p:nvSpPr>
-          <p:cNvPr id="8" name="Shape 6"/>
-          <p:cNvSpPr/>
-          <p:nvPr/>
-        </p:nvSpPr>
-        <p:spPr>
-          <a:xfrm>
-            <a:off x="6400800" y="1280160"/>
-            <a:ext cx="5212080" cy="859536"/>
-          </a:xfrm>
-          <a:prstGeom prst="roundRect">
-            <a:avLst>
-              <a:gd name="adj" fmla="val 8511"/>
-            </a:avLst>
-          </a:prstGeom>
-          <a:solidFill>
-            <a:srgbClr val="FFFFFF"/>
-          </a:solidFill>
-          <a:ln w="15875">
-            <a:solidFill>
-              <a:srgbClr val="E2E8EA"/>
-            </a:solidFill>
-            <a:prstDash val="solid"/>
-          </a:ln>
-        </p:spPr>
-      </p:sp>
-      <p:sp>
-        <p:nvSpPr>
-          <p:cNvPr id="9" name="Text 7"/>
-          <p:cNvSpPr txBox="1"/>
-          <p:nvPr/>
-        </p:nvSpPr>
-        <p:spPr>
-          <a:xfrm>
-            <a:off x="6629400" y="1408176"/>
-            <a:ext cx="4754880" cy="630936"/>
-          </a:xfrm>
-          <a:prstGeom prst="rect">
-            <a:avLst/>
-          </a:prstGeom>
-          <a:noFill/>
-          <a:ln/>
-        </p:spPr>
-        <p:txBody>
-          <a:bodyPr wrap="square" lIns="0" tIns="0" rIns="0" bIns="0" rtlCol="0" anchor="t"/>
-          <a:lstStyle/>
-          <a:p>
-            <a:pPr indent="0" marL="0">
-              <a:buNone/>
-            </a:pPr>
-            <a:r>
-              <a:rPr lang="en-US" sz="1250" b="1" dirty="0">
-                <a:solidFill>
-                  <a:srgbClr val="2F5496"/>
-                </a:solidFill>
-                <a:latin typeface="Calibri" pitchFamily="34" charset="0"/>
-                <a:ea typeface="Calibri" pitchFamily="34" charset="-122"/>
-                <a:cs typeface="Calibri" pitchFamily="34" charset="-120"/>
-              </a:rPr>
-              <a:t>Error rate 4.5%</a:t>
-            </a:r>
-            <a:pPr indent="0" marL="0">
-              <a:buNone/>
-            </a:pPr>
-            <a:r>
-              <a:rPr lang="en-US" sz="1050" dirty="0">
-                <a:solidFill>
-                  <a:srgbClr val="17272E"/>
-                </a:solidFill>
-                <a:latin typeface="Calibri" pitchFamily="34" charset="0"/>
-                <a:ea typeface="Calibri" pitchFamily="34" charset="-122"/>
-                <a:cs typeface="Calibri" pitchFamily="34" charset="-120"/>
-              </a:rPr>
-              <a:t>   (12 errors / 266 cartridges)
-</a:t>
-            </a:r>
-            <a:pPr indent="0" marL="0">
-              <a:buNone/>
-            </a:pPr>
-            <a:r>
-              <a:rPr lang="en-US" sz="1050" dirty="0">
-                <a:solidFill>
-                  <a:srgbClr val="5F7178"/>
-                </a:solidFill>
-                <a:latin typeface="Calibri" pitchFamily="34" charset="0"/>
-                <a:ea typeface="Calibri" pitchFamily="34" charset="-122"/>
-                <a:cs typeface="Calibri" pitchFamily="34" charset="-120"/>
-              </a:rPr>
-              <a:t>Top error: P3 Cartridge Handling  ·  Staff flagged: 2</a:t>
-            </a:r>
-            <a:endParaRPr lang="en-US" sz="1250" dirty="0"/>
-          </a:p>
-        </p:txBody>
-      </p:sp>
-      <p:sp>
-        <p:nvSpPr>
-          <p:cNvPr id="10" name="Shape 8"/>
-          <p:cNvSpPr/>
-          <p:nvPr/>
-        </p:nvSpPr>
-        <p:spPr>
-          <a:xfrm>
-            <a:off x="548640" y="2295144"/>
-            <a:ext cx="420624" cy="420624"/>
-          </a:xfrm>
-          <a:prstGeom prst="ellipse">
-            <a:avLst/>
-          </a:prstGeom>
-          <a:solidFill>
-            <a:srgbClr val="01485C"/>
-          </a:solidFill>
-          <a:ln/>
-        </p:spPr>
-      </p:sp>
-      <p:sp>
-        <p:nvSpPr>
-          <p:cNvPr id="11" name="Text 9"/>
-          <p:cNvSpPr txBox="1"/>
-          <p:nvPr/>
-        </p:nvSpPr>
-        <p:spPr>
-          <a:xfrm>
-            <a:off x="548640" y="2295144"/>
-            <a:ext cx="420624" cy="420624"/>
-          </a:xfrm>
-          <a:prstGeom prst="rect">
-            <a:avLst/>
-          </a:prstGeom>
-          <a:noFill/>
-          <a:ln/>
-        </p:spPr>
-        <p:txBody>
-          <a:bodyPr wrap="square" lIns="0" tIns="0" rIns="0" bIns="0" rtlCol="0" anchor="ctr"/>
-          <a:lstStyle/>
-          <a:p>
-            <a:pPr algn="ctr" indent="0" marL="0">
-              <a:buNone/>
-            </a:pPr>
-            <a:r>
-              <a:rPr lang="en-US" sz="1500" b="1" dirty="0">
-                <a:solidFill>
-                  <a:srgbClr val="FFFFFF"/>
-                </a:solidFill>
-                <a:latin typeface="Calibri" pitchFamily="34" charset="0"/>
-                <a:ea typeface="Calibri" pitchFamily="34" charset="-122"/>
-                <a:cs typeface="Calibri" pitchFamily="34" charset="-120"/>
-              </a:rPr>
-              <a:t>2</a:t>
-            </a:r>
-            <a:endParaRPr lang="en-US" sz="1500" dirty="0"/>
-          </a:p>
-        </p:txBody>
-      </p:sp>
-      <p:sp>
-        <p:nvSpPr>
-          <p:cNvPr id="12" name="Text 10"/>
-          <p:cNvSpPr txBox="1"/>
-          <p:nvPr/>
-        </p:nvSpPr>
-        <p:spPr>
-          <a:xfrm>
-            <a:off x="1133856" y="2240280"/>
-            <a:ext cx="5029200" cy="859536"/>
-          </a:xfrm>
-          <a:prstGeom prst="rect">
-            <a:avLst/>
-          </a:prstGeom>
-          <a:noFill/>
-          <a:ln/>
-        </p:spPr>
-        <p:txBody>
-          <a:bodyPr wrap="square" lIns="0" tIns="0" rIns="0" bIns="0" rtlCol="0" anchor="t"/>
-          <a:lstStyle/>
-          <a:p>
-            <a:pPr indent="0" marL="0">
-              <a:buNone/>
-            </a:pPr>
-            <a:r>
-              <a:rPr lang="en-US" sz="1300" b="1" dirty="0">
-                <a:solidFill>
-                  <a:srgbClr val="01485C"/>
-                </a:solidFill>
-                <a:latin typeface="Calibri" pitchFamily="34" charset="0"/>
-                <a:ea typeface="Calibri" pitchFamily="34" charset="-122"/>
-                <a:cs typeface="Calibri" pitchFamily="34" charset="-120"/>
-              </a:rPr>
-              <a:t>Historical Performance
-</a:t>
-            </a:r>
-            <a:pPr indent="0" marL="0">
-              <a:buNone/>
-            </a:pPr>
-            <a:r>
-              <a:rPr lang="en-US" sz="1100" dirty="0">
-                <a:solidFill>
-                  <a:srgbClr val="5F7178"/>
-                </a:solidFill>
-                <a:latin typeface="Calibri" pitchFamily="34" charset="0"/>
-                <a:ea typeface="Calibri" pitchFamily="34" charset="-122"/>
-                <a:cs typeface="Calibri" pitchFamily="34" charset="-120"/>
-              </a:rPr>
-              <a:t>TWO charts per device: the error-rate trend over the colour bands, and the Cartridges Run &amp; Error Mix chart (next slide).</a:t>
-            </a:r>
-            <a:endParaRPr lang="en-US" sz="1300" dirty="0"/>
-          </a:p>
-        </p:txBody>
-      </p:sp>
-      <p:sp>
-        <p:nvSpPr>
-          <p:cNvPr id="13" name="Shape 11"/>
-          <p:cNvSpPr/>
-          <p:nvPr/>
-        </p:nvSpPr>
-        <p:spPr>
-          <a:xfrm>
-            <a:off x="6400800" y="2249424"/>
-            <a:ext cx="5212080" cy="859536"/>
-          </a:xfrm>
-          <a:prstGeom prst="roundRect">
-            <a:avLst>
-              <a:gd name="adj" fmla="val 8511"/>
-            </a:avLst>
-          </a:prstGeom>
-          <a:solidFill>
-            <a:srgbClr val="FFFFFF"/>
-          </a:solidFill>
-          <a:ln w="15875">
-            <a:solidFill>
-              <a:srgbClr val="E2E8EA"/>
-            </a:solidFill>
-            <a:prstDash val="solid"/>
-          </a:ln>
-        </p:spPr>
-      </p:sp>
-      <p:sp>
-        <p:nvSpPr>
-          <p:cNvPr id="14" name="Shape 12"/>
-          <p:cNvSpPr/>
-          <p:nvPr/>
-        </p:nvSpPr>
-        <p:spPr>
-          <a:xfrm>
-            <a:off x="6601968" y="2359152"/>
-            <a:ext cx="3840480" cy="155448"/>
-          </a:xfrm>
-          <a:prstGeom prst="rect">
-            <a:avLst/>
-          </a:prstGeom>
-          <a:solidFill>
-            <a:srgbClr val="C00000">
-              <a:alpha val="38000"/>
-            </a:srgbClr>
-          </a:solidFill>
-          <a:ln/>
-        </p:spPr>
-      </p:sp>
-      <p:sp>
-        <p:nvSpPr>
-          <p:cNvPr id="15" name="Shape 13"/>
-          <p:cNvSpPr/>
-          <p:nvPr/>
-        </p:nvSpPr>
-        <p:spPr>
-          <a:xfrm>
-            <a:off x="6601968" y="2514600"/>
-            <a:ext cx="3840480" cy="155448"/>
-          </a:xfrm>
-          <a:prstGeom prst="rect">
-            <a:avLst/>
-          </a:prstGeom>
-          <a:solidFill>
-            <a:srgbClr val="D96800">
-              <a:alpha val="38000"/>
-            </a:srgbClr>
-          </a:solidFill>
-          <a:ln/>
-        </p:spPr>
-      </p:sp>
-      <p:sp>
-        <p:nvSpPr>
-          <p:cNvPr id="16" name="Shape 14"/>
-          <p:cNvSpPr/>
-          <p:nvPr/>
-        </p:nvSpPr>
-        <p:spPr>
-          <a:xfrm>
-            <a:off x="6601968" y="2670048"/>
-            <a:ext cx="3840480" cy="155448"/>
-          </a:xfrm>
-          <a:prstGeom prst="rect">
-            <a:avLst/>
-          </a:prstGeom>
-          <a:solidFill>
-            <a:srgbClr val="2F5496">
-              <a:alpha val="38000"/>
-            </a:srgbClr>
-          </a:solidFill>
-          <a:ln/>
-        </p:spPr>
-      </p:sp>
-      <p:sp>
-        <p:nvSpPr>
-          <p:cNvPr id="17" name="Shape 15"/>
-          <p:cNvSpPr/>
-          <p:nvPr/>
-        </p:nvSpPr>
-        <p:spPr>
-          <a:xfrm>
-            <a:off x="6601968" y="2825496"/>
-            <a:ext cx="3840480" cy="155448"/>
-          </a:xfrm>
-          <a:prstGeom prst="rect">
-            <a:avLst/>
-          </a:prstGeom>
-          <a:solidFill>
-            <a:srgbClr val="538135">
-              <a:alpha val="38000"/>
-            </a:srgbClr>
-          </a:solidFill>
-          <a:ln/>
-        </p:spPr>
-      </p:sp>
-      <p:sp>
-        <p:nvSpPr>
-          <p:cNvPr id="18" name="Shape 16"/>
-          <p:cNvSpPr/>
-          <p:nvPr/>
-        </p:nvSpPr>
-        <p:spPr>
-          <a:xfrm>
-            <a:off x="7059168" y="2468880"/>
-            <a:ext cx="118872" cy="118872"/>
-          </a:xfrm>
-          <a:prstGeom prst="ellipse">
-            <a:avLst/>
-          </a:prstGeom>
-          <a:solidFill>
-            <a:srgbClr val="01485C"/>
-          </a:solidFill>
-          <a:ln w="12700">
-            <a:solidFill>
-              <a:srgbClr val="FFFFFF"/>
-            </a:solidFill>
-            <a:prstDash val="solid"/>
-          </a:ln>
-        </p:spPr>
-      </p:sp>
-      <p:sp>
-        <p:nvSpPr>
-          <p:cNvPr id="19" name="Shape 17"/>
-          <p:cNvSpPr/>
-          <p:nvPr/>
-        </p:nvSpPr>
-        <p:spPr>
-          <a:xfrm>
-            <a:off x="7790688" y="2578608"/>
-            <a:ext cx="118872" cy="118872"/>
-          </a:xfrm>
-          <a:prstGeom prst="ellipse">
-            <a:avLst/>
-          </a:prstGeom>
-          <a:solidFill>
-            <a:srgbClr val="01485C"/>
-          </a:solidFill>
-          <a:ln w="12700">
-            <a:solidFill>
-              <a:srgbClr val="FFFFFF"/>
-            </a:solidFill>
-            <a:prstDash val="solid"/>
-          </a:ln>
-        </p:spPr>
-      </p:sp>
-      <p:sp>
-        <p:nvSpPr>
-          <p:cNvPr id="20" name="Shape 18"/>
-          <p:cNvSpPr/>
-          <p:nvPr/>
-        </p:nvSpPr>
-        <p:spPr>
-          <a:xfrm>
-            <a:off x="8522208" y="2542032"/>
-            <a:ext cx="118872" cy="118872"/>
-          </a:xfrm>
-          <a:prstGeom prst="ellipse">
-            <a:avLst/>
-          </a:prstGeom>
-          <a:solidFill>
-            <a:srgbClr val="01485C"/>
-          </a:solidFill>
-          <a:ln w="12700">
-            <a:solidFill>
-              <a:srgbClr val="FFFFFF"/>
-            </a:solidFill>
-            <a:prstDash val="solid"/>
-          </a:ln>
-        </p:spPr>
-      </p:sp>
-      <p:sp>
-        <p:nvSpPr>
-          <p:cNvPr id="21" name="Shape 19"/>
-          <p:cNvSpPr/>
-          <p:nvPr/>
-        </p:nvSpPr>
-        <p:spPr>
-          <a:xfrm>
-            <a:off x="9253728" y="2724912"/>
-            <a:ext cx="118872" cy="118872"/>
-          </a:xfrm>
-          <a:prstGeom prst="ellipse">
-            <a:avLst/>
-          </a:prstGeom>
-          <a:solidFill>
-            <a:srgbClr val="01485C"/>
-          </a:solidFill>
-          <a:ln w="12700">
-            <a:solidFill>
-              <a:srgbClr val="FFFFFF"/>
-            </a:solidFill>
-            <a:prstDash val="solid"/>
-          </a:ln>
-        </p:spPr>
-      </p:sp>
-      <p:sp>
-        <p:nvSpPr>
-          <p:cNvPr id="22" name="Shape 20"/>
-          <p:cNvSpPr/>
-          <p:nvPr/>
-        </p:nvSpPr>
-        <p:spPr>
-          <a:xfrm>
-            <a:off x="9985248" y="2825496"/>
-            <a:ext cx="118872" cy="118872"/>
-          </a:xfrm>
-          <a:prstGeom prst="ellipse">
-            <a:avLst/>
-          </a:prstGeom>
-          <a:solidFill>
-            <a:srgbClr val="01485C"/>
-          </a:solidFill>
-          <a:ln w="12700">
-            <a:solidFill>
-              <a:srgbClr val="FFFFFF"/>
-            </a:solidFill>
-            <a:prstDash val="solid"/>
-          </a:ln>
-        </p:spPr>
-      </p:sp>
-      <p:sp>
-        <p:nvSpPr>
-          <p:cNvPr id="23" name="Text 21"/>
-          <p:cNvSpPr txBox="1"/>
-          <p:nvPr/>
-        </p:nvSpPr>
-        <p:spPr>
-          <a:xfrm>
-            <a:off x="10469880" y="2542032"/>
-            <a:ext cx="1005840" cy="274320"/>
-          </a:xfrm>
-          <a:prstGeom prst="rect">
-            <a:avLst/>
-          </a:prstGeom>
-          <a:noFill/>
-          <a:ln/>
-        </p:spPr>
-        <p:txBody>
-          <a:bodyPr wrap="square" lIns="0" tIns="0" rIns="0" bIns="0" rtlCol="0" anchor="ctr"/>
-          <a:lstStyle/>
-          <a:p>
-            <a:pPr indent="0" marL="0">
-              <a:buNone/>
-            </a:pPr>
-            <a:r>
-              <a:rPr lang="en-US" sz="950" i="1" dirty="0">
-                <a:solidFill>
-                  <a:srgbClr val="538135"/>
-                </a:solidFill>
-                <a:latin typeface="Calibri" pitchFamily="34" charset="0"/>
-                <a:ea typeface="Calibri" pitchFamily="34" charset="-122"/>
-                <a:cs typeface="Calibri" pitchFamily="34" charset="-120"/>
-              </a:rPr>
-              <a:t>improving ↓</a:t>
-            </a:r>
-            <a:endParaRPr lang="en-US" sz="950" dirty="0"/>
-          </a:p>
-        </p:txBody>
-      </p:sp>
-      <p:sp>
-        <p:nvSpPr>
-          <p:cNvPr id="24" name="Shape 22"/>
-          <p:cNvSpPr/>
-          <p:nvPr/>
-        </p:nvSpPr>
-        <p:spPr>
-          <a:xfrm>
-            <a:off x="548640" y="3264408"/>
-            <a:ext cx="420624" cy="420624"/>
-          </a:xfrm>
-          <a:prstGeom prst="ellipse">
-            <a:avLst/>
-          </a:prstGeom>
-          <a:solidFill>
-            <a:srgbClr val="01485C"/>
-          </a:solidFill>
-          <a:ln/>
-        </p:spPr>
-      </p:sp>
-      <p:sp>
-        <p:nvSpPr>
-          <p:cNvPr id="25" name="Text 23"/>
-          <p:cNvSpPr txBox="1"/>
-          <p:nvPr/>
-        </p:nvSpPr>
-        <p:spPr>
-          <a:xfrm>
-            <a:off x="548640" y="3264408"/>
-            <a:ext cx="420624" cy="420624"/>
-          </a:xfrm>
-          <a:prstGeom prst="rect">
-            <a:avLst/>
-          </a:prstGeom>
-          <a:noFill/>
-          <a:ln/>
-        </p:spPr>
-        <p:txBody>
-          <a:bodyPr wrap="square" lIns="0" tIns="0" rIns="0" bIns="0" rtlCol="0" anchor="ctr"/>
-          <a:lstStyle/>
-          <a:p>
-            <a:pPr algn="ctr" indent="0" marL="0">
-              <a:buNone/>
-            </a:pPr>
-            <a:r>
-              <a:rPr lang="en-US" sz="1500" b="1" dirty="0">
-                <a:solidFill>
-                  <a:srgbClr val="FFFFFF"/>
-                </a:solidFill>
-                <a:latin typeface="Calibri" pitchFamily="34" charset="0"/>
-                <a:ea typeface="Calibri" pitchFamily="34" charset="-122"/>
-                <a:cs typeface="Calibri" pitchFamily="34" charset="-120"/>
-              </a:rPr>
-              <a:t>3</a:t>
-            </a:r>
-            <a:endParaRPr lang="en-US" sz="1500" dirty="0"/>
-          </a:p>
-        </p:txBody>
-      </p:sp>
-      <p:sp>
-        <p:nvSpPr>
-          <p:cNvPr id="26" name="Text 24"/>
-          <p:cNvSpPr txBox="1"/>
-          <p:nvPr/>
-        </p:nvSpPr>
-        <p:spPr>
-          <a:xfrm>
-            <a:off x="1133856" y="3209544"/>
-            <a:ext cx="5029200" cy="859536"/>
-          </a:xfrm>
-          <a:prstGeom prst="rect">
-            <a:avLst/>
-          </a:prstGeom>
-          <a:noFill/>
-          <a:ln/>
-        </p:spPr>
-        <p:txBody>
-          <a:bodyPr wrap="square" lIns="0" tIns="0" rIns="0" bIns="0" rtlCol="0" anchor="t"/>
-          <a:lstStyle/>
-          <a:p>
-            <a:pPr indent="0" marL="0">
-              <a:buNone/>
-            </a:pPr>
-            <a:r>
-              <a:rPr lang="en-US" sz="1300" b="1" dirty="0">
-                <a:solidFill>
-                  <a:srgbClr val="01485C"/>
-                </a:solidFill>
-                <a:latin typeface="Calibri" pitchFamily="34" charset="0"/>
-                <a:ea typeface="Calibri" pitchFamily="34" charset="-122"/>
-                <a:cs typeface="Calibri" pitchFamily="34" charset="-120"/>
-              </a:rPr>
-              <a:t>Performance Summary
-</a:t>
-            </a:r>
-            <a:pPr indent="0" marL="0">
-              <a:buNone/>
-            </a:pPr>
-            <a:r>
-              <a:rPr lang="en-US" sz="1100" dirty="0">
-                <a:solidFill>
-                  <a:srgbClr val="5F7178"/>
-                </a:solidFill>
-                <a:latin typeface="Calibri" pitchFamily="34" charset="0"/>
-                <a:ea typeface="Calibri" pitchFamily="34" charset="-122"/>
-                <a:cs typeface="Calibri" pitchFamily="34" charset="-120"/>
-              </a:rPr>
-              <a:t>Device-by-device: cartridges, errors and rate, banded Champions → Needs attention.</a:t>
-            </a:r>
-            <a:endParaRPr lang="en-US" sz="1300" dirty="0"/>
-          </a:p>
-        </p:txBody>
-      </p:sp>
-      <p:sp>
-        <p:nvSpPr>
-          <p:cNvPr id="27" name="Shape 25"/>
-          <p:cNvSpPr/>
-          <p:nvPr/>
-        </p:nvSpPr>
-        <p:spPr>
-          <a:xfrm>
-            <a:off x="6400800" y="3218688"/>
-            <a:ext cx="5212080" cy="859536"/>
-          </a:xfrm>
-          <a:prstGeom prst="roundRect">
-            <a:avLst>
-              <a:gd name="adj" fmla="val 8511"/>
-            </a:avLst>
-          </a:prstGeom>
-          <a:solidFill>
-            <a:srgbClr val="FFFFFF"/>
-          </a:solidFill>
-          <a:ln w="15875">
-            <a:solidFill>
-              <a:srgbClr val="E2E8EA"/>
-            </a:solidFill>
-            <a:prstDash val="solid"/>
-          </a:ln>
-        </p:spPr>
-      </p:sp>
-      <p:sp>
-        <p:nvSpPr>
-          <p:cNvPr id="28" name="Text 26"/>
-          <p:cNvSpPr txBox="1"/>
-          <p:nvPr/>
-        </p:nvSpPr>
-        <p:spPr>
-          <a:xfrm>
-            <a:off x="6629400" y="3310128"/>
-            <a:ext cx="3291840" cy="274320"/>
-          </a:xfrm>
-          <a:prstGeom prst="rect">
-            <a:avLst/>
-          </a:prstGeom>
-          <a:noFill/>
-          <a:ln/>
-        </p:spPr>
-        <p:txBody>
-          <a:bodyPr wrap="square" lIns="0" tIns="0" rIns="0" bIns="0" rtlCol="0" anchor="ctr"/>
-          <a:lstStyle/>
-          <a:p>
-            <a:pPr indent="0" marL="0">
-              <a:buNone/>
-            </a:pPr>
-            <a:r>
-              <a:rPr lang="en-US" sz="1050" dirty="0">
-                <a:solidFill>
-                  <a:srgbClr val="17272E"/>
-                </a:solidFill>
-                <a:latin typeface="Calibri" pitchFamily="34" charset="0"/>
-                <a:ea typeface="Calibri" pitchFamily="34" charset="-122"/>
-                <a:cs typeface="Calibri" pitchFamily="34" charset="-120"/>
-              </a:rPr>
-              <a:t>i-STAT 1;9001    80 carts    4 errors</a:t>
-            </a:r>
-            <a:endParaRPr lang="en-US" sz="1050" dirty="0"/>
-          </a:p>
-        </p:txBody>
-      </p:sp>
-      <p:sp>
-        <p:nvSpPr>
-          <p:cNvPr id="29" name="Shape 27"/>
-          <p:cNvSpPr/>
-          <p:nvPr/>
-        </p:nvSpPr>
-        <p:spPr>
-          <a:xfrm>
-            <a:off x="10195560" y="3310128"/>
-            <a:ext cx="960120" cy="274320"/>
-          </a:xfrm>
-          <a:prstGeom prst="roundRect">
-            <a:avLst>
-              <a:gd name="adj" fmla="val 26667"/>
-            </a:avLst>
-          </a:prstGeom>
-          <a:solidFill>
-            <a:srgbClr val="2F5496"/>
-          </a:solidFill>
-          <a:ln/>
-        </p:spPr>
-      </p:sp>
-      <p:sp>
-        <p:nvSpPr>
-          <p:cNvPr id="30" name="Text 28"/>
-          <p:cNvSpPr txBox="1"/>
-          <p:nvPr/>
-        </p:nvSpPr>
-        <p:spPr>
-          <a:xfrm>
-            <a:off x="10195560" y="3310128"/>
-            <a:ext cx="960120" cy="274320"/>
-          </a:xfrm>
-          <a:prstGeom prst="rect">
-            <a:avLst/>
-          </a:prstGeom>
-          <a:noFill/>
-          <a:ln/>
-        </p:spPr>
-        <p:txBody>
-          <a:bodyPr wrap="square" lIns="0" tIns="0" rIns="0" bIns="0" rtlCol="0" anchor="ctr"/>
-          <a:lstStyle/>
-          <a:p>
-            <a:pPr algn="ctr" indent="0" marL="0">
-              <a:buNone/>
-            </a:pPr>
-            <a:r>
-              <a:rPr lang="en-US" sz="1000" b="1" dirty="0">
-                <a:solidFill>
-                  <a:srgbClr val="FFFFFF"/>
-                </a:solidFill>
-                <a:latin typeface="Calibri" pitchFamily="34" charset="0"/>
-                <a:ea typeface="Calibri" pitchFamily="34" charset="-122"/>
-                <a:cs typeface="Calibri" pitchFamily="34" charset="-120"/>
-              </a:rPr>
-              <a:t>5.0% Excellent</a:t>
-            </a:r>
-            <a:endParaRPr lang="en-US" sz="1000" dirty="0"/>
-          </a:p>
-        </p:txBody>
-      </p:sp>
-      <p:sp>
-        <p:nvSpPr>
-          <p:cNvPr id="31" name="Text 29"/>
-          <p:cNvSpPr txBox="1"/>
-          <p:nvPr/>
-        </p:nvSpPr>
-        <p:spPr>
-          <a:xfrm>
-            <a:off x="6629400" y="3675888"/>
-            <a:ext cx="3291840" cy="274320"/>
-          </a:xfrm>
-          <a:prstGeom prst="rect">
-            <a:avLst/>
-          </a:prstGeom>
-          <a:noFill/>
-          <a:ln/>
-        </p:spPr>
-        <p:txBody>
-          <a:bodyPr wrap="square" lIns="0" tIns="0" rIns="0" bIns="0" rtlCol="0" anchor="ctr"/>
-          <a:lstStyle/>
-          <a:p>
-            <a:pPr indent="0" marL="0">
-              <a:buNone/>
-            </a:pPr>
-            <a:r>
-              <a:rPr lang="en-US" sz="1050" dirty="0">
-                <a:solidFill>
-                  <a:srgbClr val="17272E"/>
-                </a:solidFill>
-                <a:latin typeface="Calibri" pitchFamily="34" charset="0"/>
-                <a:ea typeface="Calibri" pitchFamily="34" charset="-122"/>
-                <a:cs typeface="Calibri" pitchFamily="34" charset="-120"/>
-              </a:rPr>
-              <a:t>i-STAT 1;9002    74 carts    5 errors</a:t>
-            </a:r>
-            <a:endParaRPr lang="en-US" sz="1050" dirty="0"/>
-          </a:p>
-        </p:txBody>
-      </p:sp>
-      <p:sp>
-        <p:nvSpPr>
-          <p:cNvPr id="32" name="Shape 30"/>
-          <p:cNvSpPr/>
-          <p:nvPr/>
-        </p:nvSpPr>
-        <p:spPr>
-          <a:xfrm>
-            <a:off x="10195560" y="3675888"/>
-            <a:ext cx="960120" cy="274320"/>
-          </a:xfrm>
-          <a:prstGeom prst="roundRect">
-            <a:avLst>
-              <a:gd name="adj" fmla="val 26667"/>
-            </a:avLst>
-          </a:prstGeom>
-          <a:solidFill>
-            <a:srgbClr val="D96800"/>
-          </a:solidFill>
-          <a:ln/>
-        </p:spPr>
-      </p:sp>
-      <p:sp>
-        <p:nvSpPr>
-          <p:cNvPr id="33" name="Text 31"/>
-          <p:cNvSpPr txBox="1"/>
-          <p:nvPr/>
-        </p:nvSpPr>
-        <p:spPr>
-          <a:xfrm>
-            <a:off x="10195560" y="3675888"/>
-            <a:ext cx="960120" cy="274320"/>
-          </a:xfrm>
-          <a:prstGeom prst="rect">
-            <a:avLst/>
-          </a:prstGeom>
-          <a:noFill/>
-          <a:ln/>
-        </p:spPr>
-        <p:txBody>
-          <a:bodyPr wrap="square" lIns="0" tIns="0" rIns="0" bIns="0" rtlCol="0" anchor="ctr"/>
-          <a:lstStyle/>
-          <a:p>
-            <a:pPr algn="ctr" indent="0" marL="0">
-              <a:buNone/>
-            </a:pPr>
-            <a:r>
-              <a:rPr lang="en-US" sz="1000" b="1" dirty="0">
-                <a:solidFill>
-                  <a:srgbClr val="FFFFFF"/>
-                </a:solidFill>
-                <a:latin typeface="Calibri" pitchFamily="34" charset="0"/>
-                <a:ea typeface="Calibri" pitchFamily="34" charset="-122"/>
-                <a:cs typeface="Calibri" pitchFamily="34" charset="-120"/>
-              </a:rPr>
-              <a:t>6.8% Accept.</a:t>
-            </a:r>
-            <a:endParaRPr lang="en-US" sz="1000" dirty="0"/>
-          </a:p>
-        </p:txBody>
-      </p:sp>
-      <p:sp>
-        <p:nvSpPr>
-          <p:cNvPr id="34" name="Shape 32"/>
-          <p:cNvSpPr/>
-          <p:nvPr/>
-        </p:nvSpPr>
-        <p:spPr>
-          <a:xfrm>
-            <a:off x="548640" y="4233672"/>
-            <a:ext cx="420624" cy="420624"/>
-          </a:xfrm>
-          <a:prstGeom prst="ellipse">
-            <a:avLst/>
-          </a:prstGeom>
-          <a:solidFill>
-            <a:srgbClr val="01485C"/>
-          </a:solidFill>
-          <a:ln/>
-        </p:spPr>
-      </p:sp>
-      <p:sp>
-        <p:nvSpPr>
-          <p:cNvPr id="35" name="Text 33"/>
-          <p:cNvSpPr txBox="1"/>
-          <p:nvPr/>
-        </p:nvSpPr>
-        <p:spPr>
-          <a:xfrm>
-            <a:off x="548640" y="4233672"/>
-            <a:ext cx="420624" cy="420624"/>
-          </a:xfrm>
-          <a:prstGeom prst="rect">
-            <a:avLst/>
-          </a:prstGeom>
-          <a:noFill/>
-          <a:ln/>
-        </p:spPr>
-        <p:txBody>
-          <a:bodyPr wrap="square" lIns="0" tIns="0" rIns="0" bIns="0" rtlCol="0" anchor="ctr"/>
-          <a:lstStyle/>
-          <a:p>
-            <a:pPr algn="ctr" indent="0" marL="0">
-              <a:buNone/>
-            </a:pPr>
-            <a:r>
-              <a:rPr lang="en-US" sz="1500" b="1" dirty="0">
-                <a:solidFill>
-                  <a:srgbClr val="FFFFFF"/>
-                </a:solidFill>
-                <a:latin typeface="Calibri" pitchFamily="34" charset="0"/>
-                <a:ea typeface="Calibri" pitchFamily="34" charset="-122"/>
-                <a:cs typeface="Calibri" pitchFamily="34" charset="-120"/>
-              </a:rPr>
-              <a:t>4</a:t>
-            </a:r>
-            <a:endParaRPr lang="en-US" sz="1500" dirty="0"/>
-          </a:p>
-        </p:txBody>
-      </p:sp>
-      <p:sp>
-        <p:nvSpPr>
-          <p:cNvPr id="36" name="Text 34"/>
-          <p:cNvSpPr txBox="1"/>
-          <p:nvPr/>
-        </p:nvSpPr>
-        <p:spPr>
-          <a:xfrm>
-            <a:off x="1133856" y="4178808"/>
-            <a:ext cx="5029200" cy="859536"/>
-          </a:xfrm>
-          <a:prstGeom prst="rect">
-            <a:avLst/>
-          </a:prstGeom>
-          <a:noFill/>
-          <a:ln/>
-        </p:spPr>
-        <p:txBody>
-          <a:bodyPr wrap="square" lIns="0" tIns="0" rIns="0" bIns="0" rtlCol="0" anchor="t"/>
-          <a:lstStyle/>
-          <a:p>
-            <a:pPr indent="0" marL="0">
-              <a:buNone/>
-            </a:pPr>
-            <a:r>
-              <a:rPr lang="en-US" sz="1300" b="1" dirty="0">
-                <a:solidFill>
-                  <a:srgbClr val="01485C"/>
-                </a:solidFill>
-                <a:latin typeface="Calibri" pitchFamily="34" charset="0"/>
-                <a:ea typeface="Calibri" pitchFamily="34" charset="-122"/>
-                <a:cs typeface="Calibri" pitchFamily="34" charset="-120"/>
-              </a:rPr>
-              <a:t>Simulators Run
-</a:t>
-            </a:r>
-            <a:pPr indent="0" marL="0">
-              <a:buNone/>
-            </a:pPr>
-            <a:r>
-              <a:rPr lang="en-US" sz="1100" dirty="0">
-                <a:solidFill>
-                  <a:srgbClr val="5F7178"/>
-                </a:solidFill>
-                <a:latin typeface="Calibri" pitchFamily="34" charset="0"/>
-                <a:ea typeface="Calibri" pitchFamily="34" charset="-122"/>
-                <a:cs typeface="Calibri" pitchFamily="34" charset="-120"/>
-              </a:rPr>
-              <a:t>Electronic QC (simulator) checks recorded on each device during the month.</a:t>
-            </a:r>
-            <a:endParaRPr lang="en-US" sz="1300" dirty="0"/>
-          </a:p>
-        </p:txBody>
-      </p:sp>
-      <p:sp>
-        <p:nvSpPr>
-          <p:cNvPr id="37" name="Shape 35"/>
-          <p:cNvSpPr/>
-          <p:nvPr/>
-        </p:nvSpPr>
-        <p:spPr>
-          <a:xfrm>
-            <a:off x="6400800" y="4187952"/>
-            <a:ext cx="5212080" cy="859536"/>
-          </a:xfrm>
-          <a:prstGeom prst="roundRect">
-            <a:avLst>
-              <a:gd name="adj" fmla="val 8511"/>
-            </a:avLst>
-          </a:prstGeom>
-          <a:solidFill>
-            <a:srgbClr val="FFFFFF"/>
-          </a:solidFill>
-          <a:ln w="15875">
-            <a:solidFill>
-              <a:srgbClr val="E2E8EA"/>
-            </a:solidFill>
-            <a:prstDash val="solid"/>
-          </a:ln>
-        </p:spPr>
-      </p:sp>
-      <p:sp>
-        <p:nvSpPr>
-          <p:cNvPr id="38" name="Text 36"/>
-          <p:cNvSpPr txBox="1"/>
-          <p:nvPr/>
-        </p:nvSpPr>
-        <p:spPr>
-          <a:xfrm>
-            <a:off x="6629400" y="4187952"/>
-            <a:ext cx="4754880" cy="859536"/>
-          </a:xfrm>
-          <a:prstGeom prst="rect">
-            <a:avLst/>
-          </a:prstGeom>
-          <a:noFill/>
-          <a:ln/>
-        </p:spPr>
-        <p:txBody>
-          <a:bodyPr wrap="square" lIns="0" tIns="0" rIns="0" bIns="0" rtlCol="0" anchor="ctr"/>
-          <a:lstStyle/>
-          <a:p>
-            <a:pPr indent="0" marL="0">
-              <a:buNone/>
-            </a:pPr>
-            <a:r>
-              <a:rPr lang="en-US" sz="1100" b="1" dirty="0">
-                <a:solidFill>
-                  <a:srgbClr val="01485C"/>
-                </a:solidFill>
-                <a:latin typeface="Calibri" pitchFamily="34" charset="0"/>
-                <a:ea typeface="Calibri" pitchFamily="34" charset="-122"/>
-                <a:cs typeface="Calibri" pitchFamily="34" charset="-120"/>
-              </a:rPr>
-              <a:t>EQC checks:   </a:t>
-            </a:r>
-            <a:pPr indent="0" marL="0">
-              <a:buNone/>
-            </a:pPr>
-            <a:r>
-              <a:rPr lang="en-US" sz="1100" dirty="0">
-                <a:solidFill>
-                  <a:srgbClr val="17272E"/>
-                </a:solidFill>
-                <a:latin typeface="Calibri" pitchFamily="34" charset="0"/>
-                <a:ea typeface="Calibri" pitchFamily="34" charset="-122"/>
-                <a:cs typeface="Calibri" pitchFamily="34" charset="-120"/>
-              </a:rPr>
-              <a:t>9001 — 8 ✓      9002 — 6 ✓      9003 — 7 ✓</a:t>
-            </a:r>
-            <a:endParaRPr lang="en-US" sz="1100" dirty="0"/>
-          </a:p>
-        </p:txBody>
-      </p:sp>
-      <p:sp>
-        <p:nvSpPr>
-          <p:cNvPr id="39" name="Shape 37"/>
-          <p:cNvSpPr/>
-          <p:nvPr/>
-        </p:nvSpPr>
-        <p:spPr>
-          <a:xfrm>
-            <a:off x="548640" y="5202936"/>
-            <a:ext cx="420624" cy="420624"/>
-          </a:xfrm>
-          <a:prstGeom prst="ellipse">
-            <a:avLst/>
-          </a:prstGeom>
-          <a:solidFill>
-            <a:srgbClr val="01485C"/>
-          </a:solidFill>
-          <a:ln/>
-        </p:spPr>
-      </p:sp>
-      <p:sp>
-        <p:nvSpPr>
-          <p:cNvPr id="40" name="Text 38"/>
-          <p:cNvSpPr txBox="1"/>
-          <p:nvPr/>
-        </p:nvSpPr>
-        <p:spPr>
-          <a:xfrm>
-            <a:off x="548640" y="5202936"/>
-            <a:ext cx="420624" cy="420624"/>
-          </a:xfrm>
-          <a:prstGeom prst="rect">
-            <a:avLst/>
-          </a:prstGeom>
-          <a:noFill/>
-          <a:ln/>
-        </p:spPr>
-        <p:txBody>
-          <a:bodyPr wrap="square" lIns="0" tIns="0" rIns="0" bIns="0" rtlCol="0" anchor="ctr"/>
-          <a:lstStyle/>
-          <a:p>
-            <a:pPr algn="ctr" indent="0" marL="0">
-              <a:buNone/>
-            </a:pPr>
-            <a:r>
-              <a:rPr lang="en-US" sz="1500" b="1" dirty="0">
-                <a:solidFill>
-                  <a:srgbClr val="FFFFFF"/>
-                </a:solidFill>
-                <a:latin typeface="Calibri" pitchFamily="34" charset="0"/>
-                <a:ea typeface="Calibri" pitchFamily="34" charset="-122"/>
-                <a:cs typeface="Calibri" pitchFamily="34" charset="-120"/>
-              </a:rPr>
-              <a:t>5</a:t>
-            </a:r>
-            <a:endParaRPr lang="en-US" sz="1500" dirty="0"/>
-          </a:p>
-        </p:txBody>
-      </p:sp>
-      <p:sp>
-        <p:nvSpPr>
-          <p:cNvPr id="41" name="Text 39"/>
-          <p:cNvSpPr txBox="1"/>
-          <p:nvPr/>
-        </p:nvSpPr>
-        <p:spPr>
-          <a:xfrm>
-            <a:off x="1133856" y="5148072"/>
-            <a:ext cx="5029200" cy="859536"/>
-          </a:xfrm>
-          <a:prstGeom prst="rect">
-            <a:avLst/>
-          </a:prstGeom>
-          <a:noFill/>
-          <a:ln/>
-        </p:spPr>
-        <p:txBody>
-          <a:bodyPr wrap="square" lIns="0" tIns="0" rIns="0" bIns="0" rtlCol="0" anchor="t"/>
-          <a:lstStyle/>
-          <a:p>
-            <a:pPr indent="0" marL="0">
-              <a:buNone/>
-            </a:pPr>
-            <a:r>
-              <a:rPr lang="en-US" sz="1300" b="1" dirty="0">
-                <a:solidFill>
-                  <a:srgbClr val="01485C"/>
-                </a:solidFill>
-                <a:latin typeface="Calibri" pitchFamily="34" charset="0"/>
-                <a:ea typeface="Calibri" pitchFamily="34" charset="-122"/>
-                <a:cs typeface="Calibri" pitchFamily="34" charset="-120"/>
-              </a:rPr>
-              <a:t>Monthly Ceramic Cleaning
-</a:t>
-            </a:r>
-            <a:pPr indent="0" marL="0">
-              <a:buNone/>
-            </a:pPr>
-            <a:r>
-              <a:rPr lang="en-US" sz="1100" dirty="0">
-                <a:solidFill>
-                  <a:srgbClr val="5F7178"/>
-                </a:solidFill>
-                <a:latin typeface="Calibri" pitchFamily="34" charset="0"/>
-                <a:ea typeface="Calibri" pitchFamily="34" charset="-122"/>
-                <a:cs typeface="Calibri" pitchFamily="34" charset="-120"/>
-              </a:rPr>
-              <a:t>Each analyser listed with its cleaning-cartridge count. Every i-STAT needs 3 per month; any shortfall fails the department.</a:t>
-            </a:r>
-            <a:endParaRPr lang="en-US" sz="1300" dirty="0"/>
-          </a:p>
-        </p:txBody>
-      </p:sp>
-      <p:sp>
-        <p:nvSpPr>
-          <p:cNvPr id="42" name="Shape 40"/>
-          <p:cNvSpPr/>
-          <p:nvPr/>
-        </p:nvSpPr>
-        <p:spPr>
-          <a:xfrm>
-            <a:off x="6400800" y="5157216"/>
-            <a:ext cx="5212080" cy="859536"/>
-          </a:xfrm>
-          <a:prstGeom prst="roundRect">
-            <a:avLst>
-              <a:gd name="adj" fmla="val 8511"/>
-            </a:avLst>
-          </a:prstGeom>
-          <a:solidFill>
-            <a:srgbClr val="FFFFFF"/>
-          </a:solidFill>
-          <a:ln w="15875">
-            <a:solidFill>
-              <a:srgbClr val="E2E8EA"/>
-            </a:solidFill>
-            <a:prstDash val="solid"/>
-          </a:ln>
-        </p:spPr>
-      </p:sp>
-      <p:sp>
-        <p:nvSpPr>
-          <p:cNvPr id="43" name="Shape 41"/>
-          <p:cNvSpPr/>
-          <p:nvPr/>
-        </p:nvSpPr>
-        <p:spPr>
-          <a:xfrm>
-            <a:off x="6629400" y="5404104"/>
-            <a:ext cx="1554480" cy="365760"/>
-          </a:xfrm>
-          <a:prstGeom prst="roundRect">
-            <a:avLst>
-              <a:gd name="adj" fmla="val 25000"/>
-            </a:avLst>
-          </a:prstGeom>
-          <a:solidFill>
-            <a:srgbClr val="538135"/>
-          </a:solidFill>
-          <a:ln/>
-        </p:spPr>
-      </p:sp>
-      <p:sp>
-        <p:nvSpPr>
-          <p:cNvPr id="44" name="Text 42"/>
-          <p:cNvSpPr txBox="1"/>
-          <p:nvPr/>
-        </p:nvSpPr>
-        <p:spPr>
-          <a:xfrm>
-            <a:off x="6629400" y="5404104"/>
-            <a:ext cx="1554480" cy="365760"/>
-          </a:xfrm>
-          <a:prstGeom prst="rect">
-            <a:avLst/>
-          </a:prstGeom>
-          <a:noFill/>
-          <a:ln/>
-        </p:spPr>
-        <p:txBody>
-          <a:bodyPr wrap="square" lIns="0" tIns="0" rIns="0" bIns="0" rtlCol="0" anchor="ctr"/>
-          <a:lstStyle/>
-          <a:p>
-            <a:pPr algn="ctr" indent="0" marL="0">
-              <a:buNone/>
-            </a:pPr>
-            <a:r>
-              <a:rPr lang="en-US" sz="1100" b="1" dirty="0">
-                <a:solidFill>
-                  <a:srgbClr val="FFFFFF"/>
-                </a:solidFill>
-                <a:latin typeface="Calibri" pitchFamily="34" charset="0"/>
-                <a:ea typeface="Calibri" pitchFamily="34" charset="-122"/>
-                <a:cs typeface="Calibri" pitchFamily="34" charset="-120"/>
-              </a:rPr>
-              <a:t>Completed ✓</a:t>
-            </a:r>
-            <a:endParaRPr lang="en-US" sz="1100" dirty="0"/>
-          </a:p>
-        </p:txBody>
-      </p:sp>
-      <p:sp>
-        <p:nvSpPr>
-          <p:cNvPr id="45" name="Text 43"/>
-          <p:cNvSpPr txBox="1"/>
-          <p:nvPr/>
-        </p:nvSpPr>
-        <p:spPr>
-          <a:xfrm>
-            <a:off x="8366760" y="5404104"/>
-            <a:ext cx="3017520" cy="365760"/>
-          </a:xfrm>
-          <a:prstGeom prst="rect">
-            <a:avLst/>
-          </a:prstGeom>
-          <a:noFill/>
-          <a:ln/>
-        </p:spPr>
-        <p:txBody>
-          <a:bodyPr wrap="square" lIns="0" tIns="0" rIns="0" bIns="0" rtlCol="0" anchor="ctr"/>
-          <a:lstStyle/>
-          <a:p>
-            <a:pPr indent="0" marL="0">
-              <a:buNone/>
-            </a:pPr>
-            <a:r>
-              <a:rPr lang="en-US" sz="1050" i="1" dirty="0">
-                <a:solidFill>
-                  <a:srgbClr val="5F7178"/>
-                </a:solidFill>
-                <a:latin typeface="Calibri" pitchFamily="34" charset="0"/>
-                <a:ea typeface="Calibri" pitchFamily="34" charset="-122"/>
-                <a:cs typeface="Calibri" pitchFamily="34" charset="-120"/>
-              </a:rPr>
-              <a:t>— listed per analyser; any analyser under 3 shows a red Fail</a:t>
-            </a:r>
-            <a:endParaRPr lang="en-US" sz="1050" dirty="0"/>
-          </a:p>
-        </p:txBody>
-      </p:sp>
-      <p:sp>
-        <p:nvSpPr>
-          <p:cNvPr id="46" name="Text 44"/>
-          <p:cNvSpPr txBox="1"/>
-          <p:nvPr/>
-        </p:nvSpPr>
-        <p:spPr>
-          <a:xfrm>
-            <a:off x="6400800" y="6163056"/>
-            <a:ext cx="5212080" cy="320040"/>
-          </a:xfrm>
-          <a:prstGeom prst="rect">
-            <a:avLst/>
-          </a:prstGeom>
-          <a:noFill/>
-          <a:ln/>
-        </p:spPr>
-        <p:txBody>
-          <a:bodyPr wrap="square" lIns="0" tIns="0" rIns="0" bIns="0" rtlCol="0" anchor="ctr"/>
-          <a:lstStyle/>
-          <a:p>
-            <a:pPr indent="0" marL="0">
-              <a:buNone/>
-            </a:pPr>
-            <a:r>
-              <a:rPr lang="en-US" sz="1000" i="1" dirty="0">
-                <a:solidFill>
-                  <a:srgbClr val="5F7178"/>
-                </a:solidFill>
-                <a:latin typeface="Calibri" pitchFamily="34" charset="0"/>
-                <a:ea typeface="Calibri" pitchFamily="34" charset="-122"/>
-                <a:cs typeface="Calibri" pitchFamily="34" charset="-120"/>
-              </a:rPr>
-              <a:t>Examples shown with fictional data — layouts match the real Word report.</a:t>
-            </a:r>
-            <a:endParaRPr lang="en-US" sz="1000" dirty="0"/>
-          </a:p>
-        </p:txBody>
-      </p:sp>
-      <p:sp>
-        <p:nvSpPr>
-          <p:cNvPr id="47" name="Shape 45"/>
-          <p:cNvSpPr/>
-          <p:nvPr/>
-        </p:nvSpPr>
-        <p:spPr>
-          <a:xfrm>
-            <a:off x="0" y="6793992"/>
-            <a:ext cx="2040636" cy="64008"/>
-          </a:xfrm>
-          <a:prstGeom prst="rect">
-            <a:avLst/>
-          </a:prstGeom>
-          <a:solidFill>
-            <a:srgbClr val="01485C"/>
-          </a:solidFill>
-          <a:ln/>
-        </p:spPr>
-      </p:sp>
-      <p:sp>
-        <p:nvSpPr>
-          <p:cNvPr id="48" name="Shape 46"/>
-          <p:cNvSpPr/>
-          <p:nvPr/>
-        </p:nvSpPr>
-        <p:spPr>
-          <a:xfrm>
-            <a:off x="2031492" y="6793992"/>
-            <a:ext cx="2040636" cy="64008"/>
-          </a:xfrm>
-          <a:prstGeom prst="rect">
-            <a:avLst/>
-          </a:prstGeom>
-          <a:solidFill>
-            <a:srgbClr val="146175"/>
-          </a:solidFill>
-          <a:ln/>
-        </p:spPr>
-      </p:sp>
-      <p:sp>
-        <p:nvSpPr>
-          <p:cNvPr id="49" name="Shape 47"/>
-          <p:cNvSpPr/>
-          <p:nvPr/>
-        </p:nvSpPr>
-        <p:spPr>
-          <a:xfrm>
-            <a:off x="4062984" y="6793992"/>
-            <a:ext cx="2040636" cy="64008"/>
-          </a:xfrm>
-          <a:prstGeom prst="rect">
-            <a:avLst/>
-          </a:prstGeom>
-          <a:solidFill>
-            <a:srgbClr val="11B5AE"/>
-          </a:solidFill>
-          <a:ln/>
-        </p:spPr>
-      </p:sp>
-      <p:sp>
-        <p:nvSpPr>
-          <p:cNvPr id="50" name="Shape 48"/>
-          <p:cNvSpPr/>
-          <p:nvPr/>
-        </p:nvSpPr>
-        <p:spPr>
-          <a:xfrm>
-            <a:off x="6094476" y="6793992"/>
-            <a:ext cx="2040636" cy="64008"/>
-          </a:xfrm>
-          <a:prstGeom prst="rect">
-            <a:avLst/>
-          </a:prstGeom>
-          <a:solidFill>
-            <a:srgbClr val="6CCAD4"/>
-          </a:solidFill>
-          <a:ln/>
-        </p:spPr>
-      </p:sp>
-      <p:sp>
-        <p:nvSpPr>
-          <p:cNvPr id="51" name="Shape 49"/>
-          <p:cNvSpPr/>
-          <p:nvPr/>
-        </p:nvSpPr>
-        <p:spPr>
-          <a:xfrm>
-            <a:off x="8125968" y="6793992"/>
-            <a:ext cx="2040636" cy="64008"/>
-          </a:xfrm>
-          <a:prstGeom prst="rect">
-            <a:avLst/>
-          </a:prstGeom>
-          <a:solidFill>
-            <a:srgbClr val="7FC04C"/>
-          </a:solidFill>
-          <a:ln/>
-        </p:spPr>
-      </p:sp>
-      <p:sp>
-        <p:nvSpPr>
-          <p:cNvPr id="52" name="Shape 50"/>
-          <p:cNvSpPr/>
-          <p:nvPr/>
-        </p:nvSpPr>
-        <p:spPr>
-          <a:xfrm>
-            <a:off x="10157460" y="6793992"/>
-            <a:ext cx="2040636" cy="64008"/>
-          </a:xfrm>
-          <a:prstGeom prst="rect">
-            <a:avLst/>
-          </a:prstGeom>
-          <a:solidFill>
-            <a:srgbClr val="E1DD57"/>
-          </a:solidFill>
-          <a:ln/>
-        </p:spPr>
-      </p:sp>
-    </p:spTree>
-  </p:cSld>
-  <p:clrMapOvr>
-    <a:masterClrMapping/>
-  </p:clrMapOvr>
-</p:sld>
-</file>
-
-<file path=ppt/slides/slide11.xml><?xml version="1.0" encoding="utf-8"?>
-<p:sld xmlns:a="http://schemas.openxmlformats.org/drawingml/2006/main" xmlns:r="http://schemas.openxmlformats.org/officeDocument/2006/relationships" xmlns:p="http://schemas.openxmlformats.org/presentationml/2006/main">
   <p:cSld name="Slide 10">
     <p:bg>
       <p:bgPr>
@@ -5112,7 +3448,7 @@
 </p:sld>
 </file>
 
-<file path=ppt/slides/slide12.xml><?xml version="1.0" encoding="utf-8"?>
+<file path=ppt/slides/slide11.xml><?xml version="1.0" encoding="utf-8"?>
 <p:sld xmlns:a="http://schemas.openxmlformats.org/drawingml/2006/main" xmlns:r="http://schemas.openxmlformats.org/officeDocument/2006/relationships" xmlns:p="http://schemas.openxmlformats.org/presentationml/2006/main">
   <p:cSld name="Slide 11">
     <p:bg>
@@ -6789,7 +5125,7 @@
 </p:sld>
 </file>
 
-<file path=ppt/slides/slide13.xml><?xml version="1.0" encoding="utf-8"?>
+<file path=ppt/slides/slide12.xml><?xml version="1.0" encoding="utf-8"?>
 <p:sld xmlns:a="http://schemas.openxmlformats.org/drawingml/2006/main" xmlns:p="http://schemas.openxmlformats.org/presentationml/2006/main" xmlns:r="http://schemas.openxmlformats.org/officeDocument/2006/relationships">
   <p:cSld>
     <p:spTree>
@@ -7447,7 +5783,7 @@
 </p:sld>
 </file>
 
-<file path=ppt/slides/slide14.xml><?xml version="1.0" encoding="utf-8"?>
+<file path=ppt/slides/slide13.xml><?xml version="1.0" encoding="utf-8"?>
 <p:sld xmlns:a="http://schemas.openxmlformats.org/drawingml/2006/main" xmlns:r="http://schemas.openxmlformats.org/officeDocument/2006/relationships" xmlns:p="http://schemas.openxmlformats.org/presentationml/2006/main">
   <p:cSld name="Slide 12">
     <p:bg>
@@ -8897,7 +7233,7 @@
 </p:sld>
 </file>
 
-<file path=ppt/slides/slide15.xml><?xml version="1.0" encoding="utf-8"?>
+<file path=ppt/slides/slide14.xml><?xml version="1.0" encoding="utf-8"?>
 <p:sld xmlns:a="http://schemas.openxmlformats.org/drawingml/2006/main" xmlns:r="http://schemas.openxmlformats.org/officeDocument/2006/relationships" xmlns:p="http://schemas.openxmlformats.org/presentationml/2006/main">
   <p:cSld name="Slide 13">
     <p:bg>
@@ -9589,7 +7925,7 @@
 </p:sld>
 </file>
 
-<file path=ppt/slides/slide16.xml><?xml version="1.0" encoding="utf-8"?>
+<file path=ppt/slides/slide15.xml><?xml version="1.0" encoding="utf-8"?>
 <p:sld xmlns:a="http://schemas.openxmlformats.org/drawingml/2006/main" xmlns:r="http://schemas.openxmlformats.org/officeDocument/2006/relationships" xmlns:p="http://schemas.openxmlformats.org/presentationml/2006/main">
   <p:cSld name="Slide 14">
     <p:bg>
@@ -10822,7 +9158,7 @@
 </p:sld>
 </file>
 
-<file path=ppt/slides/slide17.xml><?xml version="1.0" encoding="utf-8"?>
+<file path=ppt/slides/slide16.xml><?xml version="1.0" encoding="utf-8"?>
 <p:sld xmlns:a="http://schemas.openxmlformats.org/drawingml/2006/main" xmlns:r="http://schemas.openxmlformats.org/officeDocument/2006/relationships" xmlns:p="http://schemas.openxmlformats.org/presentationml/2006/main">
   <p:cSld name="Slide 15">
     <p:bg>
@@ -11881,7 +10217,7 @@
 </p:sld>
 </file>
 
-<file path=ppt/slides/slide18.xml><?xml version="1.0" encoding="utf-8"?>
+<file path=ppt/slides/slide17.xml><?xml version="1.0" encoding="utf-8"?>
 <p:sld xmlns:a="http://schemas.openxmlformats.org/drawingml/2006/main" xmlns:r="http://schemas.openxmlformats.org/officeDocument/2006/relationships" xmlns:p="http://schemas.openxmlformats.org/presentationml/2006/main">
   <p:cSld name="Slide 16">
     <p:bg>
@@ -12918,7 +11254,7 @@
                           <a:ea typeface="Calibri" pitchFamily="34" charset="-122"/>
                           <a:cs typeface="Calibri" pitchFamily="34" charset="-120"/>
                         </a:rPr>
-                        <a:t>Lock card on a PC that was enrolled</a:t>
+                        <a:t>Lock card on a PC that was licensed</a:t>
                       </a:r>
                       <a:endParaRPr lang="en-US" sz="1250" dirty="0">
                         <a:latin typeface="Calibri" charset="0"/>
@@ -12983,7 +11319,7 @@
                           <a:ea typeface="Calibri" pitchFamily="34" charset="-122"/>
                           <a:cs typeface="Calibri" pitchFamily="34" charset="-120"/>
                         </a:rPr>
-                        <a:t>EXPIRED: renew it with the enrolment password. NOT ENROLLED: the machine ID has changed (PC reimaged or renamed, motherboard or drive replaced) — enrol again and revoke the old entry on Enrolled PCs.</a:t>
+                        <a:t>EXPIRED: install the renewed licence from the PoC lead. NOT LICENSED: the machine ID has changed (PC reimaged or renamed, motherboard or drive replaced) — send the new ID for a new licence. VERSION: the bundle was updated; a licence for the new version is needed.</a:t>
                       </a:r>
                       <a:endParaRPr lang="en-US" sz="1250" dirty="0">
                         <a:latin typeface="Calibri" charset="0"/>
@@ -13115,7 +11451,7 @@
                           <a:ea typeface="Calibri" pitchFamily="34" charset="-122"/>
                           <a:cs typeface="Calibri" pitchFamily="34" charset="-120"/>
                         </a:rPr>
-                        <a:t>Same cause. Go back to localhost:5750, enrol or renew the PC, and the engines unlock straight away — nothing to restart.</a:t>
+                        <a:t>Same cause. Go back to localhost:5750, install the licence, and the engines unlock straight away — nothing to restart.</a:t>
                       </a:r>
                       <a:endParaRPr lang="en-US" sz="1250" dirty="0">
                         <a:latin typeface="Calibri" charset="0"/>
@@ -13296,7 +11632,7 @@
 </p:sld>
 </file>
 
-<file path=ppt/slides/slide19.xml><?xml version="1.0" encoding="utf-8"?>
+<file path=ppt/slides/slide18.xml><?xml version="1.0" encoding="utf-8"?>
 <p:sld xmlns:a="http://schemas.openxmlformats.org/drawingml/2006/main" xmlns:r="http://schemas.openxmlformats.org/officeDocument/2006/relationships" xmlns:p="http://schemas.openxmlformats.org/presentationml/2006/main">
   <p:cSld name="Slide 17">
     <p:bg>
@@ -13385,10 +11721,6 @@
             <a:prstDash val="solid"/>
           </a:ln>
         </p:spPr>
-        <p:txBody>
-          <a:bodyPr/>
-          <a:p/>
-        </p:txBody>
       </p:sp>
       <p:sp>
         <p:nvSpPr>
@@ -13728,10 +12060,6 @@
             <a:prstDash val="solid"/>
           </a:ln>
         </p:spPr>
-        <p:txBody>
-          <a:bodyPr/>
-          <a:p/>
-        </p:txBody>
       </p:sp>
       <p:sp>
         <p:nvSpPr>
@@ -14071,10 +12399,6 @@
             <a:prstDash val="solid"/>
           </a:ln>
         </p:spPr>
-        <p:txBody>
-          <a:bodyPr/>
-          <a:p/>
-        </p:txBody>
       </p:sp>
       <p:sp>
         <p:nvSpPr>
@@ -14148,7 +12472,7 @@
                 <a:ea typeface="Calibri" pitchFamily="34" charset="-122"/>
                 <a:cs typeface="Calibri" pitchFamily="34" charset="-120"/>
               </a:rPr>
-              <a:t>BitLocker · history (i-STAT) · enrolment (new PC)</a:t>
+              <a:t>BitLocker (drive) + history (i-STAT)</a:t>
             </a:r>
             <a:endParaRPr lang="en-US" sz="1250" dirty="0"/>
           </a:p>
@@ -14576,6 +12900,664 @@
       <p:sp>
         <p:nvSpPr>
           <p:cNvPr id="38" name="Shape 35"/>
+          <p:cNvSpPr/>
+          <p:nvPr/>
+        </p:nvSpPr>
+        <p:spPr>
+          <a:xfrm>
+            <a:off x="10157460" y="6793992"/>
+            <a:ext cx="2040636" cy="64008"/>
+          </a:xfrm>
+          <a:prstGeom prst="rect">
+            <a:avLst/>
+          </a:prstGeom>
+          <a:solidFill>
+            <a:srgbClr val="E1DD57"/>
+          </a:solidFill>
+          <a:ln/>
+        </p:spPr>
+      </p:sp>
+    </p:spTree>
+  </p:cSld>
+  <p:clrMapOvr>
+    <a:masterClrMapping/>
+  </p:clrMapOvr>
+</p:sld>
+</file>
+
+<file path=ppt/slides/slide19.xml><?xml version="1.0" encoding="utf-8"?>
+<p:sld xmlns:a="http://schemas.openxmlformats.org/drawingml/2006/main" xmlns:p="http://schemas.openxmlformats.org/presentationml/2006/main" xmlns:r="http://schemas.openxmlformats.org/officeDocument/2006/relationships">
+  <p:cSld>
+    <p:spTree>
+      <p:nvGrpSpPr>
+        <p:cNvPr id="1" name=""/>
+        <p:cNvGrpSpPr/>
+        <p:nvPr/>
+      </p:nvGrpSpPr>
+      <p:grpSpPr/>
+      <p:sp>
+        <p:nvSpPr>
+          <p:cNvPr id="2" name="Text 0"/>
+          <p:cNvSpPr txBox="1"/>
+          <p:nvPr/>
+        </p:nvSpPr>
+        <p:spPr>
+          <a:xfrm>
+            <a:off x="548640" y="320040"/>
+            <a:ext cx="11064240" cy="685800"/>
+          </a:xfrm>
+          <a:prstGeom prst="rect">
+            <a:avLst/>
+          </a:prstGeom>
+          <a:noFill/>
+          <a:ln/>
+        </p:spPr>
+        <p:txBody>
+          <a:bodyPr wrap="square" lIns="0" tIns="0" rIns="0" bIns="0" rtlCol="0" anchor="ctr"/>
+          <a:lstStyle/>
+          <a:p>
+            <a:pPr indent="0" marL="0">
+              <a:buNone/>
+            </a:pPr>
+            <a:r>
+              <a:rPr lang="en-US" sz="3000" b="1" dirty="0">
+                <a:solidFill>
+                  <a:srgbClr val="01485C"/>
+                </a:solidFill>
+                <a:latin typeface="Calibri" pitchFamily="34" charset="0"/>
+                <a:ea typeface="Calibri" pitchFamily="34" charset="-122"/>
+                <a:cs typeface="Calibri" pitchFamily="34" charset="-120"/>
+              </a:rPr>
+              <a:t>Licensing a PC (first use on a computer)</a:t>
+            </a:r>
+            <a:endParaRPr lang="en-US" sz="3000" dirty="0"/>
+          </a:p>
+        </p:txBody>
+      </p:sp>
+      <p:sp>
+        <p:nvSpPr>
+          <p:cNvPr id="3" name="Shape 1"/>
+          <p:cNvSpPr/>
+          <p:nvPr/>
+        </p:nvSpPr>
+        <p:spPr>
+          <a:xfrm>
+            <a:off x="9784080" y="384048"/>
+            <a:ext cx="1828800" cy="457200"/>
+          </a:xfrm>
+          <a:prstGeom prst="roundRect">
+            <a:avLst>
+              <a:gd name="adj" fmla="val 50000"/>
+            </a:avLst>
+          </a:prstGeom>
+          <a:solidFill>
+            <a:srgbClr val="01485C"/>
+          </a:solidFill>
+          <a:ln/>
+        </p:spPr>
+        <p:txBody>
+          <a:bodyPr/>
+          <a:p/>
+        </p:txBody>
+      </p:sp>
+      <p:sp>
+        <p:nvSpPr>
+          <p:cNvPr id="4" name="Text 2"/>
+          <p:cNvSpPr txBox="1"/>
+          <p:nvPr/>
+        </p:nvSpPr>
+        <p:spPr>
+          <a:xfrm>
+            <a:off x="9784080" y="384048"/>
+            <a:ext cx="1828800" cy="457200"/>
+          </a:xfrm>
+          <a:prstGeom prst="rect">
+            <a:avLst/>
+          </a:prstGeom>
+          <a:noFill/>
+          <a:ln/>
+        </p:spPr>
+        <p:txBody>
+          <a:bodyPr wrap="square" lIns="0" tIns="0" rIns="0" bIns="0" rtlCol="0" anchor="ctr"/>
+          <a:lstStyle/>
+          <a:p>
+            <a:pPr algn="ctr" indent="0" marL="0">
+              <a:buNone/>
+            </a:pPr>
+            <a:r>
+              <a:rPr lang="en-US" sz="1500" b="1" dirty="0">
+                <a:solidFill>
+                  <a:srgbClr val="FFFFFF"/>
+                </a:solidFill>
+                <a:latin typeface="Calibri" pitchFamily="34" charset="0"/>
+                <a:ea typeface="Calibri" pitchFamily="34" charset="-122"/>
+                <a:cs typeface="Calibri" pitchFamily="34" charset="-120"/>
+              </a:rPr>
+              <a:t>BOTH</a:t>
+            </a:r>
+            <a:endParaRPr lang="en-US" sz="1500" dirty="0"/>
+          </a:p>
+        </p:txBody>
+      </p:sp>
+      <p:sp>
+        <p:nvSpPr>
+          <p:cNvPr id="5" name="Shape 3"/>
+          <p:cNvSpPr/>
+          <p:nvPr/>
+        </p:nvSpPr>
+        <p:spPr>
+          <a:xfrm>
+            <a:off x="548640" y="1463040"/>
+            <a:ext cx="5486400" cy="2103120"/>
+          </a:xfrm>
+          <a:prstGeom prst="roundRect">
+            <a:avLst>
+              <a:gd name="adj" fmla="val 5217"/>
+            </a:avLst>
+          </a:prstGeom>
+          <a:solidFill>
+            <a:srgbClr val="E5F2F0"/>
+          </a:solidFill>
+          <a:ln/>
+        </p:spPr>
+        <p:txBody>
+          <a:bodyPr/>
+          <a:p/>
+        </p:txBody>
+      </p:sp>
+      <p:sp>
+        <p:nvSpPr>
+          <p:cNvPr id="6" name="Text 4"/>
+          <p:cNvSpPr txBox="1"/>
+          <p:nvPr/>
+        </p:nvSpPr>
+        <p:spPr>
+          <a:xfrm>
+            <a:off x="822960" y="1664208"/>
+            <a:ext cx="4937760" cy="411480"/>
+          </a:xfrm>
+          <a:prstGeom prst="rect">
+            <a:avLst/>
+          </a:prstGeom>
+          <a:noFill/>
+          <a:ln/>
+        </p:spPr>
+        <p:txBody>
+          <a:bodyPr wrap="square" lIns="0" tIns="0" rIns="0" bIns="0" rtlCol="0" anchor="ctr"/>
+          <a:lstStyle/>
+          <a:p>
+            <a:pPr indent="0" marL="0">
+              <a:buNone/>
+            </a:pPr>
+            <a:r>
+              <a:rPr lang="en-US" sz="1600" b="1" dirty="0">
+                <a:solidFill>
+                  <a:srgbClr val="01485C"/>
+                </a:solidFill>
+                <a:latin typeface="Calibri" pitchFamily="34" charset="0"/>
+                <a:ea typeface="Calibri" pitchFamily="34" charset="-122"/>
+                <a:cs typeface="Calibri" pitchFamily="34" charset="-120"/>
+              </a:rPr>
+              <a:t>The lock card</a:t>
+            </a:r>
+            <a:endParaRPr lang="en-US" sz="1600" dirty="0"/>
+          </a:p>
+        </p:txBody>
+      </p:sp>
+      <p:sp>
+        <p:nvSpPr>
+          <p:cNvPr id="7" name="Text 5"/>
+          <p:cNvSpPr txBox="1"/>
+          <p:nvPr/>
+        </p:nvSpPr>
+        <p:spPr>
+          <a:xfrm>
+            <a:off x="822960" y="2148840"/>
+            <a:ext cx="4937760" cy="1463040"/>
+          </a:xfrm>
+          <a:prstGeom prst="rect">
+            <a:avLst/>
+          </a:prstGeom>
+          <a:noFill/>
+          <a:ln/>
+        </p:spPr>
+        <p:txBody>
+          <a:bodyPr wrap="square" lIns="0" tIns="0" rIns="0" bIns="0" rtlCol="0" anchor="ctr"/>
+          <a:lstStyle/>
+          <a:p>
+            <a:pPr indent="0" marL="0">
+              <a:buNone/>
+            </a:pPr>
+            <a:r>
+              <a:rPr lang="en-US" sz="1200" dirty="0">
+                <a:solidFill>
+                  <a:srgbClr val="17272E"/>
+                </a:solidFill>
+                <a:latin typeface="Calibri" pitchFamily="34" charset="0"/>
+                <a:ea typeface="Calibri" pitchFamily="34" charset="-122"/>
+                <a:cs typeface="Calibri" pitchFamily="34" charset="-120"/>
+              </a:rPr>
+              <a:t>On a PC without a licence the selection page shows PC NOT LICENSED with the machine ID and hostname instead of the report-type drop-down. Nothing runs until a licence covering this PC is installed — the engines show a lock page too.</a:t>
+            </a:r>
+            <a:endParaRPr lang="en-US" sz="1300" dirty="0"/>
+          </a:p>
+        </p:txBody>
+      </p:sp>
+      <p:sp>
+        <p:nvSpPr>
+          <p:cNvPr id="8" name="Shape 6"/>
+          <p:cNvSpPr/>
+          <p:nvPr/>
+        </p:nvSpPr>
+        <p:spPr>
+          <a:xfrm>
+            <a:off x="6172200" y="1463040"/>
+            <a:ext cx="5486400" cy="2103120"/>
+          </a:xfrm>
+          <a:prstGeom prst="roundRect">
+            <a:avLst>
+              <a:gd name="adj" fmla="val 5217"/>
+            </a:avLst>
+          </a:prstGeom>
+          <a:solidFill>
+            <a:srgbClr val="FDF0E4"/>
+          </a:solidFill>
+          <a:ln/>
+        </p:spPr>
+        <p:txBody>
+          <a:bodyPr/>
+          <a:p/>
+        </p:txBody>
+      </p:sp>
+      <p:sp>
+        <p:nvSpPr>
+          <p:cNvPr id="9" name="Text 7"/>
+          <p:cNvSpPr txBox="1"/>
+          <p:nvPr/>
+        </p:nvSpPr>
+        <p:spPr>
+          <a:xfrm>
+            <a:off x="6446520" y="1664208"/>
+            <a:ext cx="4937760" cy="411480"/>
+          </a:xfrm>
+          <a:prstGeom prst="rect">
+            <a:avLst/>
+          </a:prstGeom>
+          <a:noFill/>
+          <a:ln/>
+        </p:spPr>
+        <p:txBody>
+          <a:bodyPr wrap="square" lIns="0" tIns="0" rIns="0" bIns="0" rtlCol="0" anchor="ctr"/>
+          <a:lstStyle/>
+          <a:p>
+            <a:pPr indent="0" marL="0">
+              <a:buNone/>
+            </a:pPr>
+            <a:r>
+              <a:rPr lang="en-US" sz="1600" b="1" dirty="0">
+                <a:solidFill>
+                  <a:srgbClr val="B4540A"/>
+                </a:solidFill>
+                <a:latin typeface="Calibri" pitchFamily="34" charset="0"/>
+                <a:ea typeface="Calibri" pitchFamily="34" charset="-122"/>
+                <a:cs typeface="Calibri" pitchFamily="34" charset="-120"/>
+              </a:rPr>
+              <a:t>Getting a licence</a:t>
+            </a:r>
+            <a:endParaRPr lang="en-US" sz="1600" dirty="0"/>
+          </a:p>
+        </p:txBody>
+      </p:sp>
+      <p:sp>
+        <p:nvSpPr>
+          <p:cNvPr id="10" name="Text 8"/>
+          <p:cNvSpPr txBox="1"/>
+          <p:nvPr/>
+        </p:nvSpPr>
+        <p:spPr>
+          <a:xfrm>
+            <a:off x="6446520" y="2148840"/>
+            <a:ext cx="4937760" cy="1463040"/>
+          </a:xfrm>
+          <a:prstGeom prst="rect">
+            <a:avLst/>
+          </a:prstGeom>
+          <a:noFill/>
+          <a:ln/>
+        </p:spPr>
+        <p:txBody>
+          <a:bodyPr wrap="square" lIns="0" tIns="0" rIns="0" bIns="0" rtlCol="0" anchor="ctr"/>
+          <a:lstStyle/>
+          <a:p>
+            <a:pPr indent="0" marL="0">
+              <a:buNone/>
+            </a:pPr>
+            <a:r>
+              <a:rPr lang="en-US" sz="1200" dirty="0">
+                <a:solidFill>
+                  <a:srgbClr val="17272E"/>
+                </a:solidFill>
+                <a:latin typeface="Calibri" pitchFamily="34" charset="0"/>
+                <a:ea typeface="Calibri" pitchFamily="34" charset="-122"/>
+                <a:cs typeface="Calibri" pitchFamily="34" charset="-120"/>
+              </a:rPr>
+              <a:t>Send the machine ID to the PoC lead. You receive a small .lic file issued for that PC, valid for 12 months. Licences cannot be created on the drive — only the PoC lead’s keygen can issue one.</a:t>
+            </a:r>
+            <a:endParaRPr lang="en-US" sz="1300" dirty="0"/>
+          </a:p>
+        </p:txBody>
+      </p:sp>
+      <p:sp>
+        <p:nvSpPr>
+          <p:cNvPr id="11" name="Shape 9"/>
+          <p:cNvSpPr/>
+          <p:nvPr/>
+        </p:nvSpPr>
+        <p:spPr>
+          <a:xfrm>
+            <a:off x="548640" y="3749040"/>
+            <a:ext cx="5486400" cy="2103120"/>
+          </a:xfrm>
+          <a:prstGeom prst="roundRect">
+            <a:avLst>
+              <a:gd name="adj" fmla="val 5217"/>
+            </a:avLst>
+          </a:prstGeom>
+          <a:solidFill>
+            <a:srgbClr val="E5F2F0"/>
+          </a:solidFill>
+          <a:ln/>
+        </p:spPr>
+        <p:txBody>
+          <a:bodyPr/>
+          <a:p/>
+        </p:txBody>
+      </p:sp>
+      <p:sp>
+        <p:nvSpPr>
+          <p:cNvPr id="12" name="Text 10"/>
+          <p:cNvSpPr txBox="1"/>
+          <p:nvPr/>
+        </p:nvSpPr>
+        <p:spPr>
+          <a:xfrm>
+            <a:off x="822960" y="3950208"/>
+            <a:ext cx="4937760" cy="411480"/>
+          </a:xfrm>
+          <a:prstGeom prst="rect">
+            <a:avLst/>
+          </a:prstGeom>
+          <a:noFill/>
+          <a:ln/>
+        </p:spPr>
+        <p:txBody>
+          <a:bodyPr wrap="square" lIns="0" tIns="0" rIns="0" bIns="0" rtlCol="0" anchor="ctr"/>
+          <a:lstStyle/>
+          <a:p>
+            <a:pPr indent="0" marL="0">
+              <a:buNone/>
+            </a:pPr>
+            <a:r>
+              <a:rPr lang="en-US" sz="1600" b="1" dirty="0">
+                <a:solidFill>
+                  <a:srgbClr val="01485C"/>
+                </a:solidFill>
+                <a:latin typeface="Calibri" pitchFamily="34" charset="0"/>
+                <a:ea typeface="Calibri" pitchFamily="34" charset="-122"/>
+                <a:cs typeface="Calibri" pitchFamily="34" charset="-120"/>
+              </a:rPr>
+              <a:t>Installing it</a:t>
+            </a:r>
+            <a:endParaRPr lang="en-US" sz="1600" dirty="0"/>
+          </a:p>
+        </p:txBody>
+      </p:sp>
+      <p:sp>
+        <p:nvSpPr>
+          <p:cNvPr id="13" name="Text 11"/>
+          <p:cNvSpPr txBox="1"/>
+          <p:nvPr/>
+        </p:nvSpPr>
+        <p:spPr>
+          <a:xfrm>
+            <a:off x="822960" y="4434840"/>
+            <a:ext cx="4937760" cy="1463040"/>
+          </a:xfrm>
+          <a:prstGeom prst="rect">
+            <a:avLst/>
+          </a:prstGeom>
+          <a:noFill/>
+          <a:ln/>
+        </p:spPr>
+        <p:txBody>
+          <a:bodyPr wrap="square" lIns="0" tIns="0" rIns="0" bIns="0" rtlCol="0" anchor="ctr"/>
+          <a:lstStyle/>
+          <a:p>
+            <a:pPr indent="0" marL="0">
+              <a:buNone/>
+            </a:pPr>
+            <a:r>
+              <a:rPr lang="en-US" sz="1200" dirty="0">
+                <a:solidFill>
+                  <a:srgbClr val="17272E"/>
+                </a:solidFill>
+                <a:latin typeface="Calibri" pitchFamily="34" charset="0"/>
+                <a:ea typeface="Calibri" pitchFamily="34" charset="-122"/>
+                <a:cs typeface="Calibri" pitchFamily="34" charset="-120"/>
+              </a:rPr>
+              <a:t>Choose the file under Install licence file and click Install licence — or copy it to the root of the drive. The page reloads with the normal drop-down and the engines unlock at once.</a:t>
+            </a:r>
+            <a:endParaRPr lang="en-US" sz="1300" dirty="0"/>
+          </a:p>
+        </p:txBody>
+      </p:sp>
+      <p:sp>
+        <p:nvSpPr>
+          <p:cNvPr id="14" name="Shape 12"/>
+          <p:cNvSpPr/>
+          <p:nvPr/>
+        </p:nvSpPr>
+        <p:spPr>
+          <a:xfrm>
+            <a:off x="6172200" y="3749040"/>
+            <a:ext cx="5486400" cy="2103120"/>
+          </a:xfrm>
+          <a:prstGeom prst="roundRect">
+            <a:avLst>
+              <a:gd name="adj" fmla="val 5217"/>
+            </a:avLst>
+          </a:prstGeom>
+          <a:solidFill>
+            <a:srgbClr val="E5F2F0"/>
+          </a:solidFill>
+          <a:ln/>
+        </p:spPr>
+        <p:txBody>
+          <a:bodyPr/>
+          <a:p/>
+        </p:txBody>
+      </p:sp>
+      <p:sp>
+        <p:nvSpPr>
+          <p:cNvPr id="15" name="Text 13"/>
+          <p:cNvSpPr txBox="1"/>
+          <p:nvPr/>
+        </p:nvSpPr>
+        <p:spPr>
+          <a:xfrm>
+            <a:off x="6446520" y="3950208"/>
+            <a:ext cx="4937760" cy="411480"/>
+          </a:xfrm>
+          <a:prstGeom prst="rect">
+            <a:avLst/>
+          </a:prstGeom>
+          <a:noFill/>
+          <a:ln/>
+        </p:spPr>
+        <p:txBody>
+          <a:bodyPr wrap="square" lIns="0" tIns="0" rIns="0" bIns="0" rtlCol="0" anchor="ctr"/>
+          <a:lstStyle/>
+          <a:p>
+            <a:pPr indent="0" marL="0">
+              <a:buNone/>
+            </a:pPr>
+            <a:r>
+              <a:rPr lang="en-US" sz="1600" b="1" dirty="0">
+                <a:solidFill>
+                  <a:srgbClr val="01485C"/>
+                </a:solidFill>
+                <a:latin typeface="Calibri" pitchFamily="34" charset="0"/>
+                <a:ea typeface="Calibri" pitchFamily="34" charset="-122"/>
+                <a:cs typeface="Calibri" pitchFamily="34" charset="-120"/>
+              </a:rPr>
+              <a:t>Renewal and the Licences page</a:t>
+            </a:r>
+            <a:endParaRPr lang="en-US" sz="1600" dirty="0"/>
+          </a:p>
+        </p:txBody>
+      </p:sp>
+      <p:sp>
+        <p:nvSpPr>
+          <p:cNvPr id="16" name="Text 14"/>
+          <p:cNvSpPr txBox="1"/>
+          <p:nvPr/>
+        </p:nvSpPr>
+        <p:spPr>
+          <a:xfrm>
+            <a:off x="6446520" y="4434840"/>
+            <a:ext cx="4937760" cy="1463040"/>
+          </a:xfrm>
+          <a:prstGeom prst="rect">
+            <a:avLst/>
+          </a:prstGeom>
+          <a:noFill/>
+          <a:ln/>
+        </p:spPr>
+        <p:txBody>
+          <a:bodyPr wrap="square" lIns="0" tIns="0" rIns="0" bIns="0" rtlCol="0" anchor="ctr"/>
+          <a:lstStyle/>
+          <a:p>
+            <a:pPr indent="0" marL="0">
+              <a:buNone/>
+            </a:pPr>
+            <a:r>
+              <a:rPr lang="en-US" sz="1200" dirty="0">
+                <a:solidFill>
+                  <a:srgbClr val="17272E"/>
+                </a:solidFill>
+                <a:latin typeface="Calibri" pitchFamily="34" charset="0"/>
+                <a:ea typeface="Calibri" pitchFamily="34" charset="-122"/>
+                <a:cs typeface="Calibri" pitchFamily="34" charset="-120"/>
+              </a:rPr>
+              <a:t>Licences expire with the 12-month QIS review: a notice appears 30 days before, a 30-day grace period follows, then the PC locks. “Licences” at the foot of the page shows every licence on the drive and the PCs it covers.</a:t>
+            </a:r>
+            <a:endParaRPr lang="en-US" sz="1300" dirty="0"/>
+          </a:p>
+        </p:txBody>
+      </p:sp>
+      <p:sp>
+        <p:nvSpPr>
+          <p:cNvPr id="17" name="Shape 15"/>
+          <p:cNvSpPr/>
+          <p:nvPr/>
+        </p:nvSpPr>
+        <p:spPr>
+          <a:xfrm>
+            <a:off x="0" y="6793992"/>
+            <a:ext cx="2040636" cy="64008"/>
+          </a:xfrm>
+          <a:prstGeom prst="rect">
+            <a:avLst/>
+          </a:prstGeom>
+          <a:solidFill>
+            <a:srgbClr val="01485C"/>
+          </a:solidFill>
+          <a:ln/>
+        </p:spPr>
+      </p:sp>
+      <p:sp>
+        <p:nvSpPr>
+          <p:cNvPr id="18" name="Shape 16"/>
+          <p:cNvSpPr/>
+          <p:nvPr/>
+        </p:nvSpPr>
+        <p:spPr>
+          <a:xfrm>
+            <a:off x="2031492" y="6793992"/>
+            <a:ext cx="2040636" cy="64008"/>
+          </a:xfrm>
+          <a:prstGeom prst="rect">
+            <a:avLst/>
+          </a:prstGeom>
+          <a:solidFill>
+            <a:srgbClr val="146175"/>
+          </a:solidFill>
+          <a:ln/>
+        </p:spPr>
+      </p:sp>
+      <p:sp>
+        <p:nvSpPr>
+          <p:cNvPr id="19" name="Shape 17"/>
+          <p:cNvSpPr/>
+          <p:nvPr/>
+        </p:nvSpPr>
+        <p:spPr>
+          <a:xfrm>
+            <a:off x="4062984" y="6793992"/>
+            <a:ext cx="2040636" cy="64008"/>
+          </a:xfrm>
+          <a:prstGeom prst="rect">
+            <a:avLst/>
+          </a:prstGeom>
+          <a:solidFill>
+            <a:srgbClr val="11B5AE"/>
+          </a:solidFill>
+          <a:ln/>
+        </p:spPr>
+      </p:sp>
+      <p:sp>
+        <p:nvSpPr>
+          <p:cNvPr id="20" name="Shape 18"/>
+          <p:cNvSpPr/>
+          <p:nvPr/>
+        </p:nvSpPr>
+        <p:spPr>
+          <a:xfrm>
+            <a:off x="6094476" y="6793992"/>
+            <a:ext cx="2040636" cy="64008"/>
+          </a:xfrm>
+          <a:prstGeom prst="rect">
+            <a:avLst/>
+          </a:prstGeom>
+          <a:solidFill>
+            <a:srgbClr val="6CCAD4"/>
+          </a:solidFill>
+          <a:ln/>
+        </p:spPr>
+      </p:sp>
+      <p:sp>
+        <p:nvSpPr>
+          <p:cNvPr id="21" name="Shape 19"/>
+          <p:cNvSpPr/>
+          <p:nvPr/>
+        </p:nvSpPr>
+        <p:spPr>
+          <a:xfrm>
+            <a:off x="8125968" y="6793992"/>
+            <a:ext cx="2040636" cy="64008"/>
+          </a:xfrm>
+          <a:prstGeom prst="rect">
+            <a:avLst/>
+          </a:prstGeom>
+          <a:solidFill>
+            <a:srgbClr val="7FC04C"/>
+          </a:solidFill>
+          <a:ln/>
+        </p:spPr>
+      </p:sp>
+      <p:sp>
+        <p:nvSpPr>
+          <p:cNvPr id="22" name="Shape 20"/>
           <p:cNvSpPr/>
           <p:nvPr/>
         </p:nvSpPr>
@@ -15145,7 +14127,7 @@
                 <a:ea typeface="Calibri" pitchFamily="34" charset="-122"/>
                 <a:cs typeface="Calibri" pitchFamily="34" charset="-120"/>
               </a:rPr>
-              <a:t>A NEW PC must be enrolled first: the selection page shows its machine ID and asks for the enrolment password (PoC team). Enrolment lasts 12 months.</a:t>
+              <a:t>A NEW PC must be licensed first: the selection page shows its machine ID — send it to the PoC lead and install the licence file you get back. Licences last 12 months.</a:t>
             </a:r>
             <a:endParaRPr lang="en-US" sz="1300" dirty="0"/>
           </a:p>
@@ -15944,7 +14926,7 @@
                 <a:ea typeface="Calibri" pitchFamily="34" charset="-122"/>
                 <a:cs typeface="Calibri" pitchFamily="34" charset="-120"/>
               </a:rPr>
-              <a:t>New PC? The selection page shows a lock card first — a PoC team member enters the enrolment password to enrol it (valid 12 months). Both report types can be run in one session.</a:t>
+              <a:t>New PC? The selection page shows a lock card with the machine ID — send it to the PoC lead and install the licence file (.lic) you receive. Both report types can be run in one session.</a:t>
             </a:r>
             <a:endParaRPr lang="en-US" sz="1250" dirty="0"/>
           </a:p>
@@ -16079,664 +15061,6 @@
 </file>
 
 <file path=ppt/slides/slide4.xml><?xml version="1.0" encoding="utf-8"?>
-<p:sld xmlns:a="http://schemas.openxmlformats.org/drawingml/2006/main" xmlns:p="http://schemas.openxmlformats.org/presentationml/2006/main" xmlns:r="http://schemas.openxmlformats.org/officeDocument/2006/relationships">
-  <p:cSld>
-    <p:spTree>
-      <p:nvGrpSpPr>
-        <p:cNvPr id="1" name=""/>
-        <p:cNvGrpSpPr/>
-        <p:nvPr/>
-      </p:nvGrpSpPr>
-      <p:grpSpPr/>
-      <p:sp>
-        <p:nvSpPr>
-          <p:cNvPr id="2" name="Text 0"/>
-          <p:cNvSpPr txBox="1"/>
-          <p:nvPr/>
-        </p:nvSpPr>
-        <p:spPr>
-          <a:xfrm>
-            <a:off x="548640" y="320040"/>
-            <a:ext cx="11064240" cy="685800"/>
-          </a:xfrm>
-          <a:prstGeom prst="rect">
-            <a:avLst/>
-          </a:prstGeom>
-          <a:noFill/>
-          <a:ln/>
-        </p:spPr>
-        <p:txBody>
-          <a:bodyPr wrap="square" lIns="0" tIns="0" rIns="0" bIns="0" rtlCol="0" anchor="ctr"/>
-          <a:lstStyle/>
-          <a:p>
-            <a:pPr indent="0" marL="0">
-              <a:buNone/>
-            </a:pPr>
-            <a:r>
-              <a:rPr lang="en-US" sz="3000" b="1" dirty="0">
-                <a:solidFill>
-                  <a:srgbClr val="01485C"/>
-                </a:solidFill>
-                <a:latin typeface="Calibri" pitchFamily="34" charset="0"/>
-                <a:ea typeface="Calibri" pitchFamily="34" charset="-122"/>
-                <a:cs typeface="Calibri" pitchFamily="34" charset="-120"/>
-              </a:rPr>
-              <a:t>Enrolling a PC (first use on a computer)</a:t>
-            </a:r>
-            <a:endParaRPr lang="en-US" sz="3000" dirty="0"/>
-          </a:p>
-        </p:txBody>
-      </p:sp>
-      <p:sp>
-        <p:nvSpPr>
-          <p:cNvPr id="3" name="Shape 1"/>
-          <p:cNvSpPr/>
-          <p:nvPr/>
-        </p:nvSpPr>
-        <p:spPr>
-          <a:xfrm>
-            <a:off x="9784080" y="384048"/>
-            <a:ext cx="1828800" cy="457200"/>
-          </a:xfrm>
-          <a:prstGeom prst="roundRect">
-            <a:avLst>
-              <a:gd name="adj" fmla="val 50000"/>
-            </a:avLst>
-          </a:prstGeom>
-          <a:solidFill>
-            <a:srgbClr val="01485C"/>
-          </a:solidFill>
-          <a:ln/>
-        </p:spPr>
-        <p:txBody>
-          <a:bodyPr/>
-          <a:p/>
-        </p:txBody>
-      </p:sp>
-      <p:sp>
-        <p:nvSpPr>
-          <p:cNvPr id="4" name="Text 2"/>
-          <p:cNvSpPr txBox="1"/>
-          <p:nvPr/>
-        </p:nvSpPr>
-        <p:spPr>
-          <a:xfrm>
-            <a:off x="9784080" y="384048"/>
-            <a:ext cx="1828800" cy="457200"/>
-          </a:xfrm>
-          <a:prstGeom prst="rect">
-            <a:avLst/>
-          </a:prstGeom>
-          <a:noFill/>
-          <a:ln/>
-        </p:spPr>
-        <p:txBody>
-          <a:bodyPr wrap="square" lIns="0" tIns="0" rIns="0" bIns="0" rtlCol="0" anchor="ctr"/>
-          <a:lstStyle/>
-          <a:p>
-            <a:pPr algn="ctr" indent="0" marL="0">
-              <a:buNone/>
-            </a:pPr>
-            <a:r>
-              <a:rPr lang="en-US" sz="1500" b="1" dirty="0">
-                <a:solidFill>
-                  <a:srgbClr val="FFFFFF"/>
-                </a:solidFill>
-                <a:latin typeface="Calibri" pitchFamily="34" charset="0"/>
-                <a:ea typeface="Calibri" pitchFamily="34" charset="-122"/>
-                <a:cs typeface="Calibri" pitchFamily="34" charset="-120"/>
-              </a:rPr>
-              <a:t>BOTH</a:t>
-            </a:r>
-            <a:endParaRPr lang="en-US" sz="1500" dirty="0"/>
-          </a:p>
-        </p:txBody>
-      </p:sp>
-      <p:sp>
-        <p:nvSpPr>
-          <p:cNvPr id="5" name="Shape 3"/>
-          <p:cNvSpPr/>
-          <p:nvPr/>
-        </p:nvSpPr>
-        <p:spPr>
-          <a:xfrm>
-            <a:off x="548640" y="1463040"/>
-            <a:ext cx="5486400" cy="2103120"/>
-          </a:xfrm>
-          <a:prstGeom prst="roundRect">
-            <a:avLst>
-              <a:gd name="adj" fmla="val 5217"/>
-            </a:avLst>
-          </a:prstGeom>
-          <a:solidFill>
-            <a:srgbClr val="E5F2F0"/>
-          </a:solidFill>
-          <a:ln/>
-        </p:spPr>
-        <p:txBody>
-          <a:bodyPr/>
-          <a:p/>
-        </p:txBody>
-      </p:sp>
-      <p:sp>
-        <p:nvSpPr>
-          <p:cNvPr id="6" name="Text 4"/>
-          <p:cNvSpPr txBox="1"/>
-          <p:nvPr/>
-        </p:nvSpPr>
-        <p:spPr>
-          <a:xfrm>
-            <a:off x="822960" y="1664208"/>
-            <a:ext cx="4937760" cy="411480"/>
-          </a:xfrm>
-          <a:prstGeom prst="rect">
-            <a:avLst/>
-          </a:prstGeom>
-          <a:noFill/>
-          <a:ln/>
-        </p:spPr>
-        <p:txBody>
-          <a:bodyPr wrap="square" lIns="0" tIns="0" rIns="0" bIns="0" rtlCol="0" anchor="ctr"/>
-          <a:lstStyle/>
-          <a:p>
-            <a:pPr indent="0" marL="0">
-              <a:buNone/>
-            </a:pPr>
-            <a:r>
-              <a:rPr lang="en-US" sz="1600" b="1" dirty="0">
-                <a:solidFill>
-                  <a:srgbClr val="01485C"/>
-                </a:solidFill>
-                <a:latin typeface="Calibri" pitchFamily="34" charset="0"/>
-                <a:ea typeface="Calibri" pitchFamily="34" charset="-122"/>
-                <a:cs typeface="Calibri" pitchFamily="34" charset="-120"/>
-              </a:rPr>
-              <a:t>The lock card</a:t>
-            </a:r>
-            <a:endParaRPr lang="en-US" sz="1600" dirty="0"/>
-          </a:p>
-        </p:txBody>
-      </p:sp>
-      <p:sp>
-        <p:nvSpPr>
-          <p:cNvPr id="7" name="Text 5"/>
-          <p:cNvSpPr txBox="1"/>
-          <p:nvPr/>
-        </p:nvSpPr>
-        <p:spPr>
-          <a:xfrm>
-            <a:off x="822960" y="2148840"/>
-            <a:ext cx="4937760" cy="1463040"/>
-          </a:xfrm>
-          <a:prstGeom prst="rect">
-            <a:avLst/>
-          </a:prstGeom>
-          <a:noFill/>
-          <a:ln/>
-        </p:spPr>
-        <p:txBody>
-          <a:bodyPr wrap="square" lIns="0" tIns="0" rIns="0" bIns="0" rtlCol="0" anchor="ctr"/>
-          <a:lstStyle/>
-          <a:p>
-            <a:pPr indent="0" marL="0">
-              <a:buNone/>
-            </a:pPr>
-            <a:r>
-              <a:rPr lang="en-US" sz="1200" dirty="0">
-                <a:solidFill>
-                  <a:srgbClr val="17272E"/>
-                </a:solidFill>
-                <a:latin typeface="Calibri" pitchFamily="34" charset="0"/>
-                <a:ea typeface="Calibri" pitchFamily="34" charset="-122"/>
-                <a:cs typeface="Calibri" pitchFamily="34" charset="-120"/>
-              </a:rPr>
-              <a:t>On a PC that is not enrolled, the selection page shows PC NOT ENROLLED with the machine ID and hostname instead of the report-type drop-down. Nothing runs until the PC is enrolled — the engines show a lock page too.</a:t>
-            </a:r>
-            <a:endParaRPr lang="en-US" sz="1300" dirty="0"/>
-          </a:p>
-        </p:txBody>
-      </p:sp>
-      <p:sp>
-        <p:nvSpPr>
-          <p:cNvPr id="8" name="Shape 6"/>
-          <p:cNvSpPr/>
-          <p:nvPr/>
-        </p:nvSpPr>
-        <p:spPr>
-          <a:xfrm>
-            <a:off x="6172200" y="1463040"/>
-            <a:ext cx="5486400" cy="2103120"/>
-          </a:xfrm>
-          <a:prstGeom prst="roundRect">
-            <a:avLst>
-              <a:gd name="adj" fmla="val 5217"/>
-            </a:avLst>
-          </a:prstGeom>
-          <a:solidFill>
-            <a:srgbClr val="FDF0E4"/>
-          </a:solidFill>
-          <a:ln/>
-        </p:spPr>
-        <p:txBody>
-          <a:bodyPr/>
-          <a:p/>
-        </p:txBody>
-      </p:sp>
-      <p:sp>
-        <p:nvSpPr>
-          <p:cNvPr id="9" name="Text 7"/>
-          <p:cNvSpPr txBox="1"/>
-          <p:nvPr/>
-        </p:nvSpPr>
-        <p:spPr>
-          <a:xfrm>
-            <a:off x="6446520" y="1664208"/>
-            <a:ext cx="4937760" cy="411480"/>
-          </a:xfrm>
-          <a:prstGeom prst="rect">
-            <a:avLst/>
-          </a:prstGeom>
-          <a:noFill/>
-          <a:ln/>
-        </p:spPr>
-        <p:txBody>
-          <a:bodyPr wrap="square" lIns="0" tIns="0" rIns="0" bIns="0" rtlCol="0" anchor="ctr"/>
-          <a:lstStyle/>
-          <a:p>
-            <a:pPr indent="0" marL="0">
-              <a:buNone/>
-            </a:pPr>
-            <a:r>
-              <a:rPr lang="en-US" sz="1600" b="1" dirty="0">
-                <a:solidFill>
-                  <a:srgbClr val="B4540A"/>
-                </a:solidFill>
-                <a:latin typeface="Calibri" pitchFamily="34" charset="0"/>
-                <a:ea typeface="Calibri" pitchFamily="34" charset="-122"/>
-                <a:cs typeface="Calibri" pitchFamily="34" charset="-120"/>
-              </a:rPr>
-              <a:t>Networked PCs — confirm first</a:t>
-            </a:r>
-            <a:endParaRPr lang="en-US" sz="1600" dirty="0"/>
-          </a:p>
-        </p:txBody>
-      </p:sp>
-      <p:sp>
-        <p:nvSpPr>
-          <p:cNvPr id="10" name="Text 8"/>
-          <p:cNvSpPr txBox="1"/>
-          <p:nvPr/>
-        </p:nvSpPr>
-        <p:spPr>
-          <a:xfrm>
-            <a:off x="6446520" y="2148840"/>
-            <a:ext cx="4937760" cy="1463040"/>
-          </a:xfrm>
-          <a:prstGeom prst="rect">
-            <a:avLst/>
-          </a:prstGeom>
-          <a:noFill/>
-          <a:ln/>
-        </p:spPr>
-        <p:txBody>
-          <a:bodyPr wrap="square" lIns="0" tIns="0" rIns="0" bIns="0" rtlCol="0" anchor="ctr"/>
-          <a:lstStyle/>
-          <a:p>
-            <a:pPr indent="0" marL="0">
-              <a:buNone/>
-            </a:pPr>
-            <a:r>
-              <a:rPr lang="en-US" sz="1200" dirty="0">
-                <a:solidFill>
-                  <a:srgbClr val="17272E"/>
-                </a:solidFill>
-                <a:latin typeface="Calibri" pitchFamily="34" charset="0"/>
-                <a:ea typeface="Calibri" pitchFamily="34" charset="-122"/>
-                <a:cs typeface="Calibri" pitchFamily="34" charset="-120"/>
-              </a:rPr>
-              <a:t>The tool is meant for non-networked PCs. If a network connection is active, the card says so and needs a confirmation tick before enrolling. That fact is recorded with the enrolment.</a:t>
-            </a:r>
-            <a:endParaRPr lang="en-US" sz="1300" dirty="0"/>
-          </a:p>
-        </p:txBody>
-      </p:sp>
-      <p:sp>
-        <p:nvSpPr>
-          <p:cNvPr id="11" name="Shape 9"/>
-          <p:cNvSpPr/>
-          <p:nvPr/>
-        </p:nvSpPr>
-        <p:spPr>
-          <a:xfrm>
-            <a:off x="548640" y="3749040"/>
-            <a:ext cx="5486400" cy="2103120"/>
-          </a:xfrm>
-          <a:prstGeom prst="roundRect">
-            <a:avLst>
-              <a:gd name="adj" fmla="val 5217"/>
-            </a:avLst>
-          </a:prstGeom>
-          <a:solidFill>
-            <a:srgbClr val="E5F2F0"/>
-          </a:solidFill>
-          <a:ln/>
-        </p:spPr>
-        <p:txBody>
-          <a:bodyPr/>
-          <a:p/>
-        </p:txBody>
-      </p:sp>
-      <p:sp>
-        <p:nvSpPr>
-          <p:cNvPr id="12" name="Text 10"/>
-          <p:cNvSpPr txBox="1"/>
-          <p:nvPr/>
-        </p:nvSpPr>
-        <p:spPr>
-          <a:xfrm>
-            <a:off x="822960" y="3950208"/>
-            <a:ext cx="4937760" cy="411480"/>
-          </a:xfrm>
-          <a:prstGeom prst="rect">
-            <a:avLst/>
-          </a:prstGeom>
-          <a:noFill/>
-          <a:ln/>
-        </p:spPr>
-        <p:txBody>
-          <a:bodyPr wrap="square" lIns="0" tIns="0" rIns="0" bIns="0" rtlCol="0" anchor="ctr"/>
-          <a:lstStyle/>
-          <a:p>
-            <a:pPr indent="0" marL="0">
-              <a:buNone/>
-            </a:pPr>
-            <a:r>
-              <a:rPr lang="en-US" sz="1600" b="1" dirty="0">
-                <a:solidFill>
-                  <a:srgbClr val="01485C"/>
-                </a:solidFill>
-                <a:latin typeface="Calibri" pitchFamily="34" charset="0"/>
-                <a:ea typeface="Calibri" pitchFamily="34" charset="-122"/>
-                <a:cs typeface="Calibri" pitchFamily="34" charset="-120"/>
-              </a:rPr>
-              <a:t>Enrolling</a:t>
-            </a:r>
-            <a:endParaRPr lang="en-US" sz="1600" dirty="0"/>
-          </a:p>
-        </p:txBody>
-      </p:sp>
-      <p:sp>
-        <p:nvSpPr>
-          <p:cNvPr id="13" name="Text 11"/>
-          <p:cNvSpPr txBox="1"/>
-          <p:nvPr/>
-        </p:nvSpPr>
-        <p:spPr>
-          <a:xfrm>
-            <a:off x="822960" y="4434840"/>
-            <a:ext cx="4937760" cy="1463040"/>
-          </a:xfrm>
-          <a:prstGeom prst="rect">
-            <a:avLst/>
-          </a:prstGeom>
-          <a:noFill/>
-          <a:ln/>
-        </p:spPr>
-        <p:txBody>
-          <a:bodyPr wrap="square" lIns="0" tIns="0" rIns="0" bIns="0" rtlCol="0" anchor="ctr"/>
-          <a:lstStyle/>
-          <a:p>
-            <a:pPr indent="0" marL="0">
-              <a:buNone/>
-            </a:pPr>
-            <a:r>
-              <a:rPr lang="en-US" sz="1200" dirty="0">
-                <a:solidFill>
-                  <a:srgbClr val="17272E"/>
-                </a:solidFill>
-                <a:latin typeface="Calibri" pitchFamily="34" charset="0"/>
-                <a:ea typeface="Calibri" pitchFamily="34" charset="-122"/>
-                <a:cs typeface="Calibri" pitchFamily="34" charset="-120"/>
-              </a:rPr>
-              <a:t>A PoC team member types the enrolment password (very first use: choose it and confirm it), adds an optional note such as the room or bench, and clicks Enrol this PC. The page reloads with the normal drop-down.</a:t>
-            </a:r>
-            <a:endParaRPr lang="en-US" sz="1300" dirty="0"/>
-          </a:p>
-        </p:txBody>
-      </p:sp>
-      <p:sp>
-        <p:nvSpPr>
-          <p:cNvPr id="14" name="Shape 12"/>
-          <p:cNvSpPr/>
-          <p:nvPr/>
-        </p:nvSpPr>
-        <p:spPr>
-          <a:xfrm>
-            <a:off x="6172200" y="3749040"/>
-            <a:ext cx="5486400" cy="2103120"/>
-          </a:xfrm>
-          <a:prstGeom prst="roundRect">
-            <a:avLst>
-              <a:gd name="adj" fmla="val 5217"/>
-            </a:avLst>
-          </a:prstGeom>
-          <a:solidFill>
-            <a:srgbClr val="E5F2F0"/>
-          </a:solidFill>
-          <a:ln/>
-        </p:spPr>
-        <p:txBody>
-          <a:bodyPr/>
-          <a:p/>
-        </p:txBody>
-      </p:sp>
-      <p:sp>
-        <p:nvSpPr>
-          <p:cNvPr id="15" name="Text 13"/>
-          <p:cNvSpPr txBox="1"/>
-          <p:nvPr/>
-        </p:nvSpPr>
-        <p:spPr>
-          <a:xfrm>
-            <a:off x="6446520" y="3950208"/>
-            <a:ext cx="4937760" cy="411480"/>
-          </a:xfrm>
-          <a:prstGeom prst="rect">
-            <a:avLst/>
-          </a:prstGeom>
-          <a:noFill/>
-          <a:ln/>
-        </p:spPr>
-        <p:txBody>
-          <a:bodyPr wrap="square" lIns="0" tIns="0" rIns="0" bIns="0" rtlCol="0" anchor="ctr"/>
-          <a:lstStyle/>
-          <a:p>
-            <a:pPr indent="0" marL="0">
-              <a:buNone/>
-            </a:pPr>
-            <a:r>
-              <a:rPr lang="en-US" sz="1600" b="1" dirty="0">
-                <a:solidFill>
-                  <a:srgbClr val="01485C"/>
-                </a:solidFill>
-                <a:latin typeface="Calibri" pitchFamily="34" charset="0"/>
-                <a:ea typeface="Calibri" pitchFamily="34" charset="-122"/>
-                <a:cs typeface="Calibri" pitchFamily="34" charset="-120"/>
-              </a:rPr>
-              <a:t>Renewal and the Enrolled PCs list</a:t>
-            </a:r>
-            <a:endParaRPr lang="en-US" sz="1600" dirty="0"/>
-          </a:p>
-        </p:txBody>
-      </p:sp>
-      <p:sp>
-        <p:nvSpPr>
-          <p:cNvPr id="16" name="Text 14"/>
-          <p:cNvSpPr txBox="1"/>
-          <p:nvPr/>
-        </p:nvSpPr>
-        <p:spPr>
-          <a:xfrm>
-            <a:off x="6446520" y="4434840"/>
-            <a:ext cx="4937760" cy="1463040"/>
-          </a:xfrm>
-          <a:prstGeom prst="rect">
-            <a:avLst/>
-          </a:prstGeom>
-          <a:noFill/>
-          <a:ln/>
-        </p:spPr>
-        <p:txBody>
-          <a:bodyPr wrap="square" lIns="0" tIns="0" rIns="0" bIns="0" rtlCol="0" anchor="ctr"/>
-          <a:lstStyle/>
-          <a:p>
-            <a:pPr indent="0" marL="0">
-              <a:buNone/>
-            </a:pPr>
-            <a:r>
-              <a:rPr lang="en-US" sz="1200" dirty="0">
-                <a:solidFill>
-                  <a:srgbClr val="17272E"/>
-                </a:solidFill>
-                <a:latin typeface="Calibri" pitchFamily="34" charset="0"/>
-                <a:ea typeface="Calibri" pitchFamily="34" charset="-122"/>
-                <a:cs typeface="Calibri" pitchFamily="34" charset="-120"/>
-              </a:rPr>
-              <a:t>Enrolment lasts 12 months; a renewal notice appears in the last 30 days with a Renew link. “Enrolled PCs” at the foot of the page lists every PC with its version and last use, and can revoke one.</a:t>
-            </a:r>
-            <a:endParaRPr lang="en-US" sz="1300" dirty="0"/>
-          </a:p>
-        </p:txBody>
-      </p:sp>
-      <p:sp>
-        <p:nvSpPr>
-          <p:cNvPr id="17" name="Shape 15"/>
-          <p:cNvSpPr/>
-          <p:nvPr/>
-        </p:nvSpPr>
-        <p:spPr>
-          <a:xfrm>
-            <a:off x="0" y="6793992"/>
-            <a:ext cx="2040636" cy="64008"/>
-          </a:xfrm>
-          <a:prstGeom prst="rect">
-            <a:avLst/>
-          </a:prstGeom>
-          <a:solidFill>
-            <a:srgbClr val="01485C"/>
-          </a:solidFill>
-          <a:ln/>
-        </p:spPr>
-      </p:sp>
-      <p:sp>
-        <p:nvSpPr>
-          <p:cNvPr id="18" name="Shape 16"/>
-          <p:cNvSpPr/>
-          <p:nvPr/>
-        </p:nvSpPr>
-        <p:spPr>
-          <a:xfrm>
-            <a:off x="2031492" y="6793992"/>
-            <a:ext cx="2040636" cy="64008"/>
-          </a:xfrm>
-          <a:prstGeom prst="rect">
-            <a:avLst/>
-          </a:prstGeom>
-          <a:solidFill>
-            <a:srgbClr val="146175"/>
-          </a:solidFill>
-          <a:ln/>
-        </p:spPr>
-      </p:sp>
-      <p:sp>
-        <p:nvSpPr>
-          <p:cNvPr id="19" name="Shape 17"/>
-          <p:cNvSpPr/>
-          <p:nvPr/>
-        </p:nvSpPr>
-        <p:spPr>
-          <a:xfrm>
-            <a:off x="4062984" y="6793992"/>
-            <a:ext cx="2040636" cy="64008"/>
-          </a:xfrm>
-          <a:prstGeom prst="rect">
-            <a:avLst/>
-          </a:prstGeom>
-          <a:solidFill>
-            <a:srgbClr val="11B5AE"/>
-          </a:solidFill>
-          <a:ln/>
-        </p:spPr>
-      </p:sp>
-      <p:sp>
-        <p:nvSpPr>
-          <p:cNvPr id="20" name="Shape 18"/>
-          <p:cNvSpPr/>
-          <p:nvPr/>
-        </p:nvSpPr>
-        <p:spPr>
-          <a:xfrm>
-            <a:off x="6094476" y="6793992"/>
-            <a:ext cx="2040636" cy="64008"/>
-          </a:xfrm>
-          <a:prstGeom prst="rect">
-            <a:avLst/>
-          </a:prstGeom>
-          <a:solidFill>
-            <a:srgbClr val="6CCAD4"/>
-          </a:solidFill>
-          <a:ln/>
-        </p:spPr>
-      </p:sp>
-      <p:sp>
-        <p:nvSpPr>
-          <p:cNvPr id="21" name="Shape 19"/>
-          <p:cNvSpPr/>
-          <p:nvPr/>
-        </p:nvSpPr>
-        <p:spPr>
-          <a:xfrm>
-            <a:off x="8125968" y="6793992"/>
-            <a:ext cx="2040636" cy="64008"/>
-          </a:xfrm>
-          <a:prstGeom prst="rect">
-            <a:avLst/>
-          </a:prstGeom>
-          <a:solidFill>
-            <a:srgbClr val="7FC04C"/>
-          </a:solidFill>
-          <a:ln/>
-        </p:spPr>
-      </p:sp>
-      <p:sp>
-        <p:nvSpPr>
-          <p:cNvPr id="22" name="Shape 20"/>
-          <p:cNvSpPr/>
-          <p:nvPr/>
-        </p:nvSpPr>
-        <p:spPr>
-          <a:xfrm>
-            <a:off x="10157460" y="6793992"/>
-            <a:ext cx="2040636" cy="64008"/>
-          </a:xfrm>
-          <a:prstGeom prst="rect">
-            <a:avLst/>
-          </a:prstGeom>
-          <a:solidFill>
-            <a:srgbClr val="E1DD57"/>
-          </a:solidFill>
-          <a:ln/>
-        </p:spPr>
-      </p:sp>
-    </p:spTree>
-  </p:cSld>
-  <p:clrMapOvr>
-    <a:masterClrMapping/>
-  </p:clrMapOvr>
-</p:sld>
-</file>
-
-<file path=ppt/slides/slide5.xml><?xml version="1.0" encoding="utf-8"?>
 <p:sld xmlns:a="http://schemas.openxmlformats.org/drawingml/2006/main" xmlns:r="http://schemas.openxmlformats.org/officeDocument/2006/relationships" xmlns:p="http://schemas.openxmlformats.org/presentationml/2006/main">
   <p:cSld name="Slide 4">
     <p:bg>
@@ -17391,7 +15715,7 @@
 </p:sld>
 </file>
 
-<file path=ppt/slides/slide6.xml><?xml version="1.0" encoding="utf-8"?>
+<file path=ppt/slides/slide5.xml><?xml version="1.0" encoding="utf-8"?>
 <p:sld xmlns:a="http://schemas.openxmlformats.org/drawingml/2006/main" xmlns:r="http://schemas.openxmlformats.org/officeDocument/2006/relationships" xmlns:p="http://schemas.openxmlformats.org/presentationml/2006/main">
   <p:cSld name="Slide 5">
     <p:bg>
@@ -18118,7 +16442,7 @@
 </p:sld>
 </file>
 
-<file path=ppt/slides/slide7.xml><?xml version="1.0" encoding="utf-8"?>
+<file path=ppt/slides/slide6.xml><?xml version="1.0" encoding="utf-8"?>
 <p:sld xmlns:a="http://schemas.openxmlformats.org/drawingml/2006/main" xmlns:r="http://schemas.openxmlformats.org/officeDocument/2006/relationships" xmlns:p="http://schemas.openxmlformats.org/presentationml/2006/main">
   <p:cSld name="Slide 6">
     <p:bg>
@@ -19037,7 +17361,7 @@
 </p:sld>
 </file>
 
-<file path=ppt/slides/slide8.xml><?xml version="1.0" encoding="utf-8"?>
+<file path=ppt/slides/slide7.xml><?xml version="1.0" encoding="utf-8"?>
 <p:sld xmlns:a="http://schemas.openxmlformats.org/drawingml/2006/main" xmlns:r="http://schemas.openxmlformats.org/officeDocument/2006/relationships" xmlns:p="http://schemas.openxmlformats.org/presentationml/2006/main">
   <p:cSld name="Slide 7">
     <p:bg>
@@ -19838,7 +18162,7 @@
 </p:sld>
 </file>
 
-<file path=ppt/slides/slide9.xml><?xml version="1.0" encoding="utf-8"?>
+<file path=ppt/slides/slide8.xml><?xml version="1.0" encoding="utf-8"?>
 <p:sld xmlns:a="http://schemas.openxmlformats.org/drawingml/2006/main" xmlns:r="http://schemas.openxmlformats.org/officeDocument/2006/relationships" xmlns:p="http://schemas.openxmlformats.org/presentationml/2006/main">
   <p:cSld name="Slide 8">
     <p:bg>
@@ -20465,6 +18789,1670 @@
       <p:sp>
         <p:nvSpPr>
           <p:cNvPr id="22" name="Shape 20"/>
+          <p:cNvSpPr/>
+          <p:nvPr/>
+        </p:nvSpPr>
+        <p:spPr>
+          <a:xfrm>
+            <a:off x="10157460" y="6793992"/>
+            <a:ext cx="2040636" cy="64008"/>
+          </a:xfrm>
+          <a:prstGeom prst="rect">
+            <a:avLst/>
+          </a:prstGeom>
+          <a:solidFill>
+            <a:srgbClr val="E1DD57"/>
+          </a:solidFill>
+          <a:ln/>
+        </p:spPr>
+      </p:sp>
+    </p:spTree>
+  </p:cSld>
+  <p:clrMapOvr>
+    <a:masterClrMapping/>
+  </p:clrMapOvr>
+</p:sld>
+</file>
+
+<file path=ppt/slides/slide9.xml><?xml version="1.0" encoding="utf-8"?>
+<p:sld xmlns:a="http://schemas.openxmlformats.org/drawingml/2006/main" xmlns:r="http://schemas.openxmlformats.org/officeDocument/2006/relationships" xmlns:p="http://schemas.openxmlformats.org/presentationml/2006/main">
+  <p:cSld name="Slide 9">
+    <p:bg>
+      <p:bgPr>
+        <a:solidFill>
+          <a:srgbClr val="FFFFFF"/>
+        </a:solidFill>
+      </p:bgPr>
+    </p:bg>
+    <p:spTree>
+      <p:nvGrpSpPr>
+        <p:cNvPr id="1" name=""/>
+        <p:cNvGrpSpPr/>
+        <p:nvPr/>
+      </p:nvGrpSpPr>
+      <p:grpSpPr>
+        <a:xfrm>
+          <a:off x="0" y="0"/>
+          <a:ext cx="0" cy="0"/>
+          <a:chOff x="0" y="0"/>
+          <a:chExt cx="0" cy="0"/>
+        </a:xfrm>
+      </p:grpSpPr>
+      <p:sp>
+        <p:nvSpPr>
+          <p:cNvPr id="2" name="Text 0"/>
+          <p:cNvSpPr txBox="1"/>
+          <p:nvPr/>
+        </p:nvSpPr>
+        <p:spPr>
+          <a:xfrm>
+            <a:off x="548640" y="320040"/>
+            <a:ext cx="11064240" cy="685800"/>
+          </a:xfrm>
+          <a:prstGeom prst="rect">
+            <a:avLst/>
+          </a:prstGeom>
+          <a:noFill/>
+          <a:ln/>
+        </p:spPr>
+        <p:txBody>
+          <a:bodyPr wrap="square" lIns="0" tIns="0" rIns="0" bIns="0" rtlCol="0" anchor="ctr"/>
+          <a:lstStyle/>
+          <a:p>
+            <a:pPr indent="0" marL="0">
+              <a:buNone/>
+            </a:pPr>
+            <a:r>
+              <a:rPr lang="en-US" sz="3000" b="1" dirty="0">
+                <a:solidFill>
+                  <a:srgbClr val="01485C"/>
+                </a:solidFill>
+                <a:latin typeface="Calibri" pitchFamily="34" charset="0"/>
+                <a:ea typeface="Calibri" pitchFamily="34" charset="-122"/>
+                <a:cs typeface="Calibri" pitchFamily="34" charset="-120"/>
+              </a:rPr>
+              <a:t>What the report contains (1 of 2)</a:t>
+            </a:r>
+            <a:endParaRPr lang="en-US" sz="3000" dirty="0"/>
+          </a:p>
+        </p:txBody>
+      </p:sp>
+      <p:sp>
+        <p:nvSpPr>
+          <p:cNvPr id="3" name="Shape 1"/>
+          <p:cNvSpPr/>
+          <p:nvPr/>
+        </p:nvSpPr>
+        <p:spPr>
+          <a:xfrm>
+            <a:off x="9784080" y="384048"/>
+            <a:ext cx="1828800" cy="457200"/>
+          </a:xfrm>
+          <a:prstGeom prst="roundRect">
+            <a:avLst>
+              <a:gd name="adj" fmla="val 50000"/>
+            </a:avLst>
+          </a:prstGeom>
+          <a:solidFill>
+            <a:srgbClr val="01485C"/>
+          </a:solidFill>
+          <a:ln/>
+        </p:spPr>
+      </p:sp>
+      <p:sp>
+        <p:nvSpPr>
+          <p:cNvPr id="4" name="Text 2"/>
+          <p:cNvSpPr txBox="1"/>
+          <p:nvPr/>
+        </p:nvSpPr>
+        <p:spPr>
+          <a:xfrm>
+            <a:off x="9784080" y="384048"/>
+            <a:ext cx="1828800" cy="457200"/>
+          </a:xfrm>
+          <a:prstGeom prst="rect">
+            <a:avLst/>
+          </a:prstGeom>
+          <a:noFill/>
+          <a:ln/>
+        </p:spPr>
+        <p:txBody>
+          <a:bodyPr wrap="square" lIns="0" tIns="0" rIns="0" bIns="0" rtlCol="0" anchor="ctr"/>
+          <a:lstStyle/>
+          <a:p>
+            <a:pPr algn="ctr" indent="0" marL="0">
+              <a:buNone/>
+            </a:pPr>
+            <a:r>
+              <a:rPr lang="en-US" sz="1500" b="1" dirty="0">
+                <a:solidFill>
+                  <a:srgbClr val="FFFFFF"/>
+                </a:solidFill>
+                <a:latin typeface="Calibri" pitchFamily="34" charset="0"/>
+                <a:ea typeface="Calibri" pitchFamily="34" charset="-122"/>
+                <a:cs typeface="Calibri" pitchFamily="34" charset="-120"/>
+              </a:rPr>
+              <a:t>i-STAT</a:t>
+            </a:r>
+            <a:endParaRPr lang="en-US" sz="1500" dirty="0"/>
+          </a:p>
+        </p:txBody>
+      </p:sp>
+      <p:sp>
+        <p:nvSpPr>
+          <p:cNvPr id="5" name="Shape 3"/>
+          <p:cNvSpPr/>
+          <p:nvPr/>
+        </p:nvSpPr>
+        <p:spPr>
+          <a:xfrm>
+            <a:off x="548640" y="1325880"/>
+            <a:ext cx="420624" cy="420624"/>
+          </a:xfrm>
+          <a:prstGeom prst="ellipse">
+            <a:avLst/>
+          </a:prstGeom>
+          <a:solidFill>
+            <a:srgbClr val="01485C"/>
+          </a:solidFill>
+          <a:ln/>
+        </p:spPr>
+      </p:sp>
+      <p:sp>
+        <p:nvSpPr>
+          <p:cNvPr id="6" name="Text 4"/>
+          <p:cNvSpPr txBox="1"/>
+          <p:nvPr/>
+        </p:nvSpPr>
+        <p:spPr>
+          <a:xfrm>
+            <a:off x="548640" y="1325880"/>
+            <a:ext cx="420624" cy="420624"/>
+          </a:xfrm>
+          <a:prstGeom prst="rect">
+            <a:avLst/>
+          </a:prstGeom>
+          <a:noFill/>
+          <a:ln/>
+        </p:spPr>
+        <p:txBody>
+          <a:bodyPr wrap="square" lIns="0" tIns="0" rIns="0" bIns="0" rtlCol="0" anchor="ctr"/>
+          <a:lstStyle/>
+          <a:p>
+            <a:pPr algn="ctr" indent="0" marL="0">
+              <a:buNone/>
+            </a:pPr>
+            <a:r>
+              <a:rPr lang="en-US" sz="1500" b="1" dirty="0">
+                <a:solidFill>
+                  <a:srgbClr val="FFFFFF"/>
+                </a:solidFill>
+                <a:latin typeface="Calibri" pitchFamily="34" charset="0"/>
+                <a:ea typeface="Calibri" pitchFamily="34" charset="-122"/>
+                <a:cs typeface="Calibri" pitchFamily="34" charset="-120"/>
+              </a:rPr>
+              <a:t>1</a:t>
+            </a:r>
+            <a:endParaRPr lang="en-US" sz="1500" dirty="0"/>
+          </a:p>
+        </p:txBody>
+      </p:sp>
+      <p:sp>
+        <p:nvSpPr>
+          <p:cNvPr id="7" name="Text 5"/>
+          <p:cNvSpPr txBox="1"/>
+          <p:nvPr/>
+        </p:nvSpPr>
+        <p:spPr>
+          <a:xfrm>
+            <a:off x="1133856" y="1271016"/>
+            <a:ext cx="5029200" cy="859536"/>
+          </a:xfrm>
+          <a:prstGeom prst="rect">
+            <a:avLst/>
+          </a:prstGeom>
+          <a:noFill/>
+          <a:ln/>
+        </p:spPr>
+        <p:txBody>
+          <a:bodyPr wrap="square" lIns="0" tIns="0" rIns="0" bIns="0" rtlCol="0" anchor="t"/>
+          <a:lstStyle/>
+          <a:p>
+            <a:pPr indent="0" marL="0">
+              <a:buNone/>
+            </a:pPr>
+            <a:r>
+              <a:rPr lang="en-US" sz="1300" b="1" dirty="0">
+                <a:solidFill>
+                  <a:srgbClr val="01485C"/>
+                </a:solidFill>
+                <a:latin typeface="Calibri" pitchFamily="34" charset="0"/>
+                <a:ea typeface="Calibri" pitchFamily="34" charset="-122"/>
+                <a:cs typeface="Calibri" pitchFamily="34" charset="-120"/>
+              </a:rPr>
+              <a:t>Monthly Snapshot
+</a:t>
+            </a:r>
+            <a:pPr indent="0" marL="0">
+              <a:buNone/>
+            </a:pPr>
+            <a:r>
+              <a:rPr lang="en-US" sz="1100" dirty="0">
+                <a:solidFill>
+                  <a:srgbClr val="5F7178"/>
+                </a:solidFill>
+                <a:latin typeface="Calibri" pitchFamily="34" charset="0"/>
+                <a:ea typeface="Calibri" pitchFamily="34" charset="-122"/>
+                <a:cs typeface="Calibri" pitchFamily="34" charset="-120"/>
+              </a:rPr>
+              <a:t>The month in one block: overall rate, errors vs cartridges, top error, flagged staff.</a:t>
+            </a:r>
+            <a:endParaRPr lang="en-US" sz="1300" dirty="0"/>
+          </a:p>
+        </p:txBody>
+      </p:sp>
+      <p:sp>
+        <p:nvSpPr>
+          <p:cNvPr id="8" name="Shape 6"/>
+          <p:cNvSpPr/>
+          <p:nvPr/>
+        </p:nvSpPr>
+        <p:spPr>
+          <a:xfrm>
+            <a:off x="6400800" y="1280160"/>
+            <a:ext cx="5212080" cy="859536"/>
+          </a:xfrm>
+          <a:prstGeom prst="roundRect">
+            <a:avLst>
+              <a:gd name="adj" fmla="val 8511"/>
+            </a:avLst>
+          </a:prstGeom>
+          <a:solidFill>
+            <a:srgbClr val="FFFFFF"/>
+          </a:solidFill>
+          <a:ln w="15875">
+            <a:solidFill>
+              <a:srgbClr val="E2E8EA"/>
+            </a:solidFill>
+            <a:prstDash val="solid"/>
+          </a:ln>
+        </p:spPr>
+      </p:sp>
+      <p:sp>
+        <p:nvSpPr>
+          <p:cNvPr id="9" name="Text 7"/>
+          <p:cNvSpPr txBox="1"/>
+          <p:nvPr/>
+        </p:nvSpPr>
+        <p:spPr>
+          <a:xfrm>
+            <a:off x="6629400" y="1408176"/>
+            <a:ext cx="4754880" cy="630936"/>
+          </a:xfrm>
+          <a:prstGeom prst="rect">
+            <a:avLst/>
+          </a:prstGeom>
+          <a:noFill/>
+          <a:ln/>
+        </p:spPr>
+        <p:txBody>
+          <a:bodyPr wrap="square" lIns="0" tIns="0" rIns="0" bIns="0" rtlCol="0" anchor="t"/>
+          <a:lstStyle/>
+          <a:p>
+            <a:pPr indent="0" marL="0">
+              <a:buNone/>
+            </a:pPr>
+            <a:r>
+              <a:rPr lang="en-US" sz="1250" b="1" dirty="0">
+                <a:solidFill>
+                  <a:srgbClr val="2F5496"/>
+                </a:solidFill>
+                <a:latin typeface="Calibri" pitchFamily="34" charset="0"/>
+                <a:ea typeface="Calibri" pitchFamily="34" charset="-122"/>
+                <a:cs typeface="Calibri" pitchFamily="34" charset="-120"/>
+              </a:rPr>
+              <a:t>Error rate 4.5%</a:t>
+            </a:r>
+            <a:pPr indent="0" marL="0">
+              <a:buNone/>
+            </a:pPr>
+            <a:r>
+              <a:rPr lang="en-US" sz="1050" dirty="0">
+                <a:solidFill>
+                  <a:srgbClr val="17272E"/>
+                </a:solidFill>
+                <a:latin typeface="Calibri" pitchFamily="34" charset="0"/>
+                <a:ea typeface="Calibri" pitchFamily="34" charset="-122"/>
+                <a:cs typeface="Calibri" pitchFamily="34" charset="-120"/>
+              </a:rPr>
+              <a:t>   (12 errors / 266 cartridges)
+</a:t>
+            </a:r>
+            <a:pPr indent="0" marL="0">
+              <a:buNone/>
+            </a:pPr>
+            <a:r>
+              <a:rPr lang="en-US" sz="1050" dirty="0">
+                <a:solidFill>
+                  <a:srgbClr val="5F7178"/>
+                </a:solidFill>
+                <a:latin typeface="Calibri" pitchFamily="34" charset="0"/>
+                <a:ea typeface="Calibri" pitchFamily="34" charset="-122"/>
+                <a:cs typeface="Calibri" pitchFamily="34" charset="-120"/>
+              </a:rPr>
+              <a:t>Top error: P3 Cartridge Handling  ·  Staff flagged: 2</a:t>
+            </a:r>
+            <a:endParaRPr lang="en-US" sz="1250" dirty="0"/>
+          </a:p>
+        </p:txBody>
+      </p:sp>
+      <p:sp>
+        <p:nvSpPr>
+          <p:cNvPr id="10" name="Shape 8"/>
+          <p:cNvSpPr/>
+          <p:nvPr/>
+        </p:nvSpPr>
+        <p:spPr>
+          <a:xfrm>
+            <a:off x="548640" y="2295144"/>
+            <a:ext cx="420624" cy="420624"/>
+          </a:xfrm>
+          <a:prstGeom prst="ellipse">
+            <a:avLst/>
+          </a:prstGeom>
+          <a:solidFill>
+            <a:srgbClr val="01485C"/>
+          </a:solidFill>
+          <a:ln/>
+        </p:spPr>
+      </p:sp>
+      <p:sp>
+        <p:nvSpPr>
+          <p:cNvPr id="11" name="Text 9"/>
+          <p:cNvSpPr txBox="1"/>
+          <p:nvPr/>
+        </p:nvSpPr>
+        <p:spPr>
+          <a:xfrm>
+            <a:off x="548640" y="2295144"/>
+            <a:ext cx="420624" cy="420624"/>
+          </a:xfrm>
+          <a:prstGeom prst="rect">
+            <a:avLst/>
+          </a:prstGeom>
+          <a:noFill/>
+          <a:ln/>
+        </p:spPr>
+        <p:txBody>
+          <a:bodyPr wrap="square" lIns="0" tIns="0" rIns="0" bIns="0" rtlCol="0" anchor="ctr"/>
+          <a:lstStyle/>
+          <a:p>
+            <a:pPr algn="ctr" indent="0" marL="0">
+              <a:buNone/>
+            </a:pPr>
+            <a:r>
+              <a:rPr lang="en-US" sz="1500" b="1" dirty="0">
+                <a:solidFill>
+                  <a:srgbClr val="FFFFFF"/>
+                </a:solidFill>
+                <a:latin typeface="Calibri" pitchFamily="34" charset="0"/>
+                <a:ea typeface="Calibri" pitchFamily="34" charset="-122"/>
+                <a:cs typeface="Calibri" pitchFamily="34" charset="-120"/>
+              </a:rPr>
+              <a:t>2</a:t>
+            </a:r>
+            <a:endParaRPr lang="en-US" sz="1500" dirty="0"/>
+          </a:p>
+        </p:txBody>
+      </p:sp>
+      <p:sp>
+        <p:nvSpPr>
+          <p:cNvPr id="12" name="Text 10"/>
+          <p:cNvSpPr txBox="1"/>
+          <p:nvPr/>
+        </p:nvSpPr>
+        <p:spPr>
+          <a:xfrm>
+            <a:off x="1133856" y="2240280"/>
+            <a:ext cx="5029200" cy="859536"/>
+          </a:xfrm>
+          <a:prstGeom prst="rect">
+            <a:avLst/>
+          </a:prstGeom>
+          <a:noFill/>
+          <a:ln/>
+        </p:spPr>
+        <p:txBody>
+          <a:bodyPr wrap="square" lIns="0" tIns="0" rIns="0" bIns="0" rtlCol="0" anchor="t"/>
+          <a:lstStyle/>
+          <a:p>
+            <a:pPr indent="0" marL="0">
+              <a:buNone/>
+            </a:pPr>
+            <a:r>
+              <a:rPr lang="en-US" sz="1300" b="1" dirty="0">
+                <a:solidFill>
+                  <a:srgbClr val="01485C"/>
+                </a:solidFill>
+                <a:latin typeface="Calibri" pitchFamily="34" charset="0"/>
+                <a:ea typeface="Calibri" pitchFamily="34" charset="-122"/>
+                <a:cs typeface="Calibri" pitchFamily="34" charset="-120"/>
+              </a:rPr>
+              <a:t>Historical Performance
+</a:t>
+            </a:r>
+            <a:pPr indent="0" marL="0">
+              <a:buNone/>
+            </a:pPr>
+            <a:r>
+              <a:rPr lang="en-US" sz="1100" dirty="0">
+                <a:solidFill>
+                  <a:srgbClr val="5F7178"/>
+                </a:solidFill>
+                <a:latin typeface="Calibri" pitchFamily="34" charset="0"/>
+                <a:ea typeface="Calibri" pitchFamily="34" charset="-122"/>
+                <a:cs typeface="Calibri" pitchFamily="34" charset="-120"/>
+              </a:rPr>
+              <a:t>TWO charts per device: the error-rate trend over the colour bands, and the Cartridges Run &amp; Error Mix chart (next slide).</a:t>
+            </a:r>
+            <a:endParaRPr lang="en-US" sz="1300" dirty="0"/>
+          </a:p>
+        </p:txBody>
+      </p:sp>
+      <p:sp>
+        <p:nvSpPr>
+          <p:cNvPr id="13" name="Shape 11"/>
+          <p:cNvSpPr/>
+          <p:nvPr/>
+        </p:nvSpPr>
+        <p:spPr>
+          <a:xfrm>
+            <a:off x="6400800" y="2249424"/>
+            <a:ext cx="5212080" cy="859536"/>
+          </a:xfrm>
+          <a:prstGeom prst="roundRect">
+            <a:avLst>
+              <a:gd name="adj" fmla="val 8511"/>
+            </a:avLst>
+          </a:prstGeom>
+          <a:solidFill>
+            <a:srgbClr val="FFFFFF"/>
+          </a:solidFill>
+          <a:ln w="15875">
+            <a:solidFill>
+              <a:srgbClr val="E2E8EA"/>
+            </a:solidFill>
+            <a:prstDash val="solid"/>
+          </a:ln>
+        </p:spPr>
+      </p:sp>
+      <p:sp>
+        <p:nvSpPr>
+          <p:cNvPr id="14" name="Shape 12"/>
+          <p:cNvSpPr/>
+          <p:nvPr/>
+        </p:nvSpPr>
+        <p:spPr>
+          <a:xfrm>
+            <a:off x="6601968" y="2359152"/>
+            <a:ext cx="3840480" cy="155448"/>
+          </a:xfrm>
+          <a:prstGeom prst="rect">
+            <a:avLst/>
+          </a:prstGeom>
+          <a:solidFill>
+            <a:srgbClr val="C00000">
+              <a:alpha val="38000"/>
+            </a:srgbClr>
+          </a:solidFill>
+          <a:ln/>
+        </p:spPr>
+      </p:sp>
+      <p:sp>
+        <p:nvSpPr>
+          <p:cNvPr id="15" name="Shape 13"/>
+          <p:cNvSpPr/>
+          <p:nvPr/>
+        </p:nvSpPr>
+        <p:spPr>
+          <a:xfrm>
+            <a:off x="6601968" y="2514600"/>
+            <a:ext cx="3840480" cy="155448"/>
+          </a:xfrm>
+          <a:prstGeom prst="rect">
+            <a:avLst/>
+          </a:prstGeom>
+          <a:solidFill>
+            <a:srgbClr val="D96800">
+              <a:alpha val="38000"/>
+            </a:srgbClr>
+          </a:solidFill>
+          <a:ln/>
+        </p:spPr>
+      </p:sp>
+      <p:sp>
+        <p:nvSpPr>
+          <p:cNvPr id="16" name="Shape 14"/>
+          <p:cNvSpPr/>
+          <p:nvPr/>
+        </p:nvSpPr>
+        <p:spPr>
+          <a:xfrm>
+            <a:off x="6601968" y="2670048"/>
+            <a:ext cx="3840480" cy="155448"/>
+          </a:xfrm>
+          <a:prstGeom prst="rect">
+            <a:avLst/>
+          </a:prstGeom>
+          <a:solidFill>
+            <a:srgbClr val="2F5496">
+              <a:alpha val="38000"/>
+            </a:srgbClr>
+          </a:solidFill>
+          <a:ln/>
+        </p:spPr>
+      </p:sp>
+      <p:sp>
+        <p:nvSpPr>
+          <p:cNvPr id="17" name="Shape 15"/>
+          <p:cNvSpPr/>
+          <p:nvPr/>
+        </p:nvSpPr>
+        <p:spPr>
+          <a:xfrm>
+            <a:off x="6601968" y="2825496"/>
+            <a:ext cx="3840480" cy="155448"/>
+          </a:xfrm>
+          <a:prstGeom prst="rect">
+            <a:avLst/>
+          </a:prstGeom>
+          <a:solidFill>
+            <a:srgbClr val="538135">
+              <a:alpha val="38000"/>
+            </a:srgbClr>
+          </a:solidFill>
+          <a:ln/>
+        </p:spPr>
+      </p:sp>
+      <p:sp>
+        <p:nvSpPr>
+          <p:cNvPr id="18" name="Shape 16"/>
+          <p:cNvSpPr/>
+          <p:nvPr/>
+        </p:nvSpPr>
+        <p:spPr>
+          <a:xfrm>
+            <a:off x="7059168" y="2468880"/>
+            <a:ext cx="118872" cy="118872"/>
+          </a:xfrm>
+          <a:prstGeom prst="ellipse">
+            <a:avLst/>
+          </a:prstGeom>
+          <a:solidFill>
+            <a:srgbClr val="01485C"/>
+          </a:solidFill>
+          <a:ln w="12700">
+            <a:solidFill>
+              <a:srgbClr val="FFFFFF"/>
+            </a:solidFill>
+            <a:prstDash val="solid"/>
+          </a:ln>
+        </p:spPr>
+      </p:sp>
+      <p:sp>
+        <p:nvSpPr>
+          <p:cNvPr id="19" name="Shape 17"/>
+          <p:cNvSpPr/>
+          <p:nvPr/>
+        </p:nvSpPr>
+        <p:spPr>
+          <a:xfrm>
+            <a:off x="7790688" y="2578608"/>
+            <a:ext cx="118872" cy="118872"/>
+          </a:xfrm>
+          <a:prstGeom prst="ellipse">
+            <a:avLst/>
+          </a:prstGeom>
+          <a:solidFill>
+            <a:srgbClr val="01485C"/>
+          </a:solidFill>
+          <a:ln w="12700">
+            <a:solidFill>
+              <a:srgbClr val="FFFFFF"/>
+            </a:solidFill>
+            <a:prstDash val="solid"/>
+          </a:ln>
+        </p:spPr>
+      </p:sp>
+      <p:sp>
+        <p:nvSpPr>
+          <p:cNvPr id="20" name="Shape 18"/>
+          <p:cNvSpPr/>
+          <p:nvPr/>
+        </p:nvSpPr>
+        <p:spPr>
+          <a:xfrm>
+            <a:off x="8522208" y="2542032"/>
+            <a:ext cx="118872" cy="118872"/>
+          </a:xfrm>
+          <a:prstGeom prst="ellipse">
+            <a:avLst/>
+          </a:prstGeom>
+          <a:solidFill>
+            <a:srgbClr val="01485C"/>
+          </a:solidFill>
+          <a:ln w="12700">
+            <a:solidFill>
+              <a:srgbClr val="FFFFFF"/>
+            </a:solidFill>
+            <a:prstDash val="solid"/>
+          </a:ln>
+        </p:spPr>
+      </p:sp>
+      <p:sp>
+        <p:nvSpPr>
+          <p:cNvPr id="21" name="Shape 19"/>
+          <p:cNvSpPr/>
+          <p:nvPr/>
+        </p:nvSpPr>
+        <p:spPr>
+          <a:xfrm>
+            <a:off x="9253728" y="2724912"/>
+            <a:ext cx="118872" cy="118872"/>
+          </a:xfrm>
+          <a:prstGeom prst="ellipse">
+            <a:avLst/>
+          </a:prstGeom>
+          <a:solidFill>
+            <a:srgbClr val="01485C"/>
+          </a:solidFill>
+          <a:ln w="12700">
+            <a:solidFill>
+              <a:srgbClr val="FFFFFF"/>
+            </a:solidFill>
+            <a:prstDash val="solid"/>
+          </a:ln>
+        </p:spPr>
+      </p:sp>
+      <p:sp>
+        <p:nvSpPr>
+          <p:cNvPr id="22" name="Shape 20"/>
+          <p:cNvSpPr/>
+          <p:nvPr/>
+        </p:nvSpPr>
+        <p:spPr>
+          <a:xfrm>
+            <a:off x="9985248" y="2825496"/>
+            <a:ext cx="118872" cy="118872"/>
+          </a:xfrm>
+          <a:prstGeom prst="ellipse">
+            <a:avLst/>
+          </a:prstGeom>
+          <a:solidFill>
+            <a:srgbClr val="01485C"/>
+          </a:solidFill>
+          <a:ln w="12700">
+            <a:solidFill>
+              <a:srgbClr val="FFFFFF"/>
+            </a:solidFill>
+            <a:prstDash val="solid"/>
+          </a:ln>
+        </p:spPr>
+      </p:sp>
+      <p:sp>
+        <p:nvSpPr>
+          <p:cNvPr id="23" name="Text 21"/>
+          <p:cNvSpPr txBox="1"/>
+          <p:nvPr/>
+        </p:nvSpPr>
+        <p:spPr>
+          <a:xfrm>
+            <a:off x="10469880" y="2542032"/>
+            <a:ext cx="1005840" cy="274320"/>
+          </a:xfrm>
+          <a:prstGeom prst="rect">
+            <a:avLst/>
+          </a:prstGeom>
+          <a:noFill/>
+          <a:ln/>
+        </p:spPr>
+        <p:txBody>
+          <a:bodyPr wrap="square" lIns="0" tIns="0" rIns="0" bIns="0" rtlCol="0" anchor="ctr"/>
+          <a:lstStyle/>
+          <a:p>
+            <a:pPr indent="0" marL="0">
+              <a:buNone/>
+            </a:pPr>
+            <a:r>
+              <a:rPr lang="en-US" sz="950" i="1" dirty="0">
+                <a:solidFill>
+                  <a:srgbClr val="538135"/>
+                </a:solidFill>
+                <a:latin typeface="Calibri" pitchFamily="34" charset="0"/>
+                <a:ea typeface="Calibri" pitchFamily="34" charset="-122"/>
+                <a:cs typeface="Calibri" pitchFamily="34" charset="-120"/>
+              </a:rPr>
+              <a:t>improving ↓</a:t>
+            </a:r>
+            <a:endParaRPr lang="en-US" sz="950" dirty="0"/>
+          </a:p>
+        </p:txBody>
+      </p:sp>
+      <p:sp>
+        <p:nvSpPr>
+          <p:cNvPr id="24" name="Shape 22"/>
+          <p:cNvSpPr/>
+          <p:nvPr/>
+        </p:nvSpPr>
+        <p:spPr>
+          <a:xfrm>
+            <a:off x="548640" y="3264408"/>
+            <a:ext cx="420624" cy="420624"/>
+          </a:xfrm>
+          <a:prstGeom prst="ellipse">
+            <a:avLst/>
+          </a:prstGeom>
+          <a:solidFill>
+            <a:srgbClr val="01485C"/>
+          </a:solidFill>
+          <a:ln/>
+        </p:spPr>
+      </p:sp>
+      <p:sp>
+        <p:nvSpPr>
+          <p:cNvPr id="25" name="Text 23"/>
+          <p:cNvSpPr txBox="1"/>
+          <p:nvPr/>
+        </p:nvSpPr>
+        <p:spPr>
+          <a:xfrm>
+            <a:off x="548640" y="3264408"/>
+            <a:ext cx="420624" cy="420624"/>
+          </a:xfrm>
+          <a:prstGeom prst="rect">
+            <a:avLst/>
+          </a:prstGeom>
+          <a:noFill/>
+          <a:ln/>
+        </p:spPr>
+        <p:txBody>
+          <a:bodyPr wrap="square" lIns="0" tIns="0" rIns="0" bIns="0" rtlCol="0" anchor="ctr"/>
+          <a:lstStyle/>
+          <a:p>
+            <a:pPr algn="ctr" indent="0" marL="0">
+              <a:buNone/>
+            </a:pPr>
+            <a:r>
+              <a:rPr lang="en-US" sz="1500" b="1" dirty="0">
+                <a:solidFill>
+                  <a:srgbClr val="FFFFFF"/>
+                </a:solidFill>
+                <a:latin typeface="Calibri" pitchFamily="34" charset="0"/>
+                <a:ea typeface="Calibri" pitchFamily="34" charset="-122"/>
+                <a:cs typeface="Calibri" pitchFamily="34" charset="-120"/>
+              </a:rPr>
+              <a:t>3</a:t>
+            </a:r>
+            <a:endParaRPr lang="en-US" sz="1500" dirty="0"/>
+          </a:p>
+        </p:txBody>
+      </p:sp>
+      <p:sp>
+        <p:nvSpPr>
+          <p:cNvPr id="26" name="Text 24"/>
+          <p:cNvSpPr txBox="1"/>
+          <p:nvPr/>
+        </p:nvSpPr>
+        <p:spPr>
+          <a:xfrm>
+            <a:off x="1133856" y="3209544"/>
+            <a:ext cx="5029200" cy="859536"/>
+          </a:xfrm>
+          <a:prstGeom prst="rect">
+            <a:avLst/>
+          </a:prstGeom>
+          <a:noFill/>
+          <a:ln/>
+        </p:spPr>
+        <p:txBody>
+          <a:bodyPr wrap="square" lIns="0" tIns="0" rIns="0" bIns="0" rtlCol="0" anchor="t"/>
+          <a:lstStyle/>
+          <a:p>
+            <a:pPr indent="0" marL="0">
+              <a:buNone/>
+            </a:pPr>
+            <a:r>
+              <a:rPr lang="en-US" sz="1300" b="1" dirty="0">
+                <a:solidFill>
+                  <a:srgbClr val="01485C"/>
+                </a:solidFill>
+                <a:latin typeface="Calibri" pitchFamily="34" charset="0"/>
+                <a:ea typeface="Calibri" pitchFamily="34" charset="-122"/>
+                <a:cs typeface="Calibri" pitchFamily="34" charset="-120"/>
+              </a:rPr>
+              <a:t>Performance Summary
+</a:t>
+            </a:r>
+            <a:pPr indent="0" marL="0">
+              <a:buNone/>
+            </a:pPr>
+            <a:r>
+              <a:rPr lang="en-US" sz="1100" dirty="0">
+                <a:solidFill>
+                  <a:srgbClr val="5F7178"/>
+                </a:solidFill>
+                <a:latin typeface="Calibri" pitchFamily="34" charset="0"/>
+                <a:ea typeface="Calibri" pitchFamily="34" charset="-122"/>
+                <a:cs typeface="Calibri" pitchFamily="34" charset="-120"/>
+              </a:rPr>
+              <a:t>Device-by-device: cartridges, errors and rate, banded Champions → Needs attention.</a:t>
+            </a:r>
+            <a:endParaRPr lang="en-US" sz="1300" dirty="0"/>
+          </a:p>
+        </p:txBody>
+      </p:sp>
+      <p:sp>
+        <p:nvSpPr>
+          <p:cNvPr id="27" name="Shape 25"/>
+          <p:cNvSpPr/>
+          <p:nvPr/>
+        </p:nvSpPr>
+        <p:spPr>
+          <a:xfrm>
+            <a:off x="6400800" y="3218688"/>
+            <a:ext cx="5212080" cy="859536"/>
+          </a:xfrm>
+          <a:prstGeom prst="roundRect">
+            <a:avLst>
+              <a:gd name="adj" fmla="val 8511"/>
+            </a:avLst>
+          </a:prstGeom>
+          <a:solidFill>
+            <a:srgbClr val="FFFFFF"/>
+          </a:solidFill>
+          <a:ln w="15875">
+            <a:solidFill>
+              <a:srgbClr val="E2E8EA"/>
+            </a:solidFill>
+            <a:prstDash val="solid"/>
+          </a:ln>
+        </p:spPr>
+      </p:sp>
+      <p:sp>
+        <p:nvSpPr>
+          <p:cNvPr id="28" name="Text 26"/>
+          <p:cNvSpPr txBox="1"/>
+          <p:nvPr/>
+        </p:nvSpPr>
+        <p:spPr>
+          <a:xfrm>
+            <a:off x="6629400" y="3310128"/>
+            <a:ext cx="3291840" cy="274320"/>
+          </a:xfrm>
+          <a:prstGeom prst="rect">
+            <a:avLst/>
+          </a:prstGeom>
+          <a:noFill/>
+          <a:ln/>
+        </p:spPr>
+        <p:txBody>
+          <a:bodyPr wrap="square" lIns="0" tIns="0" rIns="0" bIns="0" rtlCol="0" anchor="ctr"/>
+          <a:lstStyle/>
+          <a:p>
+            <a:pPr indent="0" marL="0">
+              <a:buNone/>
+            </a:pPr>
+            <a:r>
+              <a:rPr lang="en-US" sz="1050" dirty="0">
+                <a:solidFill>
+                  <a:srgbClr val="17272E"/>
+                </a:solidFill>
+                <a:latin typeface="Calibri" pitchFamily="34" charset="0"/>
+                <a:ea typeface="Calibri" pitchFamily="34" charset="-122"/>
+                <a:cs typeface="Calibri" pitchFamily="34" charset="-120"/>
+              </a:rPr>
+              <a:t>i-STAT 1;9001    80 carts    4 errors</a:t>
+            </a:r>
+            <a:endParaRPr lang="en-US" sz="1050" dirty="0"/>
+          </a:p>
+        </p:txBody>
+      </p:sp>
+      <p:sp>
+        <p:nvSpPr>
+          <p:cNvPr id="29" name="Shape 27"/>
+          <p:cNvSpPr/>
+          <p:nvPr/>
+        </p:nvSpPr>
+        <p:spPr>
+          <a:xfrm>
+            <a:off x="10195560" y="3310128"/>
+            <a:ext cx="960120" cy="274320"/>
+          </a:xfrm>
+          <a:prstGeom prst="roundRect">
+            <a:avLst>
+              <a:gd name="adj" fmla="val 26667"/>
+            </a:avLst>
+          </a:prstGeom>
+          <a:solidFill>
+            <a:srgbClr val="2F5496"/>
+          </a:solidFill>
+          <a:ln/>
+        </p:spPr>
+      </p:sp>
+      <p:sp>
+        <p:nvSpPr>
+          <p:cNvPr id="30" name="Text 28"/>
+          <p:cNvSpPr txBox="1"/>
+          <p:nvPr/>
+        </p:nvSpPr>
+        <p:spPr>
+          <a:xfrm>
+            <a:off x="10195560" y="3310128"/>
+            <a:ext cx="960120" cy="274320"/>
+          </a:xfrm>
+          <a:prstGeom prst="rect">
+            <a:avLst/>
+          </a:prstGeom>
+          <a:noFill/>
+          <a:ln/>
+        </p:spPr>
+        <p:txBody>
+          <a:bodyPr wrap="square" lIns="0" tIns="0" rIns="0" bIns="0" rtlCol="0" anchor="ctr"/>
+          <a:lstStyle/>
+          <a:p>
+            <a:pPr algn="ctr" indent="0" marL="0">
+              <a:buNone/>
+            </a:pPr>
+            <a:r>
+              <a:rPr lang="en-US" sz="1000" b="1" dirty="0">
+                <a:solidFill>
+                  <a:srgbClr val="FFFFFF"/>
+                </a:solidFill>
+                <a:latin typeface="Calibri" pitchFamily="34" charset="0"/>
+                <a:ea typeface="Calibri" pitchFamily="34" charset="-122"/>
+                <a:cs typeface="Calibri" pitchFamily="34" charset="-120"/>
+              </a:rPr>
+              <a:t>5.0% Excellent</a:t>
+            </a:r>
+            <a:endParaRPr lang="en-US" sz="1000" dirty="0"/>
+          </a:p>
+        </p:txBody>
+      </p:sp>
+      <p:sp>
+        <p:nvSpPr>
+          <p:cNvPr id="31" name="Text 29"/>
+          <p:cNvSpPr txBox="1"/>
+          <p:nvPr/>
+        </p:nvSpPr>
+        <p:spPr>
+          <a:xfrm>
+            <a:off x="6629400" y="3675888"/>
+            <a:ext cx="3291840" cy="274320"/>
+          </a:xfrm>
+          <a:prstGeom prst="rect">
+            <a:avLst/>
+          </a:prstGeom>
+          <a:noFill/>
+          <a:ln/>
+        </p:spPr>
+        <p:txBody>
+          <a:bodyPr wrap="square" lIns="0" tIns="0" rIns="0" bIns="0" rtlCol="0" anchor="ctr"/>
+          <a:lstStyle/>
+          <a:p>
+            <a:pPr indent="0" marL="0">
+              <a:buNone/>
+            </a:pPr>
+            <a:r>
+              <a:rPr lang="en-US" sz="1050" dirty="0">
+                <a:solidFill>
+                  <a:srgbClr val="17272E"/>
+                </a:solidFill>
+                <a:latin typeface="Calibri" pitchFamily="34" charset="0"/>
+                <a:ea typeface="Calibri" pitchFamily="34" charset="-122"/>
+                <a:cs typeface="Calibri" pitchFamily="34" charset="-120"/>
+              </a:rPr>
+              <a:t>i-STAT 1;9002    74 carts    5 errors</a:t>
+            </a:r>
+            <a:endParaRPr lang="en-US" sz="1050" dirty="0"/>
+          </a:p>
+        </p:txBody>
+      </p:sp>
+      <p:sp>
+        <p:nvSpPr>
+          <p:cNvPr id="32" name="Shape 30"/>
+          <p:cNvSpPr/>
+          <p:nvPr/>
+        </p:nvSpPr>
+        <p:spPr>
+          <a:xfrm>
+            <a:off x="10195560" y="3675888"/>
+            <a:ext cx="960120" cy="274320"/>
+          </a:xfrm>
+          <a:prstGeom prst="roundRect">
+            <a:avLst>
+              <a:gd name="adj" fmla="val 26667"/>
+            </a:avLst>
+          </a:prstGeom>
+          <a:solidFill>
+            <a:srgbClr val="D96800"/>
+          </a:solidFill>
+          <a:ln/>
+        </p:spPr>
+      </p:sp>
+      <p:sp>
+        <p:nvSpPr>
+          <p:cNvPr id="33" name="Text 31"/>
+          <p:cNvSpPr txBox="1"/>
+          <p:nvPr/>
+        </p:nvSpPr>
+        <p:spPr>
+          <a:xfrm>
+            <a:off x="10195560" y="3675888"/>
+            <a:ext cx="960120" cy="274320"/>
+          </a:xfrm>
+          <a:prstGeom prst="rect">
+            <a:avLst/>
+          </a:prstGeom>
+          <a:noFill/>
+          <a:ln/>
+        </p:spPr>
+        <p:txBody>
+          <a:bodyPr wrap="square" lIns="0" tIns="0" rIns="0" bIns="0" rtlCol="0" anchor="ctr"/>
+          <a:lstStyle/>
+          <a:p>
+            <a:pPr algn="ctr" indent="0" marL="0">
+              <a:buNone/>
+            </a:pPr>
+            <a:r>
+              <a:rPr lang="en-US" sz="1000" b="1" dirty="0">
+                <a:solidFill>
+                  <a:srgbClr val="FFFFFF"/>
+                </a:solidFill>
+                <a:latin typeface="Calibri" pitchFamily="34" charset="0"/>
+                <a:ea typeface="Calibri" pitchFamily="34" charset="-122"/>
+                <a:cs typeface="Calibri" pitchFamily="34" charset="-120"/>
+              </a:rPr>
+              <a:t>6.8% Accept.</a:t>
+            </a:r>
+            <a:endParaRPr lang="en-US" sz="1000" dirty="0"/>
+          </a:p>
+        </p:txBody>
+      </p:sp>
+      <p:sp>
+        <p:nvSpPr>
+          <p:cNvPr id="34" name="Shape 32"/>
+          <p:cNvSpPr/>
+          <p:nvPr/>
+        </p:nvSpPr>
+        <p:spPr>
+          <a:xfrm>
+            <a:off x="548640" y="4233672"/>
+            <a:ext cx="420624" cy="420624"/>
+          </a:xfrm>
+          <a:prstGeom prst="ellipse">
+            <a:avLst/>
+          </a:prstGeom>
+          <a:solidFill>
+            <a:srgbClr val="01485C"/>
+          </a:solidFill>
+          <a:ln/>
+        </p:spPr>
+      </p:sp>
+      <p:sp>
+        <p:nvSpPr>
+          <p:cNvPr id="35" name="Text 33"/>
+          <p:cNvSpPr txBox="1"/>
+          <p:nvPr/>
+        </p:nvSpPr>
+        <p:spPr>
+          <a:xfrm>
+            <a:off x="548640" y="4233672"/>
+            <a:ext cx="420624" cy="420624"/>
+          </a:xfrm>
+          <a:prstGeom prst="rect">
+            <a:avLst/>
+          </a:prstGeom>
+          <a:noFill/>
+          <a:ln/>
+        </p:spPr>
+        <p:txBody>
+          <a:bodyPr wrap="square" lIns="0" tIns="0" rIns="0" bIns="0" rtlCol="0" anchor="ctr"/>
+          <a:lstStyle/>
+          <a:p>
+            <a:pPr algn="ctr" indent="0" marL="0">
+              <a:buNone/>
+            </a:pPr>
+            <a:r>
+              <a:rPr lang="en-US" sz="1500" b="1" dirty="0">
+                <a:solidFill>
+                  <a:srgbClr val="FFFFFF"/>
+                </a:solidFill>
+                <a:latin typeface="Calibri" pitchFamily="34" charset="0"/>
+                <a:ea typeface="Calibri" pitchFamily="34" charset="-122"/>
+                <a:cs typeface="Calibri" pitchFamily="34" charset="-120"/>
+              </a:rPr>
+              <a:t>4</a:t>
+            </a:r>
+            <a:endParaRPr lang="en-US" sz="1500" dirty="0"/>
+          </a:p>
+        </p:txBody>
+      </p:sp>
+      <p:sp>
+        <p:nvSpPr>
+          <p:cNvPr id="36" name="Text 34"/>
+          <p:cNvSpPr txBox="1"/>
+          <p:nvPr/>
+        </p:nvSpPr>
+        <p:spPr>
+          <a:xfrm>
+            <a:off x="1133856" y="4178808"/>
+            <a:ext cx="5029200" cy="859536"/>
+          </a:xfrm>
+          <a:prstGeom prst="rect">
+            <a:avLst/>
+          </a:prstGeom>
+          <a:noFill/>
+          <a:ln/>
+        </p:spPr>
+        <p:txBody>
+          <a:bodyPr wrap="square" lIns="0" tIns="0" rIns="0" bIns="0" rtlCol="0" anchor="t"/>
+          <a:lstStyle/>
+          <a:p>
+            <a:pPr indent="0" marL="0">
+              <a:buNone/>
+            </a:pPr>
+            <a:r>
+              <a:rPr lang="en-US" sz="1300" b="1" dirty="0">
+                <a:solidFill>
+                  <a:srgbClr val="01485C"/>
+                </a:solidFill>
+                <a:latin typeface="Calibri" pitchFamily="34" charset="0"/>
+                <a:ea typeface="Calibri" pitchFamily="34" charset="-122"/>
+                <a:cs typeface="Calibri" pitchFamily="34" charset="-120"/>
+              </a:rPr>
+              <a:t>Simulators Run
+</a:t>
+            </a:r>
+            <a:pPr indent="0" marL="0">
+              <a:buNone/>
+            </a:pPr>
+            <a:r>
+              <a:rPr lang="en-US" sz="1100" dirty="0">
+                <a:solidFill>
+                  <a:srgbClr val="5F7178"/>
+                </a:solidFill>
+                <a:latin typeface="Calibri" pitchFamily="34" charset="0"/>
+                <a:ea typeface="Calibri" pitchFamily="34" charset="-122"/>
+                <a:cs typeface="Calibri" pitchFamily="34" charset="-120"/>
+              </a:rPr>
+              <a:t>Electronic QC (simulator) checks recorded on each device during the month.</a:t>
+            </a:r>
+            <a:endParaRPr lang="en-US" sz="1300" dirty="0"/>
+          </a:p>
+        </p:txBody>
+      </p:sp>
+      <p:sp>
+        <p:nvSpPr>
+          <p:cNvPr id="37" name="Shape 35"/>
+          <p:cNvSpPr/>
+          <p:nvPr/>
+        </p:nvSpPr>
+        <p:spPr>
+          <a:xfrm>
+            <a:off x="6400800" y="4187952"/>
+            <a:ext cx="5212080" cy="859536"/>
+          </a:xfrm>
+          <a:prstGeom prst="roundRect">
+            <a:avLst>
+              <a:gd name="adj" fmla="val 8511"/>
+            </a:avLst>
+          </a:prstGeom>
+          <a:solidFill>
+            <a:srgbClr val="FFFFFF"/>
+          </a:solidFill>
+          <a:ln w="15875">
+            <a:solidFill>
+              <a:srgbClr val="E2E8EA"/>
+            </a:solidFill>
+            <a:prstDash val="solid"/>
+          </a:ln>
+        </p:spPr>
+      </p:sp>
+      <p:sp>
+        <p:nvSpPr>
+          <p:cNvPr id="38" name="Text 36"/>
+          <p:cNvSpPr txBox="1"/>
+          <p:nvPr/>
+        </p:nvSpPr>
+        <p:spPr>
+          <a:xfrm>
+            <a:off x="6629400" y="4187952"/>
+            <a:ext cx="4754880" cy="859536"/>
+          </a:xfrm>
+          <a:prstGeom prst="rect">
+            <a:avLst/>
+          </a:prstGeom>
+          <a:noFill/>
+          <a:ln/>
+        </p:spPr>
+        <p:txBody>
+          <a:bodyPr wrap="square" lIns="0" tIns="0" rIns="0" bIns="0" rtlCol="0" anchor="ctr"/>
+          <a:lstStyle/>
+          <a:p>
+            <a:pPr indent="0" marL="0">
+              <a:buNone/>
+            </a:pPr>
+            <a:r>
+              <a:rPr lang="en-US" sz="1100" b="1" dirty="0">
+                <a:solidFill>
+                  <a:srgbClr val="01485C"/>
+                </a:solidFill>
+                <a:latin typeface="Calibri" pitchFamily="34" charset="0"/>
+                <a:ea typeface="Calibri" pitchFamily="34" charset="-122"/>
+                <a:cs typeface="Calibri" pitchFamily="34" charset="-120"/>
+              </a:rPr>
+              <a:t>EQC checks:   </a:t>
+            </a:r>
+            <a:pPr indent="0" marL="0">
+              <a:buNone/>
+            </a:pPr>
+            <a:r>
+              <a:rPr lang="en-US" sz="1100" dirty="0">
+                <a:solidFill>
+                  <a:srgbClr val="17272E"/>
+                </a:solidFill>
+                <a:latin typeface="Calibri" pitchFamily="34" charset="0"/>
+                <a:ea typeface="Calibri" pitchFamily="34" charset="-122"/>
+                <a:cs typeface="Calibri" pitchFamily="34" charset="-120"/>
+              </a:rPr>
+              <a:t>9001 — 8 ✓      9002 — 6 ✓      9003 — 7 ✓</a:t>
+            </a:r>
+            <a:endParaRPr lang="en-US" sz="1100" dirty="0"/>
+          </a:p>
+        </p:txBody>
+      </p:sp>
+      <p:sp>
+        <p:nvSpPr>
+          <p:cNvPr id="39" name="Shape 37"/>
+          <p:cNvSpPr/>
+          <p:nvPr/>
+        </p:nvSpPr>
+        <p:spPr>
+          <a:xfrm>
+            <a:off x="548640" y="5202936"/>
+            <a:ext cx="420624" cy="420624"/>
+          </a:xfrm>
+          <a:prstGeom prst="ellipse">
+            <a:avLst/>
+          </a:prstGeom>
+          <a:solidFill>
+            <a:srgbClr val="01485C"/>
+          </a:solidFill>
+          <a:ln/>
+        </p:spPr>
+      </p:sp>
+      <p:sp>
+        <p:nvSpPr>
+          <p:cNvPr id="40" name="Text 38"/>
+          <p:cNvSpPr txBox="1"/>
+          <p:nvPr/>
+        </p:nvSpPr>
+        <p:spPr>
+          <a:xfrm>
+            <a:off x="548640" y="5202936"/>
+            <a:ext cx="420624" cy="420624"/>
+          </a:xfrm>
+          <a:prstGeom prst="rect">
+            <a:avLst/>
+          </a:prstGeom>
+          <a:noFill/>
+          <a:ln/>
+        </p:spPr>
+        <p:txBody>
+          <a:bodyPr wrap="square" lIns="0" tIns="0" rIns="0" bIns="0" rtlCol="0" anchor="ctr"/>
+          <a:lstStyle/>
+          <a:p>
+            <a:pPr algn="ctr" indent="0" marL="0">
+              <a:buNone/>
+            </a:pPr>
+            <a:r>
+              <a:rPr lang="en-US" sz="1500" b="1" dirty="0">
+                <a:solidFill>
+                  <a:srgbClr val="FFFFFF"/>
+                </a:solidFill>
+                <a:latin typeface="Calibri" pitchFamily="34" charset="0"/>
+                <a:ea typeface="Calibri" pitchFamily="34" charset="-122"/>
+                <a:cs typeface="Calibri" pitchFamily="34" charset="-120"/>
+              </a:rPr>
+              <a:t>5</a:t>
+            </a:r>
+            <a:endParaRPr lang="en-US" sz="1500" dirty="0"/>
+          </a:p>
+        </p:txBody>
+      </p:sp>
+      <p:sp>
+        <p:nvSpPr>
+          <p:cNvPr id="41" name="Text 39"/>
+          <p:cNvSpPr txBox="1"/>
+          <p:nvPr/>
+        </p:nvSpPr>
+        <p:spPr>
+          <a:xfrm>
+            <a:off x="1133856" y="5148072"/>
+            <a:ext cx="5029200" cy="859536"/>
+          </a:xfrm>
+          <a:prstGeom prst="rect">
+            <a:avLst/>
+          </a:prstGeom>
+          <a:noFill/>
+          <a:ln/>
+        </p:spPr>
+        <p:txBody>
+          <a:bodyPr wrap="square" lIns="0" tIns="0" rIns="0" bIns="0" rtlCol="0" anchor="t"/>
+          <a:lstStyle/>
+          <a:p>
+            <a:pPr indent="0" marL="0">
+              <a:buNone/>
+            </a:pPr>
+            <a:r>
+              <a:rPr lang="en-US" sz="1300" b="1" dirty="0">
+                <a:solidFill>
+                  <a:srgbClr val="01485C"/>
+                </a:solidFill>
+                <a:latin typeface="Calibri" pitchFamily="34" charset="0"/>
+                <a:ea typeface="Calibri" pitchFamily="34" charset="-122"/>
+                <a:cs typeface="Calibri" pitchFamily="34" charset="-120"/>
+              </a:rPr>
+              <a:t>Monthly Ceramic Cleaning
+</a:t>
+            </a:r>
+            <a:pPr indent="0" marL="0">
+              <a:buNone/>
+            </a:pPr>
+            <a:r>
+              <a:rPr lang="en-US" sz="1100" dirty="0">
+                <a:solidFill>
+                  <a:srgbClr val="5F7178"/>
+                </a:solidFill>
+                <a:latin typeface="Calibri" pitchFamily="34" charset="0"/>
+                <a:ea typeface="Calibri" pitchFamily="34" charset="-122"/>
+                <a:cs typeface="Calibri" pitchFamily="34" charset="-120"/>
+              </a:rPr>
+              <a:t>Each analyser listed with its cleaning-cartridge count. Every i-STAT needs 3 per month; any shortfall fails the department.</a:t>
+            </a:r>
+            <a:endParaRPr lang="en-US" sz="1300" dirty="0"/>
+          </a:p>
+        </p:txBody>
+      </p:sp>
+      <p:sp>
+        <p:nvSpPr>
+          <p:cNvPr id="42" name="Shape 40"/>
+          <p:cNvSpPr/>
+          <p:nvPr/>
+        </p:nvSpPr>
+        <p:spPr>
+          <a:xfrm>
+            <a:off x="6400800" y="5157216"/>
+            <a:ext cx="5212080" cy="859536"/>
+          </a:xfrm>
+          <a:prstGeom prst="roundRect">
+            <a:avLst>
+              <a:gd name="adj" fmla="val 8511"/>
+            </a:avLst>
+          </a:prstGeom>
+          <a:solidFill>
+            <a:srgbClr val="FFFFFF"/>
+          </a:solidFill>
+          <a:ln w="15875">
+            <a:solidFill>
+              <a:srgbClr val="E2E8EA"/>
+            </a:solidFill>
+            <a:prstDash val="solid"/>
+          </a:ln>
+        </p:spPr>
+      </p:sp>
+      <p:sp>
+        <p:nvSpPr>
+          <p:cNvPr id="43" name="Shape 41"/>
+          <p:cNvSpPr/>
+          <p:nvPr/>
+        </p:nvSpPr>
+        <p:spPr>
+          <a:xfrm>
+            <a:off x="6629400" y="5404104"/>
+            <a:ext cx="1554480" cy="365760"/>
+          </a:xfrm>
+          <a:prstGeom prst="roundRect">
+            <a:avLst>
+              <a:gd name="adj" fmla="val 25000"/>
+            </a:avLst>
+          </a:prstGeom>
+          <a:solidFill>
+            <a:srgbClr val="538135"/>
+          </a:solidFill>
+          <a:ln/>
+        </p:spPr>
+      </p:sp>
+      <p:sp>
+        <p:nvSpPr>
+          <p:cNvPr id="44" name="Text 42"/>
+          <p:cNvSpPr txBox="1"/>
+          <p:nvPr/>
+        </p:nvSpPr>
+        <p:spPr>
+          <a:xfrm>
+            <a:off x="6629400" y="5404104"/>
+            <a:ext cx="1554480" cy="365760"/>
+          </a:xfrm>
+          <a:prstGeom prst="rect">
+            <a:avLst/>
+          </a:prstGeom>
+          <a:noFill/>
+          <a:ln/>
+        </p:spPr>
+        <p:txBody>
+          <a:bodyPr wrap="square" lIns="0" tIns="0" rIns="0" bIns="0" rtlCol="0" anchor="ctr"/>
+          <a:lstStyle/>
+          <a:p>
+            <a:pPr algn="ctr" indent="0" marL="0">
+              <a:buNone/>
+            </a:pPr>
+            <a:r>
+              <a:rPr lang="en-US" sz="1100" b="1" dirty="0">
+                <a:solidFill>
+                  <a:srgbClr val="FFFFFF"/>
+                </a:solidFill>
+                <a:latin typeface="Calibri" pitchFamily="34" charset="0"/>
+                <a:ea typeface="Calibri" pitchFamily="34" charset="-122"/>
+                <a:cs typeface="Calibri" pitchFamily="34" charset="-120"/>
+              </a:rPr>
+              <a:t>Completed ✓</a:t>
+            </a:r>
+            <a:endParaRPr lang="en-US" sz="1100" dirty="0"/>
+          </a:p>
+        </p:txBody>
+      </p:sp>
+      <p:sp>
+        <p:nvSpPr>
+          <p:cNvPr id="45" name="Text 43"/>
+          <p:cNvSpPr txBox="1"/>
+          <p:nvPr/>
+        </p:nvSpPr>
+        <p:spPr>
+          <a:xfrm>
+            <a:off x="8366760" y="5404104"/>
+            <a:ext cx="3017520" cy="365760"/>
+          </a:xfrm>
+          <a:prstGeom prst="rect">
+            <a:avLst/>
+          </a:prstGeom>
+          <a:noFill/>
+          <a:ln/>
+        </p:spPr>
+        <p:txBody>
+          <a:bodyPr wrap="square" lIns="0" tIns="0" rIns="0" bIns="0" rtlCol="0" anchor="ctr"/>
+          <a:lstStyle/>
+          <a:p>
+            <a:pPr indent="0" marL="0">
+              <a:buNone/>
+            </a:pPr>
+            <a:r>
+              <a:rPr lang="en-US" sz="1050" i="1" dirty="0">
+                <a:solidFill>
+                  <a:srgbClr val="5F7178"/>
+                </a:solidFill>
+                <a:latin typeface="Calibri" pitchFamily="34" charset="0"/>
+                <a:ea typeface="Calibri" pitchFamily="34" charset="-122"/>
+                <a:cs typeface="Calibri" pitchFamily="34" charset="-120"/>
+              </a:rPr>
+              <a:t>— listed per analyser; any analyser under 3 shows a red Fail</a:t>
+            </a:r>
+            <a:endParaRPr lang="en-US" sz="1050" dirty="0"/>
+          </a:p>
+        </p:txBody>
+      </p:sp>
+      <p:sp>
+        <p:nvSpPr>
+          <p:cNvPr id="46" name="Text 44"/>
+          <p:cNvSpPr txBox="1"/>
+          <p:nvPr/>
+        </p:nvSpPr>
+        <p:spPr>
+          <a:xfrm>
+            <a:off x="6400800" y="6163056"/>
+            <a:ext cx="5212080" cy="320040"/>
+          </a:xfrm>
+          <a:prstGeom prst="rect">
+            <a:avLst/>
+          </a:prstGeom>
+          <a:noFill/>
+          <a:ln/>
+        </p:spPr>
+        <p:txBody>
+          <a:bodyPr wrap="square" lIns="0" tIns="0" rIns="0" bIns="0" rtlCol="0" anchor="ctr"/>
+          <a:lstStyle/>
+          <a:p>
+            <a:pPr indent="0" marL="0">
+              <a:buNone/>
+            </a:pPr>
+            <a:r>
+              <a:rPr lang="en-US" sz="1000" i="1" dirty="0">
+                <a:solidFill>
+                  <a:srgbClr val="5F7178"/>
+                </a:solidFill>
+                <a:latin typeface="Calibri" pitchFamily="34" charset="0"/>
+                <a:ea typeface="Calibri" pitchFamily="34" charset="-122"/>
+                <a:cs typeface="Calibri" pitchFamily="34" charset="-120"/>
+              </a:rPr>
+              <a:t>Examples shown with fictional data — layouts match the real Word report.</a:t>
+            </a:r>
+            <a:endParaRPr lang="en-US" sz="1000" dirty="0"/>
+          </a:p>
+        </p:txBody>
+      </p:sp>
+      <p:sp>
+        <p:nvSpPr>
+          <p:cNvPr id="47" name="Shape 45"/>
+          <p:cNvSpPr/>
+          <p:nvPr/>
+        </p:nvSpPr>
+        <p:spPr>
+          <a:xfrm>
+            <a:off x="0" y="6793992"/>
+            <a:ext cx="2040636" cy="64008"/>
+          </a:xfrm>
+          <a:prstGeom prst="rect">
+            <a:avLst/>
+          </a:prstGeom>
+          <a:solidFill>
+            <a:srgbClr val="01485C"/>
+          </a:solidFill>
+          <a:ln/>
+        </p:spPr>
+      </p:sp>
+      <p:sp>
+        <p:nvSpPr>
+          <p:cNvPr id="48" name="Shape 46"/>
+          <p:cNvSpPr/>
+          <p:nvPr/>
+        </p:nvSpPr>
+        <p:spPr>
+          <a:xfrm>
+            <a:off x="2031492" y="6793992"/>
+            <a:ext cx="2040636" cy="64008"/>
+          </a:xfrm>
+          <a:prstGeom prst="rect">
+            <a:avLst/>
+          </a:prstGeom>
+          <a:solidFill>
+            <a:srgbClr val="146175"/>
+          </a:solidFill>
+          <a:ln/>
+        </p:spPr>
+      </p:sp>
+      <p:sp>
+        <p:nvSpPr>
+          <p:cNvPr id="49" name="Shape 47"/>
+          <p:cNvSpPr/>
+          <p:nvPr/>
+        </p:nvSpPr>
+        <p:spPr>
+          <a:xfrm>
+            <a:off x="4062984" y="6793992"/>
+            <a:ext cx="2040636" cy="64008"/>
+          </a:xfrm>
+          <a:prstGeom prst="rect">
+            <a:avLst/>
+          </a:prstGeom>
+          <a:solidFill>
+            <a:srgbClr val="11B5AE"/>
+          </a:solidFill>
+          <a:ln/>
+        </p:spPr>
+      </p:sp>
+      <p:sp>
+        <p:nvSpPr>
+          <p:cNvPr id="50" name="Shape 48"/>
+          <p:cNvSpPr/>
+          <p:nvPr/>
+        </p:nvSpPr>
+        <p:spPr>
+          <a:xfrm>
+            <a:off x="6094476" y="6793992"/>
+            <a:ext cx="2040636" cy="64008"/>
+          </a:xfrm>
+          <a:prstGeom prst="rect">
+            <a:avLst/>
+          </a:prstGeom>
+          <a:solidFill>
+            <a:srgbClr val="6CCAD4"/>
+          </a:solidFill>
+          <a:ln/>
+        </p:spPr>
+      </p:sp>
+      <p:sp>
+        <p:nvSpPr>
+          <p:cNvPr id="51" name="Shape 49"/>
+          <p:cNvSpPr/>
+          <p:nvPr/>
+        </p:nvSpPr>
+        <p:spPr>
+          <a:xfrm>
+            <a:off x="8125968" y="6793992"/>
+            <a:ext cx="2040636" cy="64008"/>
+          </a:xfrm>
+          <a:prstGeom prst="rect">
+            <a:avLst/>
+          </a:prstGeom>
+          <a:solidFill>
+            <a:srgbClr val="7FC04C"/>
+          </a:solidFill>
+          <a:ln/>
+        </p:spPr>
+      </p:sp>
+      <p:sp>
+        <p:nvSpPr>
+          <p:cNvPr id="52" name="Shape 50"/>
           <p:cNvSpPr/>
           <p:nvPr/>
         </p:nvSpPr>

--- a/PQ_Report_Generator_User_Guide.pptx
+++ b/PQ_Report_Generator_User_Guide.pptx
@@ -2408,6 +2408,10 @@
             </a:outerShdw>
           </a:effectLst>
         </p:spPr>
+        <p:txBody>
+          <a:bodyPr/>
+          <a:p/>
+        </p:txBody>
       </p:sp>
       <p:pic>
         <p:nvPicPr>
@@ -2622,7 +2626,7 @@
                 <a:ea typeface="Calibri" pitchFamily="34" charset="-122"/>
                 <a:cs typeface="Calibri" pitchFamily="34" charset="-120"/>
               </a:rPr>
-              <a:t>Designed by Craig MacKenzie · Chemistry Department · Townsville Group Laboratory</a:t>
+              <a:t>Conceived, designed and built by Craig MacKenzie · Chemistry Department, Townsville Group Laboratory · Pathology Queensland</a:t>
             </a:r>
             <a:endParaRPr lang="en-US" sz="1100" dirty="0"/>
           </a:p>
@@ -2647,6 +2651,10 @@
           </a:solidFill>
           <a:ln/>
         </p:spPr>
+        <p:txBody>
+          <a:bodyPr/>
+          <a:p/>
+        </p:txBody>
       </p:sp>
       <p:sp>
         <p:nvSpPr>
@@ -2667,6 +2675,10 @@
           </a:solidFill>
           <a:ln/>
         </p:spPr>
+        <p:txBody>
+          <a:bodyPr/>
+          <a:p/>
+        </p:txBody>
       </p:sp>
       <p:sp>
         <p:nvSpPr>
@@ -2687,6 +2699,10 @@
           </a:solidFill>
           <a:ln/>
         </p:spPr>
+        <p:txBody>
+          <a:bodyPr/>
+          <a:p/>
+        </p:txBody>
       </p:sp>
       <p:sp>
         <p:nvSpPr>
@@ -2707,6 +2723,10 @@
           </a:solidFill>
           <a:ln/>
         </p:spPr>
+        <p:txBody>
+          <a:bodyPr/>
+          <a:p/>
+        </p:txBody>
       </p:sp>
       <p:sp>
         <p:nvSpPr>
@@ -2727,6 +2747,10 @@
           </a:solidFill>
           <a:ln/>
         </p:spPr>
+        <p:txBody>
+          <a:bodyPr/>
+          <a:p/>
+        </p:txBody>
       </p:sp>
       <p:sp>
         <p:nvSpPr>
@@ -2747,6 +2771,10 @@
           </a:solidFill>
           <a:ln/>
         </p:spPr>
+        <p:txBody>
+          <a:bodyPr/>
+          <a:p/>
+        </p:txBody>
       </p:sp>
     </p:spTree>
   </p:cSld>
@@ -2757,6 +2785,1670 @@
 </file>
 
 <file path=ppt/slides/slide10.xml><?xml version="1.0" encoding="utf-8"?>
+<p:sld xmlns:a="http://schemas.openxmlformats.org/drawingml/2006/main" xmlns:r="http://schemas.openxmlformats.org/officeDocument/2006/relationships" xmlns:p="http://schemas.openxmlformats.org/presentationml/2006/main">
+  <p:cSld name="Slide 9">
+    <p:bg>
+      <p:bgPr>
+        <a:solidFill>
+          <a:srgbClr val="FFFFFF"/>
+        </a:solidFill>
+      </p:bgPr>
+    </p:bg>
+    <p:spTree>
+      <p:nvGrpSpPr>
+        <p:cNvPr id="1" name=""/>
+        <p:cNvGrpSpPr/>
+        <p:nvPr/>
+      </p:nvGrpSpPr>
+      <p:grpSpPr>
+        <a:xfrm>
+          <a:off x="0" y="0"/>
+          <a:ext cx="0" cy="0"/>
+          <a:chOff x="0" y="0"/>
+          <a:chExt cx="0" cy="0"/>
+        </a:xfrm>
+      </p:grpSpPr>
+      <p:sp>
+        <p:nvSpPr>
+          <p:cNvPr id="2" name="Text 0"/>
+          <p:cNvSpPr txBox="1"/>
+          <p:nvPr/>
+        </p:nvSpPr>
+        <p:spPr>
+          <a:xfrm>
+            <a:off x="548640" y="320040"/>
+            <a:ext cx="11064240" cy="685800"/>
+          </a:xfrm>
+          <a:prstGeom prst="rect">
+            <a:avLst/>
+          </a:prstGeom>
+          <a:noFill/>
+          <a:ln/>
+        </p:spPr>
+        <p:txBody>
+          <a:bodyPr wrap="square" lIns="0" tIns="0" rIns="0" bIns="0" rtlCol="0" anchor="ctr"/>
+          <a:lstStyle/>
+          <a:p>
+            <a:pPr indent="0" marL="0">
+              <a:buNone/>
+            </a:pPr>
+            <a:r>
+              <a:rPr lang="en-US" sz="3000" b="1" dirty="0">
+                <a:solidFill>
+                  <a:srgbClr val="01485C"/>
+                </a:solidFill>
+                <a:latin typeface="Calibri" pitchFamily="34" charset="0"/>
+                <a:ea typeface="Calibri" pitchFamily="34" charset="-122"/>
+                <a:cs typeface="Calibri" pitchFamily="34" charset="-120"/>
+              </a:rPr>
+              <a:t>What the report contains (1 of 2)</a:t>
+            </a:r>
+            <a:endParaRPr lang="en-US" sz="3000" dirty="0"/>
+          </a:p>
+        </p:txBody>
+      </p:sp>
+      <p:sp>
+        <p:nvSpPr>
+          <p:cNvPr id="3" name="Shape 1"/>
+          <p:cNvSpPr/>
+          <p:nvPr/>
+        </p:nvSpPr>
+        <p:spPr>
+          <a:xfrm>
+            <a:off x="9784080" y="384048"/>
+            <a:ext cx="1828800" cy="457200"/>
+          </a:xfrm>
+          <a:prstGeom prst="roundRect">
+            <a:avLst>
+              <a:gd name="adj" fmla="val 50000"/>
+            </a:avLst>
+          </a:prstGeom>
+          <a:solidFill>
+            <a:srgbClr val="01485C"/>
+          </a:solidFill>
+          <a:ln/>
+        </p:spPr>
+      </p:sp>
+      <p:sp>
+        <p:nvSpPr>
+          <p:cNvPr id="4" name="Text 2"/>
+          <p:cNvSpPr txBox="1"/>
+          <p:nvPr/>
+        </p:nvSpPr>
+        <p:spPr>
+          <a:xfrm>
+            <a:off x="9784080" y="384048"/>
+            <a:ext cx="1828800" cy="457200"/>
+          </a:xfrm>
+          <a:prstGeom prst="rect">
+            <a:avLst/>
+          </a:prstGeom>
+          <a:noFill/>
+          <a:ln/>
+        </p:spPr>
+        <p:txBody>
+          <a:bodyPr wrap="square" lIns="0" tIns="0" rIns="0" bIns="0" rtlCol="0" anchor="ctr"/>
+          <a:lstStyle/>
+          <a:p>
+            <a:pPr algn="ctr" indent="0" marL="0">
+              <a:buNone/>
+            </a:pPr>
+            <a:r>
+              <a:rPr lang="en-US" sz="1500" b="1" dirty="0">
+                <a:solidFill>
+                  <a:srgbClr val="FFFFFF"/>
+                </a:solidFill>
+                <a:latin typeface="Calibri" pitchFamily="34" charset="0"/>
+                <a:ea typeface="Calibri" pitchFamily="34" charset="-122"/>
+                <a:cs typeface="Calibri" pitchFamily="34" charset="-120"/>
+              </a:rPr>
+              <a:t>i-STAT</a:t>
+            </a:r>
+            <a:endParaRPr lang="en-US" sz="1500" dirty="0"/>
+          </a:p>
+        </p:txBody>
+      </p:sp>
+      <p:sp>
+        <p:nvSpPr>
+          <p:cNvPr id="5" name="Shape 3"/>
+          <p:cNvSpPr/>
+          <p:nvPr/>
+        </p:nvSpPr>
+        <p:spPr>
+          <a:xfrm>
+            <a:off x="548640" y="1325880"/>
+            <a:ext cx="420624" cy="420624"/>
+          </a:xfrm>
+          <a:prstGeom prst="ellipse">
+            <a:avLst/>
+          </a:prstGeom>
+          <a:solidFill>
+            <a:srgbClr val="01485C"/>
+          </a:solidFill>
+          <a:ln/>
+        </p:spPr>
+      </p:sp>
+      <p:sp>
+        <p:nvSpPr>
+          <p:cNvPr id="6" name="Text 4"/>
+          <p:cNvSpPr txBox="1"/>
+          <p:nvPr/>
+        </p:nvSpPr>
+        <p:spPr>
+          <a:xfrm>
+            <a:off x="548640" y="1325880"/>
+            <a:ext cx="420624" cy="420624"/>
+          </a:xfrm>
+          <a:prstGeom prst="rect">
+            <a:avLst/>
+          </a:prstGeom>
+          <a:noFill/>
+          <a:ln/>
+        </p:spPr>
+        <p:txBody>
+          <a:bodyPr wrap="square" lIns="0" tIns="0" rIns="0" bIns="0" rtlCol="0" anchor="ctr"/>
+          <a:lstStyle/>
+          <a:p>
+            <a:pPr algn="ctr" indent="0" marL="0">
+              <a:buNone/>
+            </a:pPr>
+            <a:r>
+              <a:rPr lang="en-US" sz="1500" b="1" dirty="0">
+                <a:solidFill>
+                  <a:srgbClr val="FFFFFF"/>
+                </a:solidFill>
+                <a:latin typeface="Calibri" pitchFamily="34" charset="0"/>
+                <a:ea typeface="Calibri" pitchFamily="34" charset="-122"/>
+                <a:cs typeface="Calibri" pitchFamily="34" charset="-120"/>
+              </a:rPr>
+              <a:t>1</a:t>
+            </a:r>
+            <a:endParaRPr lang="en-US" sz="1500" dirty="0"/>
+          </a:p>
+        </p:txBody>
+      </p:sp>
+      <p:sp>
+        <p:nvSpPr>
+          <p:cNvPr id="7" name="Text 5"/>
+          <p:cNvSpPr txBox="1"/>
+          <p:nvPr/>
+        </p:nvSpPr>
+        <p:spPr>
+          <a:xfrm>
+            <a:off x="1133856" y="1271016"/>
+            <a:ext cx="5029200" cy="859536"/>
+          </a:xfrm>
+          <a:prstGeom prst="rect">
+            <a:avLst/>
+          </a:prstGeom>
+          <a:noFill/>
+          <a:ln/>
+        </p:spPr>
+        <p:txBody>
+          <a:bodyPr wrap="square" lIns="0" tIns="0" rIns="0" bIns="0" rtlCol="0" anchor="t"/>
+          <a:lstStyle/>
+          <a:p>
+            <a:pPr indent="0" marL="0">
+              <a:buNone/>
+            </a:pPr>
+            <a:r>
+              <a:rPr lang="en-US" sz="1300" b="1" dirty="0">
+                <a:solidFill>
+                  <a:srgbClr val="01485C"/>
+                </a:solidFill>
+                <a:latin typeface="Calibri" pitchFamily="34" charset="0"/>
+                <a:ea typeface="Calibri" pitchFamily="34" charset="-122"/>
+                <a:cs typeface="Calibri" pitchFamily="34" charset="-120"/>
+              </a:rPr>
+              <a:t>Monthly Snapshot
+</a:t>
+            </a:r>
+            <a:pPr indent="0" marL="0">
+              <a:buNone/>
+            </a:pPr>
+            <a:r>
+              <a:rPr lang="en-US" sz="1100" dirty="0">
+                <a:solidFill>
+                  <a:srgbClr val="5F7178"/>
+                </a:solidFill>
+                <a:latin typeface="Calibri" pitchFamily="34" charset="0"/>
+                <a:ea typeface="Calibri" pitchFamily="34" charset="-122"/>
+                <a:cs typeface="Calibri" pitchFamily="34" charset="-120"/>
+              </a:rPr>
+              <a:t>The month in one block: overall rate, errors vs cartridges, top error, flagged staff.</a:t>
+            </a:r>
+            <a:endParaRPr lang="en-US" sz="1300" dirty="0"/>
+          </a:p>
+        </p:txBody>
+      </p:sp>
+      <p:sp>
+        <p:nvSpPr>
+          <p:cNvPr id="8" name="Shape 6"/>
+          <p:cNvSpPr/>
+          <p:nvPr/>
+        </p:nvSpPr>
+        <p:spPr>
+          <a:xfrm>
+            <a:off x="6400800" y="1280160"/>
+            <a:ext cx="5212080" cy="859536"/>
+          </a:xfrm>
+          <a:prstGeom prst="roundRect">
+            <a:avLst>
+              <a:gd name="adj" fmla="val 8511"/>
+            </a:avLst>
+          </a:prstGeom>
+          <a:solidFill>
+            <a:srgbClr val="FFFFFF"/>
+          </a:solidFill>
+          <a:ln w="15875">
+            <a:solidFill>
+              <a:srgbClr val="E2E8EA"/>
+            </a:solidFill>
+            <a:prstDash val="solid"/>
+          </a:ln>
+        </p:spPr>
+      </p:sp>
+      <p:sp>
+        <p:nvSpPr>
+          <p:cNvPr id="9" name="Text 7"/>
+          <p:cNvSpPr txBox="1"/>
+          <p:nvPr/>
+        </p:nvSpPr>
+        <p:spPr>
+          <a:xfrm>
+            <a:off x="6629400" y="1408176"/>
+            <a:ext cx="4754880" cy="630936"/>
+          </a:xfrm>
+          <a:prstGeom prst="rect">
+            <a:avLst/>
+          </a:prstGeom>
+          <a:noFill/>
+          <a:ln/>
+        </p:spPr>
+        <p:txBody>
+          <a:bodyPr wrap="square" lIns="0" tIns="0" rIns="0" bIns="0" rtlCol="0" anchor="t"/>
+          <a:lstStyle/>
+          <a:p>
+            <a:pPr indent="0" marL="0">
+              <a:buNone/>
+            </a:pPr>
+            <a:r>
+              <a:rPr lang="en-US" sz="1250" b="1" dirty="0">
+                <a:solidFill>
+                  <a:srgbClr val="2F5496"/>
+                </a:solidFill>
+                <a:latin typeface="Calibri" pitchFamily="34" charset="0"/>
+                <a:ea typeface="Calibri" pitchFamily="34" charset="-122"/>
+                <a:cs typeface="Calibri" pitchFamily="34" charset="-120"/>
+              </a:rPr>
+              <a:t>Error rate 4.5%</a:t>
+            </a:r>
+            <a:pPr indent="0" marL="0">
+              <a:buNone/>
+            </a:pPr>
+            <a:r>
+              <a:rPr lang="en-US" sz="1050" dirty="0">
+                <a:solidFill>
+                  <a:srgbClr val="17272E"/>
+                </a:solidFill>
+                <a:latin typeface="Calibri" pitchFamily="34" charset="0"/>
+                <a:ea typeface="Calibri" pitchFamily="34" charset="-122"/>
+                <a:cs typeface="Calibri" pitchFamily="34" charset="-120"/>
+              </a:rPr>
+              <a:t>   (12 errors / 266 cartridges)
+</a:t>
+            </a:r>
+            <a:pPr indent="0" marL="0">
+              <a:buNone/>
+            </a:pPr>
+            <a:r>
+              <a:rPr lang="en-US" sz="1050" dirty="0">
+                <a:solidFill>
+                  <a:srgbClr val="5F7178"/>
+                </a:solidFill>
+                <a:latin typeface="Calibri" pitchFamily="34" charset="0"/>
+                <a:ea typeface="Calibri" pitchFamily="34" charset="-122"/>
+                <a:cs typeface="Calibri" pitchFamily="34" charset="-120"/>
+              </a:rPr>
+              <a:t>Top error: P3 Cartridge Handling  ·  Staff flagged: 2</a:t>
+            </a:r>
+            <a:endParaRPr lang="en-US" sz="1250" dirty="0"/>
+          </a:p>
+        </p:txBody>
+      </p:sp>
+      <p:sp>
+        <p:nvSpPr>
+          <p:cNvPr id="10" name="Shape 8"/>
+          <p:cNvSpPr/>
+          <p:nvPr/>
+        </p:nvSpPr>
+        <p:spPr>
+          <a:xfrm>
+            <a:off x="548640" y="2295144"/>
+            <a:ext cx="420624" cy="420624"/>
+          </a:xfrm>
+          <a:prstGeom prst="ellipse">
+            <a:avLst/>
+          </a:prstGeom>
+          <a:solidFill>
+            <a:srgbClr val="01485C"/>
+          </a:solidFill>
+          <a:ln/>
+        </p:spPr>
+      </p:sp>
+      <p:sp>
+        <p:nvSpPr>
+          <p:cNvPr id="11" name="Text 9"/>
+          <p:cNvSpPr txBox="1"/>
+          <p:nvPr/>
+        </p:nvSpPr>
+        <p:spPr>
+          <a:xfrm>
+            <a:off x="548640" y="2295144"/>
+            <a:ext cx="420624" cy="420624"/>
+          </a:xfrm>
+          <a:prstGeom prst="rect">
+            <a:avLst/>
+          </a:prstGeom>
+          <a:noFill/>
+          <a:ln/>
+        </p:spPr>
+        <p:txBody>
+          <a:bodyPr wrap="square" lIns="0" tIns="0" rIns="0" bIns="0" rtlCol="0" anchor="ctr"/>
+          <a:lstStyle/>
+          <a:p>
+            <a:pPr algn="ctr" indent="0" marL="0">
+              <a:buNone/>
+            </a:pPr>
+            <a:r>
+              <a:rPr lang="en-US" sz="1500" b="1" dirty="0">
+                <a:solidFill>
+                  <a:srgbClr val="FFFFFF"/>
+                </a:solidFill>
+                <a:latin typeface="Calibri" pitchFamily="34" charset="0"/>
+                <a:ea typeface="Calibri" pitchFamily="34" charset="-122"/>
+                <a:cs typeface="Calibri" pitchFamily="34" charset="-120"/>
+              </a:rPr>
+              <a:t>2</a:t>
+            </a:r>
+            <a:endParaRPr lang="en-US" sz="1500" dirty="0"/>
+          </a:p>
+        </p:txBody>
+      </p:sp>
+      <p:sp>
+        <p:nvSpPr>
+          <p:cNvPr id="12" name="Text 10"/>
+          <p:cNvSpPr txBox="1"/>
+          <p:nvPr/>
+        </p:nvSpPr>
+        <p:spPr>
+          <a:xfrm>
+            <a:off x="1133856" y="2240280"/>
+            <a:ext cx="5029200" cy="859536"/>
+          </a:xfrm>
+          <a:prstGeom prst="rect">
+            <a:avLst/>
+          </a:prstGeom>
+          <a:noFill/>
+          <a:ln/>
+        </p:spPr>
+        <p:txBody>
+          <a:bodyPr wrap="square" lIns="0" tIns="0" rIns="0" bIns="0" rtlCol="0" anchor="t"/>
+          <a:lstStyle/>
+          <a:p>
+            <a:pPr indent="0" marL="0">
+              <a:buNone/>
+            </a:pPr>
+            <a:r>
+              <a:rPr lang="en-US" sz="1300" b="1" dirty="0">
+                <a:solidFill>
+                  <a:srgbClr val="01485C"/>
+                </a:solidFill>
+                <a:latin typeface="Calibri" pitchFamily="34" charset="0"/>
+                <a:ea typeface="Calibri" pitchFamily="34" charset="-122"/>
+                <a:cs typeface="Calibri" pitchFamily="34" charset="-120"/>
+              </a:rPr>
+              <a:t>Historical Performance
+</a:t>
+            </a:r>
+            <a:pPr indent="0" marL="0">
+              <a:buNone/>
+            </a:pPr>
+            <a:r>
+              <a:rPr lang="en-US" sz="1100" dirty="0">
+                <a:solidFill>
+                  <a:srgbClr val="5F7178"/>
+                </a:solidFill>
+                <a:latin typeface="Calibri" pitchFamily="34" charset="0"/>
+                <a:ea typeface="Calibri" pitchFamily="34" charset="-122"/>
+                <a:cs typeface="Calibri" pitchFamily="34" charset="-120"/>
+              </a:rPr>
+              <a:t>TWO charts per device: the error-rate trend over the colour bands, and the Cartridges Run &amp; Error Mix chart (next slide).</a:t>
+            </a:r>
+            <a:endParaRPr lang="en-US" sz="1300" dirty="0"/>
+          </a:p>
+        </p:txBody>
+      </p:sp>
+      <p:sp>
+        <p:nvSpPr>
+          <p:cNvPr id="13" name="Shape 11"/>
+          <p:cNvSpPr/>
+          <p:nvPr/>
+        </p:nvSpPr>
+        <p:spPr>
+          <a:xfrm>
+            <a:off x="6400800" y="2249424"/>
+            <a:ext cx="5212080" cy="859536"/>
+          </a:xfrm>
+          <a:prstGeom prst="roundRect">
+            <a:avLst>
+              <a:gd name="adj" fmla="val 8511"/>
+            </a:avLst>
+          </a:prstGeom>
+          <a:solidFill>
+            <a:srgbClr val="FFFFFF"/>
+          </a:solidFill>
+          <a:ln w="15875">
+            <a:solidFill>
+              <a:srgbClr val="E2E8EA"/>
+            </a:solidFill>
+            <a:prstDash val="solid"/>
+          </a:ln>
+        </p:spPr>
+      </p:sp>
+      <p:sp>
+        <p:nvSpPr>
+          <p:cNvPr id="14" name="Shape 12"/>
+          <p:cNvSpPr/>
+          <p:nvPr/>
+        </p:nvSpPr>
+        <p:spPr>
+          <a:xfrm>
+            <a:off x="6601968" y="2359152"/>
+            <a:ext cx="3840480" cy="155448"/>
+          </a:xfrm>
+          <a:prstGeom prst="rect">
+            <a:avLst/>
+          </a:prstGeom>
+          <a:solidFill>
+            <a:srgbClr val="C00000">
+              <a:alpha val="38000"/>
+            </a:srgbClr>
+          </a:solidFill>
+          <a:ln/>
+        </p:spPr>
+      </p:sp>
+      <p:sp>
+        <p:nvSpPr>
+          <p:cNvPr id="15" name="Shape 13"/>
+          <p:cNvSpPr/>
+          <p:nvPr/>
+        </p:nvSpPr>
+        <p:spPr>
+          <a:xfrm>
+            <a:off x="6601968" y="2514600"/>
+            <a:ext cx="3840480" cy="155448"/>
+          </a:xfrm>
+          <a:prstGeom prst="rect">
+            <a:avLst/>
+          </a:prstGeom>
+          <a:solidFill>
+            <a:srgbClr val="D96800">
+              <a:alpha val="38000"/>
+            </a:srgbClr>
+          </a:solidFill>
+          <a:ln/>
+        </p:spPr>
+      </p:sp>
+      <p:sp>
+        <p:nvSpPr>
+          <p:cNvPr id="16" name="Shape 14"/>
+          <p:cNvSpPr/>
+          <p:nvPr/>
+        </p:nvSpPr>
+        <p:spPr>
+          <a:xfrm>
+            <a:off x="6601968" y="2670048"/>
+            <a:ext cx="3840480" cy="155448"/>
+          </a:xfrm>
+          <a:prstGeom prst="rect">
+            <a:avLst/>
+          </a:prstGeom>
+          <a:solidFill>
+            <a:srgbClr val="2F5496">
+              <a:alpha val="38000"/>
+            </a:srgbClr>
+          </a:solidFill>
+          <a:ln/>
+        </p:spPr>
+      </p:sp>
+      <p:sp>
+        <p:nvSpPr>
+          <p:cNvPr id="17" name="Shape 15"/>
+          <p:cNvSpPr/>
+          <p:nvPr/>
+        </p:nvSpPr>
+        <p:spPr>
+          <a:xfrm>
+            <a:off x="6601968" y="2825496"/>
+            <a:ext cx="3840480" cy="155448"/>
+          </a:xfrm>
+          <a:prstGeom prst="rect">
+            <a:avLst/>
+          </a:prstGeom>
+          <a:solidFill>
+            <a:srgbClr val="538135">
+              <a:alpha val="38000"/>
+            </a:srgbClr>
+          </a:solidFill>
+          <a:ln/>
+        </p:spPr>
+      </p:sp>
+      <p:sp>
+        <p:nvSpPr>
+          <p:cNvPr id="18" name="Shape 16"/>
+          <p:cNvSpPr/>
+          <p:nvPr/>
+        </p:nvSpPr>
+        <p:spPr>
+          <a:xfrm>
+            <a:off x="7059168" y="2468880"/>
+            <a:ext cx="118872" cy="118872"/>
+          </a:xfrm>
+          <a:prstGeom prst="ellipse">
+            <a:avLst/>
+          </a:prstGeom>
+          <a:solidFill>
+            <a:srgbClr val="01485C"/>
+          </a:solidFill>
+          <a:ln w="12700">
+            <a:solidFill>
+              <a:srgbClr val="FFFFFF"/>
+            </a:solidFill>
+            <a:prstDash val="solid"/>
+          </a:ln>
+        </p:spPr>
+      </p:sp>
+      <p:sp>
+        <p:nvSpPr>
+          <p:cNvPr id="19" name="Shape 17"/>
+          <p:cNvSpPr/>
+          <p:nvPr/>
+        </p:nvSpPr>
+        <p:spPr>
+          <a:xfrm>
+            <a:off x="7790688" y="2578608"/>
+            <a:ext cx="118872" cy="118872"/>
+          </a:xfrm>
+          <a:prstGeom prst="ellipse">
+            <a:avLst/>
+          </a:prstGeom>
+          <a:solidFill>
+            <a:srgbClr val="01485C"/>
+          </a:solidFill>
+          <a:ln w="12700">
+            <a:solidFill>
+              <a:srgbClr val="FFFFFF"/>
+            </a:solidFill>
+            <a:prstDash val="solid"/>
+          </a:ln>
+        </p:spPr>
+      </p:sp>
+      <p:sp>
+        <p:nvSpPr>
+          <p:cNvPr id="20" name="Shape 18"/>
+          <p:cNvSpPr/>
+          <p:nvPr/>
+        </p:nvSpPr>
+        <p:spPr>
+          <a:xfrm>
+            <a:off x="8522208" y="2542032"/>
+            <a:ext cx="118872" cy="118872"/>
+          </a:xfrm>
+          <a:prstGeom prst="ellipse">
+            <a:avLst/>
+          </a:prstGeom>
+          <a:solidFill>
+            <a:srgbClr val="01485C"/>
+          </a:solidFill>
+          <a:ln w="12700">
+            <a:solidFill>
+              <a:srgbClr val="FFFFFF"/>
+            </a:solidFill>
+            <a:prstDash val="solid"/>
+          </a:ln>
+        </p:spPr>
+      </p:sp>
+      <p:sp>
+        <p:nvSpPr>
+          <p:cNvPr id="21" name="Shape 19"/>
+          <p:cNvSpPr/>
+          <p:nvPr/>
+        </p:nvSpPr>
+        <p:spPr>
+          <a:xfrm>
+            <a:off x="9253728" y="2724912"/>
+            <a:ext cx="118872" cy="118872"/>
+          </a:xfrm>
+          <a:prstGeom prst="ellipse">
+            <a:avLst/>
+          </a:prstGeom>
+          <a:solidFill>
+            <a:srgbClr val="01485C"/>
+          </a:solidFill>
+          <a:ln w="12700">
+            <a:solidFill>
+              <a:srgbClr val="FFFFFF"/>
+            </a:solidFill>
+            <a:prstDash val="solid"/>
+          </a:ln>
+        </p:spPr>
+      </p:sp>
+      <p:sp>
+        <p:nvSpPr>
+          <p:cNvPr id="22" name="Shape 20"/>
+          <p:cNvSpPr/>
+          <p:nvPr/>
+        </p:nvSpPr>
+        <p:spPr>
+          <a:xfrm>
+            <a:off x="9985248" y="2825496"/>
+            <a:ext cx="118872" cy="118872"/>
+          </a:xfrm>
+          <a:prstGeom prst="ellipse">
+            <a:avLst/>
+          </a:prstGeom>
+          <a:solidFill>
+            <a:srgbClr val="01485C"/>
+          </a:solidFill>
+          <a:ln w="12700">
+            <a:solidFill>
+              <a:srgbClr val="FFFFFF"/>
+            </a:solidFill>
+            <a:prstDash val="solid"/>
+          </a:ln>
+        </p:spPr>
+      </p:sp>
+      <p:sp>
+        <p:nvSpPr>
+          <p:cNvPr id="23" name="Text 21"/>
+          <p:cNvSpPr txBox="1"/>
+          <p:nvPr/>
+        </p:nvSpPr>
+        <p:spPr>
+          <a:xfrm>
+            <a:off x="10469880" y="2542032"/>
+            <a:ext cx="1005840" cy="274320"/>
+          </a:xfrm>
+          <a:prstGeom prst="rect">
+            <a:avLst/>
+          </a:prstGeom>
+          <a:noFill/>
+          <a:ln/>
+        </p:spPr>
+        <p:txBody>
+          <a:bodyPr wrap="square" lIns="0" tIns="0" rIns="0" bIns="0" rtlCol="0" anchor="ctr"/>
+          <a:lstStyle/>
+          <a:p>
+            <a:pPr indent="0" marL="0">
+              <a:buNone/>
+            </a:pPr>
+            <a:r>
+              <a:rPr lang="en-US" sz="950" i="1" dirty="0">
+                <a:solidFill>
+                  <a:srgbClr val="538135"/>
+                </a:solidFill>
+                <a:latin typeface="Calibri" pitchFamily="34" charset="0"/>
+                <a:ea typeface="Calibri" pitchFamily="34" charset="-122"/>
+                <a:cs typeface="Calibri" pitchFamily="34" charset="-120"/>
+              </a:rPr>
+              <a:t>improving ↓</a:t>
+            </a:r>
+            <a:endParaRPr lang="en-US" sz="950" dirty="0"/>
+          </a:p>
+        </p:txBody>
+      </p:sp>
+      <p:sp>
+        <p:nvSpPr>
+          <p:cNvPr id="24" name="Shape 22"/>
+          <p:cNvSpPr/>
+          <p:nvPr/>
+        </p:nvSpPr>
+        <p:spPr>
+          <a:xfrm>
+            <a:off x="548640" y="3264408"/>
+            <a:ext cx="420624" cy="420624"/>
+          </a:xfrm>
+          <a:prstGeom prst="ellipse">
+            <a:avLst/>
+          </a:prstGeom>
+          <a:solidFill>
+            <a:srgbClr val="01485C"/>
+          </a:solidFill>
+          <a:ln/>
+        </p:spPr>
+      </p:sp>
+      <p:sp>
+        <p:nvSpPr>
+          <p:cNvPr id="25" name="Text 23"/>
+          <p:cNvSpPr txBox="1"/>
+          <p:nvPr/>
+        </p:nvSpPr>
+        <p:spPr>
+          <a:xfrm>
+            <a:off x="548640" y="3264408"/>
+            <a:ext cx="420624" cy="420624"/>
+          </a:xfrm>
+          <a:prstGeom prst="rect">
+            <a:avLst/>
+          </a:prstGeom>
+          <a:noFill/>
+          <a:ln/>
+        </p:spPr>
+        <p:txBody>
+          <a:bodyPr wrap="square" lIns="0" tIns="0" rIns="0" bIns="0" rtlCol="0" anchor="ctr"/>
+          <a:lstStyle/>
+          <a:p>
+            <a:pPr algn="ctr" indent="0" marL="0">
+              <a:buNone/>
+            </a:pPr>
+            <a:r>
+              <a:rPr lang="en-US" sz="1500" b="1" dirty="0">
+                <a:solidFill>
+                  <a:srgbClr val="FFFFFF"/>
+                </a:solidFill>
+                <a:latin typeface="Calibri" pitchFamily="34" charset="0"/>
+                <a:ea typeface="Calibri" pitchFamily="34" charset="-122"/>
+                <a:cs typeface="Calibri" pitchFamily="34" charset="-120"/>
+              </a:rPr>
+              <a:t>3</a:t>
+            </a:r>
+            <a:endParaRPr lang="en-US" sz="1500" dirty="0"/>
+          </a:p>
+        </p:txBody>
+      </p:sp>
+      <p:sp>
+        <p:nvSpPr>
+          <p:cNvPr id="26" name="Text 24"/>
+          <p:cNvSpPr txBox="1"/>
+          <p:nvPr/>
+        </p:nvSpPr>
+        <p:spPr>
+          <a:xfrm>
+            <a:off x="1133856" y="3209544"/>
+            <a:ext cx="5029200" cy="859536"/>
+          </a:xfrm>
+          <a:prstGeom prst="rect">
+            <a:avLst/>
+          </a:prstGeom>
+          <a:noFill/>
+          <a:ln/>
+        </p:spPr>
+        <p:txBody>
+          <a:bodyPr wrap="square" lIns="0" tIns="0" rIns="0" bIns="0" rtlCol="0" anchor="t"/>
+          <a:lstStyle/>
+          <a:p>
+            <a:pPr indent="0" marL="0">
+              <a:buNone/>
+            </a:pPr>
+            <a:r>
+              <a:rPr lang="en-US" sz="1300" b="1" dirty="0">
+                <a:solidFill>
+                  <a:srgbClr val="01485C"/>
+                </a:solidFill>
+                <a:latin typeface="Calibri" pitchFamily="34" charset="0"/>
+                <a:ea typeface="Calibri" pitchFamily="34" charset="-122"/>
+                <a:cs typeface="Calibri" pitchFamily="34" charset="-120"/>
+              </a:rPr>
+              <a:t>Performance Summary
+</a:t>
+            </a:r>
+            <a:pPr indent="0" marL="0">
+              <a:buNone/>
+            </a:pPr>
+            <a:r>
+              <a:rPr lang="en-US" sz="1100" dirty="0">
+                <a:solidFill>
+                  <a:srgbClr val="5F7178"/>
+                </a:solidFill>
+                <a:latin typeface="Calibri" pitchFamily="34" charset="0"/>
+                <a:ea typeface="Calibri" pitchFamily="34" charset="-122"/>
+                <a:cs typeface="Calibri" pitchFamily="34" charset="-120"/>
+              </a:rPr>
+              <a:t>Device-by-device: cartridges, errors and rate, banded Champions → Needs attention.</a:t>
+            </a:r>
+            <a:endParaRPr lang="en-US" sz="1300" dirty="0"/>
+          </a:p>
+        </p:txBody>
+      </p:sp>
+      <p:sp>
+        <p:nvSpPr>
+          <p:cNvPr id="27" name="Shape 25"/>
+          <p:cNvSpPr/>
+          <p:nvPr/>
+        </p:nvSpPr>
+        <p:spPr>
+          <a:xfrm>
+            <a:off x="6400800" y="3218688"/>
+            <a:ext cx="5212080" cy="859536"/>
+          </a:xfrm>
+          <a:prstGeom prst="roundRect">
+            <a:avLst>
+              <a:gd name="adj" fmla="val 8511"/>
+            </a:avLst>
+          </a:prstGeom>
+          <a:solidFill>
+            <a:srgbClr val="FFFFFF"/>
+          </a:solidFill>
+          <a:ln w="15875">
+            <a:solidFill>
+              <a:srgbClr val="E2E8EA"/>
+            </a:solidFill>
+            <a:prstDash val="solid"/>
+          </a:ln>
+        </p:spPr>
+      </p:sp>
+      <p:sp>
+        <p:nvSpPr>
+          <p:cNvPr id="28" name="Text 26"/>
+          <p:cNvSpPr txBox="1"/>
+          <p:nvPr/>
+        </p:nvSpPr>
+        <p:spPr>
+          <a:xfrm>
+            <a:off x="6629400" y="3310128"/>
+            <a:ext cx="3291840" cy="274320"/>
+          </a:xfrm>
+          <a:prstGeom prst="rect">
+            <a:avLst/>
+          </a:prstGeom>
+          <a:noFill/>
+          <a:ln/>
+        </p:spPr>
+        <p:txBody>
+          <a:bodyPr wrap="square" lIns="0" tIns="0" rIns="0" bIns="0" rtlCol="0" anchor="ctr"/>
+          <a:lstStyle/>
+          <a:p>
+            <a:pPr indent="0" marL="0">
+              <a:buNone/>
+            </a:pPr>
+            <a:r>
+              <a:rPr lang="en-US" sz="1050" dirty="0">
+                <a:solidFill>
+                  <a:srgbClr val="17272E"/>
+                </a:solidFill>
+                <a:latin typeface="Calibri" pitchFamily="34" charset="0"/>
+                <a:ea typeface="Calibri" pitchFamily="34" charset="-122"/>
+                <a:cs typeface="Calibri" pitchFamily="34" charset="-120"/>
+              </a:rPr>
+              <a:t>i-STAT 1;9001    80 carts    4 errors</a:t>
+            </a:r>
+            <a:endParaRPr lang="en-US" sz="1050" dirty="0"/>
+          </a:p>
+        </p:txBody>
+      </p:sp>
+      <p:sp>
+        <p:nvSpPr>
+          <p:cNvPr id="29" name="Shape 27"/>
+          <p:cNvSpPr/>
+          <p:nvPr/>
+        </p:nvSpPr>
+        <p:spPr>
+          <a:xfrm>
+            <a:off x="10195560" y="3310128"/>
+            <a:ext cx="960120" cy="274320"/>
+          </a:xfrm>
+          <a:prstGeom prst="roundRect">
+            <a:avLst>
+              <a:gd name="adj" fmla="val 26667"/>
+            </a:avLst>
+          </a:prstGeom>
+          <a:solidFill>
+            <a:srgbClr val="2F5496"/>
+          </a:solidFill>
+          <a:ln/>
+        </p:spPr>
+      </p:sp>
+      <p:sp>
+        <p:nvSpPr>
+          <p:cNvPr id="30" name="Text 28"/>
+          <p:cNvSpPr txBox="1"/>
+          <p:nvPr/>
+        </p:nvSpPr>
+        <p:spPr>
+          <a:xfrm>
+            <a:off x="10195560" y="3310128"/>
+            <a:ext cx="960120" cy="274320"/>
+          </a:xfrm>
+          <a:prstGeom prst="rect">
+            <a:avLst/>
+          </a:prstGeom>
+          <a:noFill/>
+          <a:ln/>
+        </p:spPr>
+        <p:txBody>
+          <a:bodyPr wrap="square" lIns="0" tIns="0" rIns="0" bIns="0" rtlCol="0" anchor="ctr"/>
+          <a:lstStyle/>
+          <a:p>
+            <a:pPr algn="ctr" indent="0" marL="0">
+              <a:buNone/>
+            </a:pPr>
+            <a:r>
+              <a:rPr lang="en-US" sz="1000" b="1" dirty="0">
+                <a:solidFill>
+                  <a:srgbClr val="FFFFFF"/>
+                </a:solidFill>
+                <a:latin typeface="Calibri" pitchFamily="34" charset="0"/>
+                <a:ea typeface="Calibri" pitchFamily="34" charset="-122"/>
+                <a:cs typeface="Calibri" pitchFamily="34" charset="-120"/>
+              </a:rPr>
+              <a:t>5.0% Excellent</a:t>
+            </a:r>
+            <a:endParaRPr lang="en-US" sz="1000" dirty="0"/>
+          </a:p>
+        </p:txBody>
+      </p:sp>
+      <p:sp>
+        <p:nvSpPr>
+          <p:cNvPr id="31" name="Text 29"/>
+          <p:cNvSpPr txBox="1"/>
+          <p:nvPr/>
+        </p:nvSpPr>
+        <p:spPr>
+          <a:xfrm>
+            <a:off x="6629400" y="3675888"/>
+            <a:ext cx="3291840" cy="274320"/>
+          </a:xfrm>
+          <a:prstGeom prst="rect">
+            <a:avLst/>
+          </a:prstGeom>
+          <a:noFill/>
+          <a:ln/>
+        </p:spPr>
+        <p:txBody>
+          <a:bodyPr wrap="square" lIns="0" tIns="0" rIns="0" bIns="0" rtlCol="0" anchor="ctr"/>
+          <a:lstStyle/>
+          <a:p>
+            <a:pPr indent="0" marL="0">
+              <a:buNone/>
+            </a:pPr>
+            <a:r>
+              <a:rPr lang="en-US" sz="1050" dirty="0">
+                <a:solidFill>
+                  <a:srgbClr val="17272E"/>
+                </a:solidFill>
+                <a:latin typeface="Calibri" pitchFamily="34" charset="0"/>
+                <a:ea typeface="Calibri" pitchFamily="34" charset="-122"/>
+                <a:cs typeface="Calibri" pitchFamily="34" charset="-120"/>
+              </a:rPr>
+              <a:t>i-STAT 1;9002    74 carts    5 errors</a:t>
+            </a:r>
+            <a:endParaRPr lang="en-US" sz="1050" dirty="0"/>
+          </a:p>
+        </p:txBody>
+      </p:sp>
+      <p:sp>
+        <p:nvSpPr>
+          <p:cNvPr id="32" name="Shape 30"/>
+          <p:cNvSpPr/>
+          <p:nvPr/>
+        </p:nvSpPr>
+        <p:spPr>
+          <a:xfrm>
+            <a:off x="10195560" y="3675888"/>
+            <a:ext cx="960120" cy="274320"/>
+          </a:xfrm>
+          <a:prstGeom prst="roundRect">
+            <a:avLst>
+              <a:gd name="adj" fmla="val 26667"/>
+            </a:avLst>
+          </a:prstGeom>
+          <a:solidFill>
+            <a:srgbClr val="D96800"/>
+          </a:solidFill>
+          <a:ln/>
+        </p:spPr>
+      </p:sp>
+      <p:sp>
+        <p:nvSpPr>
+          <p:cNvPr id="33" name="Text 31"/>
+          <p:cNvSpPr txBox="1"/>
+          <p:nvPr/>
+        </p:nvSpPr>
+        <p:spPr>
+          <a:xfrm>
+            <a:off x="10195560" y="3675888"/>
+            <a:ext cx="960120" cy="274320"/>
+          </a:xfrm>
+          <a:prstGeom prst="rect">
+            <a:avLst/>
+          </a:prstGeom>
+          <a:noFill/>
+          <a:ln/>
+        </p:spPr>
+        <p:txBody>
+          <a:bodyPr wrap="square" lIns="0" tIns="0" rIns="0" bIns="0" rtlCol="0" anchor="ctr"/>
+          <a:lstStyle/>
+          <a:p>
+            <a:pPr algn="ctr" indent="0" marL="0">
+              <a:buNone/>
+            </a:pPr>
+            <a:r>
+              <a:rPr lang="en-US" sz="1000" b="1" dirty="0">
+                <a:solidFill>
+                  <a:srgbClr val="FFFFFF"/>
+                </a:solidFill>
+                <a:latin typeface="Calibri" pitchFamily="34" charset="0"/>
+                <a:ea typeface="Calibri" pitchFamily="34" charset="-122"/>
+                <a:cs typeface="Calibri" pitchFamily="34" charset="-120"/>
+              </a:rPr>
+              <a:t>6.8% Accept.</a:t>
+            </a:r>
+            <a:endParaRPr lang="en-US" sz="1000" dirty="0"/>
+          </a:p>
+        </p:txBody>
+      </p:sp>
+      <p:sp>
+        <p:nvSpPr>
+          <p:cNvPr id="34" name="Shape 32"/>
+          <p:cNvSpPr/>
+          <p:nvPr/>
+        </p:nvSpPr>
+        <p:spPr>
+          <a:xfrm>
+            <a:off x="548640" y="4233672"/>
+            <a:ext cx="420624" cy="420624"/>
+          </a:xfrm>
+          <a:prstGeom prst="ellipse">
+            <a:avLst/>
+          </a:prstGeom>
+          <a:solidFill>
+            <a:srgbClr val="01485C"/>
+          </a:solidFill>
+          <a:ln/>
+        </p:spPr>
+      </p:sp>
+      <p:sp>
+        <p:nvSpPr>
+          <p:cNvPr id="35" name="Text 33"/>
+          <p:cNvSpPr txBox="1"/>
+          <p:nvPr/>
+        </p:nvSpPr>
+        <p:spPr>
+          <a:xfrm>
+            <a:off x="548640" y="4233672"/>
+            <a:ext cx="420624" cy="420624"/>
+          </a:xfrm>
+          <a:prstGeom prst="rect">
+            <a:avLst/>
+          </a:prstGeom>
+          <a:noFill/>
+          <a:ln/>
+        </p:spPr>
+        <p:txBody>
+          <a:bodyPr wrap="square" lIns="0" tIns="0" rIns="0" bIns="0" rtlCol="0" anchor="ctr"/>
+          <a:lstStyle/>
+          <a:p>
+            <a:pPr algn="ctr" indent="0" marL="0">
+              <a:buNone/>
+            </a:pPr>
+            <a:r>
+              <a:rPr lang="en-US" sz="1500" b="1" dirty="0">
+                <a:solidFill>
+                  <a:srgbClr val="FFFFFF"/>
+                </a:solidFill>
+                <a:latin typeface="Calibri" pitchFamily="34" charset="0"/>
+                <a:ea typeface="Calibri" pitchFamily="34" charset="-122"/>
+                <a:cs typeface="Calibri" pitchFamily="34" charset="-120"/>
+              </a:rPr>
+              <a:t>4</a:t>
+            </a:r>
+            <a:endParaRPr lang="en-US" sz="1500" dirty="0"/>
+          </a:p>
+        </p:txBody>
+      </p:sp>
+      <p:sp>
+        <p:nvSpPr>
+          <p:cNvPr id="36" name="Text 34"/>
+          <p:cNvSpPr txBox="1"/>
+          <p:nvPr/>
+        </p:nvSpPr>
+        <p:spPr>
+          <a:xfrm>
+            <a:off x="1133856" y="4178808"/>
+            <a:ext cx="5029200" cy="859536"/>
+          </a:xfrm>
+          <a:prstGeom prst="rect">
+            <a:avLst/>
+          </a:prstGeom>
+          <a:noFill/>
+          <a:ln/>
+        </p:spPr>
+        <p:txBody>
+          <a:bodyPr wrap="square" lIns="0" tIns="0" rIns="0" bIns="0" rtlCol="0" anchor="t"/>
+          <a:lstStyle/>
+          <a:p>
+            <a:pPr indent="0" marL="0">
+              <a:buNone/>
+            </a:pPr>
+            <a:r>
+              <a:rPr lang="en-US" sz="1300" b="1" dirty="0">
+                <a:solidFill>
+                  <a:srgbClr val="01485C"/>
+                </a:solidFill>
+                <a:latin typeface="Calibri" pitchFamily="34" charset="0"/>
+                <a:ea typeface="Calibri" pitchFamily="34" charset="-122"/>
+                <a:cs typeface="Calibri" pitchFamily="34" charset="-120"/>
+              </a:rPr>
+              <a:t>Simulators Run
+</a:t>
+            </a:r>
+            <a:pPr indent="0" marL="0">
+              <a:buNone/>
+            </a:pPr>
+            <a:r>
+              <a:rPr lang="en-US" sz="1100" dirty="0">
+                <a:solidFill>
+                  <a:srgbClr val="5F7178"/>
+                </a:solidFill>
+                <a:latin typeface="Calibri" pitchFamily="34" charset="0"/>
+                <a:ea typeface="Calibri" pitchFamily="34" charset="-122"/>
+                <a:cs typeface="Calibri" pitchFamily="34" charset="-120"/>
+              </a:rPr>
+              <a:t>Electronic QC (simulator) checks recorded on each device during the month.</a:t>
+            </a:r>
+            <a:endParaRPr lang="en-US" sz="1300" dirty="0"/>
+          </a:p>
+        </p:txBody>
+      </p:sp>
+      <p:sp>
+        <p:nvSpPr>
+          <p:cNvPr id="37" name="Shape 35"/>
+          <p:cNvSpPr/>
+          <p:nvPr/>
+        </p:nvSpPr>
+        <p:spPr>
+          <a:xfrm>
+            <a:off x="6400800" y="4187952"/>
+            <a:ext cx="5212080" cy="859536"/>
+          </a:xfrm>
+          <a:prstGeom prst="roundRect">
+            <a:avLst>
+              <a:gd name="adj" fmla="val 8511"/>
+            </a:avLst>
+          </a:prstGeom>
+          <a:solidFill>
+            <a:srgbClr val="FFFFFF"/>
+          </a:solidFill>
+          <a:ln w="15875">
+            <a:solidFill>
+              <a:srgbClr val="E2E8EA"/>
+            </a:solidFill>
+            <a:prstDash val="solid"/>
+          </a:ln>
+        </p:spPr>
+      </p:sp>
+      <p:sp>
+        <p:nvSpPr>
+          <p:cNvPr id="38" name="Text 36"/>
+          <p:cNvSpPr txBox="1"/>
+          <p:nvPr/>
+        </p:nvSpPr>
+        <p:spPr>
+          <a:xfrm>
+            <a:off x="6629400" y="4187952"/>
+            <a:ext cx="4754880" cy="859536"/>
+          </a:xfrm>
+          <a:prstGeom prst="rect">
+            <a:avLst/>
+          </a:prstGeom>
+          <a:noFill/>
+          <a:ln/>
+        </p:spPr>
+        <p:txBody>
+          <a:bodyPr wrap="square" lIns="0" tIns="0" rIns="0" bIns="0" rtlCol="0" anchor="ctr"/>
+          <a:lstStyle/>
+          <a:p>
+            <a:pPr indent="0" marL="0">
+              <a:buNone/>
+            </a:pPr>
+            <a:r>
+              <a:rPr lang="en-US" sz="1100" b="1" dirty="0">
+                <a:solidFill>
+                  <a:srgbClr val="01485C"/>
+                </a:solidFill>
+                <a:latin typeface="Calibri" pitchFamily="34" charset="0"/>
+                <a:ea typeface="Calibri" pitchFamily="34" charset="-122"/>
+                <a:cs typeface="Calibri" pitchFamily="34" charset="-120"/>
+              </a:rPr>
+              <a:t>EQC checks:   </a:t>
+            </a:r>
+            <a:pPr indent="0" marL="0">
+              <a:buNone/>
+            </a:pPr>
+            <a:r>
+              <a:rPr lang="en-US" sz="1100" dirty="0">
+                <a:solidFill>
+                  <a:srgbClr val="17272E"/>
+                </a:solidFill>
+                <a:latin typeface="Calibri" pitchFamily="34" charset="0"/>
+                <a:ea typeface="Calibri" pitchFamily="34" charset="-122"/>
+                <a:cs typeface="Calibri" pitchFamily="34" charset="-120"/>
+              </a:rPr>
+              <a:t>9001 — 8 ✓      9002 — 6 ✓      9003 — 7 ✓</a:t>
+            </a:r>
+            <a:endParaRPr lang="en-US" sz="1100" dirty="0"/>
+          </a:p>
+        </p:txBody>
+      </p:sp>
+      <p:sp>
+        <p:nvSpPr>
+          <p:cNvPr id="39" name="Shape 37"/>
+          <p:cNvSpPr/>
+          <p:nvPr/>
+        </p:nvSpPr>
+        <p:spPr>
+          <a:xfrm>
+            <a:off x="548640" y="5202936"/>
+            <a:ext cx="420624" cy="420624"/>
+          </a:xfrm>
+          <a:prstGeom prst="ellipse">
+            <a:avLst/>
+          </a:prstGeom>
+          <a:solidFill>
+            <a:srgbClr val="01485C"/>
+          </a:solidFill>
+          <a:ln/>
+        </p:spPr>
+      </p:sp>
+      <p:sp>
+        <p:nvSpPr>
+          <p:cNvPr id="40" name="Text 38"/>
+          <p:cNvSpPr txBox="1"/>
+          <p:nvPr/>
+        </p:nvSpPr>
+        <p:spPr>
+          <a:xfrm>
+            <a:off x="548640" y="5202936"/>
+            <a:ext cx="420624" cy="420624"/>
+          </a:xfrm>
+          <a:prstGeom prst="rect">
+            <a:avLst/>
+          </a:prstGeom>
+          <a:noFill/>
+          <a:ln/>
+        </p:spPr>
+        <p:txBody>
+          <a:bodyPr wrap="square" lIns="0" tIns="0" rIns="0" bIns="0" rtlCol="0" anchor="ctr"/>
+          <a:lstStyle/>
+          <a:p>
+            <a:pPr algn="ctr" indent="0" marL="0">
+              <a:buNone/>
+            </a:pPr>
+            <a:r>
+              <a:rPr lang="en-US" sz="1500" b="1" dirty="0">
+                <a:solidFill>
+                  <a:srgbClr val="FFFFFF"/>
+                </a:solidFill>
+                <a:latin typeface="Calibri" pitchFamily="34" charset="0"/>
+                <a:ea typeface="Calibri" pitchFamily="34" charset="-122"/>
+                <a:cs typeface="Calibri" pitchFamily="34" charset="-120"/>
+              </a:rPr>
+              <a:t>5</a:t>
+            </a:r>
+            <a:endParaRPr lang="en-US" sz="1500" dirty="0"/>
+          </a:p>
+        </p:txBody>
+      </p:sp>
+      <p:sp>
+        <p:nvSpPr>
+          <p:cNvPr id="41" name="Text 39"/>
+          <p:cNvSpPr txBox="1"/>
+          <p:nvPr/>
+        </p:nvSpPr>
+        <p:spPr>
+          <a:xfrm>
+            <a:off x="1133856" y="5148072"/>
+            <a:ext cx="5029200" cy="859536"/>
+          </a:xfrm>
+          <a:prstGeom prst="rect">
+            <a:avLst/>
+          </a:prstGeom>
+          <a:noFill/>
+          <a:ln/>
+        </p:spPr>
+        <p:txBody>
+          <a:bodyPr wrap="square" lIns="0" tIns="0" rIns="0" bIns="0" rtlCol="0" anchor="t"/>
+          <a:lstStyle/>
+          <a:p>
+            <a:pPr indent="0" marL="0">
+              <a:buNone/>
+            </a:pPr>
+            <a:r>
+              <a:rPr lang="en-US" sz="1300" b="1" dirty="0">
+                <a:solidFill>
+                  <a:srgbClr val="01485C"/>
+                </a:solidFill>
+                <a:latin typeface="Calibri" pitchFamily="34" charset="0"/>
+                <a:ea typeface="Calibri" pitchFamily="34" charset="-122"/>
+                <a:cs typeface="Calibri" pitchFamily="34" charset="-120"/>
+              </a:rPr>
+              <a:t>Monthly Ceramic Cleaning
+</a:t>
+            </a:r>
+            <a:pPr indent="0" marL="0">
+              <a:buNone/>
+            </a:pPr>
+            <a:r>
+              <a:rPr lang="en-US" sz="1100" dirty="0">
+                <a:solidFill>
+                  <a:srgbClr val="5F7178"/>
+                </a:solidFill>
+                <a:latin typeface="Calibri" pitchFamily="34" charset="0"/>
+                <a:ea typeface="Calibri" pitchFamily="34" charset="-122"/>
+                <a:cs typeface="Calibri" pitchFamily="34" charset="-120"/>
+              </a:rPr>
+              <a:t>Each analyser listed with its cleaning-cartridge count. Every i-STAT needs 3 per month; any shortfall fails the department.</a:t>
+            </a:r>
+            <a:endParaRPr lang="en-US" sz="1300" dirty="0"/>
+          </a:p>
+        </p:txBody>
+      </p:sp>
+      <p:sp>
+        <p:nvSpPr>
+          <p:cNvPr id="42" name="Shape 40"/>
+          <p:cNvSpPr/>
+          <p:nvPr/>
+        </p:nvSpPr>
+        <p:spPr>
+          <a:xfrm>
+            <a:off x="6400800" y="5157216"/>
+            <a:ext cx="5212080" cy="859536"/>
+          </a:xfrm>
+          <a:prstGeom prst="roundRect">
+            <a:avLst>
+              <a:gd name="adj" fmla="val 8511"/>
+            </a:avLst>
+          </a:prstGeom>
+          <a:solidFill>
+            <a:srgbClr val="FFFFFF"/>
+          </a:solidFill>
+          <a:ln w="15875">
+            <a:solidFill>
+              <a:srgbClr val="E2E8EA"/>
+            </a:solidFill>
+            <a:prstDash val="solid"/>
+          </a:ln>
+        </p:spPr>
+      </p:sp>
+      <p:sp>
+        <p:nvSpPr>
+          <p:cNvPr id="43" name="Shape 41"/>
+          <p:cNvSpPr/>
+          <p:nvPr/>
+        </p:nvSpPr>
+        <p:spPr>
+          <a:xfrm>
+            <a:off x="6629400" y="5404104"/>
+            <a:ext cx="1554480" cy="365760"/>
+          </a:xfrm>
+          <a:prstGeom prst="roundRect">
+            <a:avLst>
+              <a:gd name="adj" fmla="val 25000"/>
+            </a:avLst>
+          </a:prstGeom>
+          <a:solidFill>
+            <a:srgbClr val="538135"/>
+          </a:solidFill>
+          <a:ln/>
+        </p:spPr>
+      </p:sp>
+      <p:sp>
+        <p:nvSpPr>
+          <p:cNvPr id="44" name="Text 42"/>
+          <p:cNvSpPr txBox="1"/>
+          <p:nvPr/>
+        </p:nvSpPr>
+        <p:spPr>
+          <a:xfrm>
+            <a:off x="6629400" y="5404104"/>
+            <a:ext cx="1554480" cy="365760"/>
+          </a:xfrm>
+          <a:prstGeom prst="rect">
+            <a:avLst/>
+          </a:prstGeom>
+          <a:noFill/>
+          <a:ln/>
+        </p:spPr>
+        <p:txBody>
+          <a:bodyPr wrap="square" lIns="0" tIns="0" rIns="0" bIns="0" rtlCol="0" anchor="ctr"/>
+          <a:lstStyle/>
+          <a:p>
+            <a:pPr algn="ctr" indent="0" marL="0">
+              <a:buNone/>
+            </a:pPr>
+            <a:r>
+              <a:rPr lang="en-US" sz="1100" b="1" dirty="0">
+                <a:solidFill>
+                  <a:srgbClr val="FFFFFF"/>
+                </a:solidFill>
+                <a:latin typeface="Calibri" pitchFamily="34" charset="0"/>
+                <a:ea typeface="Calibri" pitchFamily="34" charset="-122"/>
+                <a:cs typeface="Calibri" pitchFamily="34" charset="-120"/>
+              </a:rPr>
+              <a:t>Completed ✓</a:t>
+            </a:r>
+            <a:endParaRPr lang="en-US" sz="1100" dirty="0"/>
+          </a:p>
+        </p:txBody>
+      </p:sp>
+      <p:sp>
+        <p:nvSpPr>
+          <p:cNvPr id="45" name="Text 43"/>
+          <p:cNvSpPr txBox="1"/>
+          <p:nvPr/>
+        </p:nvSpPr>
+        <p:spPr>
+          <a:xfrm>
+            <a:off x="8366760" y="5404104"/>
+            <a:ext cx="3017520" cy="365760"/>
+          </a:xfrm>
+          <a:prstGeom prst="rect">
+            <a:avLst/>
+          </a:prstGeom>
+          <a:noFill/>
+          <a:ln/>
+        </p:spPr>
+        <p:txBody>
+          <a:bodyPr wrap="square" lIns="0" tIns="0" rIns="0" bIns="0" rtlCol="0" anchor="ctr"/>
+          <a:lstStyle/>
+          <a:p>
+            <a:pPr indent="0" marL="0">
+              <a:buNone/>
+            </a:pPr>
+            <a:r>
+              <a:rPr lang="en-US" sz="1050" i="1" dirty="0">
+                <a:solidFill>
+                  <a:srgbClr val="5F7178"/>
+                </a:solidFill>
+                <a:latin typeface="Calibri" pitchFamily="34" charset="0"/>
+                <a:ea typeface="Calibri" pitchFamily="34" charset="-122"/>
+                <a:cs typeface="Calibri" pitchFamily="34" charset="-120"/>
+              </a:rPr>
+              <a:t>— listed per analyser; any analyser under 3 shows a red Fail</a:t>
+            </a:r>
+            <a:endParaRPr lang="en-US" sz="1050" dirty="0"/>
+          </a:p>
+        </p:txBody>
+      </p:sp>
+      <p:sp>
+        <p:nvSpPr>
+          <p:cNvPr id="46" name="Text 44"/>
+          <p:cNvSpPr txBox="1"/>
+          <p:nvPr/>
+        </p:nvSpPr>
+        <p:spPr>
+          <a:xfrm>
+            <a:off x="6400800" y="6163056"/>
+            <a:ext cx="5212080" cy="320040"/>
+          </a:xfrm>
+          <a:prstGeom prst="rect">
+            <a:avLst/>
+          </a:prstGeom>
+          <a:noFill/>
+          <a:ln/>
+        </p:spPr>
+        <p:txBody>
+          <a:bodyPr wrap="square" lIns="0" tIns="0" rIns="0" bIns="0" rtlCol="0" anchor="ctr"/>
+          <a:lstStyle/>
+          <a:p>
+            <a:pPr indent="0" marL="0">
+              <a:buNone/>
+            </a:pPr>
+            <a:r>
+              <a:rPr lang="en-US" sz="1000" i="1" dirty="0">
+                <a:solidFill>
+                  <a:srgbClr val="5F7178"/>
+                </a:solidFill>
+                <a:latin typeface="Calibri" pitchFamily="34" charset="0"/>
+                <a:ea typeface="Calibri" pitchFamily="34" charset="-122"/>
+                <a:cs typeface="Calibri" pitchFamily="34" charset="-120"/>
+              </a:rPr>
+              <a:t>Examples shown with fictional data — layouts match the real Word report.</a:t>
+            </a:r>
+            <a:endParaRPr lang="en-US" sz="1000" dirty="0"/>
+          </a:p>
+        </p:txBody>
+      </p:sp>
+      <p:sp>
+        <p:nvSpPr>
+          <p:cNvPr id="47" name="Shape 45"/>
+          <p:cNvSpPr/>
+          <p:nvPr/>
+        </p:nvSpPr>
+        <p:spPr>
+          <a:xfrm>
+            <a:off x="0" y="6793992"/>
+            <a:ext cx="2040636" cy="64008"/>
+          </a:xfrm>
+          <a:prstGeom prst="rect">
+            <a:avLst/>
+          </a:prstGeom>
+          <a:solidFill>
+            <a:srgbClr val="01485C"/>
+          </a:solidFill>
+          <a:ln/>
+        </p:spPr>
+      </p:sp>
+      <p:sp>
+        <p:nvSpPr>
+          <p:cNvPr id="48" name="Shape 46"/>
+          <p:cNvSpPr/>
+          <p:nvPr/>
+        </p:nvSpPr>
+        <p:spPr>
+          <a:xfrm>
+            <a:off x="2031492" y="6793992"/>
+            <a:ext cx="2040636" cy="64008"/>
+          </a:xfrm>
+          <a:prstGeom prst="rect">
+            <a:avLst/>
+          </a:prstGeom>
+          <a:solidFill>
+            <a:srgbClr val="146175"/>
+          </a:solidFill>
+          <a:ln/>
+        </p:spPr>
+      </p:sp>
+      <p:sp>
+        <p:nvSpPr>
+          <p:cNvPr id="49" name="Shape 47"/>
+          <p:cNvSpPr/>
+          <p:nvPr/>
+        </p:nvSpPr>
+        <p:spPr>
+          <a:xfrm>
+            <a:off x="4062984" y="6793992"/>
+            <a:ext cx="2040636" cy="64008"/>
+          </a:xfrm>
+          <a:prstGeom prst="rect">
+            <a:avLst/>
+          </a:prstGeom>
+          <a:solidFill>
+            <a:srgbClr val="11B5AE"/>
+          </a:solidFill>
+          <a:ln/>
+        </p:spPr>
+      </p:sp>
+      <p:sp>
+        <p:nvSpPr>
+          <p:cNvPr id="50" name="Shape 48"/>
+          <p:cNvSpPr/>
+          <p:nvPr/>
+        </p:nvSpPr>
+        <p:spPr>
+          <a:xfrm>
+            <a:off x="6094476" y="6793992"/>
+            <a:ext cx="2040636" cy="64008"/>
+          </a:xfrm>
+          <a:prstGeom prst="rect">
+            <a:avLst/>
+          </a:prstGeom>
+          <a:solidFill>
+            <a:srgbClr val="6CCAD4"/>
+          </a:solidFill>
+          <a:ln/>
+        </p:spPr>
+      </p:sp>
+      <p:sp>
+        <p:nvSpPr>
+          <p:cNvPr id="51" name="Shape 49"/>
+          <p:cNvSpPr/>
+          <p:nvPr/>
+        </p:nvSpPr>
+        <p:spPr>
+          <a:xfrm>
+            <a:off x="8125968" y="6793992"/>
+            <a:ext cx="2040636" cy="64008"/>
+          </a:xfrm>
+          <a:prstGeom prst="rect">
+            <a:avLst/>
+          </a:prstGeom>
+          <a:solidFill>
+            <a:srgbClr val="7FC04C"/>
+          </a:solidFill>
+          <a:ln/>
+        </p:spPr>
+      </p:sp>
+      <p:sp>
+        <p:nvSpPr>
+          <p:cNvPr id="52" name="Shape 50"/>
+          <p:cNvSpPr/>
+          <p:nvPr/>
+        </p:nvSpPr>
+        <p:spPr>
+          <a:xfrm>
+            <a:off x="10157460" y="6793992"/>
+            <a:ext cx="2040636" cy="64008"/>
+          </a:xfrm>
+          <a:prstGeom prst="rect">
+            <a:avLst/>
+          </a:prstGeom>
+          <a:solidFill>
+            <a:srgbClr val="E1DD57"/>
+          </a:solidFill>
+          <a:ln/>
+        </p:spPr>
+      </p:sp>
+    </p:spTree>
+  </p:cSld>
+  <p:clrMapOvr>
+    <a:masterClrMapping/>
+  </p:clrMapOvr>
+</p:sld>
+</file>
+
+<file path=ppt/slides/slide11.xml><?xml version="1.0" encoding="utf-8"?>
 <p:sld xmlns:a="http://schemas.openxmlformats.org/drawingml/2006/main" xmlns:r="http://schemas.openxmlformats.org/officeDocument/2006/relationships" xmlns:p="http://schemas.openxmlformats.org/presentationml/2006/main">
   <p:cSld name="Slide 10">
     <p:bg>
@@ -3448,7 +5140,7 @@
 </p:sld>
 </file>
 
-<file path=ppt/slides/slide11.xml><?xml version="1.0" encoding="utf-8"?>
+<file path=ppt/slides/slide12.xml><?xml version="1.0" encoding="utf-8"?>
 <p:sld xmlns:a="http://schemas.openxmlformats.org/drawingml/2006/main" xmlns:r="http://schemas.openxmlformats.org/officeDocument/2006/relationships" xmlns:p="http://schemas.openxmlformats.org/presentationml/2006/main">
   <p:cSld name="Slide 11">
     <p:bg>
@@ -5125,7 +6817,7 @@
 </p:sld>
 </file>
 
-<file path=ppt/slides/slide12.xml><?xml version="1.0" encoding="utf-8"?>
+<file path=ppt/slides/slide13.xml><?xml version="1.0" encoding="utf-8"?>
 <p:sld xmlns:a="http://schemas.openxmlformats.org/drawingml/2006/main" xmlns:p="http://schemas.openxmlformats.org/presentationml/2006/main" xmlns:r="http://schemas.openxmlformats.org/officeDocument/2006/relationships">
   <p:cSld>
     <p:spTree>
@@ -5783,7 +7475,7 @@
 </p:sld>
 </file>
 
-<file path=ppt/slides/slide13.xml><?xml version="1.0" encoding="utf-8"?>
+<file path=ppt/slides/slide14.xml><?xml version="1.0" encoding="utf-8"?>
 <p:sld xmlns:a="http://schemas.openxmlformats.org/drawingml/2006/main" xmlns:r="http://schemas.openxmlformats.org/officeDocument/2006/relationships" xmlns:p="http://schemas.openxmlformats.org/presentationml/2006/main">
   <p:cSld name="Slide 12">
     <p:bg>
@@ -7233,7 +8925,7 @@
 </p:sld>
 </file>
 
-<file path=ppt/slides/slide14.xml><?xml version="1.0" encoding="utf-8"?>
+<file path=ppt/slides/slide15.xml><?xml version="1.0" encoding="utf-8"?>
 <p:sld xmlns:a="http://schemas.openxmlformats.org/drawingml/2006/main" xmlns:r="http://schemas.openxmlformats.org/officeDocument/2006/relationships" xmlns:p="http://schemas.openxmlformats.org/presentationml/2006/main">
   <p:cSld name="Slide 13">
     <p:bg>
@@ -7925,7 +9617,7 @@
 </p:sld>
 </file>
 
-<file path=ppt/slides/slide15.xml><?xml version="1.0" encoding="utf-8"?>
+<file path=ppt/slides/slide16.xml><?xml version="1.0" encoding="utf-8"?>
 <p:sld xmlns:a="http://schemas.openxmlformats.org/drawingml/2006/main" xmlns:r="http://schemas.openxmlformats.org/officeDocument/2006/relationships" xmlns:p="http://schemas.openxmlformats.org/presentationml/2006/main">
   <p:cSld name="Slide 14">
     <p:bg>
@@ -9158,7 +10850,7 @@
 </p:sld>
 </file>
 
-<file path=ppt/slides/slide16.xml><?xml version="1.0" encoding="utf-8"?>
+<file path=ppt/slides/slide17.xml><?xml version="1.0" encoding="utf-8"?>
 <p:sld xmlns:a="http://schemas.openxmlformats.org/drawingml/2006/main" xmlns:r="http://schemas.openxmlformats.org/officeDocument/2006/relationships" xmlns:p="http://schemas.openxmlformats.org/presentationml/2006/main">
   <p:cSld name="Slide 15">
     <p:bg>
@@ -10217,7 +11909,7 @@
 </p:sld>
 </file>
 
-<file path=ppt/slides/slide17.xml><?xml version="1.0" encoding="utf-8"?>
+<file path=ppt/slides/slide18.xml><?xml version="1.0" encoding="utf-8"?>
 <p:sld xmlns:a="http://schemas.openxmlformats.org/drawingml/2006/main" xmlns:r="http://schemas.openxmlformats.org/officeDocument/2006/relationships" xmlns:p="http://schemas.openxmlformats.org/presentationml/2006/main">
   <p:cSld name="Slide 16">
     <p:bg>
@@ -11632,7 +13324,7 @@
 </p:sld>
 </file>
 
-<file path=ppt/slides/slide18.xml><?xml version="1.0" encoding="utf-8"?>
+<file path=ppt/slides/slide19.xml><?xml version="1.0" encoding="utf-8"?>
 <p:sld xmlns:a="http://schemas.openxmlformats.org/drawingml/2006/main" xmlns:r="http://schemas.openxmlformats.org/officeDocument/2006/relationships" xmlns:p="http://schemas.openxmlformats.org/presentationml/2006/main">
   <p:cSld name="Slide 17">
     <p:bg>
@@ -12900,664 +14592,6 @@
       <p:sp>
         <p:nvSpPr>
           <p:cNvPr id="38" name="Shape 35"/>
-          <p:cNvSpPr/>
-          <p:nvPr/>
-        </p:nvSpPr>
-        <p:spPr>
-          <a:xfrm>
-            <a:off x="10157460" y="6793992"/>
-            <a:ext cx="2040636" cy="64008"/>
-          </a:xfrm>
-          <a:prstGeom prst="rect">
-            <a:avLst/>
-          </a:prstGeom>
-          <a:solidFill>
-            <a:srgbClr val="E1DD57"/>
-          </a:solidFill>
-          <a:ln/>
-        </p:spPr>
-      </p:sp>
-    </p:spTree>
-  </p:cSld>
-  <p:clrMapOvr>
-    <a:masterClrMapping/>
-  </p:clrMapOvr>
-</p:sld>
-</file>
-
-<file path=ppt/slides/slide19.xml><?xml version="1.0" encoding="utf-8"?>
-<p:sld xmlns:a="http://schemas.openxmlformats.org/drawingml/2006/main" xmlns:p="http://schemas.openxmlformats.org/presentationml/2006/main" xmlns:r="http://schemas.openxmlformats.org/officeDocument/2006/relationships">
-  <p:cSld>
-    <p:spTree>
-      <p:nvGrpSpPr>
-        <p:cNvPr id="1" name=""/>
-        <p:cNvGrpSpPr/>
-        <p:nvPr/>
-      </p:nvGrpSpPr>
-      <p:grpSpPr/>
-      <p:sp>
-        <p:nvSpPr>
-          <p:cNvPr id="2" name="Text 0"/>
-          <p:cNvSpPr txBox="1"/>
-          <p:nvPr/>
-        </p:nvSpPr>
-        <p:spPr>
-          <a:xfrm>
-            <a:off x="548640" y="320040"/>
-            <a:ext cx="11064240" cy="685800"/>
-          </a:xfrm>
-          <a:prstGeom prst="rect">
-            <a:avLst/>
-          </a:prstGeom>
-          <a:noFill/>
-          <a:ln/>
-        </p:spPr>
-        <p:txBody>
-          <a:bodyPr wrap="square" lIns="0" tIns="0" rIns="0" bIns="0" rtlCol="0" anchor="ctr"/>
-          <a:lstStyle/>
-          <a:p>
-            <a:pPr indent="0" marL="0">
-              <a:buNone/>
-            </a:pPr>
-            <a:r>
-              <a:rPr lang="en-US" sz="3000" b="1" dirty="0">
-                <a:solidFill>
-                  <a:srgbClr val="01485C"/>
-                </a:solidFill>
-                <a:latin typeface="Calibri" pitchFamily="34" charset="0"/>
-                <a:ea typeface="Calibri" pitchFamily="34" charset="-122"/>
-                <a:cs typeface="Calibri" pitchFamily="34" charset="-120"/>
-              </a:rPr>
-              <a:t>Licensing a PC (first use on a computer)</a:t>
-            </a:r>
-            <a:endParaRPr lang="en-US" sz="3000" dirty="0"/>
-          </a:p>
-        </p:txBody>
-      </p:sp>
-      <p:sp>
-        <p:nvSpPr>
-          <p:cNvPr id="3" name="Shape 1"/>
-          <p:cNvSpPr/>
-          <p:nvPr/>
-        </p:nvSpPr>
-        <p:spPr>
-          <a:xfrm>
-            <a:off x="9784080" y="384048"/>
-            <a:ext cx="1828800" cy="457200"/>
-          </a:xfrm>
-          <a:prstGeom prst="roundRect">
-            <a:avLst>
-              <a:gd name="adj" fmla="val 50000"/>
-            </a:avLst>
-          </a:prstGeom>
-          <a:solidFill>
-            <a:srgbClr val="01485C"/>
-          </a:solidFill>
-          <a:ln/>
-        </p:spPr>
-        <p:txBody>
-          <a:bodyPr/>
-          <a:p/>
-        </p:txBody>
-      </p:sp>
-      <p:sp>
-        <p:nvSpPr>
-          <p:cNvPr id="4" name="Text 2"/>
-          <p:cNvSpPr txBox="1"/>
-          <p:nvPr/>
-        </p:nvSpPr>
-        <p:spPr>
-          <a:xfrm>
-            <a:off x="9784080" y="384048"/>
-            <a:ext cx="1828800" cy="457200"/>
-          </a:xfrm>
-          <a:prstGeom prst="rect">
-            <a:avLst/>
-          </a:prstGeom>
-          <a:noFill/>
-          <a:ln/>
-        </p:spPr>
-        <p:txBody>
-          <a:bodyPr wrap="square" lIns="0" tIns="0" rIns="0" bIns="0" rtlCol="0" anchor="ctr"/>
-          <a:lstStyle/>
-          <a:p>
-            <a:pPr algn="ctr" indent="0" marL="0">
-              <a:buNone/>
-            </a:pPr>
-            <a:r>
-              <a:rPr lang="en-US" sz="1500" b="1" dirty="0">
-                <a:solidFill>
-                  <a:srgbClr val="FFFFFF"/>
-                </a:solidFill>
-                <a:latin typeface="Calibri" pitchFamily="34" charset="0"/>
-                <a:ea typeface="Calibri" pitchFamily="34" charset="-122"/>
-                <a:cs typeface="Calibri" pitchFamily="34" charset="-120"/>
-              </a:rPr>
-              <a:t>BOTH</a:t>
-            </a:r>
-            <a:endParaRPr lang="en-US" sz="1500" dirty="0"/>
-          </a:p>
-        </p:txBody>
-      </p:sp>
-      <p:sp>
-        <p:nvSpPr>
-          <p:cNvPr id="5" name="Shape 3"/>
-          <p:cNvSpPr/>
-          <p:nvPr/>
-        </p:nvSpPr>
-        <p:spPr>
-          <a:xfrm>
-            <a:off x="548640" y="1463040"/>
-            <a:ext cx="5486400" cy="2103120"/>
-          </a:xfrm>
-          <a:prstGeom prst="roundRect">
-            <a:avLst>
-              <a:gd name="adj" fmla="val 5217"/>
-            </a:avLst>
-          </a:prstGeom>
-          <a:solidFill>
-            <a:srgbClr val="E5F2F0"/>
-          </a:solidFill>
-          <a:ln/>
-        </p:spPr>
-        <p:txBody>
-          <a:bodyPr/>
-          <a:p/>
-        </p:txBody>
-      </p:sp>
-      <p:sp>
-        <p:nvSpPr>
-          <p:cNvPr id="6" name="Text 4"/>
-          <p:cNvSpPr txBox="1"/>
-          <p:nvPr/>
-        </p:nvSpPr>
-        <p:spPr>
-          <a:xfrm>
-            <a:off x="822960" y="1664208"/>
-            <a:ext cx="4937760" cy="411480"/>
-          </a:xfrm>
-          <a:prstGeom prst="rect">
-            <a:avLst/>
-          </a:prstGeom>
-          <a:noFill/>
-          <a:ln/>
-        </p:spPr>
-        <p:txBody>
-          <a:bodyPr wrap="square" lIns="0" tIns="0" rIns="0" bIns="0" rtlCol="0" anchor="ctr"/>
-          <a:lstStyle/>
-          <a:p>
-            <a:pPr indent="0" marL="0">
-              <a:buNone/>
-            </a:pPr>
-            <a:r>
-              <a:rPr lang="en-US" sz="1600" b="1" dirty="0">
-                <a:solidFill>
-                  <a:srgbClr val="01485C"/>
-                </a:solidFill>
-                <a:latin typeface="Calibri" pitchFamily="34" charset="0"/>
-                <a:ea typeface="Calibri" pitchFamily="34" charset="-122"/>
-                <a:cs typeface="Calibri" pitchFamily="34" charset="-120"/>
-              </a:rPr>
-              <a:t>The lock card</a:t>
-            </a:r>
-            <a:endParaRPr lang="en-US" sz="1600" dirty="0"/>
-          </a:p>
-        </p:txBody>
-      </p:sp>
-      <p:sp>
-        <p:nvSpPr>
-          <p:cNvPr id="7" name="Text 5"/>
-          <p:cNvSpPr txBox="1"/>
-          <p:nvPr/>
-        </p:nvSpPr>
-        <p:spPr>
-          <a:xfrm>
-            <a:off x="822960" y="2148840"/>
-            <a:ext cx="4937760" cy="1463040"/>
-          </a:xfrm>
-          <a:prstGeom prst="rect">
-            <a:avLst/>
-          </a:prstGeom>
-          <a:noFill/>
-          <a:ln/>
-        </p:spPr>
-        <p:txBody>
-          <a:bodyPr wrap="square" lIns="0" tIns="0" rIns="0" bIns="0" rtlCol="0" anchor="ctr"/>
-          <a:lstStyle/>
-          <a:p>
-            <a:pPr indent="0" marL="0">
-              <a:buNone/>
-            </a:pPr>
-            <a:r>
-              <a:rPr lang="en-US" sz="1200" dirty="0">
-                <a:solidFill>
-                  <a:srgbClr val="17272E"/>
-                </a:solidFill>
-                <a:latin typeface="Calibri" pitchFamily="34" charset="0"/>
-                <a:ea typeface="Calibri" pitchFamily="34" charset="-122"/>
-                <a:cs typeface="Calibri" pitchFamily="34" charset="-120"/>
-              </a:rPr>
-              <a:t>On a PC without a licence the selection page shows PC NOT LICENSED with the machine ID and hostname instead of the report-type drop-down. Nothing runs until a licence covering this PC is installed — the engines show a lock page too.</a:t>
-            </a:r>
-            <a:endParaRPr lang="en-US" sz="1300" dirty="0"/>
-          </a:p>
-        </p:txBody>
-      </p:sp>
-      <p:sp>
-        <p:nvSpPr>
-          <p:cNvPr id="8" name="Shape 6"/>
-          <p:cNvSpPr/>
-          <p:nvPr/>
-        </p:nvSpPr>
-        <p:spPr>
-          <a:xfrm>
-            <a:off x="6172200" y="1463040"/>
-            <a:ext cx="5486400" cy="2103120"/>
-          </a:xfrm>
-          <a:prstGeom prst="roundRect">
-            <a:avLst>
-              <a:gd name="adj" fmla="val 5217"/>
-            </a:avLst>
-          </a:prstGeom>
-          <a:solidFill>
-            <a:srgbClr val="FDF0E4"/>
-          </a:solidFill>
-          <a:ln/>
-        </p:spPr>
-        <p:txBody>
-          <a:bodyPr/>
-          <a:p/>
-        </p:txBody>
-      </p:sp>
-      <p:sp>
-        <p:nvSpPr>
-          <p:cNvPr id="9" name="Text 7"/>
-          <p:cNvSpPr txBox="1"/>
-          <p:nvPr/>
-        </p:nvSpPr>
-        <p:spPr>
-          <a:xfrm>
-            <a:off x="6446520" y="1664208"/>
-            <a:ext cx="4937760" cy="411480"/>
-          </a:xfrm>
-          <a:prstGeom prst="rect">
-            <a:avLst/>
-          </a:prstGeom>
-          <a:noFill/>
-          <a:ln/>
-        </p:spPr>
-        <p:txBody>
-          <a:bodyPr wrap="square" lIns="0" tIns="0" rIns="0" bIns="0" rtlCol="0" anchor="ctr"/>
-          <a:lstStyle/>
-          <a:p>
-            <a:pPr indent="0" marL="0">
-              <a:buNone/>
-            </a:pPr>
-            <a:r>
-              <a:rPr lang="en-US" sz="1600" b="1" dirty="0">
-                <a:solidFill>
-                  <a:srgbClr val="B4540A"/>
-                </a:solidFill>
-                <a:latin typeface="Calibri" pitchFamily="34" charset="0"/>
-                <a:ea typeface="Calibri" pitchFamily="34" charset="-122"/>
-                <a:cs typeface="Calibri" pitchFamily="34" charset="-120"/>
-              </a:rPr>
-              <a:t>Getting a licence</a:t>
-            </a:r>
-            <a:endParaRPr lang="en-US" sz="1600" dirty="0"/>
-          </a:p>
-        </p:txBody>
-      </p:sp>
-      <p:sp>
-        <p:nvSpPr>
-          <p:cNvPr id="10" name="Text 8"/>
-          <p:cNvSpPr txBox="1"/>
-          <p:nvPr/>
-        </p:nvSpPr>
-        <p:spPr>
-          <a:xfrm>
-            <a:off x="6446520" y="2148840"/>
-            <a:ext cx="4937760" cy="1463040"/>
-          </a:xfrm>
-          <a:prstGeom prst="rect">
-            <a:avLst/>
-          </a:prstGeom>
-          <a:noFill/>
-          <a:ln/>
-        </p:spPr>
-        <p:txBody>
-          <a:bodyPr wrap="square" lIns="0" tIns="0" rIns="0" bIns="0" rtlCol="0" anchor="ctr"/>
-          <a:lstStyle/>
-          <a:p>
-            <a:pPr indent="0" marL="0">
-              <a:buNone/>
-            </a:pPr>
-            <a:r>
-              <a:rPr lang="en-US" sz="1200" dirty="0">
-                <a:solidFill>
-                  <a:srgbClr val="17272E"/>
-                </a:solidFill>
-                <a:latin typeface="Calibri" pitchFamily="34" charset="0"/>
-                <a:ea typeface="Calibri" pitchFamily="34" charset="-122"/>
-                <a:cs typeface="Calibri" pitchFamily="34" charset="-120"/>
-              </a:rPr>
-              <a:t>Send the machine ID to the PoC lead. You receive a small .lic file issued for that PC, valid for 12 months. Licences cannot be created on the drive — only the PoC lead’s keygen can issue one.</a:t>
-            </a:r>
-            <a:endParaRPr lang="en-US" sz="1300" dirty="0"/>
-          </a:p>
-        </p:txBody>
-      </p:sp>
-      <p:sp>
-        <p:nvSpPr>
-          <p:cNvPr id="11" name="Shape 9"/>
-          <p:cNvSpPr/>
-          <p:nvPr/>
-        </p:nvSpPr>
-        <p:spPr>
-          <a:xfrm>
-            <a:off x="548640" y="3749040"/>
-            <a:ext cx="5486400" cy="2103120"/>
-          </a:xfrm>
-          <a:prstGeom prst="roundRect">
-            <a:avLst>
-              <a:gd name="adj" fmla="val 5217"/>
-            </a:avLst>
-          </a:prstGeom>
-          <a:solidFill>
-            <a:srgbClr val="E5F2F0"/>
-          </a:solidFill>
-          <a:ln/>
-        </p:spPr>
-        <p:txBody>
-          <a:bodyPr/>
-          <a:p/>
-        </p:txBody>
-      </p:sp>
-      <p:sp>
-        <p:nvSpPr>
-          <p:cNvPr id="12" name="Text 10"/>
-          <p:cNvSpPr txBox="1"/>
-          <p:nvPr/>
-        </p:nvSpPr>
-        <p:spPr>
-          <a:xfrm>
-            <a:off x="822960" y="3950208"/>
-            <a:ext cx="4937760" cy="411480"/>
-          </a:xfrm>
-          <a:prstGeom prst="rect">
-            <a:avLst/>
-          </a:prstGeom>
-          <a:noFill/>
-          <a:ln/>
-        </p:spPr>
-        <p:txBody>
-          <a:bodyPr wrap="square" lIns="0" tIns="0" rIns="0" bIns="0" rtlCol="0" anchor="ctr"/>
-          <a:lstStyle/>
-          <a:p>
-            <a:pPr indent="0" marL="0">
-              <a:buNone/>
-            </a:pPr>
-            <a:r>
-              <a:rPr lang="en-US" sz="1600" b="1" dirty="0">
-                <a:solidFill>
-                  <a:srgbClr val="01485C"/>
-                </a:solidFill>
-                <a:latin typeface="Calibri" pitchFamily="34" charset="0"/>
-                <a:ea typeface="Calibri" pitchFamily="34" charset="-122"/>
-                <a:cs typeface="Calibri" pitchFamily="34" charset="-120"/>
-              </a:rPr>
-              <a:t>Installing it</a:t>
-            </a:r>
-            <a:endParaRPr lang="en-US" sz="1600" dirty="0"/>
-          </a:p>
-        </p:txBody>
-      </p:sp>
-      <p:sp>
-        <p:nvSpPr>
-          <p:cNvPr id="13" name="Text 11"/>
-          <p:cNvSpPr txBox="1"/>
-          <p:nvPr/>
-        </p:nvSpPr>
-        <p:spPr>
-          <a:xfrm>
-            <a:off x="822960" y="4434840"/>
-            <a:ext cx="4937760" cy="1463040"/>
-          </a:xfrm>
-          <a:prstGeom prst="rect">
-            <a:avLst/>
-          </a:prstGeom>
-          <a:noFill/>
-          <a:ln/>
-        </p:spPr>
-        <p:txBody>
-          <a:bodyPr wrap="square" lIns="0" tIns="0" rIns="0" bIns="0" rtlCol="0" anchor="ctr"/>
-          <a:lstStyle/>
-          <a:p>
-            <a:pPr indent="0" marL="0">
-              <a:buNone/>
-            </a:pPr>
-            <a:r>
-              <a:rPr lang="en-US" sz="1200" dirty="0">
-                <a:solidFill>
-                  <a:srgbClr val="17272E"/>
-                </a:solidFill>
-                <a:latin typeface="Calibri" pitchFamily="34" charset="0"/>
-                <a:ea typeface="Calibri" pitchFamily="34" charset="-122"/>
-                <a:cs typeface="Calibri" pitchFamily="34" charset="-120"/>
-              </a:rPr>
-              <a:t>Choose the file under Install licence file and click Install licence — or copy it to the root of the drive. The page reloads with the normal drop-down and the engines unlock at once.</a:t>
-            </a:r>
-            <a:endParaRPr lang="en-US" sz="1300" dirty="0"/>
-          </a:p>
-        </p:txBody>
-      </p:sp>
-      <p:sp>
-        <p:nvSpPr>
-          <p:cNvPr id="14" name="Shape 12"/>
-          <p:cNvSpPr/>
-          <p:nvPr/>
-        </p:nvSpPr>
-        <p:spPr>
-          <a:xfrm>
-            <a:off x="6172200" y="3749040"/>
-            <a:ext cx="5486400" cy="2103120"/>
-          </a:xfrm>
-          <a:prstGeom prst="roundRect">
-            <a:avLst>
-              <a:gd name="adj" fmla="val 5217"/>
-            </a:avLst>
-          </a:prstGeom>
-          <a:solidFill>
-            <a:srgbClr val="E5F2F0"/>
-          </a:solidFill>
-          <a:ln/>
-        </p:spPr>
-        <p:txBody>
-          <a:bodyPr/>
-          <a:p/>
-        </p:txBody>
-      </p:sp>
-      <p:sp>
-        <p:nvSpPr>
-          <p:cNvPr id="15" name="Text 13"/>
-          <p:cNvSpPr txBox="1"/>
-          <p:nvPr/>
-        </p:nvSpPr>
-        <p:spPr>
-          <a:xfrm>
-            <a:off x="6446520" y="3950208"/>
-            <a:ext cx="4937760" cy="411480"/>
-          </a:xfrm>
-          <a:prstGeom prst="rect">
-            <a:avLst/>
-          </a:prstGeom>
-          <a:noFill/>
-          <a:ln/>
-        </p:spPr>
-        <p:txBody>
-          <a:bodyPr wrap="square" lIns="0" tIns="0" rIns="0" bIns="0" rtlCol="0" anchor="ctr"/>
-          <a:lstStyle/>
-          <a:p>
-            <a:pPr indent="0" marL="0">
-              <a:buNone/>
-            </a:pPr>
-            <a:r>
-              <a:rPr lang="en-US" sz="1600" b="1" dirty="0">
-                <a:solidFill>
-                  <a:srgbClr val="01485C"/>
-                </a:solidFill>
-                <a:latin typeface="Calibri" pitchFamily="34" charset="0"/>
-                <a:ea typeface="Calibri" pitchFamily="34" charset="-122"/>
-                <a:cs typeface="Calibri" pitchFamily="34" charset="-120"/>
-              </a:rPr>
-              <a:t>Renewal and the Licences page</a:t>
-            </a:r>
-            <a:endParaRPr lang="en-US" sz="1600" dirty="0"/>
-          </a:p>
-        </p:txBody>
-      </p:sp>
-      <p:sp>
-        <p:nvSpPr>
-          <p:cNvPr id="16" name="Text 14"/>
-          <p:cNvSpPr txBox="1"/>
-          <p:nvPr/>
-        </p:nvSpPr>
-        <p:spPr>
-          <a:xfrm>
-            <a:off x="6446520" y="4434840"/>
-            <a:ext cx="4937760" cy="1463040"/>
-          </a:xfrm>
-          <a:prstGeom prst="rect">
-            <a:avLst/>
-          </a:prstGeom>
-          <a:noFill/>
-          <a:ln/>
-        </p:spPr>
-        <p:txBody>
-          <a:bodyPr wrap="square" lIns="0" tIns="0" rIns="0" bIns="0" rtlCol="0" anchor="ctr"/>
-          <a:lstStyle/>
-          <a:p>
-            <a:pPr indent="0" marL="0">
-              <a:buNone/>
-            </a:pPr>
-            <a:r>
-              <a:rPr lang="en-US" sz="1200" dirty="0">
-                <a:solidFill>
-                  <a:srgbClr val="17272E"/>
-                </a:solidFill>
-                <a:latin typeface="Calibri" pitchFamily="34" charset="0"/>
-                <a:ea typeface="Calibri" pitchFamily="34" charset="-122"/>
-                <a:cs typeface="Calibri" pitchFamily="34" charset="-120"/>
-              </a:rPr>
-              <a:t>Licences expire with the 12-month QIS review: a notice appears 30 days before, a 30-day grace period follows, then the PC locks. “Licences” at the foot of the page shows every licence on the drive and the PCs it covers.</a:t>
-            </a:r>
-            <a:endParaRPr lang="en-US" sz="1300" dirty="0"/>
-          </a:p>
-        </p:txBody>
-      </p:sp>
-      <p:sp>
-        <p:nvSpPr>
-          <p:cNvPr id="17" name="Shape 15"/>
-          <p:cNvSpPr/>
-          <p:nvPr/>
-        </p:nvSpPr>
-        <p:spPr>
-          <a:xfrm>
-            <a:off x="0" y="6793992"/>
-            <a:ext cx="2040636" cy="64008"/>
-          </a:xfrm>
-          <a:prstGeom prst="rect">
-            <a:avLst/>
-          </a:prstGeom>
-          <a:solidFill>
-            <a:srgbClr val="01485C"/>
-          </a:solidFill>
-          <a:ln/>
-        </p:spPr>
-      </p:sp>
-      <p:sp>
-        <p:nvSpPr>
-          <p:cNvPr id="18" name="Shape 16"/>
-          <p:cNvSpPr/>
-          <p:nvPr/>
-        </p:nvSpPr>
-        <p:spPr>
-          <a:xfrm>
-            <a:off x="2031492" y="6793992"/>
-            <a:ext cx="2040636" cy="64008"/>
-          </a:xfrm>
-          <a:prstGeom prst="rect">
-            <a:avLst/>
-          </a:prstGeom>
-          <a:solidFill>
-            <a:srgbClr val="146175"/>
-          </a:solidFill>
-          <a:ln/>
-        </p:spPr>
-      </p:sp>
-      <p:sp>
-        <p:nvSpPr>
-          <p:cNvPr id="19" name="Shape 17"/>
-          <p:cNvSpPr/>
-          <p:nvPr/>
-        </p:nvSpPr>
-        <p:spPr>
-          <a:xfrm>
-            <a:off x="4062984" y="6793992"/>
-            <a:ext cx="2040636" cy="64008"/>
-          </a:xfrm>
-          <a:prstGeom prst="rect">
-            <a:avLst/>
-          </a:prstGeom>
-          <a:solidFill>
-            <a:srgbClr val="11B5AE"/>
-          </a:solidFill>
-          <a:ln/>
-        </p:spPr>
-      </p:sp>
-      <p:sp>
-        <p:nvSpPr>
-          <p:cNvPr id="20" name="Shape 18"/>
-          <p:cNvSpPr/>
-          <p:nvPr/>
-        </p:nvSpPr>
-        <p:spPr>
-          <a:xfrm>
-            <a:off x="6094476" y="6793992"/>
-            <a:ext cx="2040636" cy="64008"/>
-          </a:xfrm>
-          <a:prstGeom prst="rect">
-            <a:avLst/>
-          </a:prstGeom>
-          <a:solidFill>
-            <a:srgbClr val="6CCAD4"/>
-          </a:solidFill>
-          <a:ln/>
-        </p:spPr>
-      </p:sp>
-      <p:sp>
-        <p:nvSpPr>
-          <p:cNvPr id="21" name="Shape 19"/>
-          <p:cNvSpPr/>
-          <p:nvPr/>
-        </p:nvSpPr>
-        <p:spPr>
-          <a:xfrm>
-            <a:off x="8125968" y="6793992"/>
-            <a:ext cx="2040636" cy="64008"/>
-          </a:xfrm>
-          <a:prstGeom prst="rect">
-            <a:avLst/>
-          </a:prstGeom>
-          <a:solidFill>
-            <a:srgbClr val="7FC04C"/>
-          </a:solidFill>
-          <a:ln/>
-        </p:spPr>
-      </p:sp>
-      <p:sp>
-        <p:nvSpPr>
-          <p:cNvPr id="22" name="Shape 20"/>
           <p:cNvSpPr/>
           <p:nvPr/>
         </p:nvSpPr>
@@ -15061,6 +16095,664 @@
 </file>
 
 <file path=ppt/slides/slide4.xml><?xml version="1.0" encoding="utf-8"?>
+<p:sld xmlns:a="http://schemas.openxmlformats.org/drawingml/2006/main" xmlns:p="http://schemas.openxmlformats.org/presentationml/2006/main" xmlns:r="http://schemas.openxmlformats.org/officeDocument/2006/relationships">
+  <p:cSld>
+    <p:spTree>
+      <p:nvGrpSpPr>
+        <p:cNvPr id="1" name=""/>
+        <p:cNvGrpSpPr/>
+        <p:nvPr/>
+      </p:nvGrpSpPr>
+      <p:grpSpPr/>
+      <p:sp>
+        <p:nvSpPr>
+          <p:cNvPr id="2" name="Text 0"/>
+          <p:cNvSpPr txBox="1"/>
+          <p:nvPr/>
+        </p:nvSpPr>
+        <p:spPr>
+          <a:xfrm>
+            <a:off x="548640" y="320040"/>
+            <a:ext cx="11064240" cy="685800"/>
+          </a:xfrm>
+          <a:prstGeom prst="rect">
+            <a:avLst/>
+          </a:prstGeom>
+          <a:noFill/>
+          <a:ln/>
+        </p:spPr>
+        <p:txBody>
+          <a:bodyPr wrap="square" lIns="0" tIns="0" rIns="0" bIns="0" rtlCol="0" anchor="ctr"/>
+          <a:lstStyle/>
+          <a:p>
+            <a:pPr indent="0" marL="0">
+              <a:buNone/>
+            </a:pPr>
+            <a:r>
+              <a:rPr lang="en-US" sz="3000" b="1" dirty="0">
+                <a:solidFill>
+                  <a:srgbClr val="01485C"/>
+                </a:solidFill>
+                <a:latin typeface="Calibri" pitchFamily="34" charset="0"/>
+                <a:ea typeface="Calibri" pitchFamily="34" charset="-122"/>
+                <a:cs typeface="Calibri" pitchFamily="34" charset="-120"/>
+              </a:rPr>
+              <a:t>Licensing a PC (first use on a computer)</a:t>
+            </a:r>
+            <a:endParaRPr lang="en-US" sz="3000" dirty="0"/>
+          </a:p>
+        </p:txBody>
+      </p:sp>
+      <p:sp>
+        <p:nvSpPr>
+          <p:cNvPr id="3" name="Shape 1"/>
+          <p:cNvSpPr/>
+          <p:nvPr/>
+        </p:nvSpPr>
+        <p:spPr>
+          <a:xfrm>
+            <a:off x="9784080" y="384048"/>
+            <a:ext cx="1828800" cy="457200"/>
+          </a:xfrm>
+          <a:prstGeom prst="roundRect">
+            <a:avLst>
+              <a:gd name="adj" fmla="val 50000"/>
+            </a:avLst>
+          </a:prstGeom>
+          <a:solidFill>
+            <a:srgbClr val="01485C"/>
+          </a:solidFill>
+          <a:ln/>
+        </p:spPr>
+        <p:txBody>
+          <a:bodyPr/>
+          <a:p/>
+        </p:txBody>
+      </p:sp>
+      <p:sp>
+        <p:nvSpPr>
+          <p:cNvPr id="4" name="Text 2"/>
+          <p:cNvSpPr txBox="1"/>
+          <p:nvPr/>
+        </p:nvSpPr>
+        <p:spPr>
+          <a:xfrm>
+            <a:off x="9784080" y="384048"/>
+            <a:ext cx="1828800" cy="457200"/>
+          </a:xfrm>
+          <a:prstGeom prst="rect">
+            <a:avLst/>
+          </a:prstGeom>
+          <a:noFill/>
+          <a:ln/>
+        </p:spPr>
+        <p:txBody>
+          <a:bodyPr wrap="square" lIns="0" tIns="0" rIns="0" bIns="0" rtlCol="0" anchor="ctr"/>
+          <a:lstStyle/>
+          <a:p>
+            <a:pPr algn="ctr" indent="0" marL="0">
+              <a:buNone/>
+            </a:pPr>
+            <a:r>
+              <a:rPr lang="en-US" sz="1500" b="1" dirty="0">
+                <a:solidFill>
+                  <a:srgbClr val="FFFFFF"/>
+                </a:solidFill>
+                <a:latin typeface="Calibri" pitchFamily="34" charset="0"/>
+                <a:ea typeface="Calibri" pitchFamily="34" charset="-122"/>
+                <a:cs typeface="Calibri" pitchFamily="34" charset="-120"/>
+              </a:rPr>
+              <a:t>BOTH</a:t>
+            </a:r>
+            <a:endParaRPr lang="en-US" sz="1500" dirty="0"/>
+          </a:p>
+        </p:txBody>
+      </p:sp>
+      <p:sp>
+        <p:nvSpPr>
+          <p:cNvPr id="5" name="Shape 3"/>
+          <p:cNvSpPr/>
+          <p:nvPr/>
+        </p:nvSpPr>
+        <p:spPr>
+          <a:xfrm>
+            <a:off x="548640" y="1463040"/>
+            <a:ext cx="5486400" cy="2103120"/>
+          </a:xfrm>
+          <a:prstGeom prst="roundRect">
+            <a:avLst>
+              <a:gd name="adj" fmla="val 5217"/>
+            </a:avLst>
+          </a:prstGeom>
+          <a:solidFill>
+            <a:srgbClr val="E5F2F0"/>
+          </a:solidFill>
+          <a:ln/>
+        </p:spPr>
+        <p:txBody>
+          <a:bodyPr/>
+          <a:p/>
+        </p:txBody>
+      </p:sp>
+      <p:sp>
+        <p:nvSpPr>
+          <p:cNvPr id="6" name="Text 4"/>
+          <p:cNvSpPr txBox="1"/>
+          <p:nvPr/>
+        </p:nvSpPr>
+        <p:spPr>
+          <a:xfrm>
+            <a:off x="822960" y="1664208"/>
+            <a:ext cx="4937760" cy="411480"/>
+          </a:xfrm>
+          <a:prstGeom prst="rect">
+            <a:avLst/>
+          </a:prstGeom>
+          <a:noFill/>
+          <a:ln/>
+        </p:spPr>
+        <p:txBody>
+          <a:bodyPr wrap="square" lIns="0" tIns="0" rIns="0" bIns="0" rtlCol="0" anchor="ctr"/>
+          <a:lstStyle/>
+          <a:p>
+            <a:pPr indent="0" marL="0">
+              <a:buNone/>
+            </a:pPr>
+            <a:r>
+              <a:rPr lang="en-US" sz="1600" b="1" dirty="0">
+                <a:solidFill>
+                  <a:srgbClr val="01485C"/>
+                </a:solidFill>
+                <a:latin typeface="Calibri" pitchFamily="34" charset="0"/>
+                <a:ea typeface="Calibri" pitchFamily="34" charset="-122"/>
+                <a:cs typeface="Calibri" pitchFamily="34" charset="-120"/>
+              </a:rPr>
+              <a:t>The lock card</a:t>
+            </a:r>
+            <a:endParaRPr lang="en-US" sz="1600" dirty="0"/>
+          </a:p>
+        </p:txBody>
+      </p:sp>
+      <p:sp>
+        <p:nvSpPr>
+          <p:cNvPr id="7" name="Text 5"/>
+          <p:cNvSpPr txBox="1"/>
+          <p:nvPr/>
+        </p:nvSpPr>
+        <p:spPr>
+          <a:xfrm>
+            <a:off x="822960" y="2148840"/>
+            <a:ext cx="4937760" cy="1463040"/>
+          </a:xfrm>
+          <a:prstGeom prst="rect">
+            <a:avLst/>
+          </a:prstGeom>
+          <a:noFill/>
+          <a:ln/>
+        </p:spPr>
+        <p:txBody>
+          <a:bodyPr wrap="square" lIns="0" tIns="0" rIns="0" bIns="0" rtlCol="0" anchor="ctr"/>
+          <a:lstStyle/>
+          <a:p>
+            <a:pPr indent="0" marL="0">
+              <a:buNone/>
+            </a:pPr>
+            <a:r>
+              <a:rPr lang="en-US" sz="1200" dirty="0">
+                <a:solidFill>
+                  <a:srgbClr val="17272E"/>
+                </a:solidFill>
+                <a:latin typeface="Calibri" pitchFamily="34" charset="0"/>
+                <a:ea typeface="Calibri" pitchFamily="34" charset="-122"/>
+                <a:cs typeface="Calibri" pitchFamily="34" charset="-120"/>
+              </a:rPr>
+              <a:t>On a PC without a licence the selection page shows PC NOT LICENSED with the machine ID and hostname instead of the report-type drop-down. Nothing runs until a licence covering this PC is installed — the engines show a lock page too.</a:t>
+            </a:r>
+            <a:endParaRPr lang="en-US" sz="1300" dirty="0"/>
+          </a:p>
+        </p:txBody>
+      </p:sp>
+      <p:sp>
+        <p:nvSpPr>
+          <p:cNvPr id="8" name="Shape 6"/>
+          <p:cNvSpPr/>
+          <p:nvPr/>
+        </p:nvSpPr>
+        <p:spPr>
+          <a:xfrm>
+            <a:off x="6172200" y="1463040"/>
+            <a:ext cx="5486400" cy="2103120"/>
+          </a:xfrm>
+          <a:prstGeom prst="roundRect">
+            <a:avLst>
+              <a:gd name="adj" fmla="val 5217"/>
+            </a:avLst>
+          </a:prstGeom>
+          <a:solidFill>
+            <a:srgbClr val="FDF0E4"/>
+          </a:solidFill>
+          <a:ln/>
+        </p:spPr>
+        <p:txBody>
+          <a:bodyPr/>
+          <a:p/>
+        </p:txBody>
+      </p:sp>
+      <p:sp>
+        <p:nvSpPr>
+          <p:cNvPr id="9" name="Text 7"/>
+          <p:cNvSpPr txBox="1"/>
+          <p:nvPr/>
+        </p:nvSpPr>
+        <p:spPr>
+          <a:xfrm>
+            <a:off x="6446520" y="1664208"/>
+            <a:ext cx="4937760" cy="411480"/>
+          </a:xfrm>
+          <a:prstGeom prst="rect">
+            <a:avLst/>
+          </a:prstGeom>
+          <a:noFill/>
+          <a:ln/>
+        </p:spPr>
+        <p:txBody>
+          <a:bodyPr wrap="square" lIns="0" tIns="0" rIns="0" bIns="0" rtlCol="0" anchor="ctr"/>
+          <a:lstStyle/>
+          <a:p>
+            <a:pPr indent="0" marL="0">
+              <a:buNone/>
+            </a:pPr>
+            <a:r>
+              <a:rPr lang="en-US" sz="1600" b="1" dirty="0">
+                <a:solidFill>
+                  <a:srgbClr val="B4540A"/>
+                </a:solidFill>
+                <a:latin typeface="Calibri" pitchFamily="34" charset="0"/>
+                <a:ea typeface="Calibri" pitchFamily="34" charset="-122"/>
+                <a:cs typeface="Calibri" pitchFamily="34" charset="-120"/>
+              </a:rPr>
+              <a:t>Getting a licence</a:t>
+            </a:r>
+            <a:endParaRPr lang="en-US" sz="1600" dirty="0"/>
+          </a:p>
+        </p:txBody>
+      </p:sp>
+      <p:sp>
+        <p:nvSpPr>
+          <p:cNvPr id="10" name="Text 8"/>
+          <p:cNvSpPr txBox="1"/>
+          <p:nvPr/>
+        </p:nvSpPr>
+        <p:spPr>
+          <a:xfrm>
+            <a:off x="6446520" y="2148840"/>
+            <a:ext cx="4937760" cy="1463040"/>
+          </a:xfrm>
+          <a:prstGeom prst="rect">
+            <a:avLst/>
+          </a:prstGeom>
+          <a:noFill/>
+          <a:ln/>
+        </p:spPr>
+        <p:txBody>
+          <a:bodyPr wrap="square" lIns="0" tIns="0" rIns="0" bIns="0" rtlCol="0" anchor="ctr"/>
+          <a:lstStyle/>
+          <a:p>
+            <a:pPr indent="0" marL="0">
+              <a:buNone/>
+            </a:pPr>
+            <a:r>
+              <a:rPr lang="en-US" sz="1200" dirty="0">
+                <a:solidFill>
+                  <a:srgbClr val="17272E"/>
+                </a:solidFill>
+                <a:latin typeface="Calibri" pitchFamily="34" charset="0"/>
+                <a:ea typeface="Calibri" pitchFamily="34" charset="-122"/>
+                <a:cs typeface="Calibri" pitchFamily="34" charset="-120"/>
+              </a:rPr>
+              <a:t>Send the machine ID to the PoC lead. You receive a small .lic file issued for that PC, valid for 12 months. Licences cannot be created on the drive — only the PoC lead’s keygen can issue one.</a:t>
+            </a:r>
+            <a:endParaRPr lang="en-US" sz="1300" dirty="0"/>
+          </a:p>
+        </p:txBody>
+      </p:sp>
+      <p:sp>
+        <p:nvSpPr>
+          <p:cNvPr id="11" name="Shape 9"/>
+          <p:cNvSpPr/>
+          <p:nvPr/>
+        </p:nvSpPr>
+        <p:spPr>
+          <a:xfrm>
+            <a:off x="548640" y="3749040"/>
+            <a:ext cx="5486400" cy="2103120"/>
+          </a:xfrm>
+          <a:prstGeom prst="roundRect">
+            <a:avLst>
+              <a:gd name="adj" fmla="val 5217"/>
+            </a:avLst>
+          </a:prstGeom>
+          <a:solidFill>
+            <a:srgbClr val="E5F2F0"/>
+          </a:solidFill>
+          <a:ln/>
+        </p:spPr>
+        <p:txBody>
+          <a:bodyPr/>
+          <a:p/>
+        </p:txBody>
+      </p:sp>
+      <p:sp>
+        <p:nvSpPr>
+          <p:cNvPr id="12" name="Text 10"/>
+          <p:cNvSpPr txBox="1"/>
+          <p:nvPr/>
+        </p:nvSpPr>
+        <p:spPr>
+          <a:xfrm>
+            <a:off x="822960" y="3950208"/>
+            <a:ext cx="4937760" cy="411480"/>
+          </a:xfrm>
+          <a:prstGeom prst="rect">
+            <a:avLst/>
+          </a:prstGeom>
+          <a:noFill/>
+          <a:ln/>
+        </p:spPr>
+        <p:txBody>
+          <a:bodyPr wrap="square" lIns="0" tIns="0" rIns="0" bIns="0" rtlCol="0" anchor="ctr"/>
+          <a:lstStyle/>
+          <a:p>
+            <a:pPr indent="0" marL="0">
+              <a:buNone/>
+            </a:pPr>
+            <a:r>
+              <a:rPr lang="en-US" sz="1600" b="1" dirty="0">
+                <a:solidFill>
+                  <a:srgbClr val="01485C"/>
+                </a:solidFill>
+                <a:latin typeface="Calibri" pitchFamily="34" charset="0"/>
+                <a:ea typeface="Calibri" pitchFamily="34" charset="-122"/>
+                <a:cs typeface="Calibri" pitchFamily="34" charset="-120"/>
+              </a:rPr>
+              <a:t>Installing it</a:t>
+            </a:r>
+            <a:endParaRPr lang="en-US" sz="1600" dirty="0"/>
+          </a:p>
+        </p:txBody>
+      </p:sp>
+      <p:sp>
+        <p:nvSpPr>
+          <p:cNvPr id="13" name="Text 11"/>
+          <p:cNvSpPr txBox="1"/>
+          <p:nvPr/>
+        </p:nvSpPr>
+        <p:spPr>
+          <a:xfrm>
+            <a:off x="822960" y="4434840"/>
+            <a:ext cx="4937760" cy="1463040"/>
+          </a:xfrm>
+          <a:prstGeom prst="rect">
+            <a:avLst/>
+          </a:prstGeom>
+          <a:noFill/>
+          <a:ln/>
+        </p:spPr>
+        <p:txBody>
+          <a:bodyPr wrap="square" lIns="0" tIns="0" rIns="0" bIns="0" rtlCol="0" anchor="ctr"/>
+          <a:lstStyle/>
+          <a:p>
+            <a:pPr indent="0" marL="0">
+              <a:buNone/>
+            </a:pPr>
+            <a:r>
+              <a:rPr lang="en-US" sz="1200" dirty="0">
+                <a:solidFill>
+                  <a:srgbClr val="17272E"/>
+                </a:solidFill>
+                <a:latin typeface="Calibri" pitchFamily="34" charset="0"/>
+                <a:ea typeface="Calibri" pitchFamily="34" charset="-122"/>
+                <a:cs typeface="Calibri" pitchFamily="34" charset="-120"/>
+              </a:rPr>
+              <a:t>Choose the file under Install licence file and click Install licence — or copy it to the root of the drive. The page reloads with the normal drop-down and the engines unlock at once.</a:t>
+            </a:r>
+            <a:endParaRPr lang="en-US" sz="1300" dirty="0"/>
+          </a:p>
+        </p:txBody>
+      </p:sp>
+      <p:sp>
+        <p:nvSpPr>
+          <p:cNvPr id="14" name="Shape 12"/>
+          <p:cNvSpPr/>
+          <p:nvPr/>
+        </p:nvSpPr>
+        <p:spPr>
+          <a:xfrm>
+            <a:off x="6172200" y="3749040"/>
+            <a:ext cx="5486400" cy="2103120"/>
+          </a:xfrm>
+          <a:prstGeom prst="roundRect">
+            <a:avLst>
+              <a:gd name="adj" fmla="val 5217"/>
+            </a:avLst>
+          </a:prstGeom>
+          <a:solidFill>
+            <a:srgbClr val="E5F2F0"/>
+          </a:solidFill>
+          <a:ln/>
+        </p:spPr>
+        <p:txBody>
+          <a:bodyPr/>
+          <a:p/>
+        </p:txBody>
+      </p:sp>
+      <p:sp>
+        <p:nvSpPr>
+          <p:cNvPr id="15" name="Text 13"/>
+          <p:cNvSpPr txBox="1"/>
+          <p:nvPr/>
+        </p:nvSpPr>
+        <p:spPr>
+          <a:xfrm>
+            <a:off x="6446520" y="3950208"/>
+            <a:ext cx="4937760" cy="411480"/>
+          </a:xfrm>
+          <a:prstGeom prst="rect">
+            <a:avLst/>
+          </a:prstGeom>
+          <a:noFill/>
+          <a:ln/>
+        </p:spPr>
+        <p:txBody>
+          <a:bodyPr wrap="square" lIns="0" tIns="0" rIns="0" bIns="0" rtlCol="0" anchor="ctr"/>
+          <a:lstStyle/>
+          <a:p>
+            <a:pPr indent="0" marL="0">
+              <a:buNone/>
+            </a:pPr>
+            <a:r>
+              <a:rPr lang="en-US" sz="1600" b="1" dirty="0">
+                <a:solidFill>
+                  <a:srgbClr val="01485C"/>
+                </a:solidFill>
+                <a:latin typeface="Calibri" pitchFamily="34" charset="0"/>
+                <a:ea typeface="Calibri" pitchFamily="34" charset="-122"/>
+                <a:cs typeface="Calibri" pitchFamily="34" charset="-120"/>
+              </a:rPr>
+              <a:t>Renewal and the Licences page</a:t>
+            </a:r>
+            <a:endParaRPr lang="en-US" sz="1600" dirty="0"/>
+          </a:p>
+        </p:txBody>
+      </p:sp>
+      <p:sp>
+        <p:nvSpPr>
+          <p:cNvPr id="16" name="Text 14"/>
+          <p:cNvSpPr txBox="1"/>
+          <p:nvPr/>
+        </p:nvSpPr>
+        <p:spPr>
+          <a:xfrm>
+            <a:off x="6446520" y="4434840"/>
+            <a:ext cx="4937760" cy="1463040"/>
+          </a:xfrm>
+          <a:prstGeom prst="rect">
+            <a:avLst/>
+          </a:prstGeom>
+          <a:noFill/>
+          <a:ln/>
+        </p:spPr>
+        <p:txBody>
+          <a:bodyPr wrap="square" lIns="0" tIns="0" rIns="0" bIns="0" rtlCol="0" anchor="ctr"/>
+          <a:lstStyle/>
+          <a:p>
+            <a:pPr indent="0" marL="0">
+              <a:buNone/>
+            </a:pPr>
+            <a:r>
+              <a:rPr lang="en-US" sz="1200" dirty="0">
+                <a:solidFill>
+                  <a:srgbClr val="17272E"/>
+                </a:solidFill>
+                <a:latin typeface="Calibri" pitchFamily="34" charset="0"/>
+                <a:ea typeface="Calibri" pitchFamily="34" charset="-122"/>
+                <a:cs typeface="Calibri" pitchFamily="34" charset="-120"/>
+              </a:rPr>
+              <a:t>Licences expire with the 12-month QIS review: a notice appears 30 days before, a 30-day grace period follows, then the PC locks. “Licences” at the foot of the page shows every licence on the drive and the PCs it covers.</a:t>
+            </a:r>
+            <a:endParaRPr lang="en-US" sz="1300" dirty="0"/>
+          </a:p>
+        </p:txBody>
+      </p:sp>
+      <p:sp>
+        <p:nvSpPr>
+          <p:cNvPr id="17" name="Shape 15"/>
+          <p:cNvSpPr/>
+          <p:nvPr/>
+        </p:nvSpPr>
+        <p:spPr>
+          <a:xfrm>
+            <a:off x="0" y="6793992"/>
+            <a:ext cx="2040636" cy="64008"/>
+          </a:xfrm>
+          <a:prstGeom prst="rect">
+            <a:avLst/>
+          </a:prstGeom>
+          <a:solidFill>
+            <a:srgbClr val="01485C"/>
+          </a:solidFill>
+          <a:ln/>
+        </p:spPr>
+      </p:sp>
+      <p:sp>
+        <p:nvSpPr>
+          <p:cNvPr id="18" name="Shape 16"/>
+          <p:cNvSpPr/>
+          <p:nvPr/>
+        </p:nvSpPr>
+        <p:spPr>
+          <a:xfrm>
+            <a:off x="2031492" y="6793992"/>
+            <a:ext cx="2040636" cy="64008"/>
+          </a:xfrm>
+          <a:prstGeom prst="rect">
+            <a:avLst/>
+          </a:prstGeom>
+          <a:solidFill>
+            <a:srgbClr val="146175"/>
+          </a:solidFill>
+          <a:ln/>
+        </p:spPr>
+      </p:sp>
+      <p:sp>
+        <p:nvSpPr>
+          <p:cNvPr id="19" name="Shape 17"/>
+          <p:cNvSpPr/>
+          <p:nvPr/>
+        </p:nvSpPr>
+        <p:spPr>
+          <a:xfrm>
+            <a:off x="4062984" y="6793992"/>
+            <a:ext cx="2040636" cy="64008"/>
+          </a:xfrm>
+          <a:prstGeom prst="rect">
+            <a:avLst/>
+          </a:prstGeom>
+          <a:solidFill>
+            <a:srgbClr val="11B5AE"/>
+          </a:solidFill>
+          <a:ln/>
+        </p:spPr>
+      </p:sp>
+      <p:sp>
+        <p:nvSpPr>
+          <p:cNvPr id="20" name="Shape 18"/>
+          <p:cNvSpPr/>
+          <p:nvPr/>
+        </p:nvSpPr>
+        <p:spPr>
+          <a:xfrm>
+            <a:off x="6094476" y="6793992"/>
+            <a:ext cx="2040636" cy="64008"/>
+          </a:xfrm>
+          <a:prstGeom prst="rect">
+            <a:avLst/>
+          </a:prstGeom>
+          <a:solidFill>
+            <a:srgbClr val="6CCAD4"/>
+          </a:solidFill>
+          <a:ln/>
+        </p:spPr>
+      </p:sp>
+      <p:sp>
+        <p:nvSpPr>
+          <p:cNvPr id="21" name="Shape 19"/>
+          <p:cNvSpPr/>
+          <p:nvPr/>
+        </p:nvSpPr>
+        <p:spPr>
+          <a:xfrm>
+            <a:off x="8125968" y="6793992"/>
+            <a:ext cx="2040636" cy="64008"/>
+          </a:xfrm>
+          <a:prstGeom prst="rect">
+            <a:avLst/>
+          </a:prstGeom>
+          <a:solidFill>
+            <a:srgbClr val="7FC04C"/>
+          </a:solidFill>
+          <a:ln/>
+        </p:spPr>
+      </p:sp>
+      <p:sp>
+        <p:nvSpPr>
+          <p:cNvPr id="22" name="Shape 20"/>
+          <p:cNvSpPr/>
+          <p:nvPr/>
+        </p:nvSpPr>
+        <p:spPr>
+          <a:xfrm>
+            <a:off x="10157460" y="6793992"/>
+            <a:ext cx="2040636" cy="64008"/>
+          </a:xfrm>
+          <a:prstGeom prst="rect">
+            <a:avLst/>
+          </a:prstGeom>
+          <a:solidFill>
+            <a:srgbClr val="E1DD57"/>
+          </a:solidFill>
+          <a:ln/>
+        </p:spPr>
+      </p:sp>
+    </p:spTree>
+  </p:cSld>
+  <p:clrMapOvr>
+    <a:masterClrMapping/>
+  </p:clrMapOvr>
+</p:sld>
+</file>
+
+<file path=ppt/slides/slide5.xml><?xml version="1.0" encoding="utf-8"?>
 <p:sld xmlns:a="http://schemas.openxmlformats.org/drawingml/2006/main" xmlns:r="http://schemas.openxmlformats.org/officeDocument/2006/relationships" xmlns:p="http://schemas.openxmlformats.org/presentationml/2006/main">
   <p:cSld name="Slide 4">
     <p:bg>
@@ -15715,7 +17407,7 @@
 </p:sld>
 </file>
 
-<file path=ppt/slides/slide5.xml><?xml version="1.0" encoding="utf-8"?>
+<file path=ppt/slides/slide6.xml><?xml version="1.0" encoding="utf-8"?>
 <p:sld xmlns:a="http://schemas.openxmlformats.org/drawingml/2006/main" xmlns:r="http://schemas.openxmlformats.org/officeDocument/2006/relationships" xmlns:p="http://schemas.openxmlformats.org/presentationml/2006/main">
   <p:cSld name="Slide 5">
     <p:bg>
@@ -16442,7 +18134,7 @@
 </p:sld>
 </file>
 
-<file path=ppt/slides/slide6.xml><?xml version="1.0" encoding="utf-8"?>
+<file path=ppt/slides/slide7.xml><?xml version="1.0" encoding="utf-8"?>
 <p:sld xmlns:a="http://schemas.openxmlformats.org/drawingml/2006/main" xmlns:r="http://schemas.openxmlformats.org/officeDocument/2006/relationships" xmlns:p="http://schemas.openxmlformats.org/presentationml/2006/main">
   <p:cSld name="Slide 6">
     <p:bg>
@@ -17361,7 +19053,7 @@
 </p:sld>
 </file>
 
-<file path=ppt/slides/slide7.xml><?xml version="1.0" encoding="utf-8"?>
+<file path=ppt/slides/slide8.xml><?xml version="1.0" encoding="utf-8"?>
 <p:sld xmlns:a="http://schemas.openxmlformats.org/drawingml/2006/main" xmlns:r="http://schemas.openxmlformats.org/officeDocument/2006/relationships" xmlns:p="http://schemas.openxmlformats.org/presentationml/2006/main">
   <p:cSld name="Slide 7">
     <p:bg>
@@ -18162,7 +19854,7 @@
 </p:sld>
 </file>
 
-<file path=ppt/slides/slide8.xml><?xml version="1.0" encoding="utf-8"?>
+<file path=ppt/slides/slide9.xml><?xml version="1.0" encoding="utf-8"?>
 <p:sld xmlns:a="http://schemas.openxmlformats.org/drawingml/2006/main" xmlns:r="http://schemas.openxmlformats.org/officeDocument/2006/relationships" xmlns:p="http://schemas.openxmlformats.org/presentationml/2006/main">
   <p:cSld name="Slide 8">
     <p:bg>
@@ -18789,1670 +20481,6 @@
       <p:sp>
         <p:nvSpPr>
           <p:cNvPr id="22" name="Shape 20"/>
-          <p:cNvSpPr/>
-          <p:nvPr/>
-        </p:nvSpPr>
-        <p:spPr>
-          <a:xfrm>
-            <a:off x="10157460" y="6793992"/>
-            <a:ext cx="2040636" cy="64008"/>
-          </a:xfrm>
-          <a:prstGeom prst="rect">
-            <a:avLst/>
-          </a:prstGeom>
-          <a:solidFill>
-            <a:srgbClr val="E1DD57"/>
-          </a:solidFill>
-          <a:ln/>
-        </p:spPr>
-      </p:sp>
-    </p:spTree>
-  </p:cSld>
-  <p:clrMapOvr>
-    <a:masterClrMapping/>
-  </p:clrMapOvr>
-</p:sld>
-</file>
-
-<file path=ppt/slides/slide9.xml><?xml version="1.0" encoding="utf-8"?>
-<p:sld xmlns:a="http://schemas.openxmlformats.org/drawingml/2006/main" xmlns:r="http://schemas.openxmlformats.org/officeDocument/2006/relationships" xmlns:p="http://schemas.openxmlformats.org/presentationml/2006/main">
-  <p:cSld name="Slide 9">
-    <p:bg>
-      <p:bgPr>
-        <a:solidFill>
-          <a:srgbClr val="FFFFFF"/>
-        </a:solidFill>
-      </p:bgPr>
-    </p:bg>
-    <p:spTree>
-      <p:nvGrpSpPr>
-        <p:cNvPr id="1" name=""/>
-        <p:cNvGrpSpPr/>
-        <p:nvPr/>
-      </p:nvGrpSpPr>
-      <p:grpSpPr>
-        <a:xfrm>
-          <a:off x="0" y="0"/>
-          <a:ext cx="0" cy="0"/>
-          <a:chOff x="0" y="0"/>
-          <a:chExt cx="0" cy="0"/>
-        </a:xfrm>
-      </p:grpSpPr>
-      <p:sp>
-        <p:nvSpPr>
-          <p:cNvPr id="2" name="Text 0"/>
-          <p:cNvSpPr txBox="1"/>
-          <p:nvPr/>
-        </p:nvSpPr>
-        <p:spPr>
-          <a:xfrm>
-            <a:off x="548640" y="320040"/>
-            <a:ext cx="11064240" cy="685800"/>
-          </a:xfrm>
-          <a:prstGeom prst="rect">
-            <a:avLst/>
-          </a:prstGeom>
-          <a:noFill/>
-          <a:ln/>
-        </p:spPr>
-        <p:txBody>
-          <a:bodyPr wrap="square" lIns="0" tIns="0" rIns="0" bIns="0" rtlCol="0" anchor="ctr"/>
-          <a:lstStyle/>
-          <a:p>
-            <a:pPr indent="0" marL="0">
-              <a:buNone/>
-            </a:pPr>
-            <a:r>
-              <a:rPr lang="en-US" sz="3000" b="1" dirty="0">
-                <a:solidFill>
-                  <a:srgbClr val="01485C"/>
-                </a:solidFill>
-                <a:latin typeface="Calibri" pitchFamily="34" charset="0"/>
-                <a:ea typeface="Calibri" pitchFamily="34" charset="-122"/>
-                <a:cs typeface="Calibri" pitchFamily="34" charset="-120"/>
-              </a:rPr>
-              <a:t>What the report contains (1 of 2)</a:t>
-            </a:r>
-            <a:endParaRPr lang="en-US" sz="3000" dirty="0"/>
-          </a:p>
-        </p:txBody>
-      </p:sp>
-      <p:sp>
-        <p:nvSpPr>
-          <p:cNvPr id="3" name="Shape 1"/>
-          <p:cNvSpPr/>
-          <p:nvPr/>
-        </p:nvSpPr>
-        <p:spPr>
-          <a:xfrm>
-            <a:off x="9784080" y="384048"/>
-            <a:ext cx="1828800" cy="457200"/>
-          </a:xfrm>
-          <a:prstGeom prst="roundRect">
-            <a:avLst>
-              <a:gd name="adj" fmla="val 50000"/>
-            </a:avLst>
-          </a:prstGeom>
-          <a:solidFill>
-            <a:srgbClr val="01485C"/>
-          </a:solidFill>
-          <a:ln/>
-        </p:spPr>
-      </p:sp>
-      <p:sp>
-        <p:nvSpPr>
-          <p:cNvPr id="4" name="Text 2"/>
-          <p:cNvSpPr txBox="1"/>
-          <p:nvPr/>
-        </p:nvSpPr>
-        <p:spPr>
-          <a:xfrm>
-            <a:off x="9784080" y="384048"/>
-            <a:ext cx="1828800" cy="457200"/>
-          </a:xfrm>
-          <a:prstGeom prst="rect">
-            <a:avLst/>
-          </a:prstGeom>
-          <a:noFill/>
-          <a:ln/>
-        </p:spPr>
-        <p:txBody>
-          <a:bodyPr wrap="square" lIns="0" tIns="0" rIns="0" bIns="0" rtlCol="0" anchor="ctr"/>
-          <a:lstStyle/>
-          <a:p>
-            <a:pPr algn="ctr" indent="0" marL="0">
-              <a:buNone/>
-            </a:pPr>
-            <a:r>
-              <a:rPr lang="en-US" sz="1500" b="1" dirty="0">
-                <a:solidFill>
-                  <a:srgbClr val="FFFFFF"/>
-                </a:solidFill>
-                <a:latin typeface="Calibri" pitchFamily="34" charset="0"/>
-                <a:ea typeface="Calibri" pitchFamily="34" charset="-122"/>
-                <a:cs typeface="Calibri" pitchFamily="34" charset="-120"/>
-              </a:rPr>
-              <a:t>i-STAT</a:t>
-            </a:r>
-            <a:endParaRPr lang="en-US" sz="1500" dirty="0"/>
-          </a:p>
-        </p:txBody>
-      </p:sp>
-      <p:sp>
-        <p:nvSpPr>
-          <p:cNvPr id="5" name="Shape 3"/>
-          <p:cNvSpPr/>
-          <p:nvPr/>
-        </p:nvSpPr>
-        <p:spPr>
-          <a:xfrm>
-            <a:off x="548640" y="1325880"/>
-            <a:ext cx="420624" cy="420624"/>
-          </a:xfrm>
-          <a:prstGeom prst="ellipse">
-            <a:avLst/>
-          </a:prstGeom>
-          <a:solidFill>
-            <a:srgbClr val="01485C"/>
-          </a:solidFill>
-          <a:ln/>
-        </p:spPr>
-      </p:sp>
-      <p:sp>
-        <p:nvSpPr>
-          <p:cNvPr id="6" name="Text 4"/>
-          <p:cNvSpPr txBox="1"/>
-          <p:nvPr/>
-        </p:nvSpPr>
-        <p:spPr>
-          <a:xfrm>
-            <a:off x="548640" y="1325880"/>
-            <a:ext cx="420624" cy="420624"/>
-          </a:xfrm>
-          <a:prstGeom prst="rect">
-            <a:avLst/>
-          </a:prstGeom>
-          <a:noFill/>
-          <a:ln/>
-        </p:spPr>
-        <p:txBody>
-          <a:bodyPr wrap="square" lIns="0" tIns="0" rIns="0" bIns="0" rtlCol="0" anchor="ctr"/>
-          <a:lstStyle/>
-          <a:p>
-            <a:pPr algn="ctr" indent="0" marL="0">
-              <a:buNone/>
-            </a:pPr>
-            <a:r>
-              <a:rPr lang="en-US" sz="1500" b="1" dirty="0">
-                <a:solidFill>
-                  <a:srgbClr val="FFFFFF"/>
-                </a:solidFill>
-                <a:latin typeface="Calibri" pitchFamily="34" charset="0"/>
-                <a:ea typeface="Calibri" pitchFamily="34" charset="-122"/>
-                <a:cs typeface="Calibri" pitchFamily="34" charset="-120"/>
-              </a:rPr>
-              <a:t>1</a:t>
-            </a:r>
-            <a:endParaRPr lang="en-US" sz="1500" dirty="0"/>
-          </a:p>
-        </p:txBody>
-      </p:sp>
-      <p:sp>
-        <p:nvSpPr>
-          <p:cNvPr id="7" name="Text 5"/>
-          <p:cNvSpPr txBox="1"/>
-          <p:nvPr/>
-        </p:nvSpPr>
-        <p:spPr>
-          <a:xfrm>
-            <a:off x="1133856" y="1271016"/>
-            <a:ext cx="5029200" cy="859536"/>
-          </a:xfrm>
-          <a:prstGeom prst="rect">
-            <a:avLst/>
-          </a:prstGeom>
-          <a:noFill/>
-          <a:ln/>
-        </p:spPr>
-        <p:txBody>
-          <a:bodyPr wrap="square" lIns="0" tIns="0" rIns="0" bIns="0" rtlCol="0" anchor="t"/>
-          <a:lstStyle/>
-          <a:p>
-            <a:pPr indent="0" marL="0">
-              <a:buNone/>
-            </a:pPr>
-            <a:r>
-              <a:rPr lang="en-US" sz="1300" b="1" dirty="0">
-                <a:solidFill>
-                  <a:srgbClr val="01485C"/>
-                </a:solidFill>
-                <a:latin typeface="Calibri" pitchFamily="34" charset="0"/>
-                <a:ea typeface="Calibri" pitchFamily="34" charset="-122"/>
-                <a:cs typeface="Calibri" pitchFamily="34" charset="-120"/>
-              </a:rPr>
-              <a:t>Monthly Snapshot
-</a:t>
-            </a:r>
-            <a:pPr indent="0" marL="0">
-              <a:buNone/>
-            </a:pPr>
-            <a:r>
-              <a:rPr lang="en-US" sz="1100" dirty="0">
-                <a:solidFill>
-                  <a:srgbClr val="5F7178"/>
-                </a:solidFill>
-                <a:latin typeface="Calibri" pitchFamily="34" charset="0"/>
-                <a:ea typeface="Calibri" pitchFamily="34" charset="-122"/>
-                <a:cs typeface="Calibri" pitchFamily="34" charset="-120"/>
-              </a:rPr>
-              <a:t>The month in one block: overall rate, errors vs cartridges, top error, flagged staff.</a:t>
-            </a:r>
-            <a:endParaRPr lang="en-US" sz="1300" dirty="0"/>
-          </a:p>
-        </p:txBody>
-      </p:sp>
-      <p:sp>
-        <p:nvSpPr>
-          <p:cNvPr id="8" name="Shape 6"/>
-          <p:cNvSpPr/>
-          <p:nvPr/>
-        </p:nvSpPr>
-        <p:spPr>
-          <a:xfrm>
-            <a:off x="6400800" y="1280160"/>
-            <a:ext cx="5212080" cy="859536"/>
-          </a:xfrm>
-          <a:prstGeom prst="roundRect">
-            <a:avLst>
-              <a:gd name="adj" fmla="val 8511"/>
-            </a:avLst>
-          </a:prstGeom>
-          <a:solidFill>
-            <a:srgbClr val="FFFFFF"/>
-          </a:solidFill>
-          <a:ln w="15875">
-            <a:solidFill>
-              <a:srgbClr val="E2E8EA"/>
-            </a:solidFill>
-            <a:prstDash val="solid"/>
-          </a:ln>
-        </p:spPr>
-      </p:sp>
-      <p:sp>
-        <p:nvSpPr>
-          <p:cNvPr id="9" name="Text 7"/>
-          <p:cNvSpPr txBox="1"/>
-          <p:nvPr/>
-        </p:nvSpPr>
-        <p:spPr>
-          <a:xfrm>
-            <a:off x="6629400" y="1408176"/>
-            <a:ext cx="4754880" cy="630936"/>
-          </a:xfrm>
-          <a:prstGeom prst="rect">
-            <a:avLst/>
-          </a:prstGeom>
-          <a:noFill/>
-          <a:ln/>
-        </p:spPr>
-        <p:txBody>
-          <a:bodyPr wrap="square" lIns="0" tIns="0" rIns="0" bIns="0" rtlCol="0" anchor="t"/>
-          <a:lstStyle/>
-          <a:p>
-            <a:pPr indent="0" marL="0">
-              <a:buNone/>
-            </a:pPr>
-            <a:r>
-              <a:rPr lang="en-US" sz="1250" b="1" dirty="0">
-                <a:solidFill>
-                  <a:srgbClr val="2F5496"/>
-                </a:solidFill>
-                <a:latin typeface="Calibri" pitchFamily="34" charset="0"/>
-                <a:ea typeface="Calibri" pitchFamily="34" charset="-122"/>
-                <a:cs typeface="Calibri" pitchFamily="34" charset="-120"/>
-              </a:rPr>
-              <a:t>Error rate 4.5%</a:t>
-            </a:r>
-            <a:pPr indent="0" marL="0">
-              <a:buNone/>
-            </a:pPr>
-            <a:r>
-              <a:rPr lang="en-US" sz="1050" dirty="0">
-                <a:solidFill>
-                  <a:srgbClr val="17272E"/>
-                </a:solidFill>
-                <a:latin typeface="Calibri" pitchFamily="34" charset="0"/>
-                <a:ea typeface="Calibri" pitchFamily="34" charset="-122"/>
-                <a:cs typeface="Calibri" pitchFamily="34" charset="-120"/>
-              </a:rPr>
-              <a:t>   (12 errors / 266 cartridges)
-</a:t>
-            </a:r>
-            <a:pPr indent="0" marL="0">
-              <a:buNone/>
-            </a:pPr>
-            <a:r>
-              <a:rPr lang="en-US" sz="1050" dirty="0">
-                <a:solidFill>
-                  <a:srgbClr val="5F7178"/>
-                </a:solidFill>
-                <a:latin typeface="Calibri" pitchFamily="34" charset="0"/>
-                <a:ea typeface="Calibri" pitchFamily="34" charset="-122"/>
-                <a:cs typeface="Calibri" pitchFamily="34" charset="-120"/>
-              </a:rPr>
-              <a:t>Top error: P3 Cartridge Handling  ·  Staff flagged: 2</a:t>
-            </a:r>
-            <a:endParaRPr lang="en-US" sz="1250" dirty="0"/>
-          </a:p>
-        </p:txBody>
-      </p:sp>
-      <p:sp>
-        <p:nvSpPr>
-          <p:cNvPr id="10" name="Shape 8"/>
-          <p:cNvSpPr/>
-          <p:nvPr/>
-        </p:nvSpPr>
-        <p:spPr>
-          <a:xfrm>
-            <a:off x="548640" y="2295144"/>
-            <a:ext cx="420624" cy="420624"/>
-          </a:xfrm>
-          <a:prstGeom prst="ellipse">
-            <a:avLst/>
-          </a:prstGeom>
-          <a:solidFill>
-            <a:srgbClr val="01485C"/>
-          </a:solidFill>
-          <a:ln/>
-        </p:spPr>
-      </p:sp>
-      <p:sp>
-        <p:nvSpPr>
-          <p:cNvPr id="11" name="Text 9"/>
-          <p:cNvSpPr txBox="1"/>
-          <p:nvPr/>
-        </p:nvSpPr>
-        <p:spPr>
-          <a:xfrm>
-            <a:off x="548640" y="2295144"/>
-            <a:ext cx="420624" cy="420624"/>
-          </a:xfrm>
-          <a:prstGeom prst="rect">
-            <a:avLst/>
-          </a:prstGeom>
-          <a:noFill/>
-          <a:ln/>
-        </p:spPr>
-        <p:txBody>
-          <a:bodyPr wrap="square" lIns="0" tIns="0" rIns="0" bIns="0" rtlCol="0" anchor="ctr"/>
-          <a:lstStyle/>
-          <a:p>
-            <a:pPr algn="ctr" indent="0" marL="0">
-              <a:buNone/>
-            </a:pPr>
-            <a:r>
-              <a:rPr lang="en-US" sz="1500" b="1" dirty="0">
-                <a:solidFill>
-                  <a:srgbClr val="FFFFFF"/>
-                </a:solidFill>
-                <a:latin typeface="Calibri" pitchFamily="34" charset="0"/>
-                <a:ea typeface="Calibri" pitchFamily="34" charset="-122"/>
-                <a:cs typeface="Calibri" pitchFamily="34" charset="-120"/>
-              </a:rPr>
-              <a:t>2</a:t>
-            </a:r>
-            <a:endParaRPr lang="en-US" sz="1500" dirty="0"/>
-          </a:p>
-        </p:txBody>
-      </p:sp>
-      <p:sp>
-        <p:nvSpPr>
-          <p:cNvPr id="12" name="Text 10"/>
-          <p:cNvSpPr txBox="1"/>
-          <p:nvPr/>
-        </p:nvSpPr>
-        <p:spPr>
-          <a:xfrm>
-            <a:off x="1133856" y="2240280"/>
-            <a:ext cx="5029200" cy="859536"/>
-          </a:xfrm>
-          <a:prstGeom prst="rect">
-            <a:avLst/>
-          </a:prstGeom>
-          <a:noFill/>
-          <a:ln/>
-        </p:spPr>
-        <p:txBody>
-          <a:bodyPr wrap="square" lIns="0" tIns="0" rIns="0" bIns="0" rtlCol="0" anchor="t"/>
-          <a:lstStyle/>
-          <a:p>
-            <a:pPr indent="0" marL="0">
-              <a:buNone/>
-            </a:pPr>
-            <a:r>
-              <a:rPr lang="en-US" sz="1300" b="1" dirty="0">
-                <a:solidFill>
-                  <a:srgbClr val="01485C"/>
-                </a:solidFill>
-                <a:latin typeface="Calibri" pitchFamily="34" charset="0"/>
-                <a:ea typeface="Calibri" pitchFamily="34" charset="-122"/>
-                <a:cs typeface="Calibri" pitchFamily="34" charset="-120"/>
-              </a:rPr>
-              <a:t>Historical Performance
-</a:t>
-            </a:r>
-            <a:pPr indent="0" marL="0">
-              <a:buNone/>
-            </a:pPr>
-            <a:r>
-              <a:rPr lang="en-US" sz="1100" dirty="0">
-                <a:solidFill>
-                  <a:srgbClr val="5F7178"/>
-                </a:solidFill>
-                <a:latin typeface="Calibri" pitchFamily="34" charset="0"/>
-                <a:ea typeface="Calibri" pitchFamily="34" charset="-122"/>
-                <a:cs typeface="Calibri" pitchFamily="34" charset="-120"/>
-              </a:rPr>
-              <a:t>TWO charts per device: the error-rate trend over the colour bands, and the Cartridges Run &amp; Error Mix chart (next slide).</a:t>
-            </a:r>
-            <a:endParaRPr lang="en-US" sz="1300" dirty="0"/>
-          </a:p>
-        </p:txBody>
-      </p:sp>
-      <p:sp>
-        <p:nvSpPr>
-          <p:cNvPr id="13" name="Shape 11"/>
-          <p:cNvSpPr/>
-          <p:nvPr/>
-        </p:nvSpPr>
-        <p:spPr>
-          <a:xfrm>
-            <a:off x="6400800" y="2249424"/>
-            <a:ext cx="5212080" cy="859536"/>
-          </a:xfrm>
-          <a:prstGeom prst="roundRect">
-            <a:avLst>
-              <a:gd name="adj" fmla="val 8511"/>
-            </a:avLst>
-          </a:prstGeom>
-          <a:solidFill>
-            <a:srgbClr val="FFFFFF"/>
-          </a:solidFill>
-          <a:ln w="15875">
-            <a:solidFill>
-              <a:srgbClr val="E2E8EA"/>
-            </a:solidFill>
-            <a:prstDash val="solid"/>
-          </a:ln>
-        </p:spPr>
-      </p:sp>
-      <p:sp>
-        <p:nvSpPr>
-          <p:cNvPr id="14" name="Shape 12"/>
-          <p:cNvSpPr/>
-          <p:nvPr/>
-        </p:nvSpPr>
-        <p:spPr>
-          <a:xfrm>
-            <a:off x="6601968" y="2359152"/>
-            <a:ext cx="3840480" cy="155448"/>
-          </a:xfrm>
-          <a:prstGeom prst="rect">
-            <a:avLst/>
-          </a:prstGeom>
-          <a:solidFill>
-            <a:srgbClr val="C00000">
-              <a:alpha val="38000"/>
-            </a:srgbClr>
-          </a:solidFill>
-          <a:ln/>
-        </p:spPr>
-      </p:sp>
-      <p:sp>
-        <p:nvSpPr>
-          <p:cNvPr id="15" name="Shape 13"/>
-          <p:cNvSpPr/>
-          <p:nvPr/>
-        </p:nvSpPr>
-        <p:spPr>
-          <a:xfrm>
-            <a:off x="6601968" y="2514600"/>
-            <a:ext cx="3840480" cy="155448"/>
-          </a:xfrm>
-          <a:prstGeom prst="rect">
-            <a:avLst/>
-          </a:prstGeom>
-          <a:solidFill>
-            <a:srgbClr val="D96800">
-              <a:alpha val="38000"/>
-            </a:srgbClr>
-          </a:solidFill>
-          <a:ln/>
-        </p:spPr>
-      </p:sp>
-      <p:sp>
-        <p:nvSpPr>
-          <p:cNvPr id="16" name="Shape 14"/>
-          <p:cNvSpPr/>
-          <p:nvPr/>
-        </p:nvSpPr>
-        <p:spPr>
-          <a:xfrm>
-            <a:off x="6601968" y="2670048"/>
-            <a:ext cx="3840480" cy="155448"/>
-          </a:xfrm>
-          <a:prstGeom prst="rect">
-            <a:avLst/>
-          </a:prstGeom>
-          <a:solidFill>
-            <a:srgbClr val="2F5496">
-              <a:alpha val="38000"/>
-            </a:srgbClr>
-          </a:solidFill>
-          <a:ln/>
-        </p:spPr>
-      </p:sp>
-      <p:sp>
-        <p:nvSpPr>
-          <p:cNvPr id="17" name="Shape 15"/>
-          <p:cNvSpPr/>
-          <p:nvPr/>
-        </p:nvSpPr>
-        <p:spPr>
-          <a:xfrm>
-            <a:off x="6601968" y="2825496"/>
-            <a:ext cx="3840480" cy="155448"/>
-          </a:xfrm>
-          <a:prstGeom prst="rect">
-            <a:avLst/>
-          </a:prstGeom>
-          <a:solidFill>
-            <a:srgbClr val="538135">
-              <a:alpha val="38000"/>
-            </a:srgbClr>
-          </a:solidFill>
-          <a:ln/>
-        </p:spPr>
-      </p:sp>
-      <p:sp>
-        <p:nvSpPr>
-          <p:cNvPr id="18" name="Shape 16"/>
-          <p:cNvSpPr/>
-          <p:nvPr/>
-        </p:nvSpPr>
-        <p:spPr>
-          <a:xfrm>
-            <a:off x="7059168" y="2468880"/>
-            <a:ext cx="118872" cy="118872"/>
-          </a:xfrm>
-          <a:prstGeom prst="ellipse">
-            <a:avLst/>
-          </a:prstGeom>
-          <a:solidFill>
-            <a:srgbClr val="01485C"/>
-          </a:solidFill>
-          <a:ln w="12700">
-            <a:solidFill>
-              <a:srgbClr val="FFFFFF"/>
-            </a:solidFill>
-            <a:prstDash val="solid"/>
-          </a:ln>
-        </p:spPr>
-      </p:sp>
-      <p:sp>
-        <p:nvSpPr>
-          <p:cNvPr id="19" name="Shape 17"/>
-          <p:cNvSpPr/>
-          <p:nvPr/>
-        </p:nvSpPr>
-        <p:spPr>
-          <a:xfrm>
-            <a:off x="7790688" y="2578608"/>
-            <a:ext cx="118872" cy="118872"/>
-          </a:xfrm>
-          <a:prstGeom prst="ellipse">
-            <a:avLst/>
-          </a:prstGeom>
-          <a:solidFill>
-            <a:srgbClr val="01485C"/>
-          </a:solidFill>
-          <a:ln w="12700">
-            <a:solidFill>
-              <a:srgbClr val="FFFFFF"/>
-            </a:solidFill>
-            <a:prstDash val="solid"/>
-          </a:ln>
-        </p:spPr>
-      </p:sp>
-      <p:sp>
-        <p:nvSpPr>
-          <p:cNvPr id="20" name="Shape 18"/>
-          <p:cNvSpPr/>
-          <p:nvPr/>
-        </p:nvSpPr>
-        <p:spPr>
-          <a:xfrm>
-            <a:off x="8522208" y="2542032"/>
-            <a:ext cx="118872" cy="118872"/>
-          </a:xfrm>
-          <a:prstGeom prst="ellipse">
-            <a:avLst/>
-          </a:prstGeom>
-          <a:solidFill>
-            <a:srgbClr val="01485C"/>
-          </a:solidFill>
-          <a:ln w="12700">
-            <a:solidFill>
-              <a:srgbClr val="FFFFFF"/>
-            </a:solidFill>
-            <a:prstDash val="solid"/>
-          </a:ln>
-        </p:spPr>
-      </p:sp>
-      <p:sp>
-        <p:nvSpPr>
-          <p:cNvPr id="21" name="Shape 19"/>
-          <p:cNvSpPr/>
-          <p:nvPr/>
-        </p:nvSpPr>
-        <p:spPr>
-          <a:xfrm>
-            <a:off x="9253728" y="2724912"/>
-            <a:ext cx="118872" cy="118872"/>
-          </a:xfrm>
-          <a:prstGeom prst="ellipse">
-            <a:avLst/>
-          </a:prstGeom>
-          <a:solidFill>
-            <a:srgbClr val="01485C"/>
-          </a:solidFill>
-          <a:ln w="12700">
-            <a:solidFill>
-              <a:srgbClr val="FFFFFF"/>
-            </a:solidFill>
-            <a:prstDash val="solid"/>
-          </a:ln>
-        </p:spPr>
-      </p:sp>
-      <p:sp>
-        <p:nvSpPr>
-          <p:cNvPr id="22" name="Shape 20"/>
-          <p:cNvSpPr/>
-          <p:nvPr/>
-        </p:nvSpPr>
-        <p:spPr>
-          <a:xfrm>
-            <a:off x="9985248" y="2825496"/>
-            <a:ext cx="118872" cy="118872"/>
-          </a:xfrm>
-          <a:prstGeom prst="ellipse">
-            <a:avLst/>
-          </a:prstGeom>
-          <a:solidFill>
-            <a:srgbClr val="01485C"/>
-          </a:solidFill>
-          <a:ln w="12700">
-            <a:solidFill>
-              <a:srgbClr val="FFFFFF"/>
-            </a:solidFill>
-            <a:prstDash val="solid"/>
-          </a:ln>
-        </p:spPr>
-      </p:sp>
-      <p:sp>
-        <p:nvSpPr>
-          <p:cNvPr id="23" name="Text 21"/>
-          <p:cNvSpPr txBox="1"/>
-          <p:nvPr/>
-        </p:nvSpPr>
-        <p:spPr>
-          <a:xfrm>
-            <a:off x="10469880" y="2542032"/>
-            <a:ext cx="1005840" cy="274320"/>
-          </a:xfrm>
-          <a:prstGeom prst="rect">
-            <a:avLst/>
-          </a:prstGeom>
-          <a:noFill/>
-          <a:ln/>
-        </p:spPr>
-        <p:txBody>
-          <a:bodyPr wrap="square" lIns="0" tIns="0" rIns="0" bIns="0" rtlCol="0" anchor="ctr"/>
-          <a:lstStyle/>
-          <a:p>
-            <a:pPr indent="0" marL="0">
-              <a:buNone/>
-            </a:pPr>
-            <a:r>
-              <a:rPr lang="en-US" sz="950" i="1" dirty="0">
-                <a:solidFill>
-                  <a:srgbClr val="538135"/>
-                </a:solidFill>
-                <a:latin typeface="Calibri" pitchFamily="34" charset="0"/>
-                <a:ea typeface="Calibri" pitchFamily="34" charset="-122"/>
-                <a:cs typeface="Calibri" pitchFamily="34" charset="-120"/>
-              </a:rPr>
-              <a:t>improving ↓</a:t>
-            </a:r>
-            <a:endParaRPr lang="en-US" sz="950" dirty="0"/>
-          </a:p>
-        </p:txBody>
-      </p:sp>
-      <p:sp>
-        <p:nvSpPr>
-          <p:cNvPr id="24" name="Shape 22"/>
-          <p:cNvSpPr/>
-          <p:nvPr/>
-        </p:nvSpPr>
-        <p:spPr>
-          <a:xfrm>
-            <a:off x="548640" y="3264408"/>
-            <a:ext cx="420624" cy="420624"/>
-          </a:xfrm>
-          <a:prstGeom prst="ellipse">
-            <a:avLst/>
-          </a:prstGeom>
-          <a:solidFill>
-            <a:srgbClr val="01485C"/>
-          </a:solidFill>
-          <a:ln/>
-        </p:spPr>
-      </p:sp>
-      <p:sp>
-        <p:nvSpPr>
-          <p:cNvPr id="25" name="Text 23"/>
-          <p:cNvSpPr txBox="1"/>
-          <p:nvPr/>
-        </p:nvSpPr>
-        <p:spPr>
-          <a:xfrm>
-            <a:off x="548640" y="3264408"/>
-            <a:ext cx="420624" cy="420624"/>
-          </a:xfrm>
-          <a:prstGeom prst="rect">
-            <a:avLst/>
-          </a:prstGeom>
-          <a:noFill/>
-          <a:ln/>
-        </p:spPr>
-        <p:txBody>
-          <a:bodyPr wrap="square" lIns="0" tIns="0" rIns="0" bIns="0" rtlCol="0" anchor="ctr"/>
-          <a:lstStyle/>
-          <a:p>
-            <a:pPr algn="ctr" indent="0" marL="0">
-              <a:buNone/>
-            </a:pPr>
-            <a:r>
-              <a:rPr lang="en-US" sz="1500" b="1" dirty="0">
-                <a:solidFill>
-                  <a:srgbClr val="FFFFFF"/>
-                </a:solidFill>
-                <a:latin typeface="Calibri" pitchFamily="34" charset="0"/>
-                <a:ea typeface="Calibri" pitchFamily="34" charset="-122"/>
-                <a:cs typeface="Calibri" pitchFamily="34" charset="-120"/>
-              </a:rPr>
-              <a:t>3</a:t>
-            </a:r>
-            <a:endParaRPr lang="en-US" sz="1500" dirty="0"/>
-          </a:p>
-        </p:txBody>
-      </p:sp>
-      <p:sp>
-        <p:nvSpPr>
-          <p:cNvPr id="26" name="Text 24"/>
-          <p:cNvSpPr txBox="1"/>
-          <p:nvPr/>
-        </p:nvSpPr>
-        <p:spPr>
-          <a:xfrm>
-            <a:off x="1133856" y="3209544"/>
-            <a:ext cx="5029200" cy="859536"/>
-          </a:xfrm>
-          <a:prstGeom prst="rect">
-            <a:avLst/>
-          </a:prstGeom>
-          <a:noFill/>
-          <a:ln/>
-        </p:spPr>
-        <p:txBody>
-          <a:bodyPr wrap="square" lIns="0" tIns="0" rIns="0" bIns="0" rtlCol="0" anchor="t"/>
-          <a:lstStyle/>
-          <a:p>
-            <a:pPr indent="0" marL="0">
-              <a:buNone/>
-            </a:pPr>
-            <a:r>
-              <a:rPr lang="en-US" sz="1300" b="1" dirty="0">
-                <a:solidFill>
-                  <a:srgbClr val="01485C"/>
-                </a:solidFill>
-                <a:latin typeface="Calibri" pitchFamily="34" charset="0"/>
-                <a:ea typeface="Calibri" pitchFamily="34" charset="-122"/>
-                <a:cs typeface="Calibri" pitchFamily="34" charset="-120"/>
-              </a:rPr>
-              <a:t>Performance Summary
-</a:t>
-            </a:r>
-            <a:pPr indent="0" marL="0">
-              <a:buNone/>
-            </a:pPr>
-            <a:r>
-              <a:rPr lang="en-US" sz="1100" dirty="0">
-                <a:solidFill>
-                  <a:srgbClr val="5F7178"/>
-                </a:solidFill>
-                <a:latin typeface="Calibri" pitchFamily="34" charset="0"/>
-                <a:ea typeface="Calibri" pitchFamily="34" charset="-122"/>
-                <a:cs typeface="Calibri" pitchFamily="34" charset="-120"/>
-              </a:rPr>
-              <a:t>Device-by-device: cartridges, errors and rate, banded Champions → Needs attention.</a:t>
-            </a:r>
-            <a:endParaRPr lang="en-US" sz="1300" dirty="0"/>
-          </a:p>
-        </p:txBody>
-      </p:sp>
-      <p:sp>
-        <p:nvSpPr>
-          <p:cNvPr id="27" name="Shape 25"/>
-          <p:cNvSpPr/>
-          <p:nvPr/>
-        </p:nvSpPr>
-        <p:spPr>
-          <a:xfrm>
-            <a:off x="6400800" y="3218688"/>
-            <a:ext cx="5212080" cy="859536"/>
-          </a:xfrm>
-          <a:prstGeom prst="roundRect">
-            <a:avLst>
-              <a:gd name="adj" fmla="val 8511"/>
-            </a:avLst>
-          </a:prstGeom>
-          <a:solidFill>
-            <a:srgbClr val="FFFFFF"/>
-          </a:solidFill>
-          <a:ln w="15875">
-            <a:solidFill>
-              <a:srgbClr val="E2E8EA"/>
-            </a:solidFill>
-            <a:prstDash val="solid"/>
-          </a:ln>
-        </p:spPr>
-      </p:sp>
-      <p:sp>
-        <p:nvSpPr>
-          <p:cNvPr id="28" name="Text 26"/>
-          <p:cNvSpPr txBox="1"/>
-          <p:nvPr/>
-        </p:nvSpPr>
-        <p:spPr>
-          <a:xfrm>
-            <a:off x="6629400" y="3310128"/>
-            <a:ext cx="3291840" cy="274320"/>
-          </a:xfrm>
-          <a:prstGeom prst="rect">
-            <a:avLst/>
-          </a:prstGeom>
-          <a:noFill/>
-          <a:ln/>
-        </p:spPr>
-        <p:txBody>
-          <a:bodyPr wrap="square" lIns="0" tIns="0" rIns="0" bIns="0" rtlCol="0" anchor="ctr"/>
-          <a:lstStyle/>
-          <a:p>
-            <a:pPr indent="0" marL="0">
-              <a:buNone/>
-            </a:pPr>
-            <a:r>
-              <a:rPr lang="en-US" sz="1050" dirty="0">
-                <a:solidFill>
-                  <a:srgbClr val="17272E"/>
-                </a:solidFill>
-                <a:latin typeface="Calibri" pitchFamily="34" charset="0"/>
-                <a:ea typeface="Calibri" pitchFamily="34" charset="-122"/>
-                <a:cs typeface="Calibri" pitchFamily="34" charset="-120"/>
-              </a:rPr>
-              <a:t>i-STAT 1;9001    80 carts    4 errors</a:t>
-            </a:r>
-            <a:endParaRPr lang="en-US" sz="1050" dirty="0"/>
-          </a:p>
-        </p:txBody>
-      </p:sp>
-      <p:sp>
-        <p:nvSpPr>
-          <p:cNvPr id="29" name="Shape 27"/>
-          <p:cNvSpPr/>
-          <p:nvPr/>
-        </p:nvSpPr>
-        <p:spPr>
-          <a:xfrm>
-            <a:off x="10195560" y="3310128"/>
-            <a:ext cx="960120" cy="274320"/>
-          </a:xfrm>
-          <a:prstGeom prst="roundRect">
-            <a:avLst>
-              <a:gd name="adj" fmla="val 26667"/>
-            </a:avLst>
-          </a:prstGeom>
-          <a:solidFill>
-            <a:srgbClr val="2F5496"/>
-          </a:solidFill>
-          <a:ln/>
-        </p:spPr>
-      </p:sp>
-      <p:sp>
-        <p:nvSpPr>
-          <p:cNvPr id="30" name="Text 28"/>
-          <p:cNvSpPr txBox="1"/>
-          <p:nvPr/>
-        </p:nvSpPr>
-        <p:spPr>
-          <a:xfrm>
-            <a:off x="10195560" y="3310128"/>
-            <a:ext cx="960120" cy="274320"/>
-          </a:xfrm>
-          <a:prstGeom prst="rect">
-            <a:avLst/>
-          </a:prstGeom>
-          <a:noFill/>
-          <a:ln/>
-        </p:spPr>
-        <p:txBody>
-          <a:bodyPr wrap="square" lIns="0" tIns="0" rIns="0" bIns="0" rtlCol="0" anchor="ctr"/>
-          <a:lstStyle/>
-          <a:p>
-            <a:pPr algn="ctr" indent="0" marL="0">
-              <a:buNone/>
-            </a:pPr>
-            <a:r>
-              <a:rPr lang="en-US" sz="1000" b="1" dirty="0">
-                <a:solidFill>
-                  <a:srgbClr val="FFFFFF"/>
-                </a:solidFill>
-                <a:latin typeface="Calibri" pitchFamily="34" charset="0"/>
-                <a:ea typeface="Calibri" pitchFamily="34" charset="-122"/>
-                <a:cs typeface="Calibri" pitchFamily="34" charset="-120"/>
-              </a:rPr>
-              <a:t>5.0% Excellent</a:t>
-            </a:r>
-            <a:endParaRPr lang="en-US" sz="1000" dirty="0"/>
-          </a:p>
-        </p:txBody>
-      </p:sp>
-      <p:sp>
-        <p:nvSpPr>
-          <p:cNvPr id="31" name="Text 29"/>
-          <p:cNvSpPr txBox="1"/>
-          <p:nvPr/>
-        </p:nvSpPr>
-        <p:spPr>
-          <a:xfrm>
-            <a:off x="6629400" y="3675888"/>
-            <a:ext cx="3291840" cy="274320"/>
-          </a:xfrm>
-          <a:prstGeom prst="rect">
-            <a:avLst/>
-          </a:prstGeom>
-          <a:noFill/>
-          <a:ln/>
-        </p:spPr>
-        <p:txBody>
-          <a:bodyPr wrap="square" lIns="0" tIns="0" rIns="0" bIns="0" rtlCol="0" anchor="ctr"/>
-          <a:lstStyle/>
-          <a:p>
-            <a:pPr indent="0" marL="0">
-              <a:buNone/>
-            </a:pPr>
-            <a:r>
-              <a:rPr lang="en-US" sz="1050" dirty="0">
-                <a:solidFill>
-                  <a:srgbClr val="17272E"/>
-                </a:solidFill>
-                <a:latin typeface="Calibri" pitchFamily="34" charset="0"/>
-                <a:ea typeface="Calibri" pitchFamily="34" charset="-122"/>
-                <a:cs typeface="Calibri" pitchFamily="34" charset="-120"/>
-              </a:rPr>
-              <a:t>i-STAT 1;9002    74 carts    5 errors</a:t>
-            </a:r>
-            <a:endParaRPr lang="en-US" sz="1050" dirty="0"/>
-          </a:p>
-        </p:txBody>
-      </p:sp>
-      <p:sp>
-        <p:nvSpPr>
-          <p:cNvPr id="32" name="Shape 30"/>
-          <p:cNvSpPr/>
-          <p:nvPr/>
-        </p:nvSpPr>
-        <p:spPr>
-          <a:xfrm>
-            <a:off x="10195560" y="3675888"/>
-            <a:ext cx="960120" cy="274320"/>
-          </a:xfrm>
-          <a:prstGeom prst="roundRect">
-            <a:avLst>
-              <a:gd name="adj" fmla="val 26667"/>
-            </a:avLst>
-          </a:prstGeom>
-          <a:solidFill>
-            <a:srgbClr val="D96800"/>
-          </a:solidFill>
-          <a:ln/>
-        </p:spPr>
-      </p:sp>
-      <p:sp>
-        <p:nvSpPr>
-          <p:cNvPr id="33" name="Text 31"/>
-          <p:cNvSpPr txBox="1"/>
-          <p:nvPr/>
-        </p:nvSpPr>
-        <p:spPr>
-          <a:xfrm>
-            <a:off x="10195560" y="3675888"/>
-            <a:ext cx="960120" cy="274320"/>
-          </a:xfrm>
-          <a:prstGeom prst="rect">
-            <a:avLst/>
-          </a:prstGeom>
-          <a:noFill/>
-          <a:ln/>
-        </p:spPr>
-        <p:txBody>
-          <a:bodyPr wrap="square" lIns="0" tIns="0" rIns="0" bIns="0" rtlCol="0" anchor="ctr"/>
-          <a:lstStyle/>
-          <a:p>
-            <a:pPr algn="ctr" indent="0" marL="0">
-              <a:buNone/>
-            </a:pPr>
-            <a:r>
-              <a:rPr lang="en-US" sz="1000" b="1" dirty="0">
-                <a:solidFill>
-                  <a:srgbClr val="FFFFFF"/>
-                </a:solidFill>
-                <a:latin typeface="Calibri" pitchFamily="34" charset="0"/>
-                <a:ea typeface="Calibri" pitchFamily="34" charset="-122"/>
-                <a:cs typeface="Calibri" pitchFamily="34" charset="-120"/>
-              </a:rPr>
-              <a:t>6.8% Accept.</a:t>
-            </a:r>
-            <a:endParaRPr lang="en-US" sz="1000" dirty="0"/>
-          </a:p>
-        </p:txBody>
-      </p:sp>
-      <p:sp>
-        <p:nvSpPr>
-          <p:cNvPr id="34" name="Shape 32"/>
-          <p:cNvSpPr/>
-          <p:nvPr/>
-        </p:nvSpPr>
-        <p:spPr>
-          <a:xfrm>
-            <a:off x="548640" y="4233672"/>
-            <a:ext cx="420624" cy="420624"/>
-          </a:xfrm>
-          <a:prstGeom prst="ellipse">
-            <a:avLst/>
-          </a:prstGeom>
-          <a:solidFill>
-            <a:srgbClr val="01485C"/>
-          </a:solidFill>
-          <a:ln/>
-        </p:spPr>
-      </p:sp>
-      <p:sp>
-        <p:nvSpPr>
-          <p:cNvPr id="35" name="Text 33"/>
-          <p:cNvSpPr txBox="1"/>
-          <p:nvPr/>
-        </p:nvSpPr>
-        <p:spPr>
-          <a:xfrm>
-            <a:off x="548640" y="4233672"/>
-            <a:ext cx="420624" cy="420624"/>
-          </a:xfrm>
-          <a:prstGeom prst="rect">
-            <a:avLst/>
-          </a:prstGeom>
-          <a:noFill/>
-          <a:ln/>
-        </p:spPr>
-        <p:txBody>
-          <a:bodyPr wrap="square" lIns="0" tIns="0" rIns="0" bIns="0" rtlCol="0" anchor="ctr"/>
-          <a:lstStyle/>
-          <a:p>
-            <a:pPr algn="ctr" indent="0" marL="0">
-              <a:buNone/>
-            </a:pPr>
-            <a:r>
-              <a:rPr lang="en-US" sz="1500" b="1" dirty="0">
-                <a:solidFill>
-                  <a:srgbClr val="FFFFFF"/>
-                </a:solidFill>
-                <a:latin typeface="Calibri" pitchFamily="34" charset="0"/>
-                <a:ea typeface="Calibri" pitchFamily="34" charset="-122"/>
-                <a:cs typeface="Calibri" pitchFamily="34" charset="-120"/>
-              </a:rPr>
-              <a:t>4</a:t>
-            </a:r>
-            <a:endParaRPr lang="en-US" sz="1500" dirty="0"/>
-          </a:p>
-        </p:txBody>
-      </p:sp>
-      <p:sp>
-        <p:nvSpPr>
-          <p:cNvPr id="36" name="Text 34"/>
-          <p:cNvSpPr txBox="1"/>
-          <p:nvPr/>
-        </p:nvSpPr>
-        <p:spPr>
-          <a:xfrm>
-            <a:off x="1133856" y="4178808"/>
-            <a:ext cx="5029200" cy="859536"/>
-          </a:xfrm>
-          <a:prstGeom prst="rect">
-            <a:avLst/>
-          </a:prstGeom>
-          <a:noFill/>
-          <a:ln/>
-        </p:spPr>
-        <p:txBody>
-          <a:bodyPr wrap="square" lIns="0" tIns="0" rIns="0" bIns="0" rtlCol="0" anchor="t"/>
-          <a:lstStyle/>
-          <a:p>
-            <a:pPr indent="0" marL="0">
-              <a:buNone/>
-            </a:pPr>
-            <a:r>
-              <a:rPr lang="en-US" sz="1300" b="1" dirty="0">
-                <a:solidFill>
-                  <a:srgbClr val="01485C"/>
-                </a:solidFill>
-                <a:latin typeface="Calibri" pitchFamily="34" charset="0"/>
-                <a:ea typeface="Calibri" pitchFamily="34" charset="-122"/>
-                <a:cs typeface="Calibri" pitchFamily="34" charset="-120"/>
-              </a:rPr>
-              <a:t>Simulators Run
-</a:t>
-            </a:r>
-            <a:pPr indent="0" marL="0">
-              <a:buNone/>
-            </a:pPr>
-            <a:r>
-              <a:rPr lang="en-US" sz="1100" dirty="0">
-                <a:solidFill>
-                  <a:srgbClr val="5F7178"/>
-                </a:solidFill>
-                <a:latin typeface="Calibri" pitchFamily="34" charset="0"/>
-                <a:ea typeface="Calibri" pitchFamily="34" charset="-122"/>
-                <a:cs typeface="Calibri" pitchFamily="34" charset="-120"/>
-              </a:rPr>
-              <a:t>Electronic QC (simulator) checks recorded on each device during the month.</a:t>
-            </a:r>
-            <a:endParaRPr lang="en-US" sz="1300" dirty="0"/>
-          </a:p>
-        </p:txBody>
-      </p:sp>
-      <p:sp>
-        <p:nvSpPr>
-          <p:cNvPr id="37" name="Shape 35"/>
-          <p:cNvSpPr/>
-          <p:nvPr/>
-        </p:nvSpPr>
-        <p:spPr>
-          <a:xfrm>
-            <a:off x="6400800" y="4187952"/>
-            <a:ext cx="5212080" cy="859536"/>
-          </a:xfrm>
-          <a:prstGeom prst="roundRect">
-            <a:avLst>
-              <a:gd name="adj" fmla="val 8511"/>
-            </a:avLst>
-          </a:prstGeom>
-          <a:solidFill>
-            <a:srgbClr val="FFFFFF"/>
-          </a:solidFill>
-          <a:ln w="15875">
-            <a:solidFill>
-              <a:srgbClr val="E2E8EA"/>
-            </a:solidFill>
-            <a:prstDash val="solid"/>
-          </a:ln>
-        </p:spPr>
-      </p:sp>
-      <p:sp>
-        <p:nvSpPr>
-          <p:cNvPr id="38" name="Text 36"/>
-          <p:cNvSpPr txBox="1"/>
-          <p:nvPr/>
-        </p:nvSpPr>
-        <p:spPr>
-          <a:xfrm>
-            <a:off x="6629400" y="4187952"/>
-            <a:ext cx="4754880" cy="859536"/>
-          </a:xfrm>
-          <a:prstGeom prst="rect">
-            <a:avLst/>
-          </a:prstGeom>
-          <a:noFill/>
-          <a:ln/>
-        </p:spPr>
-        <p:txBody>
-          <a:bodyPr wrap="square" lIns="0" tIns="0" rIns="0" bIns="0" rtlCol="0" anchor="ctr"/>
-          <a:lstStyle/>
-          <a:p>
-            <a:pPr indent="0" marL="0">
-              <a:buNone/>
-            </a:pPr>
-            <a:r>
-              <a:rPr lang="en-US" sz="1100" b="1" dirty="0">
-                <a:solidFill>
-                  <a:srgbClr val="01485C"/>
-                </a:solidFill>
-                <a:latin typeface="Calibri" pitchFamily="34" charset="0"/>
-                <a:ea typeface="Calibri" pitchFamily="34" charset="-122"/>
-                <a:cs typeface="Calibri" pitchFamily="34" charset="-120"/>
-              </a:rPr>
-              <a:t>EQC checks:   </a:t>
-            </a:r>
-            <a:pPr indent="0" marL="0">
-              <a:buNone/>
-            </a:pPr>
-            <a:r>
-              <a:rPr lang="en-US" sz="1100" dirty="0">
-                <a:solidFill>
-                  <a:srgbClr val="17272E"/>
-                </a:solidFill>
-                <a:latin typeface="Calibri" pitchFamily="34" charset="0"/>
-                <a:ea typeface="Calibri" pitchFamily="34" charset="-122"/>
-                <a:cs typeface="Calibri" pitchFamily="34" charset="-120"/>
-              </a:rPr>
-              <a:t>9001 — 8 ✓      9002 — 6 ✓      9003 — 7 ✓</a:t>
-            </a:r>
-            <a:endParaRPr lang="en-US" sz="1100" dirty="0"/>
-          </a:p>
-        </p:txBody>
-      </p:sp>
-      <p:sp>
-        <p:nvSpPr>
-          <p:cNvPr id="39" name="Shape 37"/>
-          <p:cNvSpPr/>
-          <p:nvPr/>
-        </p:nvSpPr>
-        <p:spPr>
-          <a:xfrm>
-            <a:off x="548640" y="5202936"/>
-            <a:ext cx="420624" cy="420624"/>
-          </a:xfrm>
-          <a:prstGeom prst="ellipse">
-            <a:avLst/>
-          </a:prstGeom>
-          <a:solidFill>
-            <a:srgbClr val="01485C"/>
-          </a:solidFill>
-          <a:ln/>
-        </p:spPr>
-      </p:sp>
-      <p:sp>
-        <p:nvSpPr>
-          <p:cNvPr id="40" name="Text 38"/>
-          <p:cNvSpPr txBox="1"/>
-          <p:nvPr/>
-        </p:nvSpPr>
-        <p:spPr>
-          <a:xfrm>
-            <a:off x="548640" y="5202936"/>
-            <a:ext cx="420624" cy="420624"/>
-          </a:xfrm>
-          <a:prstGeom prst="rect">
-            <a:avLst/>
-          </a:prstGeom>
-          <a:noFill/>
-          <a:ln/>
-        </p:spPr>
-        <p:txBody>
-          <a:bodyPr wrap="square" lIns="0" tIns="0" rIns="0" bIns="0" rtlCol="0" anchor="ctr"/>
-          <a:lstStyle/>
-          <a:p>
-            <a:pPr algn="ctr" indent="0" marL="0">
-              <a:buNone/>
-            </a:pPr>
-            <a:r>
-              <a:rPr lang="en-US" sz="1500" b="1" dirty="0">
-                <a:solidFill>
-                  <a:srgbClr val="FFFFFF"/>
-                </a:solidFill>
-                <a:latin typeface="Calibri" pitchFamily="34" charset="0"/>
-                <a:ea typeface="Calibri" pitchFamily="34" charset="-122"/>
-                <a:cs typeface="Calibri" pitchFamily="34" charset="-120"/>
-              </a:rPr>
-              <a:t>5</a:t>
-            </a:r>
-            <a:endParaRPr lang="en-US" sz="1500" dirty="0"/>
-          </a:p>
-        </p:txBody>
-      </p:sp>
-      <p:sp>
-        <p:nvSpPr>
-          <p:cNvPr id="41" name="Text 39"/>
-          <p:cNvSpPr txBox="1"/>
-          <p:nvPr/>
-        </p:nvSpPr>
-        <p:spPr>
-          <a:xfrm>
-            <a:off x="1133856" y="5148072"/>
-            <a:ext cx="5029200" cy="859536"/>
-          </a:xfrm>
-          <a:prstGeom prst="rect">
-            <a:avLst/>
-          </a:prstGeom>
-          <a:noFill/>
-          <a:ln/>
-        </p:spPr>
-        <p:txBody>
-          <a:bodyPr wrap="square" lIns="0" tIns="0" rIns="0" bIns="0" rtlCol="0" anchor="t"/>
-          <a:lstStyle/>
-          <a:p>
-            <a:pPr indent="0" marL="0">
-              <a:buNone/>
-            </a:pPr>
-            <a:r>
-              <a:rPr lang="en-US" sz="1300" b="1" dirty="0">
-                <a:solidFill>
-                  <a:srgbClr val="01485C"/>
-                </a:solidFill>
-                <a:latin typeface="Calibri" pitchFamily="34" charset="0"/>
-                <a:ea typeface="Calibri" pitchFamily="34" charset="-122"/>
-                <a:cs typeface="Calibri" pitchFamily="34" charset="-120"/>
-              </a:rPr>
-              <a:t>Monthly Ceramic Cleaning
-</a:t>
-            </a:r>
-            <a:pPr indent="0" marL="0">
-              <a:buNone/>
-            </a:pPr>
-            <a:r>
-              <a:rPr lang="en-US" sz="1100" dirty="0">
-                <a:solidFill>
-                  <a:srgbClr val="5F7178"/>
-                </a:solidFill>
-                <a:latin typeface="Calibri" pitchFamily="34" charset="0"/>
-                <a:ea typeface="Calibri" pitchFamily="34" charset="-122"/>
-                <a:cs typeface="Calibri" pitchFamily="34" charset="-120"/>
-              </a:rPr>
-              <a:t>Each analyser listed with its cleaning-cartridge count. Every i-STAT needs 3 per month; any shortfall fails the department.</a:t>
-            </a:r>
-            <a:endParaRPr lang="en-US" sz="1300" dirty="0"/>
-          </a:p>
-        </p:txBody>
-      </p:sp>
-      <p:sp>
-        <p:nvSpPr>
-          <p:cNvPr id="42" name="Shape 40"/>
-          <p:cNvSpPr/>
-          <p:nvPr/>
-        </p:nvSpPr>
-        <p:spPr>
-          <a:xfrm>
-            <a:off x="6400800" y="5157216"/>
-            <a:ext cx="5212080" cy="859536"/>
-          </a:xfrm>
-          <a:prstGeom prst="roundRect">
-            <a:avLst>
-              <a:gd name="adj" fmla="val 8511"/>
-            </a:avLst>
-          </a:prstGeom>
-          <a:solidFill>
-            <a:srgbClr val="FFFFFF"/>
-          </a:solidFill>
-          <a:ln w="15875">
-            <a:solidFill>
-              <a:srgbClr val="E2E8EA"/>
-            </a:solidFill>
-            <a:prstDash val="solid"/>
-          </a:ln>
-        </p:spPr>
-      </p:sp>
-      <p:sp>
-        <p:nvSpPr>
-          <p:cNvPr id="43" name="Shape 41"/>
-          <p:cNvSpPr/>
-          <p:nvPr/>
-        </p:nvSpPr>
-        <p:spPr>
-          <a:xfrm>
-            <a:off x="6629400" y="5404104"/>
-            <a:ext cx="1554480" cy="365760"/>
-          </a:xfrm>
-          <a:prstGeom prst="roundRect">
-            <a:avLst>
-              <a:gd name="adj" fmla="val 25000"/>
-            </a:avLst>
-          </a:prstGeom>
-          <a:solidFill>
-            <a:srgbClr val="538135"/>
-          </a:solidFill>
-          <a:ln/>
-        </p:spPr>
-      </p:sp>
-      <p:sp>
-        <p:nvSpPr>
-          <p:cNvPr id="44" name="Text 42"/>
-          <p:cNvSpPr txBox="1"/>
-          <p:nvPr/>
-        </p:nvSpPr>
-        <p:spPr>
-          <a:xfrm>
-            <a:off x="6629400" y="5404104"/>
-            <a:ext cx="1554480" cy="365760"/>
-          </a:xfrm>
-          <a:prstGeom prst="rect">
-            <a:avLst/>
-          </a:prstGeom>
-          <a:noFill/>
-          <a:ln/>
-        </p:spPr>
-        <p:txBody>
-          <a:bodyPr wrap="square" lIns="0" tIns="0" rIns="0" bIns="0" rtlCol="0" anchor="ctr"/>
-          <a:lstStyle/>
-          <a:p>
-            <a:pPr algn="ctr" indent="0" marL="0">
-              <a:buNone/>
-            </a:pPr>
-            <a:r>
-              <a:rPr lang="en-US" sz="1100" b="1" dirty="0">
-                <a:solidFill>
-                  <a:srgbClr val="FFFFFF"/>
-                </a:solidFill>
-                <a:latin typeface="Calibri" pitchFamily="34" charset="0"/>
-                <a:ea typeface="Calibri" pitchFamily="34" charset="-122"/>
-                <a:cs typeface="Calibri" pitchFamily="34" charset="-120"/>
-              </a:rPr>
-              <a:t>Completed ✓</a:t>
-            </a:r>
-            <a:endParaRPr lang="en-US" sz="1100" dirty="0"/>
-          </a:p>
-        </p:txBody>
-      </p:sp>
-      <p:sp>
-        <p:nvSpPr>
-          <p:cNvPr id="45" name="Text 43"/>
-          <p:cNvSpPr txBox="1"/>
-          <p:nvPr/>
-        </p:nvSpPr>
-        <p:spPr>
-          <a:xfrm>
-            <a:off x="8366760" y="5404104"/>
-            <a:ext cx="3017520" cy="365760"/>
-          </a:xfrm>
-          <a:prstGeom prst="rect">
-            <a:avLst/>
-          </a:prstGeom>
-          <a:noFill/>
-          <a:ln/>
-        </p:spPr>
-        <p:txBody>
-          <a:bodyPr wrap="square" lIns="0" tIns="0" rIns="0" bIns="0" rtlCol="0" anchor="ctr"/>
-          <a:lstStyle/>
-          <a:p>
-            <a:pPr indent="0" marL="0">
-              <a:buNone/>
-            </a:pPr>
-            <a:r>
-              <a:rPr lang="en-US" sz="1050" i="1" dirty="0">
-                <a:solidFill>
-                  <a:srgbClr val="5F7178"/>
-                </a:solidFill>
-                <a:latin typeface="Calibri" pitchFamily="34" charset="0"/>
-                <a:ea typeface="Calibri" pitchFamily="34" charset="-122"/>
-                <a:cs typeface="Calibri" pitchFamily="34" charset="-120"/>
-              </a:rPr>
-              <a:t>— listed per analyser; any analyser under 3 shows a red Fail</a:t>
-            </a:r>
-            <a:endParaRPr lang="en-US" sz="1050" dirty="0"/>
-          </a:p>
-        </p:txBody>
-      </p:sp>
-      <p:sp>
-        <p:nvSpPr>
-          <p:cNvPr id="46" name="Text 44"/>
-          <p:cNvSpPr txBox="1"/>
-          <p:nvPr/>
-        </p:nvSpPr>
-        <p:spPr>
-          <a:xfrm>
-            <a:off x="6400800" y="6163056"/>
-            <a:ext cx="5212080" cy="320040"/>
-          </a:xfrm>
-          <a:prstGeom prst="rect">
-            <a:avLst/>
-          </a:prstGeom>
-          <a:noFill/>
-          <a:ln/>
-        </p:spPr>
-        <p:txBody>
-          <a:bodyPr wrap="square" lIns="0" tIns="0" rIns="0" bIns="0" rtlCol="0" anchor="ctr"/>
-          <a:lstStyle/>
-          <a:p>
-            <a:pPr indent="0" marL="0">
-              <a:buNone/>
-            </a:pPr>
-            <a:r>
-              <a:rPr lang="en-US" sz="1000" i="1" dirty="0">
-                <a:solidFill>
-                  <a:srgbClr val="5F7178"/>
-                </a:solidFill>
-                <a:latin typeface="Calibri" pitchFamily="34" charset="0"/>
-                <a:ea typeface="Calibri" pitchFamily="34" charset="-122"/>
-                <a:cs typeface="Calibri" pitchFamily="34" charset="-120"/>
-              </a:rPr>
-              <a:t>Examples shown with fictional data — layouts match the real Word report.</a:t>
-            </a:r>
-            <a:endParaRPr lang="en-US" sz="1000" dirty="0"/>
-          </a:p>
-        </p:txBody>
-      </p:sp>
-      <p:sp>
-        <p:nvSpPr>
-          <p:cNvPr id="47" name="Shape 45"/>
-          <p:cNvSpPr/>
-          <p:nvPr/>
-        </p:nvSpPr>
-        <p:spPr>
-          <a:xfrm>
-            <a:off x="0" y="6793992"/>
-            <a:ext cx="2040636" cy="64008"/>
-          </a:xfrm>
-          <a:prstGeom prst="rect">
-            <a:avLst/>
-          </a:prstGeom>
-          <a:solidFill>
-            <a:srgbClr val="01485C"/>
-          </a:solidFill>
-          <a:ln/>
-        </p:spPr>
-      </p:sp>
-      <p:sp>
-        <p:nvSpPr>
-          <p:cNvPr id="48" name="Shape 46"/>
-          <p:cNvSpPr/>
-          <p:nvPr/>
-        </p:nvSpPr>
-        <p:spPr>
-          <a:xfrm>
-            <a:off x="2031492" y="6793992"/>
-            <a:ext cx="2040636" cy="64008"/>
-          </a:xfrm>
-          <a:prstGeom prst="rect">
-            <a:avLst/>
-          </a:prstGeom>
-          <a:solidFill>
-            <a:srgbClr val="146175"/>
-          </a:solidFill>
-          <a:ln/>
-        </p:spPr>
-      </p:sp>
-      <p:sp>
-        <p:nvSpPr>
-          <p:cNvPr id="49" name="Shape 47"/>
-          <p:cNvSpPr/>
-          <p:nvPr/>
-        </p:nvSpPr>
-        <p:spPr>
-          <a:xfrm>
-            <a:off x="4062984" y="6793992"/>
-            <a:ext cx="2040636" cy="64008"/>
-          </a:xfrm>
-          <a:prstGeom prst="rect">
-            <a:avLst/>
-          </a:prstGeom>
-          <a:solidFill>
-            <a:srgbClr val="11B5AE"/>
-          </a:solidFill>
-          <a:ln/>
-        </p:spPr>
-      </p:sp>
-      <p:sp>
-        <p:nvSpPr>
-          <p:cNvPr id="50" name="Shape 48"/>
-          <p:cNvSpPr/>
-          <p:nvPr/>
-        </p:nvSpPr>
-        <p:spPr>
-          <a:xfrm>
-            <a:off x="6094476" y="6793992"/>
-            <a:ext cx="2040636" cy="64008"/>
-          </a:xfrm>
-          <a:prstGeom prst="rect">
-            <a:avLst/>
-          </a:prstGeom>
-          <a:solidFill>
-            <a:srgbClr val="6CCAD4"/>
-          </a:solidFill>
-          <a:ln/>
-        </p:spPr>
-      </p:sp>
-      <p:sp>
-        <p:nvSpPr>
-          <p:cNvPr id="51" name="Shape 49"/>
-          <p:cNvSpPr/>
-          <p:nvPr/>
-        </p:nvSpPr>
-        <p:spPr>
-          <a:xfrm>
-            <a:off x="8125968" y="6793992"/>
-            <a:ext cx="2040636" cy="64008"/>
-          </a:xfrm>
-          <a:prstGeom prst="rect">
-            <a:avLst/>
-          </a:prstGeom>
-          <a:solidFill>
-            <a:srgbClr val="7FC04C"/>
-          </a:solidFill>
-          <a:ln/>
-        </p:spPr>
-      </p:sp>
-      <p:sp>
-        <p:nvSpPr>
-          <p:cNvPr id="52" name="Shape 50"/>
           <p:cNvSpPr/>
           <p:nvPr/>
         </p:nvSpPr>

--- a/PQ_Report_Generator_User_Guide.pptx
+++ b/PQ_Report_Generator_User_Guide.pptx
@@ -2602,7 +2602,7 @@
         <p:spPr>
           <a:xfrm>
             <a:off x="548640" y="6291072"/>
-            <a:ext cx="6949440" cy="320040"/>
+            <a:ext cx="11064240" cy="320040"/>
           </a:xfrm>
           <a:prstGeom prst="rect">
             <a:avLst/>

--- a/PQ_Report_Generator_User_Guide.pptx
+++ b/PQ_Report_Generator_User_Guide.pptx
@@ -13413,6 +13413,10 @@
             <a:prstDash val="solid"/>
           </a:ln>
         </p:spPr>
+        <p:txBody>
+          <a:bodyPr/>
+          <a:p/>
+        </p:txBody>
       </p:sp>
       <p:sp>
         <p:nvSpPr>
@@ -13752,6 +13756,10 @@
             <a:prstDash val="solid"/>
           </a:ln>
         </p:spPr>
+        <p:txBody>
+          <a:bodyPr/>
+          <a:p/>
+        </p:txBody>
       </p:sp>
       <p:sp>
         <p:nvSpPr>
@@ -14091,6 +14099,10 @@
             <a:prstDash val="solid"/>
           </a:ln>
         </p:spPr>
+        <p:txBody>
+          <a:bodyPr/>
+          <a:p/>
+        </p:txBody>
       </p:sp>
       <p:sp>
         <p:nvSpPr>
@@ -14164,7 +14176,7 @@
                 <a:ea typeface="Calibri" pitchFamily="34" charset="-122"/>
                 <a:cs typeface="Calibri" pitchFamily="34" charset="-120"/>
               </a:rPr>
-              <a:t>BitLocker (drive) + history (i-STAT)</a:t>
+              <a:t>BitLocker (drive) + history (i-STAT and ABL)</a:t>
             </a:r>
             <a:endParaRPr lang="en-US" sz="1250" dirty="0"/>
           </a:p>
@@ -14897,7 +14909,7 @@
                 <a:ea typeface="Calibri" pitchFamily="34" charset="-122"/>
                 <a:cs typeface="Calibri" pitchFamily="34" charset="-120"/>
               </a:rPr>
-              <a:t>History password (i-STAT)   </a:t>
+              <a:t>History passwords   </a:t>
             </a:r>
             <a:pPr indent="0" marL="0">
               <a:buNone/>
@@ -14911,7 +14923,7 @@
                 <a:ea typeface="Calibri" pitchFamily="34" charset="-122"/>
                 <a:cs typeface="Calibri" pitchFamily="34" charset="-120"/>
               </a:rPr>
-              <a:t>The app asks for it at each launch — held by the PoC team; there is NO recovery if forgotten</a:t>
+              <a:t>Each app asks for its own at launch (i-STAT and ABL) — held by the PoC team; there is NO recovery if forgotten</a:t>
             </a:r>
             <a:endParaRPr lang="en-US" sz="1500" dirty="0"/>
           </a:p>
@@ -19137,6 +19149,10 @@
           </a:solidFill>
           <a:ln/>
         </p:spPr>
+        <p:txBody>
+          <a:bodyPr/>
+          <a:p/>
+        </p:txBody>
       </p:sp>
       <p:sp>
         <p:nvSpPr>
@@ -19196,6 +19212,10 @@
           </a:solidFill>
           <a:ln/>
         </p:spPr>
+        <p:txBody>
+          <a:bodyPr/>
+          <a:p/>
+        </p:txBody>
       </p:sp>
       <p:sp>
         <p:nvSpPr>
@@ -19284,7 +19304,7 @@
                 <a:ea typeface="Calibri" pitchFamily="34" charset="-122"/>
                 <a:cs typeface="Calibri" pitchFamily="34" charset="-120"/>
               </a:rPr>
-              <a:t>The monthly Radiometer ABL export (.xlsx). No password needed for the ABL app.</a:t>
+              <a:t>The monthly Radiometer ABL export (.xlsx). The ABL app asks for its history password first, like i-STAT.</a:t>
             </a:r>
             <a:endParaRPr lang="en-US" sz="1450" dirty="0"/>
           </a:p>
@@ -19938,6 +19958,10 @@
           </a:solidFill>
           <a:ln/>
         </p:spPr>
+        <p:txBody>
+          <a:bodyPr/>
+          <a:p/>
+        </p:txBody>
       </p:sp>
       <p:sp>
         <p:nvSpPr>
@@ -19999,6 +20023,10 @@
           </a:solidFill>
           <a:ln/>
         </p:spPr>
+        <p:txBody>
+          <a:bodyPr/>
+          <a:p/>
+        </p:txBody>
       </p:sp>
       <p:sp>
         <p:nvSpPr>
@@ -20072,7 +20100,7 @@
                 <a:ea typeface="Calibri" pitchFamily="34" charset="-122"/>
                 <a:cs typeface="Calibri" pitchFamily="34" charset="-120"/>
               </a:rPr>
-              <a:t>Reports\ABL\&lt;YYYY-MM Month&gt;\&lt;Hospital&gt;\ABL_&lt;Department&gt;_&lt;Month&gt;.docx — one Word report per department, on PQ letterhead.</a:t>
+              <a:t>Reports\ABL\&lt;YYYY-MM Month&gt;\&lt;Hospital&gt;\ABL_&lt;Department&gt;_&lt;Month&gt;.docx — one Word report per department, plus ABL_&lt;Hospital&gt;_Hospital_Summary_&lt;Month&gt;.docx per hospital.</a:t>
             </a:r>
             <a:endParaRPr lang="en-US" sz="1300" dirty="0"/>
           </a:p>
@@ -20099,6 +20127,10 @@
           </a:solidFill>
           <a:ln/>
         </p:spPr>
+        <p:txBody>
+          <a:bodyPr/>
+          <a:p/>
+        </p:txBody>
       </p:sp>
       <p:sp>
         <p:nvSpPr>
@@ -20199,6 +20231,10 @@
           </a:solidFill>
           <a:ln/>
         </p:spPr>
+        <p:txBody>
+          <a:bodyPr/>
+          <a:p/>
+        </p:txBody>
       </p:sp>
       <p:sp>
         <p:nvSpPr>
@@ -20299,6 +20335,10 @@
           </a:solidFill>
           <a:ln/>
         </p:spPr>
+        <p:txBody>
+          <a:bodyPr/>
+          <a:p/>
+        </p:txBody>
       </p:sp>
       <p:sp>
         <p:nvSpPr>
@@ -20372,7 +20412,7 @@
                 <a:ea typeface="Calibri" pitchFamily="34" charset="-122"/>
                 <a:cs typeface="Calibri" pitchFamily="34" charset="-120"/>
               </a:rPr>
-              <a:t>Per-analyser history builds month by month automatically; a repeated top error is flagged in red.</a:t>
+              <a:t>Per-analyser history builds month by month, encrypted like i-STAT’s; 12-month charts with every error segment labelled; a repeated top error is flagged in red.</a:t>
             </a:r>
             <a:endParaRPr lang="en-US" sz="1300" dirty="0"/>
           </a:p>

--- a/PQ_Report_Generator_User_Guide.pptx
+++ b/PQ_Report_Generator_User_Guide.pptx
@@ -5224,6 +5224,10 @@
           </a:solidFill>
           <a:ln/>
         </p:spPr>
+        <p:txBody>
+          <a:bodyPr/>
+          <a:p/>
+        </p:txBody>
       </p:sp>
       <p:sp>
         <p:nvSpPr>
@@ -5272,7 +5276,7 @@
         </p:nvSpPr>
         <p:spPr>
           <a:xfrm>
-            <a:off x="548640" y="1325880"/>
+            <a:off x="548640" y="1188720"/>
             <a:ext cx="420624" cy="420624"/>
           </a:xfrm>
           <a:prstGeom prst="ellipse">
@@ -5283,6 +5287,10 @@
           </a:solidFill>
           <a:ln/>
         </p:spPr>
+        <p:txBody>
+          <a:bodyPr/>
+          <a:p/>
+        </p:txBody>
       </p:sp>
       <p:sp>
         <p:nvSpPr>
@@ -5292,7 +5300,7 @@
         </p:nvSpPr>
         <p:spPr>
           <a:xfrm>
-            <a:off x="548640" y="1325880"/>
+            <a:off x="548640" y="1188720"/>
             <a:ext cx="420624" cy="420624"/>
           </a:xfrm>
           <a:prstGeom prst="rect">
@@ -5331,7 +5339,7 @@
         </p:nvSpPr>
         <p:spPr>
           <a:xfrm>
-            <a:off x="1133856" y="1271016"/>
+            <a:off x="1133856" y="1133856"/>
             <a:ext cx="5029200" cy="859536"/>
           </a:xfrm>
           <a:prstGeom prst="rect">
@@ -5385,7 +5393,7 @@
         </p:nvSpPr>
         <p:spPr>
           <a:xfrm>
-            <a:off x="6400800" y="1280160"/>
+            <a:off x="6400800" y="1143000"/>
             <a:ext cx="5212080" cy="859536"/>
           </a:xfrm>
           <a:prstGeom prst="roundRect">
@@ -5403,6 +5411,10 @@
             <a:prstDash val="solid"/>
           </a:ln>
         </p:spPr>
+        <p:txBody>
+          <a:bodyPr/>
+          <a:p/>
+        </p:txBody>
       </p:sp>
       <p:sp>
         <p:nvSpPr>
@@ -5412,7 +5424,7 @@
         </p:nvSpPr>
         <p:spPr>
           <a:xfrm>
-            <a:off x="6629400" y="1399032"/>
+            <a:off x="6629400" y="1261872"/>
             <a:ext cx="4754880" cy="676656"/>
           </a:xfrm>
           <a:prstGeom prst="rect">
@@ -5522,7 +5534,7 @@
         </p:nvSpPr>
         <p:spPr>
           <a:xfrm>
-            <a:off x="548640" y="2295144"/>
+            <a:off x="548640" y="2011680"/>
             <a:ext cx="420624" cy="420624"/>
           </a:xfrm>
           <a:prstGeom prst="ellipse">
@@ -5533,6 +5545,10 @@
           </a:solidFill>
           <a:ln/>
         </p:spPr>
+        <p:txBody>
+          <a:bodyPr/>
+          <a:p/>
+        </p:txBody>
       </p:sp>
       <p:sp>
         <p:nvSpPr>
@@ -5542,7 +5558,7 @@
         </p:nvSpPr>
         <p:spPr>
           <a:xfrm>
-            <a:off x="548640" y="2295144"/>
+            <a:off x="548640" y="2011680"/>
             <a:ext cx="420624" cy="420624"/>
           </a:xfrm>
           <a:prstGeom prst="rect">
@@ -5581,7 +5597,7 @@
         </p:nvSpPr>
         <p:spPr>
           <a:xfrm>
-            <a:off x="1133856" y="2240280"/>
+            <a:off x="1133856" y="1956816"/>
             <a:ext cx="5029200" cy="859536"/>
           </a:xfrm>
           <a:prstGeom prst="rect">
@@ -5635,7 +5651,7 @@
         </p:nvSpPr>
         <p:spPr>
           <a:xfrm>
-            <a:off x="6400800" y="2249424"/>
+            <a:off x="6400800" y="1965960"/>
             <a:ext cx="5212080" cy="859536"/>
           </a:xfrm>
           <a:prstGeom prst="roundRect">
@@ -5653,6 +5669,10 @@
             <a:prstDash val="solid"/>
           </a:ln>
         </p:spPr>
+        <p:txBody>
+          <a:bodyPr/>
+          <a:p/>
+        </p:txBody>
       </p:sp>
       <p:sp>
         <p:nvSpPr>
@@ -5662,7 +5682,7 @@
         </p:nvSpPr>
         <p:spPr>
           <a:xfrm>
-            <a:off x="6629400" y="2331720"/>
+            <a:off x="6629400" y="2048256"/>
             <a:ext cx="502920" cy="237744"/>
           </a:xfrm>
           <a:prstGeom prst="rect">
@@ -5701,7 +5721,7 @@
         </p:nvSpPr>
         <p:spPr>
           <a:xfrm>
-            <a:off x="7178040" y="2368296"/>
+            <a:off x="7178040" y="2084832"/>
             <a:ext cx="2194560" cy="164592"/>
           </a:xfrm>
           <a:prstGeom prst="rect">
@@ -5712,6 +5732,10 @@
           </a:solidFill>
           <a:ln/>
         </p:spPr>
+        <p:txBody>
+          <a:bodyPr/>
+          <a:p/>
+        </p:txBody>
       </p:sp>
       <p:sp>
         <p:nvSpPr>
@@ -5721,7 +5745,7 @@
         </p:nvSpPr>
         <p:spPr>
           <a:xfrm>
-            <a:off x="9427464" y="2331720"/>
+            <a:off x="9427464" y="2048256"/>
             <a:ext cx="457200" cy="237744"/>
           </a:xfrm>
           <a:prstGeom prst="rect">
@@ -5760,7 +5784,7 @@
         </p:nvSpPr>
         <p:spPr>
           <a:xfrm>
-            <a:off x="6629400" y="2587752"/>
+            <a:off x="6629400" y="2304288"/>
             <a:ext cx="502920" cy="237744"/>
           </a:xfrm>
           <a:prstGeom prst="rect">
@@ -5799,7 +5823,7 @@
         </p:nvSpPr>
         <p:spPr>
           <a:xfrm>
-            <a:off x="7178040" y="2624328"/>
+            <a:off x="7178040" y="2340864"/>
             <a:ext cx="1463040" cy="164592"/>
           </a:xfrm>
           <a:prstGeom prst="rect">
@@ -5810,6 +5834,10 @@
           </a:solidFill>
           <a:ln/>
         </p:spPr>
+        <p:txBody>
+          <a:bodyPr/>
+          <a:p/>
+        </p:txBody>
       </p:sp>
       <p:sp>
         <p:nvSpPr>
@@ -5819,7 +5847,7 @@
         </p:nvSpPr>
         <p:spPr>
           <a:xfrm>
-            <a:off x="8695944" y="2587752"/>
+            <a:off x="8695944" y="2304288"/>
             <a:ext cx="457200" cy="237744"/>
           </a:xfrm>
           <a:prstGeom prst="rect">
@@ -5858,7 +5886,7 @@
         </p:nvSpPr>
         <p:spPr>
           <a:xfrm>
-            <a:off x="6629400" y="2843784"/>
+            <a:off x="6629400" y="2560320"/>
             <a:ext cx="502920" cy="237744"/>
           </a:xfrm>
           <a:prstGeom prst="rect">
@@ -5897,7 +5925,7 @@
         </p:nvSpPr>
         <p:spPr>
           <a:xfrm>
-            <a:off x="7178040" y="2880360"/>
+            <a:off x="7178040" y="2596896"/>
             <a:ext cx="731520" cy="164592"/>
           </a:xfrm>
           <a:prstGeom prst="rect">
@@ -5908,6 +5936,10 @@
           </a:solidFill>
           <a:ln/>
         </p:spPr>
+        <p:txBody>
+          <a:bodyPr/>
+          <a:p/>
+        </p:txBody>
       </p:sp>
       <p:sp>
         <p:nvSpPr>
@@ -5917,7 +5949,7 @@
         </p:nvSpPr>
         <p:spPr>
           <a:xfrm>
-            <a:off x="7964424" y="2843784"/>
+            <a:off x="7964424" y="2560320"/>
             <a:ext cx="457200" cy="237744"/>
           </a:xfrm>
           <a:prstGeom prst="rect">
@@ -5956,7 +5988,7 @@
         </p:nvSpPr>
         <p:spPr>
           <a:xfrm>
-            <a:off x="10058400" y="2313432"/>
+            <a:off x="10058400" y="2029968"/>
             <a:ext cx="1463040" cy="777240"/>
           </a:xfrm>
           <a:prstGeom prst="rect">
@@ -6038,7 +6070,7 @@
         </p:nvSpPr>
         <p:spPr>
           <a:xfrm>
-            <a:off x="548640" y="3264408"/>
+            <a:off x="548640" y="2834640"/>
             <a:ext cx="420624" cy="420624"/>
           </a:xfrm>
           <a:prstGeom prst="ellipse">
@@ -6049,6 +6081,10 @@
           </a:solidFill>
           <a:ln/>
         </p:spPr>
+        <p:txBody>
+          <a:bodyPr/>
+          <a:p/>
+        </p:txBody>
       </p:sp>
       <p:sp>
         <p:nvSpPr>
@@ -6058,7 +6094,7 @@
         </p:nvSpPr>
         <p:spPr>
           <a:xfrm>
-            <a:off x="548640" y="3264408"/>
+            <a:off x="548640" y="2834640"/>
             <a:ext cx="420624" cy="420624"/>
           </a:xfrm>
           <a:prstGeom prst="rect">
@@ -6097,7 +6133,7 @@
         </p:nvSpPr>
         <p:spPr>
           <a:xfrm>
-            <a:off x="1133856" y="3209544"/>
+            <a:off x="1133856" y="2779776"/>
             <a:ext cx="5029200" cy="859536"/>
           </a:xfrm>
           <a:prstGeom prst="rect">
@@ -6151,7 +6187,7 @@
         </p:nvSpPr>
         <p:spPr>
           <a:xfrm>
-            <a:off x="6400800" y="3218688"/>
+            <a:off x="6400800" y="2788920"/>
             <a:ext cx="5212080" cy="859536"/>
           </a:xfrm>
           <a:prstGeom prst="roundRect">
@@ -6169,6 +6205,10 @@
             <a:prstDash val="solid"/>
           </a:ln>
         </p:spPr>
+        <p:txBody>
+          <a:bodyPr/>
+          <a:p/>
+        </p:txBody>
       </p:sp>
       <p:sp>
         <p:nvSpPr>
@@ -6178,7 +6218,7 @@
         </p:nvSpPr>
         <p:spPr>
           <a:xfrm>
-            <a:off x="6629400" y="3328416"/>
+            <a:off x="6629400" y="2898648"/>
             <a:ext cx="4754880" cy="676656"/>
           </a:xfrm>
           <a:prstGeom prst="rect">
@@ -6232,7 +6272,7 @@
         </p:nvSpPr>
         <p:spPr>
           <a:xfrm>
-            <a:off x="548640" y="4233672"/>
+            <a:off x="548640" y="3657600"/>
             <a:ext cx="420624" cy="420624"/>
           </a:xfrm>
           <a:prstGeom prst="ellipse">
@@ -6243,6 +6283,10 @@
           </a:solidFill>
           <a:ln/>
         </p:spPr>
+        <p:txBody>
+          <a:bodyPr/>
+          <a:p/>
+        </p:txBody>
       </p:sp>
       <p:sp>
         <p:nvSpPr>
@@ -6252,7 +6296,7 @@
         </p:nvSpPr>
         <p:spPr>
           <a:xfrm>
-            <a:off x="548640" y="4233672"/>
+            <a:off x="548640" y="3657600"/>
             <a:ext cx="420624" cy="420624"/>
           </a:xfrm>
           <a:prstGeom prst="rect">
@@ -6291,7 +6335,7 @@
         </p:nvSpPr>
         <p:spPr>
           <a:xfrm>
-            <a:off x="1133856" y="4178808"/>
+            <a:off x="1133856" y="3602736"/>
             <a:ext cx="5029200" cy="859536"/>
           </a:xfrm>
           <a:prstGeom prst="rect">
@@ -6345,7 +6389,7 @@
         </p:nvSpPr>
         <p:spPr>
           <a:xfrm>
-            <a:off x="6400800" y="4187952"/>
+            <a:off x="6400800" y="3611880"/>
             <a:ext cx="5212080" cy="859536"/>
           </a:xfrm>
           <a:prstGeom prst="roundRect">
@@ -6363,6 +6407,10 @@
             <a:prstDash val="solid"/>
           </a:ln>
         </p:spPr>
+        <p:txBody>
+          <a:bodyPr/>
+          <a:p/>
+        </p:txBody>
       </p:sp>
       <p:sp>
         <p:nvSpPr>
@@ -6372,7 +6420,7 @@
         </p:nvSpPr>
         <p:spPr>
           <a:xfrm>
-            <a:off x="6629400" y="4187952"/>
+            <a:off x="6629400" y="3611880"/>
             <a:ext cx="4754880" cy="859536"/>
           </a:xfrm>
           <a:prstGeom prst="rect">
@@ -6425,7 +6473,7 @@
         </p:nvSpPr>
         <p:spPr>
           <a:xfrm>
-            <a:off x="548640" y="5202936"/>
+            <a:off x="548640" y="4480560"/>
             <a:ext cx="420624" cy="420624"/>
           </a:xfrm>
           <a:prstGeom prst="ellipse">
@@ -6436,6 +6484,10 @@
           </a:solidFill>
           <a:ln/>
         </p:spPr>
+        <p:txBody>
+          <a:bodyPr/>
+          <a:p/>
+        </p:txBody>
       </p:sp>
       <p:sp>
         <p:nvSpPr>
@@ -6445,7 +6497,7 @@
         </p:nvSpPr>
         <p:spPr>
           <a:xfrm>
-            <a:off x="548640" y="5202936"/>
+            <a:off x="548640" y="4480560"/>
             <a:ext cx="420624" cy="420624"/>
           </a:xfrm>
           <a:prstGeom prst="rect">
@@ -6484,7 +6536,7 @@
         </p:nvSpPr>
         <p:spPr>
           <a:xfrm>
-            <a:off x="1133856" y="5148072"/>
+            <a:off x="1133856" y="4425696"/>
             <a:ext cx="5029200" cy="859536"/>
           </a:xfrm>
           <a:prstGeom prst="rect">
@@ -6538,7 +6590,7 @@
         </p:nvSpPr>
         <p:spPr>
           <a:xfrm>
-            <a:off x="6400800" y="5157216"/>
+            <a:off x="6400800" y="4434840"/>
             <a:ext cx="5212080" cy="859536"/>
           </a:xfrm>
           <a:prstGeom prst="roundRect">
@@ -6556,6 +6608,10 @@
             <a:prstDash val="solid"/>
           </a:ln>
         </p:spPr>
+        <p:txBody>
+          <a:bodyPr/>
+          <a:p/>
+        </p:txBody>
       </p:sp>
       <p:sp>
         <p:nvSpPr>
@@ -6565,7 +6621,7 @@
         </p:nvSpPr>
         <p:spPr>
           <a:xfrm>
-            <a:off x="6629400" y="5285232"/>
+            <a:off x="6629400" y="4562856"/>
             <a:ext cx="3566160" cy="630936"/>
           </a:xfrm>
           <a:prstGeom prst="rect">
@@ -6619,7 +6675,7 @@
         </p:nvSpPr>
         <p:spPr>
           <a:xfrm>
-            <a:off x="10287000" y="5431536"/>
+            <a:off x="10287000" y="4709160"/>
             <a:ext cx="1188720" cy="320040"/>
           </a:xfrm>
           <a:prstGeom prst="rect">
@@ -6658,7 +6714,7 @@
         </p:nvSpPr>
         <p:spPr>
           <a:xfrm>
-            <a:off x="6400800" y="6163056"/>
+            <a:off x="6400800" y="6291072"/>
             <a:ext cx="5212080" cy="320040"/>
           </a:xfrm>
           <a:prstGeom prst="rect">
@@ -6808,6 +6864,246 @@
           </a:solidFill>
           <a:ln/>
         </p:spPr>
+      </p:sp>
+      <p:sp>
+        <p:nvSpPr>
+          <p:cNvPr id="34" name="Shape 32"/>
+          <p:cNvSpPr/>
+          <p:nvPr/>
+        </p:nvSpPr>
+        <p:spPr>
+          <a:xfrm>
+            <a:off x="548640" y="5303519"/>
+            <a:ext cx="420624" cy="420624"/>
+          </a:xfrm>
+          <a:prstGeom prst="ellipse">
+            <a:avLst/>
+          </a:prstGeom>
+          <a:solidFill>
+            <a:srgbClr val="01485C"/>
+          </a:solidFill>
+          <a:ln/>
+        </p:spPr>
+        <p:txBody>
+          <a:bodyPr/>
+          <a:p/>
+        </p:txBody>
+      </p:sp>
+      <p:sp>
+        <p:nvSpPr>
+          <p:cNvPr id="35" name="Text 33"/>
+          <p:cNvSpPr txBox="1"/>
+          <p:nvPr/>
+        </p:nvSpPr>
+        <p:spPr>
+          <a:xfrm>
+            <a:off x="548640" y="5303519"/>
+            <a:ext cx="420624" cy="420624"/>
+          </a:xfrm>
+          <a:prstGeom prst="rect">
+            <a:avLst/>
+          </a:prstGeom>
+          <a:noFill/>
+          <a:ln/>
+        </p:spPr>
+        <p:txBody>
+          <a:bodyPr wrap="square" lIns="0" tIns="0" rIns="0" bIns="0" rtlCol="0" anchor="ctr"/>
+          <a:lstStyle/>
+          <a:p>
+            <a:pPr algn="ctr" indent="0" marL="0">
+              <a:buNone/>
+            </a:pPr>
+            <a:r>
+              <a:rPr lang="en-US" sz="1500" b="1" dirty="0">
+                <a:solidFill>
+                  <a:srgbClr val="FFFFFF"/>
+                </a:solidFill>
+                <a:latin typeface="Calibri" pitchFamily="34" charset="0"/>
+                <a:ea typeface="Calibri" pitchFamily="34" charset="-122"/>
+                <a:cs typeface="Calibri" pitchFamily="34" charset="-120"/>
+              </a:rPr>
+              <a:t>11</a:t>
+            </a:r>
+            <a:endParaRPr lang="en-US" sz="1500" dirty="0"/>
+          </a:p>
+        </p:txBody>
+      </p:sp>
+      <p:sp>
+        <p:nvSpPr>
+          <p:cNvPr id="36" name="Text 34"/>
+          <p:cNvSpPr txBox="1"/>
+          <p:nvPr/>
+        </p:nvSpPr>
+        <p:spPr>
+          <a:xfrm>
+            <a:off x="1133856" y="5248655"/>
+            <a:ext cx="5029200" cy="859536"/>
+          </a:xfrm>
+          <a:prstGeom prst="rect">
+            <a:avLst/>
+          </a:prstGeom>
+          <a:noFill/>
+          <a:ln/>
+        </p:spPr>
+        <p:txBody>
+          <a:bodyPr wrap="square" lIns="0" tIns="0" rIns="0" bIns="0" rtlCol="0" anchor="t"/>
+          <a:lstStyle/>
+          <a:p>
+            <a:pPr indent="0" marL="0">
+              <a:buNone/>
+            </a:pPr>
+            <a:r>
+              <a:rPr lang="en-US" sz="1300" b="1" dirty="0">
+                <a:solidFill>
+                  <a:srgbClr val="01485C"/>
+                </a:solidFill>
+                <a:latin typeface="Calibri" pitchFamily="34" charset="0"/>
+                <a:ea typeface="Calibri" pitchFamily="34" charset="-122"/>
+                <a:cs typeface="Calibri" pitchFamily="34" charset="-120"/>
+              </a:rPr>
+              <a:t>Cartridge Usage
+</a:t>
+            </a:r>
+            <a:pPr indent="0" marL="0">
+              <a:buNone/>
+            </a:pPr>
+            <a:r>
+              <a:rPr lang="en-US" sz="1100" dirty="0">
+                <a:solidFill>
+                  <a:srgbClr val="5F7178"/>
+                </a:solidFill>
+                <a:latin typeface="Calibri" pitchFamily="34" charset="0"/>
+                <a:ea typeface="Calibri" pitchFamily="34" charset="-122"/>
+                <a:cs typeface="Calibri" pitchFamily="34" charset="-120"/>
+              </a:rPr>
+              <a:t>This month’s cartridges by type (patient and QC), the 12-month average and peak, and a suggested monthly stock for ordering.</a:t>
+            </a:r>
+            <a:endParaRPr lang="en-US" sz="1300" dirty="0"/>
+          </a:p>
+        </p:txBody>
+      </p:sp>
+      <p:sp>
+        <p:nvSpPr>
+          <p:cNvPr id="37" name="Shape 35"/>
+          <p:cNvSpPr/>
+          <p:nvPr/>
+        </p:nvSpPr>
+        <p:spPr>
+          <a:xfrm>
+            <a:off x="6400800" y="5257799"/>
+            <a:ext cx="5212080" cy="859536"/>
+          </a:xfrm>
+          <a:prstGeom prst="roundRect">
+            <a:avLst>
+              <a:gd name="adj" fmla="val 8511"/>
+            </a:avLst>
+          </a:prstGeom>
+          <a:solidFill>
+            <a:srgbClr val="FFFFFF"/>
+          </a:solidFill>
+          <a:ln w="15875">
+            <a:solidFill>
+              <a:srgbClr val="E2E8EA"/>
+            </a:solidFill>
+            <a:prstDash val="solid"/>
+          </a:ln>
+        </p:spPr>
+        <p:txBody>
+          <a:bodyPr/>
+          <a:p/>
+        </p:txBody>
+      </p:sp>
+      <p:sp>
+        <p:nvSpPr>
+          <p:cNvPr id="38" name="Text 36"/>
+          <p:cNvSpPr txBox="1"/>
+          <p:nvPr/>
+        </p:nvSpPr>
+        <p:spPr>
+          <a:xfrm>
+            <a:off x="6629400" y="5385815"/>
+            <a:ext cx="3566160" cy="630936"/>
+          </a:xfrm>
+          <a:prstGeom prst="rect">
+            <a:avLst/>
+          </a:prstGeom>
+          <a:noFill/>
+          <a:ln/>
+        </p:spPr>
+        <p:txBody>
+          <a:bodyPr wrap="square" lIns="0" tIns="0" rIns="0" bIns="0" rtlCol="0" anchor="t"/>
+          <a:lstStyle/>
+          <a:p>
+            <a:pPr indent="0" marL="0">
+              <a:buNone/>
+            </a:pPr>
+            <a:r>
+              <a:rPr lang="en-US" sz="1050" b="1" dirty="0">
+                <a:solidFill>
+                  <a:srgbClr val="C00000"/>
+                </a:solidFill>
+                <a:latin typeface="Calibri" pitchFamily="34" charset="0"/>
+                <a:ea typeface="Calibri" pitchFamily="34" charset="-122"/>
+                <a:cs typeface="Calibri" pitchFamily="34" charset="-120"/>
+              </a:rPr>
+              <a:t>CHEM8   321 this month   avg 298   order 343</a:t>
+            </a:r>
+            <a:pPr indent="0" marL="0">
+              <a:buNone/>
+            </a:pPr>
+            <a:r>
+              <a:rPr lang="en-US" sz="1050" b="1" dirty="0">
+                <a:solidFill>
+                  <a:srgbClr val="C00000"/>
+                </a:solidFill>
+                <a:latin typeface="Calibri" pitchFamily="34" charset="0"/>
+                <a:ea typeface="Calibri" pitchFamily="34" charset="-122"/>
+                <a:cs typeface="Calibri" pitchFamily="34" charset="-120"/>
+              </a:rPr>
+              <a:t/>
+            </a:r>
+            <a:endParaRPr lang="en-US" sz="1050" dirty="0"/>
+          </a:p>
+        </p:txBody>
+      </p:sp>
+      <p:sp>
+        <p:nvSpPr>
+          <p:cNvPr id="39" name="Text 37"/>
+          <p:cNvSpPr txBox="1"/>
+          <p:nvPr/>
+        </p:nvSpPr>
+        <p:spPr>
+          <a:xfrm>
+            <a:off x="10287000" y="5532119"/>
+            <a:ext cx="1188720" cy="320040"/>
+          </a:xfrm>
+          <a:prstGeom prst="rect">
+            <a:avLst/>
+          </a:prstGeom>
+          <a:noFill/>
+          <a:ln/>
+        </p:spPr>
+        <p:txBody>
+          <a:bodyPr wrap="square" lIns="0" tIns="0" rIns="0" bIns="0" rtlCol="0" anchor="ctr"/>
+          <a:lstStyle/>
+          <a:p>
+            <a:pPr indent="0" marL="0">
+              <a:buNone/>
+            </a:pPr>
+            <a:r>
+              <a:rPr lang="en-US" sz="950" i="1" dirty="0">
+                <a:solidFill>
+                  <a:srgbClr val="5F7178"/>
+                </a:solidFill>
+                <a:latin typeface="Calibri" pitchFamily="34" charset="0"/>
+                <a:ea typeface="Calibri" pitchFamily="34" charset="-122"/>
+                <a:cs typeface="Calibri" pitchFamily="34" charset="-120"/>
+              </a:rPr>
+              <a:t>green = order guide</a:t>
+            </a:r>
+            <a:endParaRPr lang="en-US" sz="950" dirty="0"/>
+          </a:p>
+        </p:txBody>
       </p:sp>
     </p:spTree>
   </p:cSld>

--- a/PQ_Report_Generator_User_Guide.pptx
+++ b/PQ_Report_Generator_User_Guide.pptx
@@ -6764,6 +6764,10 @@
           </a:solidFill>
           <a:ln/>
         </p:spPr>
+        <p:txBody>
+          <a:bodyPr/>
+          <a:p/>
+        </p:txBody>
       </p:sp>
       <p:sp>
         <p:nvSpPr>
@@ -6784,6 +6788,10 @@
           </a:solidFill>
           <a:ln/>
         </p:spPr>
+        <p:txBody>
+          <a:bodyPr/>
+          <a:p/>
+        </p:txBody>
       </p:sp>
       <p:sp>
         <p:nvSpPr>
@@ -6804,6 +6812,10 @@
           </a:solidFill>
           <a:ln/>
         </p:spPr>
+        <p:txBody>
+          <a:bodyPr/>
+          <a:p/>
+        </p:txBody>
       </p:sp>
       <p:sp>
         <p:nvSpPr>
@@ -6824,6 +6836,10 @@
           </a:solidFill>
           <a:ln/>
         </p:spPr>
+        <p:txBody>
+          <a:bodyPr/>
+          <a:p/>
+        </p:txBody>
       </p:sp>
       <p:sp>
         <p:nvSpPr>
@@ -6844,6 +6860,10 @@
           </a:solidFill>
           <a:ln/>
         </p:spPr>
+        <p:txBody>
+          <a:bodyPr/>
+          <a:p/>
+        </p:txBody>
       </p:sp>
       <p:sp>
         <p:nvSpPr>
@@ -6864,10 +6884,14 @@
           </a:solidFill>
           <a:ln/>
         </p:spPr>
-      </p:sp>
-      <p:sp>
-        <p:nvSpPr>
-          <p:cNvPr id="34" name="Shape 32"/>
+        <p:txBody>
+          <a:bodyPr/>
+          <a:p/>
+        </p:txBody>
+      </p:sp>
+      <p:sp>
+        <p:nvSpPr>
+          <p:cNvPr id="47" name="Shape 32"/>
           <p:cNvSpPr/>
           <p:nvPr/>
         </p:nvSpPr>
@@ -6891,7 +6915,7 @@
       </p:sp>
       <p:sp>
         <p:nvSpPr>
-          <p:cNvPr id="35" name="Text 33"/>
+          <p:cNvPr id="48" name="Text 33"/>
           <p:cNvSpPr txBox="1"/>
           <p:nvPr/>
         </p:nvSpPr>
@@ -6930,7 +6954,7 @@
       </p:sp>
       <p:sp>
         <p:nvSpPr>
-          <p:cNvPr id="36" name="Text 34"/>
+          <p:cNvPr id="49" name="Text 34"/>
           <p:cNvSpPr txBox="1"/>
           <p:nvPr/>
         </p:nvSpPr>
@@ -6984,7 +7008,7 @@
       </p:sp>
       <p:sp>
         <p:nvSpPr>
-          <p:cNvPr id="37" name="Shape 35"/>
+          <p:cNvPr id="50" name="Shape 35"/>
           <p:cNvSpPr/>
           <p:nvPr/>
         </p:nvSpPr>
@@ -7015,7 +7039,7 @@
       </p:sp>
       <p:sp>
         <p:nvSpPr>
-          <p:cNvPr id="38" name="Text 36"/>
+          <p:cNvPr id="51" name="Text 36"/>
           <p:cNvSpPr txBox="1"/>
           <p:nvPr/>
         </p:nvSpPr>
@@ -7038,6 +7062,21 @@
               <a:buNone/>
             </a:pPr>
             <a:r>
+              <a:rPr lang="en-US" sz="1050" b="0" dirty="0">
+                <a:solidFill>
+                  <a:srgbClr val="01485C"/>
+                </a:solidFill>
+                <a:latin typeface="Calibri" pitchFamily="34" charset="0"/>
+                <a:ea typeface="Calibri" pitchFamily="34" charset="-122"/>
+                <a:cs typeface="Calibri" pitchFamily="34" charset="-120"/>
+              </a:rPr>
+              <a:t>CHEM8    321 this month   ·   avg 298   ·   order 343
+hs-TnI     157 this month   ·   avg 41     ·   order 47</a:t>
+            </a:r>
+            <a:pPr indent="0" marL="0">
+              <a:buNone/>
+            </a:pPr>
+            <a:r>
               <a:rPr lang="en-US" sz="1050" b="1" dirty="0">
                 <a:solidFill>
                   <a:srgbClr val="C00000"/>
@@ -7046,20 +7085,6 @@
                 <a:ea typeface="Calibri" pitchFamily="34" charset="-122"/>
                 <a:cs typeface="Calibri" pitchFamily="34" charset="-120"/>
               </a:rPr>
-              <a:t>CHEM8   321 this month   avg 298   order 343</a:t>
-            </a:r>
-            <a:pPr indent="0" marL="0">
-              <a:buNone/>
-            </a:pPr>
-            <a:r>
-              <a:rPr lang="en-US" sz="1050" b="1" dirty="0">
-                <a:solidFill>
-                  <a:srgbClr val="C00000"/>
-                </a:solidFill>
-                <a:latin typeface="Calibri" pitchFamily="34" charset="0"/>
-                <a:ea typeface="Calibri" pitchFamily="34" charset="-122"/>
-                <a:cs typeface="Calibri" pitchFamily="34" charset="-120"/>
-              </a:rPr>
               <a:t/>
             </a:r>
             <a:endParaRPr lang="en-US" sz="1050" dirty="0"/>
@@ -7068,7 +7093,7 @@
       </p:sp>
       <p:sp>
         <p:nvSpPr>
-          <p:cNvPr id="39" name="Text 37"/>
+          <p:cNvPr id="52" name="Text 37"/>
           <p:cNvSpPr txBox="1"/>
           <p:nvPr/>
         </p:nvSpPr>

--- a/PQ_Report_Generator_User_Guide.pptx
+++ b/PQ_Report_Generator_User_Guide.pptx
@@ -2601,8 +2601,8 @@
         </p:nvSpPr>
         <p:spPr>
           <a:xfrm>
-            <a:off x="548640" y="6291072"/>
-            <a:ext cx="11064240" cy="320040"/>
+            <a:off x="548640" y="6016752"/>
+            <a:ext cx="11064240" cy="566928"/>
           </a:xfrm>
           <a:prstGeom prst="rect">
             <a:avLst/>
@@ -2629,6 +2629,18 @@
               <a:t>Conceived, designed and built by Craig MacKenzie · Chemistry Department, Townsville Group Laboratory · Pathology Queensland</a:t>
             </a:r>
             <a:endParaRPr lang="en-US" sz="1100" dirty="0"/>
+          </a:p>
+          <a:p>
+            <a:pPr/>
+            <a:r>
+              <a:rPr sz="1000">
+                <a:solidFill>
+                  <a:srgbClr val="6CCAD4"/>
+                </a:solidFill>
+                <a:latin typeface="Calibri"/>
+              </a:rPr>
+              <a:t>Amendments and oversight by Damian Juskiw · Supervising Scientist, Chemical Pathology, Townsville</a:t>
+            </a:r>
           </a:p>
         </p:txBody>
       </p:sp>
@@ -7000,7 +7012,7 @@
                 <a:ea typeface="Calibri" pitchFamily="34" charset="-122"/>
                 <a:cs typeface="Calibri" pitchFamily="34" charset="-120"/>
               </a:rPr>
-              <a:t>This month’s cartridges by type (patient and QC), the 12-month average and peak, and a suggested monthly stock for ordering.</a:t>
+              <a:t>This month’s cartridges by type (patient tests and total used), the 12-month average and peak, and suggested weekly and fortnightly orders in whole Abbott boxes (+15%) for sites with little storage.</a:t>
             </a:r>
             <a:endParaRPr lang="en-US" sz="1300" dirty="0"/>
           </a:p>
@@ -7046,7 +7058,7 @@
         <p:spPr>
           <a:xfrm>
             <a:off x="6629400" y="5385815"/>
-            <a:ext cx="3566160" cy="630936"/>
+            <a:ext cx="3611880" cy="630936"/>
           </a:xfrm>
           <a:prstGeom prst="rect">
             <a:avLst/>
@@ -7062,7 +7074,7 @@
               <a:buNone/>
             </a:pPr>
             <a:r>
-              <a:rPr lang="en-US" sz="1050" b="0" dirty="0">
+              <a:rPr lang="en-US" sz="900" b="0" dirty="0">
                 <a:solidFill>
                   <a:srgbClr val="01485C"/>
                 </a:solidFill>
@@ -7070,23 +7082,11 @@
                 <a:ea typeface="Calibri" pitchFamily="34" charset="-122"/>
                 <a:cs typeface="Calibri" pitchFamily="34" charset="-120"/>
               </a:rPr>
-              <a:t>CHEM8    321 this month   ·   avg 298   ·   order 343
-hs-TnI     157 this month   ·   avg 41     ·   order 47</a:t>
-            </a:r>
-            <a:pPr indent="0" marL="0">
-              <a:buNone/>
-            </a:pPr>
-            <a:r>
-              <a:rPr lang="en-US" sz="1050" b="1" dirty="0">
-                <a:solidFill>
-                  <a:srgbClr val="C00000"/>
-                </a:solidFill>
-                <a:latin typeface="Calibri" pitchFamily="34" charset="0"/>
-                <a:ea typeface="Calibri" pitchFamily="34" charset="-122"/>
-                <a:cs typeface="Calibri" pitchFamily="34" charset="-120"/>
-              </a:rPr>
-              <a:t/>
-            </a:r>
+              <a:t>CHEM8   321 used · avg 298 · weekly 4 boxes · fortnightly 7 boxes</a:t>
+            </a:r>
+            <a:pPr indent="0" marL="0">
+              <a:buNone/>
+            </a:pPr>
             <a:endParaRPr lang="en-US" sz="1050" dirty="0"/>
           </a:p>
         </p:txBody>
@@ -7469,7 +7469,7 @@
         <p:spPr>
           <a:xfrm>
             <a:off x="548640" y="3749040"/>
-            <a:ext cx="5486400" cy="2103120"/>
+            <a:ext cx="5486400" cy="2423160"/>
           </a:xfrm>
           <a:prstGeom prst="roundRect">
             <a:avLst>
@@ -7534,7 +7534,7 @@
         <p:spPr>
           <a:xfrm>
             <a:off x="822960" y="4434840"/>
-            <a:ext cx="4937760" cy="1463040"/>
+            <a:ext cx="4937760" cy="1828800"/>
           </a:xfrm>
           <a:prstGeom prst="rect">
             <a:avLst/>
@@ -7550,7 +7550,7 @@
               <a:buNone/>
             </a:pPr>
             <a:r>
-              <a:rPr lang="en-US" sz="1200" dirty="0">
+              <a:rPr lang="en-US" sz="1150" dirty="0">
                 <a:solidFill>
                   <a:srgbClr val="17272E"/>
                 </a:solidFill>
@@ -7558,7 +7558,7 @@
                 <a:ea typeface="Calibri" pitchFamily="34" charset="-122"/>
                 <a:cs typeface="Calibri" pitchFamily="34" charset="-120"/>
               </a:rPr>
-              <a:t>One per HHS folder each run: every hospital in the area on one page with the same figures, an area total, and an “Analysers Needing Attention” table naming each analyser that ran no simulator or fewer than 3 ceramics. i-STAT_&lt;HHS&gt;_Area_Summary_&lt;Month&gt;.docx</a:t>
+              <a:t>One per HHS folder each run: every hospital in the area on one page with the same figures, an area total, an “Analysers Needing Attention” table naming each analyser that ran no simulator or fewer than 3 ceramics, and the area’s Cartridge Usage table. A Cartridge Stock report sits beside it for the HHS stores team: each site’s use by type, the monthly average and the suggested weekly and fortnightly dispatch. i-STAT_&lt;HHS&gt;_Area_Summary_&lt;Month&gt;.docx · i-STAT_&lt;HHS&gt;_Cartridge_Stock_&lt;Month&gt;.docx</a:t>
             </a:r>
             <a:endParaRPr lang="en-US" sz="1300" dirty="0"/>
           </a:p>
@@ -7573,7 +7573,7 @@
         <p:spPr>
           <a:xfrm>
             <a:off x="6172200" y="3749040"/>
-            <a:ext cx="5486400" cy="2103120"/>
+            <a:ext cx="5486400" cy="2423160"/>
           </a:xfrm>
           <a:prstGeom prst="roundRect">
             <a:avLst>
@@ -7638,7 +7638,7 @@
         <p:spPr>
           <a:xfrm>
             <a:off x="6446520" y="4434840"/>
-            <a:ext cx="4937760" cy="1463040"/>
+            <a:ext cx="4937760" cy="1828800"/>
           </a:xfrm>
           <a:prstGeom prst="rect">
             <a:avLst/>
@@ -7687,6 +7687,10 @@
           </a:solidFill>
           <a:ln/>
         </p:spPr>
+        <p:txBody>
+          <a:bodyPr/>
+          <a:p/>
+        </p:txBody>
       </p:sp>
       <p:sp>
         <p:nvSpPr>
@@ -7707,6 +7711,10 @@
           </a:solidFill>
           <a:ln/>
         </p:spPr>
+        <p:txBody>
+          <a:bodyPr/>
+          <a:p/>
+        </p:txBody>
       </p:sp>
       <p:sp>
         <p:nvSpPr>
@@ -7727,6 +7735,10 @@
           </a:solidFill>
           <a:ln/>
         </p:spPr>
+        <p:txBody>
+          <a:bodyPr/>
+          <a:p/>
+        </p:txBody>
       </p:sp>
       <p:sp>
         <p:nvSpPr>
@@ -7747,6 +7759,10 @@
           </a:solidFill>
           <a:ln/>
         </p:spPr>
+        <p:txBody>
+          <a:bodyPr/>
+          <a:p/>
+        </p:txBody>
       </p:sp>
       <p:sp>
         <p:nvSpPr>
@@ -7767,6 +7783,10 @@
           </a:solidFill>
           <a:ln/>
         </p:spPr>
+        <p:txBody>
+          <a:bodyPr/>
+          <a:p/>
+        </p:txBody>
       </p:sp>
       <p:sp>
         <p:nvSpPr>
@@ -7787,6 +7807,10 @@
           </a:solidFill>
           <a:ln/>
         </p:spPr>
+        <p:txBody>
+          <a:bodyPr/>
+          <a:p/>
+        </p:txBody>
       </p:sp>
     </p:spTree>
   </p:cSld>

--- a/PQ_Report_Generator_User_Guide.pptx
+++ b/PQ_Report_Generator_User_Guide.pptx
@@ -2633,7 +2633,7 @@
           <a:p>
             <a:pPr/>
             <a:r>
-              <a:rPr sz="1000">
+              <a:rPr sz="1100">
                 <a:solidFill>
                   <a:srgbClr val="6CCAD4"/>
                 </a:solidFill>
